--- a/presentation/SaaSsum_AI_Presentation.pptx
+++ b/presentation/SaaSsum_AI_Presentation.pptx
@@ -3134,7 +3134,7 @@
                 </a:solidFill>
                 <a:latin typeface="Aptos"/>
               </a:rPr>
-              <a:t>SaaSsum AI</a:t>
+              <a:t>tenantAI</a:t>
             </a:r>
           </a:p>
         </p:txBody>
@@ -3169,7 +3169,7 @@
                 </a:solidFill>
                 <a:latin typeface="Aptos"/>
               </a:rPr>
-              <a:t>Multi-tenant AI chatbot platform | Hackathon presentation</a:t>
+              <a:t>Secure multi-tenant AI chatbot platform | Jury presentation</a:t>
             </a:r>
           </a:p>
         </p:txBody>
@@ -3218,7 +3218,7 @@
         <p:spPr>
           <a:xfrm>
             <a:off x="777240" y="3063240"/>
-            <a:ext cx="9601200" cy="411480"/>
+            <a:ext cx="10241280" cy="411480"/>
           </a:xfrm>
           <a:prstGeom prst="rect">
             <a:avLst/>
@@ -3239,7 +3239,7 @@
                 </a:solidFill>
                 <a:latin typeface="Aptos"/>
               </a:rPr>
-              <a:t>Production direction: FastAPI + SQLAlchemy + Next.js + tenant-scoped RAG</a:t>
+              <a:t>FastAPI + SQLAlchemy + Next.js + tenant-scoped RAG + Telegram worker</a:t>
             </a:r>
           </a:p>
         </p:txBody>
@@ -3274,7 +3274,7 @@
                 </a:solidFill>
                 <a:latin typeface="Aptos"/>
               </a:rPr>
-              <a:t>Implemented surfaces are distinguished from follow-up integration work.</a:t>
+              <a:t>Verified locally with tenant isolation, seeded jury data, frontend build, and backend tests.</a:t>
             </a:r>
           </a:p>
         </p:txBody>
@@ -6335,7 +6335,7 @@
                 </a:solidFill>
                 <a:latin typeface="Aptos"/>
               </a:rPr>
-              <a:t>Live demo path</a:t>
+              <a:t>Live jury demo path</a:t>
             </a:r>
           </a:p>
         </p:txBody>
@@ -6370,7 +6370,7 @@
                 </a:solidFill>
                 <a:latin typeface="Aptos"/>
               </a:rPr>
-              <a:t>Use real data and label anything not yet deployed.</a:t>
+              <a:t>A concise, repeatable flow for proving value and isolation.</a:t>
             </a:r>
           </a:p>
         </p:txBody>
@@ -6524,7 +6524,7 @@
         <p:spPr>
           <a:xfrm>
             <a:off x="914400" y="4206240"/>
-            <a:ext cx="7680960" cy="457200"/>
+            <a:ext cx="9144000" cy="457200"/>
           </a:xfrm>
           <a:prstGeom prst="rect">
             <a:avLst/>
@@ -6545,7 +6545,7 @@
                 </a:solidFill>
                 <a:latin typeface="Aptos"/>
               </a:rPr>
-              <a:t>5  Register a second company and verify isolation</a:t>
+              <a:t>5  Inspect audit telemetry and run the cross-tenant denial demo</a:t>
             </a:r>
           </a:p>
         </p:txBody>
@@ -6558,7 +6558,7 @@
         </p:nvSpPr>
         <p:spPr>
           <a:xfrm>
-            <a:off x="914400" y="5715000"/>
+            <a:off x="914400" y="4846320"/>
             <a:ext cx="10058400" cy="320040"/>
           </a:xfrm>
           <a:prstGeom prst="rect">
@@ -6580,7 +6580,7 @@
                 </a:solidFill>
                 <a:latin typeface="Aptos"/>
               </a:rPr>
-              <a:t>Telegram bot: integration point documented; no fabricated bot or token.</a:t>
+              <a:t>6  Telegram: /login → /documents → /upload → /conversations → /audits</a:t>
             </a:r>
           </a:p>
         </p:txBody>
@@ -6676,7 +6676,7 @@
                 </a:solidFill>
                 <a:latin typeface="Aptos"/>
               </a:rPr>
-              <a:t>Prepare production infrastructure without performing paid or irreversible actions.</a:t>
+              <a:t>Production-minded configuration with an explicit operator checklist.</a:t>
             </a:r>
           </a:p>
         </p:txBody>
@@ -6756,7 +6756,7 @@
                 </a:solidFill>
                 <a:latin typeface="Aptos"/>
               </a:rPr>
-              <a:t>Runtime</a:t>
+              <a:t>Render architecture</a:t>
             </a:r>
           </a:p>
         </p:txBody>
@@ -6791,7 +6791,7 @@
                 </a:solidFill>
                 <a:latin typeface="Aptos"/>
               </a:rPr>
-              <a:t>Frontend and backend containers, managed PostgreSQL, persistent document storage, SMTP provider.</a:t>
+              <a:t>Managed PostgreSQL, FastAPI web service, Next.js web service, and a dedicated Telegram background worker.</a:t>
             </a:r>
           </a:p>
         </p:txBody>
@@ -6906,7 +6906,7 @@
                 </a:solidFill>
                 <a:latin typeface="Aptos"/>
               </a:rPr>
-              <a:t>19 existing backend tests pass, including tenant isolation, RAG citations, admin access, and uploads.</a:t>
+              <a:t>20 backend tests pass; frontend production build generates 16 routes; Telegram module compiles.</a:t>
             </a:r>
           </a:p>
         </p:txBody>
@@ -6986,7 +6986,7 @@
                 </a:solidFill>
                 <a:latin typeface="Aptos"/>
               </a:rPr>
-              <a:t>Operator checklist</a:t>
+              <a:t>Hardening</a:t>
             </a:r>
           </a:p>
         </p:txBody>
@@ -7021,7 +7021,7 @@
                 </a:solidFill>
                 <a:latin typeface="Aptos"/>
               </a:rPr>
-              <a:t>Set secrets, CORS, storage, health checks, migrations, and verify registration before launch.</a:t>
+              <a:t>Production reload disabled, strict environment-driven CORS, friendly upload errors, and cleanup of failed files.</a:t>
             </a:r>
           </a:p>
         </p:txBody>
@@ -7117,7 +7117,7 @@
                 </a:solidFill>
                 <a:latin typeface="Aptos"/>
               </a:rPr>
-              <a:t>Secure foundations first; integrate only what can be verified.</a:t>
+              <a:t>A secure foundation ready for a focused jury demonstration.</a:t>
             </a:r>
           </a:p>
         </p:txBody>
@@ -7197,7 +7197,7 @@
                 </a:solidFill>
                 <a:latin typeface="Aptos"/>
               </a:rPr>
-              <a:t>Now</a:t>
+              <a:t>Implemented</a:t>
             </a:r>
           </a:p>
         </p:txBody>
@@ -7232,7 +7232,7 @@
                 </a:solidFill>
                 <a:latin typeface="Aptos"/>
               </a:rPr>
-              <a:t>Tenant-scoped FastAPI APIs, grounded RAG, OTP registration, dark-first auth UI, audit telemetry.</a:t>
+              <a:t>OTP registration, tenant-scoped RAG, citations, audit telemetry, seeded jury data, accessible landing page, privacy and terms pages.</a:t>
             </a:r>
           </a:p>
         </p:txBody>
@@ -7312,7 +7312,7 @@
                 </a:solidFill>
                 <a:latin typeface="Aptos"/>
               </a:rPr>
-              <a:t>Next</a:t>
+              <a:t>Connected</a:t>
             </a:r>
           </a:p>
         </p:txBody>
@@ -7347,7 +7347,7 @@
                 </a:solidFill>
                 <a:latin typeface="Aptos"/>
               </a:rPr>
-              <a:t>Complete Telegram account linking and 120-second session enforcement on a shared bot service.</a:t>
+              <a:t>Telegram supports sliding inactivity sessions, chatbot questions, uploads, conversations, audits, and tenant-admin settings.</a:t>
             </a:r>
           </a:p>
         </p:txBody>
@@ -7427,7 +7427,7 @@
                 </a:solidFill>
                 <a:latin typeface="Aptos"/>
               </a:rPr>
-              <a:t>Future</a:t>
+              <a:t>Scale next</a:t>
             </a:r>
           </a:p>
         </p:txBody>
@@ -7462,7 +7462,7 @@
                 </a:solidFill>
                 <a:latin typeface="Aptos"/>
               </a:rPr>
-              <a:t>Async workers, OCR, object storage, richer feedback/export, and managed deployment verification.</a:t>
+              <a:t>Alembic migration history, object storage, async document workers, OCR, and production Render verification.</a:t>
             </a:r>
           </a:p>
         </p:txBody>

--- a/presentation/SaaSsum_AI_Presentation.pptx
+++ b/presentation/SaaSsum_AI_Presentation.pptx
@@ -14,6 +14,13 @@
     <p:sldId id="262" r:id="rId13"/>
     <p:sldId id="263" r:id="rId14"/>
     <p:sldId id="264" r:id="rId15"/>
+    <p:sldId id="265" r:id="rId16"/>
+    <p:sldId id="266" r:id="rId17"/>
+    <p:sldId id="267" r:id="rId18"/>
+    <p:sldId id="268" r:id="rId19"/>
+    <p:sldId id="269" r:id="rId20"/>
+    <p:sldId id="270" r:id="rId21"/>
+    <p:sldId id="271" r:id="rId22"/>
   </p:sldIdLst>
   <p:sldSz cx="12191695" cy="6858000" type="screen4x3"/>
   <p:notesSz cx="6858000" cy="9144000"/>
@@ -3134,7 +3141,7 @@
                 </a:solidFill>
                 <a:latin typeface="Aptos"/>
               </a:rPr>
-              <a:t>SaaSsum AI</a:t>
+              <a:t>tenantAI</a:t>
             </a:r>
           </a:p>
         </p:txBody>
@@ -3169,7 +3176,7 @@
                 </a:solidFill>
                 <a:latin typeface="Aptos"/>
               </a:rPr>
-              <a:t>Multi-tenant AI chatbot platform | Hackathon presentation</a:t>
+              <a:t>Secure multi-tenant AI knowledge platform | Hackathon presentation</a:t>
             </a:r>
           </a:p>
         </p:txBody>
@@ -3218,7 +3225,7 @@
         <p:spPr>
           <a:xfrm>
             <a:off x="777240" y="3063240"/>
-            <a:ext cx="9601200" cy="411480"/>
+            <a:ext cx="10241280" cy="411480"/>
           </a:xfrm>
           <a:prstGeom prst="rect">
             <a:avLst/>
@@ -3239,7 +3246,7 @@
                 </a:solidFill>
                 <a:latin typeface="Aptos"/>
               </a:rPr>
-              <a:t>Production direction: FastAPI + SQLAlchemy + Next.js + tenant-scoped RAG</a:t>
+              <a:t>FastAPI + SQLAlchemy + Next.js + tenant-scoped RAG + security telemetry</a:t>
             </a:r>
           </a:p>
         </p:txBody>
@@ -3274,7 +3281,3161 @@
                 </a:solidFill>
                 <a:latin typeface="Aptos"/>
               </a:rPr>
-              <a:t>Implemented surfaces are distinguished from follow-up integration work.</a:t>
+              <a:t>TriCity AI Hackathon | SaaSsum AI track</a:t>
+            </a:r>
+          </a:p>
+        </p:txBody>
+      </p:sp>
+    </p:spTree>
+  </p:cSld>
+  <p:clrMapOvr>
+    <a:masterClrMapping/>
+  </p:clrMapOvr>
+</p:sld>
+</file>
+
+<file path=ppt/slides/slide10.xml><?xml version="1.0" encoding="utf-8"?>
+<p:sld xmlns:a="http://schemas.openxmlformats.org/drawingml/2006/main" xmlns:p="http://schemas.openxmlformats.org/presentationml/2006/main" xmlns:r="http://schemas.openxmlformats.org/officeDocument/2006/relationships">
+  <p:cSld>
+    <p:bg>
+      <p:bgPr>
+        <a:solidFill>
+          <a:srgbClr val="0B1120"/>
+        </a:solidFill>
+        <a:effectLst/>
+      </p:bgPr>
+    </p:bg>
+    <p:spTree>
+      <p:nvGrpSpPr>
+        <p:cNvPr id="1" name=""/>
+        <p:cNvGrpSpPr/>
+        <p:nvPr/>
+      </p:nvGrpSpPr>
+      <p:grpSpPr/>
+      <p:sp>
+        <p:nvSpPr>
+          <p:cNvPr id="2" name="TextBox 1"/>
+          <p:cNvSpPr txBox="1"/>
+          <p:nvPr/>
+        </p:nvSpPr>
+        <p:spPr>
+          <a:xfrm>
+            <a:off x="594360" y="411480"/>
+            <a:ext cx="10972800" cy="502920"/>
+          </a:xfrm>
+          <a:prstGeom prst="rect">
+            <a:avLst/>
+          </a:prstGeom>
+          <a:noFill/>
+        </p:spPr>
+        <p:txBody>
+          <a:bodyPr wrap="square">
+            <a:spAutoFit/>
+          </a:bodyPr>
+          <a:lstStyle/>
+          <a:p>
+            <a:pPr algn="l"/>
+            <a:r>
+              <a:rPr sz="2800" b="1">
+                <a:solidFill>
+                  <a:srgbClr val="E5EDF7"/>
+                </a:solidFill>
+                <a:latin typeface="Aptos"/>
+              </a:rPr>
+              <a:t>RAG behavior</a:t>
+            </a:r>
+          </a:p>
+        </p:txBody>
+      </p:sp>
+      <p:sp>
+        <p:nvSpPr>
+          <p:cNvPr id="3" name="TextBox 2"/>
+          <p:cNvSpPr txBox="1"/>
+          <p:nvPr/>
+        </p:nvSpPr>
+        <p:spPr>
+          <a:xfrm>
+            <a:off x="621792" y="987552"/>
+            <a:ext cx="10789920" cy="320040"/>
+          </a:xfrm>
+          <a:prstGeom prst="rect">
+            <a:avLst/>
+          </a:prstGeom>
+          <a:noFill/>
+        </p:spPr>
+        <p:txBody>
+          <a:bodyPr wrap="square">
+            <a:spAutoFit/>
+          </a:bodyPr>
+          <a:lstStyle/>
+          <a:p>
+            <a:pPr algn="l"/>
+            <a:r>
+              <a:rPr sz="1200" b="0">
+                <a:solidFill>
+                  <a:srgbClr val="94A3B8"/>
+                </a:solidFill>
+                <a:latin typeface="Aptos"/>
+              </a:rPr>
+              <a:t>Answers are constrained by the verified workspace knowledge base.</a:t>
+            </a:r>
+          </a:p>
+        </p:txBody>
+      </p:sp>
+      <p:sp>
+        <p:nvSpPr>
+          <p:cNvPr id="4" name="Rounded Rectangle 3"/>
+          <p:cNvSpPr/>
+          <p:nvPr/>
+        </p:nvSpPr>
+        <p:spPr>
+          <a:xfrm>
+            <a:off x="685800" y="1645920"/>
+            <a:ext cx="3474720" cy="3291840"/>
+          </a:xfrm>
+          <a:prstGeom prst="roundRect">
+            <a:avLst/>
+          </a:prstGeom>
+          <a:solidFill>
+            <a:srgbClr val="111A2D"/>
+          </a:solidFill>
+          <a:ln>
+            <a:solidFill>
+              <a:srgbClr val="2D3A52"/>
+            </a:solidFill>
+          </a:ln>
+        </p:spPr>
+        <p:style>
+          <a:lnRef idx="1">
+            <a:schemeClr val="accent1"/>
+          </a:lnRef>
+          <a:fillRef idx="3">
+            <a:schemeClr val="accent1"/>
+          </a:fillRef>
+          <a:effectRef idx="2">
+            <a:schemeClr val="accent1"/>
+          </a:effectRef>
+          <a:fontRef idx="minor">
+            <a:schemeClr val="lt1"/>
+          </a:fontRef>
+        </p:style>
+        <p:txBody>
+          <a:bodyPr rtlCol="0" anchor="ctr"/>
+          <a:lstStyle/>
+          <a:p>
+            <a:pPr algn="ctr"/>
+          </a:p>
+        </p:txBody>
+      </p:sp>
+      <p:sp>
+        <p:nvSpPr>
+          <p:cNvPr id="5" name="TextBox 4"/>
+          <p:cNvSpPr txBox="1"/>
+          <p:nvPr/>
+        </p:nvSpPr>
+        <p:spPr>
+          <a:xfrm>
+            <a:off x="868680" y="1810512"/>
+            <a:ext cx="3108960" cy="320040"/>
+          </a:xfrm>
+          <a:prstGeom prst="rect">
+            <a:avLst/>
+          </a:prstGeom>
+          <a:noFill/>
+        </p:spPr>
+        <p:txBody>
+          <a:bodyPr wrap="square">
+            <a:spAutoFit/>
+          </a:bodyPr>
+          <a:lstStyle/>
+          <a:p>
+            <a:pPr algn="l"/>
+            <a:r>
+              <a:rPr sz="1600" b="1">
+                <a:solidFill>
+                  <a:srgbClr val="2DD4BF"/>
+                </a:solidFill>
+                <a:latin typeface="Aptos"/>
+              </a:rPr>
+              <a:t>1. Retrieve</a:t>
+            </a:r>
+          </a:p>
+        </p:txBody>
+      </p:sp>
+      <p:sp>
+        <p:nvSpPr>
+          <p:cNvPr id="6" name="TextBox 5"/>
+          <p:cNvSpPr txBox="1"/>
+          <p:nvPr/>
+        </p:nvSpPr>
+        <p:spPr>
+          <a:xfrm>
+            <a:off x="868680" y="2240280"/>
+            <a:ext cx="3108960" cy="2560320"/>
+          </a:xfrm>
+          <a:prstGeom prst="rect">
+            <a:avLst/>
+          </a:prstGeom>
+          <a:noFill/>
+        </p:spPr>
+        <p:txBody>
+          <a:bodyPr wrap="square">
+            <a:spAutoFit/>
+          </a:bodyPr>
+          <a:lstStyle/>
+          <a:p>
+            <a:pPr algn="l"/>
+            <a:r>
+              <a:rPr sz="1200" b="0">
+                <a:solidFill>
+                  <a:srgbClr val="E5EDF7"/>
+                </a:solidFill>
+                <a:latin typeface="Aptos"/>
+              </a:rPr>
+              <a:t>The query is embedded and compared against chunks from READY documents in the caller's tenant only.</a:t>
+            </a:r>
+          </a:p>
+        </p:txBody>
+      </p:sp>
+      <p:sp>
+        <p:nvSpPr>
+          <p:cNvPr id="7" name="Rounded Rectangle 6"/>
+          <p:cNvSpPr/>
+          <p:nvPr/>
+        </p:nvSpPr>
+        <p:spPr>
+          <a:xfrm>
+            <a:off x="4389120" y="1645920"/>
+            <a:ext cx="3474720" cy="3291840"/>
+          </a:xfrm>
+          <a:prstGeom prst="roundRect">
+            <a:avLst/>
+          </a:prstGeom>
+          <a:solidFill>
+            <a:srgbClr val="111A2D"/>
+          </a:solidFill>
+          <a:ln>
+            <a:solidFill>
+              <a:srgbClr val="2D3A52"/>
+            </a:solidFill>
+          </a:ln>
+        </p:spPr>
+        <p:style>
+          <a:lnRef idx="1">
+            <a:schemeClr val="accent1"/>
+          </a:lnRef>
+          <a:fillRef idx="3">
+            <a:schemeClr val="accent1"/>
+          </a:fillRef>
+          <a:effectRef idx="2">
+            <a:schemeClr val="accent1"/>
+          </a:effectRef>
+          <a:fontRef idx="minor">
+            <a:schemeClr val="lt1"/>
+          </a:fontRef>
+        </p:style>
+        <p:txBody>
+          <a:bodyPr rtlCol="0" anchor="ctr"/>
+          <a:lstStyle/>
+          <a:p>
+            <a:pPr algn="ctr"/>
+          </a:p>
+        </p:txBody>
+      </p:sp>
+      <p:sp>
+        <p:nvSpPr>
+          <p:cNvPr id="8" name="TextBox 7"/>
+          <p:cNvSpPr txBox="1"/>
+          <p:nvPr/>
+        </p:nvSpPr>
+        <p:spPr>
+          <a:xfrm>
+            <a:off x="4572000" y="1810512"/>
+            <a:ext cx="3108960" cy="320040"/>
+          </a:xfrm>
+          <a:prstGeom prst="rect">
+            <a:avLst/>
+          </a:prstGeom>
+          <a:noFill/>
+        </p:spPr>
+        <p:txBody>
+          <a:bodyPr wrap="square">
+            <a:spAutoFit/>
+          </a:bodyPr>
+          <a:lstStyle/>
+          <a:p>
+            <a:pPr algn="l"/>
+            <a:r>
+              <a:rPr sz="1600" b="1">
+                <a:solidFill>
+                  <a:srgbClr val="2DD4BF"/>
+                </a:solidFill>
+                <a:latin typeface="Aptos"/>
+              </a:rPr>
+              <a:t>2. Ground</a:t>
+            </a:r>
+          </a:p>
+        </p:txBody>
+      </p:sp>
+      <p:sp>
+        <p:nvSpPr>
+          <p:cNvPr id="9" name="TextBox 8"/>
+          <p:cNvSpPr txBox="1"/>
+          <p:nvPr/>
+        </p:nvSpPr>
+        <p:spPr>
+          <a:xfrm>
+            <a:off x="4572000" y="2240280"/>
+            <a:ext cx="3108960" cy="2560320"/>
+          </a:xfrm>
+          <a:prstGeom prst="rect">
+            <a:avLst/>
+          </a:prstGeom>
+          <a:noFill/>
+        </p:spPr>
+        <p:txBody>
+          <a:bodyPr wrap="square">
+            <a:spAutoFit/>
+          </a:bodyPr>
+          <a:lstStyle/>
+          <a:p>
+            <a:pPr algn="l"/>
+            <a:r>
+              <a:rPr sz="1200" b="0">
+                <a:solidFill>
+                  <a:srgbClr val="E5EDF7"/>
+                </a:solidFill>
+                <a:latin typeface="Aptos"/>
+              </a:rPr>
+              <a:t>Relevant chunks are passed as context to the response layer; unsupported claims are not treated as facts.</a:t>
+            </a:r>
+          </a:p>
+        </p:txBody>
+      </p:sp>
+      <p:sp>
+        <p:nvSpPr>
+          <p:cNvPr id="10" name="Rounded Rectangle 9"/>
+          <p:cNvSpPr/>
+          <p:nvPr/>
+        </p:nvSpPr>
+        <p:spPr>
+          <a:xfrm>
+            <a:off x="8092440" y="1645920"/>
+            <a:ext cx="3474720" cy="3291840"/>
+          </a:xfrm>
+          <a:prstGeom prst="roundRect">
+            <a:avLst/>
+          </a:prstGeom>
+          <a:solidFill>
+            <a:srgbClr val="111A2D"/>
+          </a:solidFill>
+          <a:ln>
+            <a:solidFill>
+              <a:srgbClr val="2D3A52"/>
+            </a:solidFill>
+          </a:ln>
+        </p:spPr>
+        <p:style>
+          <a:lnRef idx="1">
+            <a:schemeClr val="accent1"/>
+          </a:lnRef>
+          <a:fillRef idx="3">
+            <a:schemeClr val="accent1"/>
+          </a:fillRef>
+          <a:effectRef idx="2">
+            <a:schemeClr val="accent1"/>
+          </a:effectRef>
+          <a:fontRef idx="minor">
+            <a:schemeClr val="lt1"/>
+          </a:fontRef>
+        </p:style>
+        <p:txBody>
+          <a:bodyPr rtlCol="0" anchor="ctr"/>
+          <a:lstStyle/>
+          <a:p>
+            <a:pPr algn="ctr"/>
+          </a:p>
+        </p:txBody>
+      </p:sp>
+      <p:sp>
+        <p:nvSpPr>
+          <p:cNvPr id="11" name="TextBox 10"/>
+          <p:cNvSpPr txBox="1"/>
+          <p:nvPr/>
+        </p:nvSpPr>
+        <p:spPr>
+          <a:xfrm>
+            <a:off x="8275319" y="1810512"/>
+            <a:ext cx="3108960" cy="320040"/>
+          </a:xfrm>
+          <a:prstGeom prst="rect">
+            <a:avLst/>
+          </a:prstGeom>
+          <a:noFill/>
+        </p:spPr>
+        <p:txBody>
+          <a:bodyPr wrap="square">
+            <a:spAutoFit/>
+          </a:bodyPr>
+          <a:lstStyle/>
+          <a:p>
+            <a:pPr algn="l"/>
+            <a:r>
+              <a:rPr sz="1600" b="1">
+                <a:solidFill>
+                  <a:srgbClr val="2DD4BF"/>
+                </a:solidFill>
+                <a:latin typeface="Aptos"/>
+              </a:rPr>
+              <a:t>3. Cite or refuse</a:t>
+            </a:r>
+          </a:p>
+        </p:txBody>
+      </p:sp>
+      <p:sp>
+        <p:nvSpPr>
+          <p:cNvPr id="12" name="TextBox 11"/>
+          <p:cNvSpPr txBox="1"/>
+          <p:nvPr/>
+        </p:nvSpPr>
+        <p:spPr>
+          <a:xfrm>
+            <a:off x="8275319" y="2240280"/>
+            <a:ext cx="3108960" cy="2560320"/>
+          </a:xfrm>
+          <a:prstGeom prst="rect">
+            <a:avLst/>
+          </a:prstGeom>
+          <a:noFill/>
+        </p:spPr>
+        <p:txBody>
+          <a:bodyPr wrap="square">
+            <a:spAutoFit/>
+          </a:bodyPr>
+          <a:lstStyle/>
+          <a:p>
+            <a:pPr algn="l"/>
+            <a:r>
+              <a:rPr sz="1200" b="0">
+                <a:solidFill>
+                  <a:srgbClr val="E5EDF7"/>
+                </a:solidFill>
+                <a:latin typeface="Aptos"/>
+              </a:rPr>
+              <a:t>The answer includes document/page evidence or explicitly refuses when the workspace has no support.</a:t>
+            </a:r>
+          </a:p>
+        </p:txBody>
+      </p:sp>
+      <p:sp>
+        <p:nvSpPr>
+          <p:cNvPr id="13" name="TextBox 12"/>
+          <p:cNvSpPr txBox="1"/>
+          <p:nvPr/>
+        </p:nvSpPr>
+        <p:spPr>
+          <a:xfrm>
+            <a:off x="822960" y="5486400"/>
+            <a:ext cx="10515600" cy="411480"/>
+          </a:xfrm>
+          <a:prstGeom prst="rect">
+            <a:avLst/>
+          </a:prstGeom>
+          <a:noFill/>
+        </p:spPr>
+        <p:txBody>
+          <a:bodyPr wrap="square">
+            <a:spAutoFit/>
+          </a:bodyPr>
+          <a:lstStyle/>
+          <a:p>
+            <a:pPr algn="ctr"/>
+            <a:r>
+              <a:rPr sz="1500" b="0">
+                <a:solidFill>
+                  <a:srgbClr val="2DD4BF"/>
+                </a:solidFill>
+                <a:latin typeface="Aptos"/>
+              </a:rPr>
+              <a:t>Example: GreenLeaf can answer its 30-day return policy, but cannot answer TechNova's laptop warranty question.</a:t>
+            </a:r>
+          </a:p>
+        </p:txBody>
+      </p:sp>
+    </p:spTree>
+  </p:cSld>
+  <p:clrMapOvr>
+    <a:masterClrMapping/>
+  </p:clrMapOvr>
+</p:sld>
+</file>
+
+<file path=ppt/slides/slide11.xml><?xml version="1.0" encoding="utf-8"?>
+<p:sld xmlns:a="http://schemas.openxmlformats.org/drawingml/2006/main" xmlns:p="http://schemas.openxmlformats.org/presentationml/2006/main" xmlns:r="http://schemas.openxmlformats.org/officeDocument/2006/relationships">
+  <p:cSld>
+    <p:bg>
+      <p:bgPr>
+        <a:solidFill>
+          <a:srgbClr val="0B1120"/>
+        </a:solidFill>
+        <a:effectLst/>
+      </p:bgPr>
+    </p:bg>
+    <p:spTree>
+      <p:nvGrpSpPr>
+        <p:cNvPr id="1" name=""/>
+        <p:cNvGrpSpPr/>
+        <p:nvPr/>
+      </p:nvGrpSpPr>
+      <p:grpSpPr/>
+      <p:sp>
+        <p:nvSpPr>
+          <p:cNvPr id="2" name="TextBox 1"/>
+          <p:cNvSpPr txBox="1"/>
+          <p:nvPr/>
+        </p:nvSpPr>
+        <p:spPr>
+          <a:xfrm>
+            <a:off x="594360" y="411480"/>
+            <a:ext cx="10972800" cy="502920"/>
+          </a:xfrm>
+          <a:prstGeom prst="rect">
+            <a:avLst/>
+          </a:prstGeom>
+          <a:noFill/>
+        </p:spPr>
+        <p:txBody>
+          <a:bodyPr wrap="square">
+            <a:spAutoFit/>
+          </a:bodyPr>
+          <a:lstStyle/>
+          <a:p>
+            <a:pPr algn="l"/>
+            <a:r>
+              <a:rPr sz="2800" b="1">
+                <a:solidFill>
+                  <a:srgbClr val="E5EDF7"/>
+                </a:solidFill>
+                <a:latin typeface="Aptos"/>
+              </a:rPr>
+              <a:t>Live demo path</a:t>
+            </a:r>
+          </a:p>
+        </p:txBody>
+      </p:sp>
+      <p:sp>
+        <p:nvSpPr>
+          <p:cNvPr id="3" name="TextBox 2"/>
+          <p:cNvSpPr txBox="1"/>
+          <p:nvPr/>
+        </p:nvSpPr>
+        <p:spPr>
+          <a:xfrm>
+            <a:off x="621792" y="987552"/>
+            <a:ext cx="10789920" cy="320040"/>
+          </a:xfrm>
+          <a:prstGeom prst="rect">
+            <a:avLst/>
+          </a:prstGeom>
+          <a:noFill/>
+        </p:spPr>
+        <p:txBody>
+          <a:bodyPr wrap="square">
+            <a:spAutoFit/>
+          </a:bodyPr>
+          <a:lstStyle/>
+          <a:p>
+            <a:pPr algn="l"/>
+            <a:r>
+              <a:rPr sz="1200" b="0">
+                <a:solidFill>
+                  <a:srgbClr val="94A3B8"/>
+                </a:solidFill>
+                <a:latin typeface="Aptos"/>
+              </a:rPr>
+              <a:t>Use real data and label anything not yet deployed.</a:t>
+            </a:r>
+          </a:p>
+        </p:txBody>
+      </p:sp>
+      <p:sp>
+        <p:nvSpPr>
+          <p:cNvPr id="4" name="TextBox 3"/>
+          <p:cNvSpPr txBox="1"/>
+          <p:nvPr/>
+        </p:nvSpPr>
+        <p:spPr>
+          <a:xfrm>
+            <a:off x="914400" y="1645920"/>
+            <a:ext cx="4754880" cy="457200"/>
+          </a:xfrm>
+          <a:prstGeom prst="rect">
+            <a:avLst/>
+          </a:prstGeom>
+          <a:noFill/>
+        </p:spPr>
+        <p:txBody>
+          <a:bodyPr wrap="square">
+            <a:spAutoFit/>
+          </a:bodyPr>
+          <a:lstStyle/>
+          <a:p>
+            <a:pPr algn="l"/>
+            <a:r>
+              <a:rPr sz="2000" b="1">
+                <a:solidFill>
+                  <a:srgbClr val="E5EDF7"/>
+                </a:solidFill>
+                <a:latin typeface="Aptos"/>
+              </a:rPr>
+              <a:t>1  Register company</a:t>
+            </a:r>
+          </a:p>
+        </p:txBody>
+      </p:sp>
+      <p:sp>
+        <p:nvSpPr>
+          <p:cNvPr id="5" name="TextBox 4"/>
+          <p:cNvSpPr txBox="1"/>
+          <p:nvPr/>
+        </p:nvSpPr>
+        <p:spPr>
+          <a:xfrm>
+            <a:off x="914400" y="2286000"/>
+            <a:ext cx="6217920" cy="457200"/>
+          </a:xfrm>
+          <a:prstGeom prst="rect">
+            <a:avLst/>
+          </a:prstGeom>
+          <a:noFill/>
+        </p:spPr>
+        <p:txBody>
+          <a:bodyPr wrap="square">
+            <a:spAutoFit/>
+          </a:bodyPr>
+          <a:lstStyle/>
+          <a:p>
+            <a:pPr algn="l"/>
+            <a:r>
+              <a:rPr sz="2000" b="1">
+                <a:solidFill>
+                  <a:srgbClr val="E5EDF7"/>
+                </a:solidFill>
+                <a:latin typeface="Aptos"/>
+              </a:rPr>
+              <a:t>2  Verify OTP from SMTP or development log</a:t>
+            </a:r>
+          </a:p>
+        </p:txBody>
+      </p:sp>
+      <p:sp>
+        <p:nvSpPr>
+          <p:cNvPr id="6" name="TextBox 5"/>
+          <p:cNvSpPr txBox="1"/>
+          <p:nvPr/>
+        </p:nvSpPr>
+        <p:spPr>
+          <a:xfrm>
+            <a:off x="914400" y="2926080"/>
+            <a:ext cx="6217920" cy="457200"/>
+          </a:xfrm>
+          <a:prstGeom prst="rect">
+            <a:avLst/>
+          </a:prstGeom>
+          <a:noFill/>
+        </p:spPr>
+        <p:txBody>
+          <a:bodyPr wrap="square">
+            <a:spAutoFit/>
+          </a:bodyPr>
+          <a:lstStyle/>
+          <a:p>
+            <a:pPr algn="l"/>
+            <a:r>
+              <a:rPr sz="2000" b="1">
+                <a:solidFill>
+                  <a:srgbClr val="E5EDF7"/>
+                </a:solidFill>
+                <a:latin typeface="Aptos"/>
+              </a:rPr>
+              <a:t>3  Upload a PDF/TXT/MD document</a:t>
+            </a:r>
+          </a:p>
+        </p:txBody>
+      </p:sp>
+      <p:sp>
+        <p:nvSpPr>
+          <p:cNvPr id="7" name="TextBox 6"/>
+          <p:cNvSpPr txBox="1"/>
+          <p:nvPr/>
+        </p:nvSpPr>
+        <p:spPr>
+          <a:xfrm>
+            <a:off x="914400" y="3566160"/>
+            <a:ext cx="6858000" cy="457200"/>
+          </a:xfrm>
+          <a:prstGeom prst="rect">
+            <a:avLst/>
+          </a:prstGeom>
+          <a:noFill/>
+        </p:spPr>
+        <p:txBody>
+          <a:bodyPr wrap="square">
+            <a:spAutoFit/>
+          </a:bodyPr>
+          <a:lstStyle/>
+          <a:p>
+            <a:pPr algn="l"/>
+            <a:r>
+              <a:rPr sz="2000" b="1">
+                <a:solidFill>
+                  <a:srgbClr val="E5EDF7"/>
+                </a:solidFill>
+                <a:latin typeface="Aptos"/>
+              </a:rPr>
+              <a:t>4  Ask a grounded question and inspect citations</a:t>
+            </a:r>
+          </a:p>
+        </p:txBody>
+      </p:sp>
+      <p:sp>
+        <p:nvSpPr>
+          <p:cNvPr id="8" name="TextBox 7"/>
+          <p:cNvSpPr txBox="1"/>
+          <p:nvPr/>
+        </p:nvSpPr>
+        <p:spPr>
+          <a:xfrm>
+            <a:off x="914400" y="4206240"/>
+            <a:ext cx="7680960" cy="457200"/>
+          </a:xfrm>
+          <a:prstGeom prst="rect">
+            <a:avLst/>
+          </a:prstGeom>
+          <a:noFill/>
+        </p:spPr>
+        <p:txBody>
+          <a:bodyPr wrap="square">
+            <a:spAutoFit/>
+          </a:bodyPr>
+          <a:lstStyle/>
+          <a:p>
+            <a:pPr algn="l"/>
+            <a:r>
+              <a:rPr sz="2000" b="1">
+                <a:solidFill>
+                  <a:srgbClr val="E5EDF7"/>
+                </a:solidFill>
+                <a:latin typeface="Aptos"/>
+              </a:rPr>
+              <a:t>5  Register a second company and verify isolation</a:t>
+            </a:r>
+          </a:p>
+        </p:txBody>
+      </p:sp>
+      <p:sp>
+        <p:nvSpPr>
+          <p:cNvPr id="9" name="TextBox 8"/>
+          <p:cNvSpPr txBox="1"/>
+          <p:nvPr/>
+        </p:nvSpPr>
+        <p:spPr>
+          <a:xfrm>
+            <a:off x="914400" y="5715000"/>
+            <a:ext cx="10058400" cy="320040"/>
+          </a:xfrm>
+          <a:prstGeom prst="rect">
+            <a:avLst/>
+          </a:prstGeom>
+          <a:noFill/>
+        </p:spPr>
+        <p:txBody>
+          <a:bodyPr wrap="square">
+            <a:spAutoFit/>
+          </a:bodyPr>
+          <a:lstStyle/>
+          <a:p>
+            <a:pPr algn="l"/>
+            <a:r>
+              <a:rPr sz="1300" b="0">
+                <a:solidFill>
+                  <a:srgbClr val="2DD4BF"/>
+                </a:solidFill>
+                <a:latin typeface="Aptos"/>
+              </a:rPr>
+              <a:t>Optional follow-up: connect the same tenant-scoped APIs to a Telegram worker after deployment.</a:t>
+            </a:r>
+          </a:p>
+        </p:txBody>
+      </p:sp>
+    </p:spTree>
+  </p:cSld>
+  <p:clrMapOvr>
+    <a:masterClrMapping/>
+  </p:clrMapOvr>
+</p:sld>
+</file>
+
+<file path=ppt/slides/slide12.xml><?xml version="1.0" encoding="utf-8"?>
+<p:sld xmlns:a="http://schemas.openxmlformats.org/drawingml/2006/main" xmlns:p="http://schemas.openxmlformats.org/presentationml/2006/main" xmlns:r="http://schemas.openxmlformats.org/officeDocument/2006/relationships">
+  <p:cSld>
+    <p:bg>
+      <p:bgPr>
+        <a:solidFill>
+          <a:srgbClr val="0B1120"/>
+        </a:solidFill>
+        <a:effectLst/>
+      </p:bgPr>
+    </p:bg>
+    <p:spTree>
+      <p:nvGrpSpPr>
+        <p:cNvPr id="1" name=""/>
+        <p:cNvGrpSpPr/>
+        <p:nvPr/>
+      </p:nvGrpSpPr>
+      <p:grpSpPr/>
+      <p:sp>
+        <p:nvSpPr>
+          <p:cNvPr id="2" name="TextBox 1"/>
+          <p:cNvSpPr txBox="1"/>
+          <p:nvPr/>
+        </p:nvSpPr>
+        <p:spPr>
+          <a:xfrm>
+            <a:off x="594360" y="411480"/>
+            <a:ext cx="10972800" cy="502920"/>
+          </a:xfrm>
+          <a:prstGeom prst="rect">
+            <a:avLst/>
+          </a:prstGeom>
+          <a:noFill/>
+        </p:spPr>
+        <p:txBody>
+          <a:bodyPr wrap="square">
+            <a:spAutoFit/>
+          </a:bodyPr>
+          <a:lstStyle/>
+          <a:p>
+            <a:pPr algn="l"/>
+            <a:r>
+              <a:rPr sz="2800" b="1">
+                <a:solidFill>
+                  <a:srgbClr val="E5EDF7"/>
+                </a:solidFill>
+                <a:latin typeface="Aptos"/>
+              </a:rPr>
+              <a:t>Demo credentials and data</a:t>
+            </a:r>
+          </a:p>
+        </p:txBody>
+      </p:sp>
+      <p:sp>
+        <p:nvSpPr>
+          <p:cNvPr id="3" name="TextBox 2"/>
+          <p:cNvSpPr txBox="1"/>
+          <p:nvPr/>
+        </p:nvSpPr>
+        <p:spPr>
+          <a:xfrm>
+            <a:off x="621792" y="987552"/>
+            <a:ext cx="10789920" cy="320040"/>
+          </a:xfrm>
+          <a:prstGeom prst="rect">
+            <a:avLst/>
+          </a:prstGeom>
+          <a:noFill/>
+        </p:spPr>
+        <p:txBody>
+          <a:bodyPr wrap="square">
+            <a:spAutoFit/>
+          </a:bodyPr>
+          <a:lstStyle/>
+          <a:p>
+            <a:pPr algn="l"/>
+            <a:r>
+              <a:rPr sz="1200" b="0">
+                <a:solidFill>
+                  <a:srgbClr val="94A3B8"/>
+                </a:solidFill>
+                <a:latin typeface="Aptos"/>
+              </a:rPr>
+              <a:t>Use these legacy fixtures only for the jury walkthrough; do not use them in production.</a:t>
+            </a:r>
+          </a:p>
+        </p:txBody>
+      </p:sp>
+      <p:sp>
+        <p:nvSpPr>
+          <p:cNvPr id="4" name="Rounded Rectangle 3"/>
+          <p:cNvSpPr/>
+          <p:nvPr/>
+        </p:nvSpPr>
+        <p:spPr>
+          <a:xfrm>
+            <a:off x="685800" y="1600200"/>
+            <a:ext cx="3474720" cy="3429000"/>
+          </a:xfrm>
+          <a:prstGeom prst="roundRect">
+            <a:avLst/>
+          </a:prstGeom>
+          <a:solidFill>
+            <a:srgbClr val="111A2D"/>
+          </a:solidFill>
+          <a:ln>
+            <a:solidFill>
+              <a:srgbClr val="2D3A52"/>
+            </a:solidFill>
+          </a:ln>
+        </p:spPr>
+        <p:style>
+          <a:lnRef idx="1">
+            <a:schemeClr val="accent1"/>
+          </a:lnRef>
+          <a:fillRef idx="3">
+            <a:schemeClr val="accent1"/>
+          </a:fillRef>
+          <a:effectRef idx="2">
+            <a:schemeClr val="accent1"/>
+          </a:effectRef>
+          <a:fontRef idx="minor">
+            <a:schemeClr val="lt1"/>
+          </a:fontRef>
+        </p:style>
+        <p:txBody>
+          <a:bodyPr rtlCol="0" anchor="ctr"/>
+          <a:lstStyle/>
+          <a:p>
+            <a:pPr algn="ctr"/>
+          </a:p>
+        </p:txBody>
+      </p:sp>
+      <p:sp>
+        <p:nvSpPr>
+          <p:cNvPr id="5" name="TextBox 4"/>
+          <p:cNvSpPr txBox="1"/>
+          <p:nvPr/>
+        </p:nvSpPr>
+        <p:spPr>
+          <a:xfrm>
+            <a:off x="868680" y="1764792"/>
+            <a:ext cx="3108960" cy="320040"/>
+          </a:xfrm>
+          <a:prstGeom prst="rect">
+            <a:avLst/>
+          </a:prstGeom>
+          <a:noFill/>
+        </p:spPr>
+        <p:txBody>
+          <a:bodyPr wrap="square">
+            <a:spAutoFit/>
+          </a:bodyPr>
+          <a:lstStyle/>
+          <a:p>
+            <a:pPr algn="l"/>
+            <a:r>
+              <a:rPr sz="1600" b="1">
+                <a:solidFill>
+                  <a:srgbClr val="2DD4BF"/>
+                </a:solidFill>
+                <a:latin typeface="Aptos"/>
+              </a:rPr>
+              <a:t>TechNova Solutions</a:t>
+            </a:r>
+          </a:p>
+        </p:txBody>
+      </p:sp>
+      <p:sp>
+        <p:nvSpPr>
+          <p:cNvPr id="6" name="TextBox 5"/>
+          <p:cNvSpPr txBox="1"/>
+          <p:nvPr/>
+        </p:nvSpPr>
+        <p:spPr>
+          <a:xfrm>
+            <a:off x="868680" y="2194560"/>
+            <a:ext cx="3108960" cy="2697480"/>
+          </a:xfrm>
+          <a:prstGeom prst="rect">
+            <a:avLst/>
+          </a:prstGeom>
+          <a:noFill/>
+        </p:spPr>
+        <p:txBody>
+          <a:bodyPr wrap="square">
+            <a:spAutoFit/>
+          </a:bodyPr>
+          <a:lstStyle/>
+          <a:p>
+            <a:pPr algn="l"/>
+            <a:r>
+              <a:rPr sz="1200" b="0">
+                <a:solidFill>
+                  <a:srgbClr val="E5EDF7"/>
+                </a:solidFill>
+                <a:latin typeface="Aptos"/>
+              </a:rPr>
+              <a:t>Admin: admin@technova.com
+Password: DemoPass123!
+Knowledge: UltraBook Pro X15 hardware manual</a:t>
+            </a:r>
+          </a:p>
+        </p:txBody>
+      </p:sp>
+      <p:sp>
+        <p:nvSpPr>
+          <p:cNvPr id="7" name="Rounded Rectangle 6"/>
+          <p:cNvSpPr/>
+          <p:nvPr/>
+        </p:nvSpPr>
+        <p:spPr>
+          <a:xfrm>
+            <a:off x="4389120" y="1600200"/>
+            <a:ext cx="3474720" cy="3429000"/>
+          </a:xfrm>
+          <a:prstGeom prst="roundRect">
+            <a:avLst/>
+          </a:prstGeom>
+          <a:solidFill>
+            <a:srgbClr val="111A2D"/>
+          </a:solidFill>
+          <a:ln>
+            <a:solidFill>
+              <a:srgbClr val="2D3A52"/>
+            </a:solidFill>
+          </a:ln>
+        </p:spPr>
+        <p:style>
+          <a:lnRef idx="1">
+            <a:schemeClr val="accent1"/>
+          </a:lnRef>
+          <a:fillRef idx="3">
+            <a:schemeClr val="accent1"/>
+          </a:fillRef>
+          <a:effectRef idx="2">
+            <a:schemeClr val="accent1"/>
+          </a:effectRef>
+          <a:fontRef idx="minor">
+            <a:schemeClr val="lt1"/>
+          </a:fontRef>
+        </p:style>
+        <p:txBody>
+          <a:bodyPr rtlCol="0" anchor="ctr"/>
+          <a:lstStyle/>
+          <a:p>
+            <a:pPr algn="ctr"/>
+          </a:p>
+        </p:txBody>
+      </p:sp>
+      <p:sp>
+        <p:nvSpPr>
+          <p:cNvPr id="8" name="TextBox 7"/>
+          <p:cNvSpPr txBox="1"/>
+          <p:nvPr/>
+        </p:nvSpPr>
+        <p:spPr>
+          <a:xfrm>
+            <a:off x="4572000" y="1764792"/>
+            <a:ext cx="3108960" cy="320040"/>
+          </a:xfrm>
+          <a:prstGeom prst="rect">
+            <a:avLst/>
+          </a:prstGeom>
+          <a:noFill/>
+        </p:spPr>
+        <p:txBody>
+          <a:bodyPr wrap="square">
+            <a:spAutoFit/>
+          </a:bodyPr>
+          <a:lstStyle/>
+          <a:p>
+            <a:pPr algn="l"/>
+            <a:r>
+              <a:rPr sz="1600" b="1">
+                <a:solidFill>
+                  <a:srgbClr val="2DD4BF"/>
+                </a:solidFill>
+                <a:latin typeface="Aptos"/>
+              </a:rPr>
+              <a:t>GreenLeaf Retail</a:t>
+            </a:r>
+          </a:p>
+        </p:txBody>
+      </p:sp>
+      <p:sp>
+        <p:nvSpPr>
+          <p:cNvPr id="9" name="TextBox 8"/>
+          <p:cNvSpPr txBox="1"/>
+          <p:nvPr/>
+        </p:nvSpPr>
+        <p:spPr>
+          <a:xfrm>
+            <a:off x="4572000" y="2194560"/>
+            <a:ext cx="3108960" cy="2697480"/>
+          </a:xfrm>
+          <a:prstGeom prst="rect">
+            <a:avLst/>
+          </a:prstGeom>
+          <a:noFill/>
+        </p:spPr>
+        <p:txBody>
+          <a:bodyPr wrap="square">
+            <a:spAutoFit/>
+          </a:bodyPr>
+          <a:lstStyle/>
+          <a:p>
+            <a:pPr algn="l"/>
+            <a:r>
+              <a:rPr sz="1200" b="0">
+                <a:solidFill>
+                  <a:srgbClr val="E5EDF7"/>
+                </a:solidFill>
+                <a:latin typeface="Aptos"/>
+              </a:rPr>
+              <a:t>Admin: admin@greenleaf.com
+Password: DemoPass123!
+Knowledge: customer refund and return policy</a:t>
+            </a:r>
+          </a:p>
+        </p:txBody>
+      </p:sp>
+      <p:sp>
+        <p:nvSpPr>
+          <p:cNvPr id="10" name="Rounded Rectangle 9"/>
+          <p:cNvSpPr/>
+          <p:nvPr/>
+        </p:nvSpPr>
+        <p:spPr>
+          <a:xfrm>
+            <a:off x="8092440" y="1600200"/>
+            <a:ext cx="3474720" cy="3429000"/>
+          </a:xfrm>
+          <a:prstGeom prst="roundRect">
+            <a:avLst/>
+          </a:prstGeom>
+          <a:solidFill>
+            <a:srgbClr val="111A2D"/>
+          </a:solidFill>
+          <a:ln>
+            <a:solidFill>
+              <a:srgbClr val="2D3A52"/>
+            </a:solidFill>
+          </a:ln>
+        </p:spPr>
+        <p:style>
+          <a:lnRef idx="1">
+            <a:schemeClr val="accent1"/>
+          </a:lnRef>
+          <a:fillRef idx="3">
+            <a:schemeClr val="accent1"/>
+          </a:fillRef>
+          <a:effectRef idx="2">
+            <a:schemeClr val="accent1"/>
+          </a:effectRef>
+          <a:fontRef idx="minor">
+            <a:schemeClr val="lt1"/>
+          </a:fontRef>
+        </p:style>
+        <p:txBody>
+          <a:bodyPr rtlCol="0" anchor="ctr"/>
+          <a:lstStyle/>
+          <a:p>
+            <a:pPr algn="ctr"/>
+          </a:p>
+        </p:txBody>
+      </p:sp>
+      <p:sp>
+        <p:nvSpPr>
+          <p:cNvPr id="11" name="TextBox 10"/>
+          <p:cNvSpPr txBox="1"/>
+          <p:nvPr/>
+        </p:nvSpPr>
+        <p:spPr>
+          <a:xfrm>
+            <a:off x="8275319" y="1764792"/>
+            <a:ext cx="3108960" cy="320040"/>
+          </a:xfrm>
+          <a:prstGeom prst="rect">
+            <a:avLst/>
+          </a:prstGeom>
+          <a:noFill/>
+        </p:spPr>
+        <p:txBody>
+          <a:bodyPr wrap="square">
+            <a:spAutoFit/>
+          </a:bodyPr>
+          <a:lstStyle/>
+          <a:p>
+            <a:pPr algn="l"/>
+            <a:r>
+              <a:rPr sz="1600" b="1">
+                <a:solidFill>
+                  <a:srgbClr val="2DD4BF"/>
+                </a:solidFill>
+                <a:latin typeface="Aptos"/>
+              </a:rPr>
+              <a:t>Best demo sequence</a:t>
+            </a:r>
+          </a:p>
+        </p:txBody>
+      </p:sp>
+      <p:sp>
+        <p:nvSpPr>
+          <p:cNvPr id="12" name="TextBox 11"/>
+          <p:cNvSpPr txBox="1"/>
+          <p:nvPr/>
+        </p:nvSpPr>
+        <p:spPr>
+          <a:xfrm>
+            <a:off x="8275319" y="2194560"/>
+            <a:ext cx="3108960" cy="2697480"/>
+          </a:xfrm>
+          <a:prstGeom prst="rect">
+            <a:avLst/>
+          </a:prstGeom>
+          <a:noFill/>
+        </p:spPr>
+        <p:txBody>
+          <a:bodyPr wrap="square">
+            <a:spAutoFit/>
+          </a:bodyPr>
+          <a:lstStyle/>
+          <a:p>
+            <a:pPr algn="l"/>
+            <a:r>
+              <a:rPr sz="1200" b="0">
+                <a:solidFill>
+                  <a:srgbClr val="E5EDF7"/>
+                </a:solidFill>
+                <a:latin typeface="Aptos"/>
+              </a:rPr>
+              <a:t>Login as TechNova → ask a warranty question → switch to GreenLeaf → verify TechNova data is invisible → run the IDOR simulator.</a:t>
+            </a:r>
+          </a:p>
+        </p:txBody>
+      </p:sp>
+      <p:sp>
+        <p:nvSpPr>
+          <p:cNvPr id="13" name="TextBox 12"/>
+          <p:cNvSpPr txBox="1"/>
+          <p:nvPr/>
+        </p:nvSpPr>
+        <p:spPr>
+          <a:xfrm>
+            <a:off x="914400" y="5623560"/>
+            <a:ext cx="10241280" cy="320040"/>
+          </a:xfrm>
+          <a:prstGeom prst="rect">
+            <a:avLst/>
+          </a:prstGeom>
+          <a:noFill/>
+        </p:spPr>
+        <p:txBody>
+          <a:bodyPr wrap="square">
+            <a:spAutoFit/>
+          </a:bodyPr>
+          <a:lstStyle/>
+          <a:p>
+            <a:pPr algn="ctr"/>
+            <a:r>
+              <a:rPr sz="1300" b="0">
+                <a:solidFill>
+                  <a:srgbClr val="94A3B8"/>
+                </a:solidFill>
+                <a:latin typeface="Aptos"/>
+              </a:rPr>
+              <a:t>These accounts are presentation fixtures and intentionally remain unchanged by request.</a:t>
+            </a:r>
+          </a:p>
+        </p:txBody>
+      </p:sp>
+    </p:spTree>
+  </p:cSld>
+  <p:clrMapOvr>
+    <a:masterClrMapping/>
+  </p:clrMapOvr>
+</p:sld>
+</file>
+
+<file path=ppt/slides/slide13.xml><?xml version="1.0" encoding="utf-8"?>
+<p:sld xmlns:a="http://schemas.openxmlformats.org/drawingml/2006/main" xmlns:p="http://schemas.openxmlformats.org/presentationml/2006/main" xmlns:r="http://schemas.openxmlformats.org/officeDocument/2006/relationships">
+  <p:cSld>
+    <p:bg>
+      <p:bgPr>
+        <a:solidFill>
+          <a:srgbClr val="0B1120"/>
+        </a:solidFill>
+        <a:effectLst/>
+      </p:bgPr>
+    </p:bg>
+    <p:spTree>
+      <p:nvGrpSpPr>
+        <p:cNvPr id="1" name=""/>
+        <p:cNvGrpSpPr/>
+        <p:nvPr/>
+      </p:nvGrpSpPr>
+      <p:grpSpPr/>
+      <p:sp>
+        <p:nvSpPr>
+          <p:cNvPr id="2" name="TextBox 1"/>
+          <p:cNvSpPr txBox="1"/>
+          <p:nvPr/>
+        </p:nvSpPr>
+        <p:spPr>
+          <a:xfrm>
+            <a:off x="594360" y="411480"/>
+            <a:ext cx="10972800" cy="502920"/>
+          </a:xfrm>
+          <a:prstGeom prst="rect">
+            <a:avLst/>
+          </a:prstGeom>
+          <a:noFill/>
+        </p:spPr>
+        <p:txBody>
+          <a:bodyPr wrap="square">
+            <a:spAutoFit/>
+          </a:bodyPr>
+          <a:lstStyle/>
+          <a:p>
+            <a:pPr algn="l"/>
+            <a:r>
+              <a:rPr sz="2800" b="1">
+                <a:solidFill>
+                  <a:srgbClr val="E5EDF7"/>
+                </a:solidFill>
+                <a:latin typeface="Aptos"/>
+              </a:rPr>
+              <a:t>Deployment and testing</a:t>
+            </a:r>
+          </a:p>
+        </p:txBody>
+      </p:sp>
+      <p:sp>
+        <p:nvSpPr>
+          <p:cNvPr id="3" name="TextBox 2"/>
+          <p:cNvSpPr txBox="1"/>
+          <p:nvPr/>
+        </p:nvSpPr>
+        <p:spPr>
+          <a:xfrm>
+            <a:off x="621792" y="987552"/>
+            <a:ext cx="10789920" cy="320040"/>
+          </a:xfrm>
+          <a:prstGeom prst="rect">
+            <a:avLst/>
+          </a:prstGeom>
+          <a:noFill/>
+        </p:spPr>
+        <p:txBody>
+          <a:bodyPr wrap="square">
+            <a:spAutoFit/>
+          </a:bodyPr>
+          <a:lstStyle/>
+          <a:p>
+            <a:pPr algn="l"/>
+            <a:r>
+              <a:rPr sz="1200" b="0">
+                <a:solidFill>
+                  <a:srgbClr val="94A3B8"/>
+                </a:solidFill>
+                <a:latin typeface="Aptos"/>
+              </a:rPr>
+              <a:t>Move from local proof to a repeatable production setup.</a:t>
+            </a:r>
+          </a:p>
+        </p:txBody>
+      </p:sp>
+      <p:sp>
+        <p:nvSpPr>
+          <p:cNvPr id="4" name="Rounded Rectangle 3"/>
+          <p:cNvSpPr/>
+          <p:nvPr/>
+        </p:nvSpPr>
+        <p:spPr>
+          <a:xfrm>
+            <a:off x="685800" y="1600200"/>
+            <a:ext cx="3474720" cy="3429000"/>
+          </a:xfrm>
+          <a:prstGeom prst="roundRect">
+            <a:avLst/>
+          </a:prstGeom>
+          <a:solidFill>
+            <a:srgbClr val="111A2D"/>
+          </a:solidFill>
+          <a:ln>
+            <a:solidFill>
+              <a:srgbClr val="2D3A52"/>
+            </a:solidFill>
+          </a:ln>
+        </p:spPr>
+        <p:style>
+          <a:lnRef idx="1">
+            <a:schemeClr val="accent1"/>
+          </a:lnRef>
+          <a:fillRef idx="3">
+            <a:schemeClr val="accent1"/>
+          </a:fillRef>
+          <a:effectRef idx="2">
+            <a:schemeClr val="accent1"/>
+          </a:effectRef>
+          <a:fontRef idx="minor">
+            <a:schemeClr val="lt1"/>
+          </a:fontRef>
+        </p:style>
+        <p:txBody>
+          <a:bodyPr rtlCol="0" anchor="ctr"/>
+          <a:lstStyle/>
+          <a:p>
+            <a:pPr algn="ctr"/>
+          </a:p>
+        </p:txBody>
+      </p:sp>
+      <p:sp>
+        <p:nvSpPr>
+          <p:cNvPr id="5" name="TextBox 4"/>
+          <p:cNvSpPr txBox="1"/>
+          <p:nvPr/>
+        </p:nvSpPr>
+        <p:spPr>
+          <a:xfrm>
+            <a:off x="868680" y="1764792"/>
+            <a:ext cx="3108960" cy="320040"/>
+          </a:xfrm>
+          <a:prstGeom prst="rect">
+            <a:avLst/>
+          </a:prstGeom>
+          <a:noFill/>
+        </p:spPr>
+        <p:txBody>
+          <a:bodyPr wrap="square">
+            <a:spAutoFit/>
+          </a:bodyPr>
+          <a:lstStyle/>
+          <a:p>
+            <a:pPr algn="l"/>
+            <a:r>
+              <a:rPr sz="1600" b="1">
+                <a:solidFill>
+                  <a:srgbClr val="2DD4BF"/>
+                </a:solidFill>
+                <a:latin typeface="Aptos"/>
+              </a:rPr>
+              <a:t>Local stack</a:t>
+            </a:r>
+          </a:p>
+        </p:txBody>
+      </p:sp>
+      <p:sp>
+        <p:nvSpPr>
+          <p:cNvPr id="6" name="TextBox 5"/>
+          <p:cNvSpPr txBox="1"/>
+          <p:nvPr/>
+        </p:nvSpPr>
+        <p:spPr>
+          <a:xfrm>
+            <a:off x="868680" y="2194560"/>
+            <a:ext cx="3108960" cy="2697480"/>
+          </a:xfrm>
+          <a:prstGeom prst="rect">
+            <a:avLst/>
+          </a:prstGeom>
+          <a:noFill/>
+        </p:spPr>
+        <p:txBody>
+          <a:bodyPr wrap="square">
+            <a:spAutoFit/>
+          </a:bodyPr>
+          <a:lstStyle/>
+          <a:p>
+            <a:pPr algn="l"/>
+            <a:r>
+              <a:rPr sz="1200" b="0">
+                <a:solidFill>
+                  <a:srgbClr val="E5EDF7"/>
+                </a:solidFill>
+                <a:latin typeface="Aptos"/>
+              </a:rPr>
+              <a:t>Next.js at :3000
+FastAPI at :8001
+SQLite for zero-dependency development
+Pytest for API and isolation checks</a:t>
+            </a:r>
+          </a:p>
+        </p:txBody>
+      </p:sp>
+      <p:sp>
+        <p:nvSpPr>
+          <p:cNvPr id="7" name="Rounded Rectangle 6"/>
+          <p:cNvSpPr/>
+          <p:nvPr/>
+        </p:nvSpPr>
+        <p:spPr>
+          <a:xfrm>
+            <a:off x="4389120" y="1600200"/>
+            <a:ext cx="3474720" cy="3429000"/>
+          </a:xfrm>
+          <a:prstGeom prst="roundRect">
+            <a:avLst/>
+          </a:prstGeom>
+          <a:solidFill>
+            <a:srgbClr val="111A2D"/>
+          </a:solidFill>
+          <a:ln>
+            <a:solidFill>
+              <a:srgbClr val="2D3A52"/>
+            </a:solidFill>
+          </a:ln>
+        </p:spPr>
+        <p:style>
+          <a:lnRef idx="1">
+            <a:schemeClr val="accent1"/>
+          </a:lnRef>
+          <a:fillRef idx="3">
+            <a:schemeClr val="accent1"/>
+          </a:fillRef>
+          <a:effectRef idx="2">
+            <a:schemeClr val="accent1"/>
+          </a:effectRef>
+          <a:fontRef idx="minor">
+            <a:schemeClr val="lt1"/>
+          </a:fontRef>
+        </p:style>
+        <p:txBody>
+          <a:bodyPr rtlCol="0" anchor="ctr"/>
+          <a:lstStyle/>
+          <a:p>
+            <a:pPr algn="ctr"/>
+          </a:p>
+        </p:txBody>
+      </p:sp>
+      <p:sp>
+        <p:nvSpPr>
+          <p:cNvPr id="8" name="TextBox 7"/>
+          <p:cNvSpPr txBox="1"/>
+          <p:nvPr/>
+        </p:nvSpPr>
+        <p:spPr>
+          <a:xfrm>
+            <a:off x="4572000" y="1764792"/>
+            <a:ext cx="3108960" cy="320040"/>
+          </a:xfrm>
+          <a:prstGeom prst="rect">
+            <a:avLst/>
+          </a:prstGeom>
+          <a:noFill/>
+        </p:spPr>
+        <p:txBody>
+          <a:bodyPr wrap="square">
+            <a:spAutoFit/>
+          </a:bodyPr>
+          <a:lstStyle/>
+          <a:p>
+            <a:pPr algn="l"/>
+            <a:r>
+              <a:rPr sz="1600" b="1">
+                <a:solidFill>
+                  <a:srgbClr val="2DD4BF"/>
+                </a:solidFill>
+                <a:latin typeface="Aptos"/>
+              </a:rPr>
+              <a:t>Production shape</a:t>
+            </a:r>
+          </a:p>
+        </p:txBody>
+      </p:sp>
+      <p:sp>
+        <p:nvSpPr>
+          <p:cNvPr id="9" name="TextBox 8"/>
+          <p:cNvSpPr txBox="1"/>
+          <p:nvPr/>
+        </p:nvSpPr>
+        <p:spPr>
+          <a:xfrm>
+            <a:off x="4572000" y="2194560"/>
+            <a:ext cx="3108960" cy="2697480"/>
+          </a:xfrm>
+          <a:prstGeom prst="rect">
+            <a:avLst/>
+          </a:prstGeom>
+          <a:noFill/>
+        </p:spPr>
+        <p:txBody>
+          <a:bodyPr wrap="square">
+            <a:spAutoFit/>
+          </a:bodyPr>
+          <a:lstStyle/>
+          <a:p>
+            <a:pPr algn="l"/>
+            <a:r>
+              <a:rPr sz="1200" b="0">
+                <a:solidFill>
+                  <a:srgbClr val="E5EDF7"/>
+                </a:solidFill>
+                <a:latin typeface="Aptos"/>
+              </a:rPr>
+              <a:t>Render frontend + backend
+Managed PostgreSQL/pgvector
+SMTP provider
+Persistent object storage
+Environment-managed secrets</a:t>
+            </a:r>
+          </a:p>
+        </p:txBody>
+      </p:sp>
+      <p:sp>
+        <p:nvSpPr>
+          <p:cNvPr id="10" name="Rounded Rectangle 9"/>
+          <p:cNvSpPr/>
+          <p:nvPr/>
+        </p:nvSpPr>
+        <p:spPr>
+          <a:xfrm>
+            <a:off x="8092440" y="1600200"/>
+            <a:ext cx="3474720" cy="3429000"/>
+          </a:xfrm>
+          <a:prstGeom prst="roundRect">
+            <a:avLst/>
+          </a:prstGeom>
+          <a:solidFill>
+            <a:srgbClr val="111A2D"/>
+          </a:solidFill>
+          <a:ln>
+            <a:solidFill>
+              <a:srgbClr val="2D3A52"/>
+            </a:solidFill>
+          </a:ln>
+        </p:spPr>
+        <p:style>
+          <a:lnRef idx="1">
+            <a:schemeClr val="accent1"/>
+          </a:lnRef>
+          <a:fillRef idx="3">
+            <a:schemeClr val="accent1"/>
+          </a:fillRef>
+          <a:effectRef idx="2">
+            <a:schemeClr val="accent1"/>
+          </a:effectRef>
+          <a:fontRef idx="minor">
+            <a:schemeClr val="lt1"/>
+          </a:fontRef>
+        </p:style>
+        <p:txBody>
+          <a:bodyPr rtlCol="0" anchor="ctr"/>
+          <a:lstStyle/>
+          <a:p>
+            <a:pPr algn="ctr"/>
+          </a:p>
+        </p:txBody>
+      </p:sp>
+      <p:sp>
+        <p:nvSpPr>
+          <p:cNvPr id="11" name="TextBox 10"/>
+          <p:cNvSpPr txBox="1"/>
+          <p:nvPr/>
+        </p:nvSpPr>
+        <p:spPr>
+          <a:xfrm>
+            <a:off x="8275319" y="1764792"/>
+            <a:ext cx="3108960" cy="320040"/>
+          </a:xfrm>
+          <a:prstGeom prst="rect">
+            <a:avLst/>
+          </a:prstGeom>
+          <a:noFill/>
+        </p:spPr>
+        <p:txBody>
+          <a:bodyPr wrap="square">
+            <a:spAutoFit/>
+          </a:bodyPr>
+          <a:lstStyle/>
+          <a:p>
+            <a:pPr algn="l"/>
+            <a:r>
+              <a:rPr sz="1600" b="1">
+                <a:solidFill>
+                  <a:srgbClr val="2DD4BF"/>
+                </a:solidFill>
+                <a:latin typeface="Aptos"/>
+              </a:rPr>
+              <a:t>Release gates</a:t>
+            </a:r>
+          </a:p>
+        </p:txBody>
+      </p:sp>
+      <p:sp>
+        <p:nvSpPr>
+          <p:cNvPr id="12" name="TextBox 11"/>
+          <p:cNvSpPr txBox="1"/>
+          <p:nvPr/>
+        </p:nvSpPr>
+        <p:spPr>
+          <a:xfrm>
+            <a:off x="8275319" y="2194560"/>
+            <a:ext cx="3108960" cy="2697480"/>
+          </a:xfrm>
+          <a:prstGeom prst="rect">
+            <a:avLst/>
+          </a:prstGeom>
+          <a:noFill/>
+        </p:spPr>
+        <p:txBody>
+          <a:bodyPr wrap="square">
+            <a:spAutoFit/>
+          </a:bodyPr>
+          <a:lstStyle/>
+          <a:p>
+            <a:pPr algn="l"/>
+            <a:r>
+              <a:rPr sz="1200" b="0">
+                <a:solidFill>
+                  <a:srgbClr val="E5EDF7"/>
+                </a:solidFill>
+                <a:latin typeface="Aptos"/>
+              </a:rPr>
+              <a:t>Health endpoint
+Strict CORS
+No development reload
+Registration and OTP test
+Tenant isolation regression test</a:t>
+            </a:r>
+          </a:p>
+        </p:txBody>
+      </p:sp>
+    </p:spTree>
+  </p:cSld>
+  <p:clrMapOvr>
+    <a:masterClrMapping/>
+  </p:clrMapOvr>
+</p:sld>
+</file>
+
+<file path=ppt/slides/slide14.xml><?xml version="1.0" encoding="utf-8"?>
+<p:sld xmlns:a="http://schemas.openxmlformats.org/drawingml/2006/main" xmlns:p="http://schemas.openxmlformats.org/presentationml/2006/main" xmlns:r="http://schemas.openxmlformats.org/officeDocument/2006/relationships">
+  <p:cSld>
+    <p:bg>
+      <p:bgPr>
+        <a:solidFill>
+          <a:srgbClr val="0B1120"/>
+        </a:solidFill>
+        <a:effectLst/>
+      </p:bgPr>
+    </p:bg>
+    <p:spTree>
+      <p:nvGrpSpPr>
+        <p:cNvPr id="1" name=""/>
+        <p:cNvGrpSpPr/>
+        <p:nvPr/>
+      </p:nvGrpSpPr>
+      <p:grpSpPr/>
+      <p:sp>
+        <p:nvSpPr>
+          <p:cNvPr id="2" name="TextBox 1"/>
+          <p:cNvSpPr txBox="1"/>
+          <p:nvPr/>
+        </p:nvSpPr>
+        <p:spPr>
+          <a:xfrm>
+            <a:off x="594360" y="411480"/>
+            <a:ext cx="10972800" cy="502920"/>
+          </a:xfrm>
+          <a:prstGeom prst="rect">
+            <a:avLst/>
+          </a:prstGeom>
+          <a:noFill/>
+        </p:spPr>
+        <p:txBody>
+          <a:bodyPr wrap="square">
+            <a:spAutoFit/>
+          </a:bodyPr>
+          <a:lstStyle/>
+          <a:p>
+            <a:pPr algn="l"/>
+            <a:r>
+              <a:rPr sz="2800" b="1">
+                <a:solidFill>
+                  <a:srgbClr val="E5EDF7"/>
+                </a:solidFill>
+                <a:latin typeface="Aptos"/>
+              </a:rPr>
+              <a:t>API and observability</a:t>
+            </a:r>
+          </a:p>
+        </p:txBody>
+      </p:sp>
+      <p:sp>
+        <p:nvSpPr>
+          <p:cNvPr id="3" name="TextBox 2"/>
+          <p:cNvSpPr txBox="1"/>
+          <p:nvPr/>
+        </p:nvSpPr>
+        <p:spPr>
+          <a:xfrm>
+            <a:off x="621792" y="987552"/>
+            <a:ext cx="10789920" cy="320040"/>
+          </a:xfrm>
+          <a:prstGeom prst="rect">
+            <a:avLst/>
+          </a:prstGeom>
+          <a:noFill/>
+        </p:spPr>
+        <p:txBody>
+          <a:bodyPr wrap="square">
+            <a:spAutoFit/>
+          </a:bodyPr>
+          <a:lstStyle/>
+          <a:p>
+            <a:pPr algn="l"/>
+            <a:r>
+              <a:rPr sz="1200" b="0">
+                <a:solidFill>
+                  <a:srgbClr val="94A3B8"/>
+                </a:solidFill>
+                <a:latin typeface="Aptos"/>
+              </a:rPr>
+              <a:t>The platform exposes clear boundaries for UI, integrations, and operators.</a:t>
+            </a:r>
+          </a:p>
+        </p:txBody>
+      </p:sp>
+      <p:sp>
+        <p:nvSpPr>
+          <p:cNvPr id="4" name="Rounded Rectangle 3"/>
+          <p:cNvSpPr/>
+          <p:nvPr/>
+        </p:nvSpPr>
+        <p:spPr>
+          <a:xfrm>
+            <a:off x="685800" y="1600200"/>
+            <a:ext cx="3474720" cy="3474720"/>
+          </a:xfrm>
+          <a:prstGeom prst="roundRect">
+            <a:avLst/>
+          </a:prstGeom>
+          <a:solidFill>
+            <a:srgbClr val="111A2D"/>
+          </a:solidFill>
+          <a:ln>
+            <a:solidFill>
+              <a:srgbClr val="2D3A52"/>
+            </a:solidFill>
+          </a:ln>
+        </p:spPr>
+        <p:style>
+          <a:lnRef idx="1">
+            <a:schemeClr val="accent1"/>
+          </a:lnRef>
+          <a:fillRef idx="3">
+            <a:schemeClr val="accent1"/>
+          </a:fillRef>
+          <a:effectRef idx="2">
+            <a:schemeClr val="accent1"/>
+          </a:effectRef>
+          <a:fontRef idx="minor">
+            <a:schemeClr val="lt1"/>
+          </a:fontRef>
+        </p:style>
+        <p:txBody>
+          <a:bodyPr rtlCol="0" anchor="ctr"/>
+          <a:lstStyle/>
+          <a:p>
+            <a:pPr algn="ctr"/>
+          </a:p>
+        </p:txBody>
+      </p:sp>
+      <p:sp>
+        <p:nvSpPr>
+          <p:cNvPr id="5" name="TextBox 4"/>
+          <p:cNvSpPr txBox="1"/>
+          <p:nvPr/>
+        </p:nvSpPr>
+        <p:spPr>
+          <a:xfrm>
+            <a:off x="868680" y="1764792"/>
+            <a:ext cx="3108960" cy="320040"/>
+          </a:xfrm>
+          <a:prstGeom prst="rect">
+            <a:avLst/>
+          </a:prstGeom>
+          <a:noFill/>
+        </p:spPr>
+        <p:txBody>
+          <a:bodyPr wrap="square">
+            <a:spAutoFit/>
+          </a:bodyPr>
+          <a:lstStyle/>
+          <a:p>
+            <a:pPr algn="l"/>
+            <a:r>
+              <a:rPr sz="1600" b="1">
+                <a:solidFill>
+                  <a:srgbClr val="2DD4BF"/>
+                </a:solidFill>
+                <a:latin typeface="Aptos"/>
+              </a:rPr>
+              <a:t>Auth APIs</a:t>
+            </a:r>
+          </a:p>
+        </p:txBody>
+      </p:sp>
+      <p:sp>
+        <p:nvSpPr>
+          <p:cNvPr id="6" name="TextBox 5"/>
+          <p:cNvSpPr txBox="1"/>
+          <p:nvPr/>
+        </p:nvSpPr>
+        <p:spPr>
+          <a:xfrm>
+            <a:off x="868680" y="2194560"/>
+            <a:ext cx="3108960" cy="2743200"/>
+          </a:xfrm>
+          <a:prstGeom prst="rect">
+            <a:avLst/>
+          </a:prstGeom>
+          <a:noFill/>
+        </p:spPr>
+        <p:txBody>
+          <a:bodyPr wrap="square">
+            <a:spAutoFit/>
+          </a:bodyPr>
+          <a:lstStyle/>
+          <a:p>
+            <a:pPr algn="l"/>
+            <a:r>
+              <a:rPr sz="1200" b="0">
+                <a:solidFill>
+                  <a:srgbClr val="E5EDF7"/>
+                </a:solidFill>
+                <a:latin typeface="Aptos"/>
+              </a:rPr>
+              <a:t>register
+verify-email
+resend-verification
+login
+me</a:t>
+            </a:r>
+          </a:p>
+        </p:txBody>
+      </p:sp>
+      <p:sp>
+        <p:nvSpPr>
+          <p:cNvPr id="7" name="Rounded Rectangle 6"/>
+          <p:cNvSpPr/>
+          <p:nvPr/>
+        </p:nvSpPr>
+        <p:spPr>
+          <a:xfrm>
+            <a:off x="4389120" y="1600200"/>
+            <a:ext cx="3474720" cy="3474720"/>
+          </a:xfrm>
+          <a:prstGeom prst="roundRect">
+            <a:avLst/>
+          </a:prstGeom>
+          <a:solidFill>
+            <a:srgbClr val="111A2D"/>
+          </a:solidFill>
+          <a:ln>
+            <a:solidFill>
+              <a:srgbClr val="2D3A52"/>
+            </a:solidFill>
+          </a:ln>
+        </p:spPr>
+        <p:style>
+          <a:lnRef idx="1">
+            <a:schemeClr val="accent1"/>
+          </a:lnRef>
+          <a:fillRef idx="3">
+            <a:schemeClr val="accent1"/>
+          </a:fillRef>
+          <a:effectRef idx="2">
+            <a:schemeClr val="accent1"/>
+          </a:effectRef>
+          <a:fontRef idx="minor">
+            <a:schemeClr val="lt1"/>
+          </a:fontRef>
+        </p:style>
+        <p:txBody>
+          <a:bodyPr rtlCol="0" anchor="ctr"/>
+          <a:lstStyle/>
+          <a:p>
+            <a:pPr algn="ctr"/>
+          </a:p>
+        </p:txBody>
+      </p:sp>
+      <p:sp>
+        <p:nvSpPr>
+          <p:cNvPr id="8" name="TextBox 7"/>
+          <p:cNvSpPr txBox="1"/>
+          <p:nvPr/>
+        </p:nvSpPr>
+        <p:spPr>
+          <a:xfrm>
+            <a:off x="4572000" y="1764792"/>
+            <a:ext cx="3108960" cy="320040"/>
+          </a:xfrm>
+          <a:prstGeom prst="rect">
+            <a:avLst/>
+          </a:prstGeom>
+          <a:noFill/>
+        </p:spPr>
+        <p:txBody>
+          <a:bodyPr wrap="square">
+            <a:spAutoFit/>
+          </a:bodyPr>
+          <a:lstStyle/>
+          <a:p>
+            <a:pPr algn="l"/>
+            <a:r>
+              <a:rPr sz="1600" b="1">
+                <a:solidFill>
+                  <a:srgbClr val="2DD4BF"/>
+                </a:solidFill>
+                <a:latin typeface="Aptos"/>
+              </a:rPr>
+              <a:t>Knowledge APIs</a:t>
+            </a:r>
+          </a:p>
+        </p:txBody>
+      </p:sp>
+      <p:sp>
+        <p:nvSpPr>
+          <p:cNvPr id="9" name="TextBox 8"/>
+          <p:cNvSpPr txBox="1"/>
+          <p:nvPr/>
+        </p:nvSpPr>
+        <p:spPr>
+          <a:xfrm>
+            <a:off x="4572000" y="2194560"/>
+            <a:ext cx="3108960" cy="2743200"/>
+          </a:xfrm>
+          <a:prstGeom prst="rect">
+            <a:avLst/>
+          </a:prstGeom>
+          <a:noFill/>
+        </p:spPr>
+        <p:txBody>
+          <a:bodyPr wrap="square">
+            <a:spAutoFit/>
+          </a:bodyPr>
+          <a:lstStyle/>
+          <a:p>
+            <a:pPr algn="l"/>
+            <a:r>
+              <a:rPr sz="1200" b="0">
+                <a:solidFill>
+                  <a:srgbClr val="E5EDF7"/>
+                </a:solidFill>
+                <a:latin typeface="Aptos"/>
+              </a:rPr>
+              <a:t>documents
+upload
+inspect/delete document
+chat message
+conversation history</a:t>
+            </a:r>
+          </a:p>
+        </p:txBody>
+      </p:sp>
+      <p:sp>
+        <p:nvSpPr>
+          <p:cNvPr id="10" name="Rounded Rectangle 9"/>
+          <p:cNvSpPr/>
+          <p:nvPr/>
+        </p:nvSpPr>
+        <p:spPr>
+          <a:xfrm>
+            <a:off x="8092440" y="1600200"/>
+            <a:ext cx="3474720" cy="3474720"/>
+          </a:xfrm>
+          <a:prstGeom prst="roundRect">
+            <a:avLst/>
+          </a:prstGeom>
+          <a:solidFill>
+            <a:srgbClr val="111A2D"/>
+          </a:solidFill>
+          <a:ln>
+            <a:solidFill>
+              <a:srgbClr val="2D3A52"/>
+            </a:solidFill>
+          </a:ln>
+        </p:spPr>
+        <p:style>
+          <a:lnRef idx="1">
+            <a:schemeClr val="accent1"/>
+          </a:lnRef>
+          <a:fillRef idx="3">
+            <a:schemeClr val="accent1"/>
+          </a:fillRef>
+          <a:effectRef idx="2">
+            <a:schemeClr val="accent1"/>
+          </a:effectRef>
+          <a:fontRef idx="minor">
+            <a:schemeClr val="lt1"/>
+          </a:fontRef>
+        </p:style>
+        <p:txBody>
+          <a:bodyPr rtlCol="0" anchor="ctr"/>
+          <a:lstStyle/>
+          <a:p>
+            <a:pPr algn="ctr"/>
+          </a:p>
+        </p:txBody>
+      </p:sp>
+      <p:sp>
+        <p:nvSpPr>
+          <p:cNvPr id="11" name="TextBox 10"/>
+          <p:cNvSpPr txBox="1"/>
+          <p:nvPr/>
+        </p:nvSpPr>
+        <p:spPr>
+          <a:xfrm>
+            <a:off x="8275319" y="1764792"/>
+            <a:ext cx="3108960" cy="320040"/>
+          </a:xfrm>
+          <a:prstGeom prst="rect">
+            <a:avLst/>
+          </a:prstGeom>
+          <a:noFill/>
+        </p:spPr>
+        <p:txBody>
+          <a:bodyPr wrap="square">
+            <a:spAutoFit/>
+          </a:bodyPr>
+          <a:lstStyle/>
+          <a:p>
+            <a:pPr algn="l"/>
+            <a:r>
+              <a:rPr sz="1600" b="1">
+                <a:solidFill>
+                  <a:srgbClr val="2DD4BF"/>
+                </a:solidFill>
+                <a:latin typeface="Aptos"/>
+              </a:rPr>
+              <a:t>Operator APIs</a:t>
+            </a:r>
+          </a:p>
+        </p:txBody>
+      </p:sp>
+      <p:sp>
+        <p:nvSpPr>
+          <p:cNvPr id="12" name="TextBox 11"/>
+          <p:cNvSpPr txBox="1"/>
+          <p:nvPr/>
+        </p:nvSpPr>
+        <p:spPr>
+          <a:xfrm>
+            <a:off x="8275319" y="2194560"/>
+            <a:ext cx="3108960" cy="2743200"/>
+          </a:xfrm>
+          <a:prstGeom prst="rect">
+            <a:avLst/>
+          </a:prstGeom>
+          <a:noFill/>
+        </p:spPr>
+        <p:txBody>
+          <a:bodyPr wrap="square">
+            <a:spAutoFit/>
+          </a:bodyPr>
+          <a:lstStyle/>
+          <a:p>
+            <a:pPr algn="l"/>
+            <a:r>
+              <a:rPr sz="1200" b="0">
+                <a:solidFill>
+                  <a:srgbClr val="E5EDF7"/>
+                </a:solidFill>
+                <a:latin typeface="Aptos"/>
+              </a:rPr>
+              <a:t>logs and telemetry
+admin stats
+tenant summaries
+provision tenants
+security simulation</a:t>
+            </a:r>
+          </a:p>
+        </p:txBody>
+      </p:sp>
+      <p:sp>
+        <p:nvSpPr>
+          <p:cNvPr id="13" name="TextBox 12"/>
+          <p:cNvSpPr txBox="1"/>
+          <p:nvPr/>
+        </p:nvSpPr>
+        <p:spPr>
+          <a:xfrm>
+            <a:off x="868680" y="5623560"/>
+            <a:ext cx="10424160" cy="320040"/>
+          </a:xfrm>
+          <a:prstGeom prst="rect">
+            <a:avLst/>
+          </a:prstGeom>
+          <a:noFill/>
+        </p:spPr>
+        <p:txBody>
+          <a:bodyPr wrap="square">
+            <a:spAutoFit/>
+          </a:bodyPr>
+          <a:lstStyle/>
+          <a:p>
+            <a:pPr algn="ctr"/>
+            <a:r>
+              <a:rPr sz="1400" b="0">
+                <a:solidFill>
+                  <a:srgbClr val="2DD4BF"/>
+                </a:solidFill>
+                <a:latin typeface="Aptos"/>
+              </a:rPr>
+              <a:t>Every sensitive operation is measurable: actor, tenant, action, outcome, latency, and resource context.</a:t>
+            </a:r>
+          </a:p>
+        </p:txBody>
+      </p:sp>
+    </p:spTree>
+  </p:cSld>
+  <p:clrMapOvr>
+    <a:masterClrMapping/>
+  </p:clrMapOvr>
+</p:sld>
+</file>
+
+<file path=ppt/slides/slide15.xml><?xml version="1.0" encoding="utf-8"?>
+<p:sld xmlns:a="http://schemas.openxmlformats.org/drawingml/2006/main" xmlns:p="http://schemas.openxmlformats.org/presentationml/2006/main" xmlns:r="http://schemas.openxmlformats.org/officeDocument/2006/relationships">
+  <p:cSld>
+    <p:bg>
+      <p:bgPr>
+        <a:solidFill>
+          <a:srgbClr val="0B1120"/>
+        </a:solidFill>
+        <a:effectLst/>
+      </p:bgPr>
+    </p:bg>
+    <p:spTree>
+      <p:nvGrpSpPr>
+        <p:cNvPr id="1" name=""/>
+        <p:cNvGrpSpPr/>
+        <p:nvPr/>
+      </p:nvGrpSpPr>
+      <p:grpSpPr/>
+      <p:sp>
+        <p:nvSpPr>
+          <p:cNvPr id="2" name="TextBox 1"/>
+          <p:cNvSpPr txBox="1"/>
+          <p:nvPr/>
+        </p:nvSpPr>
+        <p:spPr>
+          <a:xfrm>
+            <a:off x="594360" y="411480"/>
+            <a:ext cx="10972800" cy="502920"/>
+          </a:xfrm>
+          <a:prstGeom prst="rect">
+            <a:avLst/>
+          </a:prstGeom>
+          <a:noFill/>
+        </p:spPr>
+        <p:txBody>
+          <a:bodyPr wrap="square">
+            <a:spAutoFit/>
+          </a:bodyPr>
+          <a:lstStyle/>
+          <a:p>
+            <a:pPr algn="l"/>
+            <a:r>
+              <a:rPr sz="2800" b="1">
+                <a:solidFill>
+                  <a:srgbClr val="E5EDF7"/>
+                </a:solidFill>
+                <a:latin typeface="Aptos"/>
+              </a:rPr>
+              <a:t>Evaluation snapshot</a:t>
+            </a:r>
+          </a:p>
+        </p:txBody>
+      </p:sp>
+      <p:sp>
+        <p:nvSpPr>
+          <p:cNvPr id="3" name="TextBox 2"/>
+          <p:cNvSpPr txBox="1"/>
+          <p:nvPr/>
+        </p:nvSpPr>
+        <p:spPr>
+          <a:xfrm>
+            <a:off x="621792" y="987552"/>
+            <a:ext cx="10789920" cy="320040"/>
+          </a:xfrm>
+          <a:prstGeom prst="rect">
+            <a:avLst/>
+          </a:prstGeom>
+          <a:noFill/>
+        </p:spPr>
+        <p:txBody>
+          <a:bodyPr wrap="square">
+            <a:spAutoFit/>
+          </a:bodyPr>
+          <a:lstStyle/>
+          <a:p>
+            <a:pPr algn="l"/>
+            <a:r>
+              <a:rPr sz="1200" b="0">
+                <a:solidFill>
+                  <a:srgbClr val="94A3B8"/>
+                </a:solidFill>
+                <a:latin typeface="Aptos"/>
+              </a:rPr>
+              <a:t>How the implementation maps to a jury rubric.</a:t>
+            </a:r>
+          </a:p>
+        </p:txBody>
+      </p:sp>
+      <p:sp>
+        <p:nvSpPr>
+          <p:cNvPr id="4" name="Rounded Rectangle 3"/>
+          <p:cNvSpPr/>
+          <p:nvPr/>
+        </p:nvSpPr>
+        <p:spPr>
+          <a:xfrm>
+            <a:off x="685800" y="1600200"/>
+            <a:ext cx="3474720" cy="3520440"/>
+          </a:xfrm>
+          <a:prstGeom prst="roundRect">
+            <a:avLst/>
+          </a:prstGeom>
+          <a:solidFill>
+            <a:srgbClr val="111A2D"/>
+          </a:solidFill>
+          <a:ln>
+            <a:solidFill>
+              <a:srgbClr val="2D3A52"/>
+            </a:solidFill>
+          </a:ln>
+        </p:spPr>
+        <p:style>
+          <a:lnRef idx="1">
+            <a:schemeClr val="accent1"/>
+          </a:lnRef>
+          <a:fillRef idx="3">
+            <a:schemeClr val="accent1"/>
+          </a:fillRef>
+          <a:effectRef idx="2">
+            <a:schemeClr val="accent1"/>
+          </a:effectRef>
+          <a:fontRef idx="minor">
+            <a:schemeClr val="lt1"/>
+          </a:fontRef>
+        </p:style>
+        <p:txBody>
+          <a:bodyPr rtlCol="0" anchor="ctr"/>
+          <a:lstStyle/>
+          <a:p>
+            <a:pPr algn="ctr"/>
+          </a:p>
+        </p:txBody>
+      </p:sp>
+      <p:sp>
+        <p:nvSpPr>
+          <p:cNvPr id="5" name="TextBox 4"/>
+          <p:cNvSpPr txBox="1"/>
+          <p:nvPr/>
+        </p:nvSpPr>
+        <p:spPr>
+          <a:xfrm>
+            <a:off x="868680" y="1764792"/>
+            <a:ext cx="3108960" cy="320040"/>
+          </a:xfrm>
+          <a:prstGeom prst="rect">
+            <a:avLst/>
+          </a:prstGeom>
+          <a:noFill/>
+        </p:spPr>
+        <p:txBody>
+          <a:bodyPr wrap="square">
+            <a:spAutoFit/>
+          </a:bodyPr>
+          <a:lstStyle/>
+          <a:p>
+            <a:pPr algn="l"/>
+            <a:r>
+              <a:rPr sz="1600" b="1">
+                <a:solidFill>
+                  <a:srgbClr val="2DD4BF"/>
+                </a:solidFill>
+                <a:latin typeface="Aptos"/>
+              </a:rPr>
+              <a:t>Working MVP</a:t>
+            </a:r>
+          </a:p>
+        </p:txBody>
+      </p:sp>
+      <p:sp>
+        <p:nvSpPr>
+          <p:cNvPr id="6" name="TextBox 5"/>
+          <p:cNvSpPr txBox="1"/>
+          <p:nvPr/>
+        </p:nvSpPr>
+        <p:spPr>
+          <a:xfrm>
+            <a:off x="868680" y="2194560"/>
+            <a:ext cx="3108960" cy="2788920"/>
+          </a:xfrm>
+          <a:prstGeom prst="rect">
+            <a:avLst/>
+          </a:prstGeom>
+          <a:noFill/>
+        </p:spPr>
+        <p:txBody>
+          <a:bodyPr wrap="square">
+            <a:spAutoFit/>
+          </a:bodyPr>
+          <a:lstStyle/>
+          <a:p>
+            <a:pPr algn="l"/>
+            <a:r>
+              <a:rPr sz="1200" b="0">
+                <a:solidFill>
+                  <a:srgbClr val="E5EDF7"/>
+                </a:solidFill>
+                <a:latin typeface="Aptos"/>
+              </a:rPr>
+              <a:t>Authentication, document upload, RAG chat, citations, tenant dashboards, logs, and an interactive security demo.</a:t>
+            </a:r>
+          </a:p>
+        </p:txBody>
+      </p:sp>
+      <p:sp>
+        <p:nvSpPr>
+          <p:cNvPr id="7" name="Rounded Rectangle 6"/>
+          <p:cNvSpPr/>
+          <p:nvPr/>
+        </p:nvSpPr>
+        <p:spPr>
+          <a:xfrm>
+            <a:off x="4389120" y="1600200"/>
+            <a:ext cx="3474720" cy="3520440"/>
+          </a:xfrm>
+          <a:prstGeom prst="roundRect">
+            <a:avLst/>
+          </a:prstGeom>
+          <a:solidFill>
+            <a:srgbClr val="111A2D"/>
+          </a:solidFill>
+          <a:ln>
+            <a:solidFill>
+              <a:srgbClr val="2D3A52"/>
+            </a:solidFill>
+          </a:ln>
+        </p:spPr>
+        <p:style>
+          <a:lnRef idx="1">
+            <a:schemeClr val="accent1"/>
+          </a:lnRef>
+          <a:fillRef idx="3">
+            <a:schemeClr val="accent1"/>
+          </a:fillRef>
+          <a:effectRef idx="2">
+            <a:schemeClr val="accent1"/>
+          </a:effectRef>
+          <a:fontRef idx="minor">
+            <a:schemeClr val="lt1"/>
+          </a:fontRef>
+        </p:style>
+        <p:txBody>
+          <a:bodyPr rtlCol="0" anchor="ctr"/>
+          <a:lstStyle/>
+          <a:p>
+            <a:pPr algn="ctr"/>
+          </a:p>
+        </p:txBody>
+      </p:sp>
+      <p:sp>
+        <p:nvSpPr>
+          <p:cNvPr id="8" name="TextBox 7"/>
+          <p:cNvSpPr txBox="1"/>
+          <p:nvPr/>
+        </p:nvSpPr>
+        <p:spPr>
+          <a:xfrm>
+            <a:off x="4572000" y="1764792"/>
+            <a:ext cx="3108960" cy="320040"/>
+          </a:xfrm>
+          <a:prstGeom prst="rect">
+            <a:avLst/>
+          </a:prstGeom>
+          <a:noFill/>
+        </p:spPr>
+        <p:txBody>
+          <a:bodyPr wrap="square">
+            <a:spAutoFit/>
+          </a:bodyPr>
+          <a:lstStyle/>
+          <a:p>
+            <a:pPr algn="l"/>
+            <a:r>
+              <a:rPr sz="1600" b="1">
+                <a:solidFill>
+                  <a:srgbClr val="2DD4BF"/>
+                </a:solidFill>
+                <a:latin typeface="Aptos"/>
+              </a:rPr>
+              <a:t>Differentiation</a:t>
+            </a:r>
+          </a:p>
+        </p:txBody>
+      </p:sp>
+      <p:sp>
+        <p:nvSpPr>
+          <p:cNvPr id="9" name="TextBox 8"/>
+          <p:cNvSpPr txBox="1"/>
+          <p:nvPr/>
+        </p:nvSpPr>
+        <p:spPr>
+          <a:xfrm>
+            <a:off x="4572000" y="2194560"/>
+            <a:ext cx="3108960" cy="2788920"/>
+          </a:xfrm>
+          <a:prstGeom prst="rect">
+            <a:avLst/>
+          </a:prstGeom>
+          <a:noFill/>
+        </p:spPr>
+        <p:txBody>
+          <a:bodyPr wrap="square">
+            <a:spAutoFit/>
+          </a:bodyPr>
+          <a:lstStyle/>
+          <a:p>
+            <a:pPr algn="l"/>
+            <a:r>
+              <a:rPr sz="1200" b="0">
+                <a:solidFill>
+                  <a:srgbClr val="E5EDF7"/>
+                </a:solidFill>
+                <a:latin typeface="Aptos"/>
+              </a:rPr>
+              <a:t>Security is visible and testable: out-of-domain refusal, tenant-scoped retrieval, 404 IDOR protection, and audit evidence.</a:t>
+            </a:r>
+          </a:p>
+        </p:txBody>
+      </p:sp>
+      <p:sp>
+        <p:nvSpPr>
+          <p:cNvPr id="10" name="Rounded Rectangle 9"/>
+          <p:cNvSpPr/>
+          <p:nvPr/>
+        </p:nvSpPr>
+        <p:spPr>
+          <a:xfrm>
+            <a:off x="8092440" y="1600200"/>
+            <a:ext cx="3474720" cy="3520440"/>
+          </a:xfrm>
+          <a:prstGeom prst="roundRect">
+            <a:avLst/>
+          </a:prstGeom>
+          <a:solidFill>
+            <a:srgbClr val="111A2D"/>
+          </a:solidFill>
+          <a:ln>
+            <a:solidFill>
+              <a:srgbClr val="2D3A52"/>
+            </a:solidFill>
+          </a:ln>
+        </p:spPr>
+        <p:style>
+          <a:lnRef idx="1">
+            <a:schemeClr val="accent1"/>
+          </a:lnRef>
+          <a:fillRef idx="3">
+            <a:schemeClr val="accent1"/>
+          </a:fillRef>
+          <a:effectRef idx="2">
+            <a:schemeClr val="accent1"/>
+          </a:effectRef>
+          <a:fontRef idx="minor">
+            <a:schemeClr val="lt1"/>
+          </a:fontRef>
+        </p:style>
+        <p:txBody>
+          <a:bodyPr rtlCol="0" anchor="ctr"/>
+          <a:lstStyle/>
+          <a:p>
+            <a:pPr algn="ctr"/>
+          </a:p>
+        </p:txBody>
+      </p:sp>
+      <p:sp>
+        <p:nvSpPr>
+          <p:cNvPr id="11" name="TextBox 10"/>
+          <p:cNvSpPr txBox="1"/>
+          <p:nvPr/>
+        </p:nvSpPr>
+        <p:spPr>
+          <a:xfrm>
+            <a:off x="8275319" y="1764792"/>
+            <a:ext cx="3108960" cy="320040"/>
+          </a:xfrm>
+          <a:prstGeom prst="rect">
+            <a:avLst/>
+          </a:prstGeom>
+          <a:noFill/>
+        </p:spPr>
+        <p:txBody>
+          <a:bodyPr wrap="square">
+            <a:spAutoFit/>
+          </a:bodyPr>
+          <a:lstStyle/>
+          <a:p>
+            <a:pPr algn="l"/>
+            <a:r>
+              <a:rPr sz="1600" b="1">
+                <a:solidFill>
+                  <a:srgbClr val="2DD4BF"/>
+                </a:solidFill>
+                <a:latin typeface="Aptos"/>
+              </a:rPr>
+              <a:t>Business value</a:t>
+            </a:r>
+          </a:p>
+        </p:txBody>
+      </p:sp>
+      <p:sp>
+        <p:nvSpPr>
+          <p:cNvPr id="12" name="TextBox 11"/>
+          <p:cNvSpPr txBox="1"/>
+          <p:nvPr/>
+        </p:nvSpPr>
+        <p:spPr>
+          <a:xfrm>
+            <a:off x="8275319" y="2194560"/>
+            <a:ext cx="3108960" cy="2788920"/>
+          </a:xfrm>
+          <a:prstGeom prst="rect">
+            <a:avLst/>
+          </a:prstGeom>
+          <a:noFill/>
+        </p:spPr>
+        <p:txBody>
+          <a:bodyPr wrap="square">
+            <a:spAutoFit/>
+          </a:bodyPr>
+          <a:lstStyle/>
+          <a:p>
+            <a:pPr algn="l"/>
+            <a:r>
+              <a:rPr sz="1200" b="0">
+                <a:solidFill>
+                  <a:srgbClr val="E5EDF7"/>
+                </a:solidFill>
+                <a:latin typeface="Aptos"/>
+              </a:rPr>
+              <a:t>Reusable company knowledge, faster support decisions, lower information risk, and a path to per-tenant SaaS pricing.</a:t>
+            </a:r>
+          </a:p>
+        </p:txBody>
+      </p:sp>
+      <p:sp>
+        <p:nvSpPr>
+          <p:cNvPr id="13" name="TextBox 12"/>
+          <p:cNvSpPr txBox="1"/>
+          <p:nvPr/>
+        </p:nvSpPr>
+        <p:spPr>
+          <a:xfrm>
+            <a:off x="822960" y="5623560"/>
+            <a:ext cx="10515600" cy="365760"/>
+          </a:xfrm>
+          <a:prstGeom prst="rect">
+            <a:avLst/>
+          </a:prstGeom>
+          <a:noFill/>
+        </p:spPr>
+        <p:txBody>
+          <a:bodyPr wrap="square">
+            <a:spAutoFit/>
+          </a:bodyPr>
+          <a:lstStyle/>
+          <a:p>
+            <a:pPr algn="ctr"/>
+            <a:r>
+              <a:rPr sz="1300" b="0">
+                <a:solidFill>
+                  <a:srgbClr val="94A3B8"/>
+                </a:solidFill>
+                <a:latin typeface="Aptos"/>
+              </a:rPr>
+              <a:t>Honest status: deployment verification, object storage, OCR, and formal migrations remain production follow-up work.</a:t>
+            </a:r>
+          </a:p>
+        </p:txBody>
+      </p:sp>
+    </p:spTree>
+  </p:cSld>
+  <p:clrMapOvr>
+    <a:masterClrMapping/>
+  </p:clrMapOvr>
+</p:sld>
+</file>
+
+<file path=ppt/slides/slide16.xml><?xml version="1.0" encoding="utf-8"?>
+<p:sld xmlns:a="http://schemas.openxmlformats.org/drawingml/2006/main" xmlns:p="http://schemas.openxmlformats.org/presentationml/2006/main" xmlns:r="http://schemas.openxmlformats.org/officeDocument/2006/relationships">
+  <p:cSld>
+    <p:bg>
+      <p:bgPr>
+        <a:solidFill>
+          <a:srgbClr val="0B1120"/>
+        </a:solidFill>
+        <a:effectLst/>
+      </p:bgPr>
+    </p:bg>
+    <p:spTree>
+      <p:nvGrpSpPr>
+        <p:cNvPr id="1" name=""/>
+        <p:cNvGrpSpPr/>
+        <p:nvPr/>
+      </p:nvGrpSpPr>
+      <p:grpSpPr/>
+      <p:sp>
+        <p:nvSpPr>
+          <p:cNvPr id="2" name="TextBox 1"/>
+          <p:cNvSpPr txBox="1"/>
+          <p:nvPr/>
+        </p:nvSpPr>
+        <p:spPr>
+          <a:xfrm>
+            <a:off x="594360" y="411480"/>
+            <a:ext cx="10972800" cy="502920"/>
+          </a:xfrm>
+          <a:prstGeom prst="rect">
+            <a:avLst/>
+          </a:prstGeom>
+          <a:noFill/>
+        </p:spPr>
+        <p:txBody>
+          <a:bodyPr wrap="square">
+            <a:spAutoFit/>
+          </a:bodyPr>
+          <a:lstStyle/>
+          <a:p>
+            <a:pPr algn="l"/>
+            <a:r>
+              <a:rPr sz="2800" b="1">
+                <a:solidFill>
+                  <a:srgbClr val="E5EDF7"/>
+                </a:solidFill>
+                <a:latin typeface="Aptos"/>
+              </a:rPr>
+              <a:t>Conclusion and roadmap</a:t>
+            </a:r>
+          </a:p>
+        </p:txBody>
+      </p:sp>
+      <p:sp>
+        <p:nvSpPr>
+          <p:cNvPr id="3" name="TextBox 2"/>
+          <p:cNvSpPr txBox="1"/>
+          <p:nvPr/>
+        </p:nvSpPr>
+        <p:spPr>
+          <a:xfrm>
+            <a:off x="621792" y="987552"/>
+            <a:ext cx="10789920" cy="320040"/>
+          </a:xfrm>
+          <a:prstGeom prst="rect">
+            <a:avLst/>
+          </a:prstGeom>
+          <a:noFill/>
+        </p:spPr>
+        <p:txBody>
+          <a:bodyPr wrap="square">
+            <a:spAutoFit/>
+          </a:bodyPr>
+          <a:lstStyle/>
+          <a:p>
+            <a:pPr algn="l"/>
+            <a:r>
+              <a:rPr sz="1200" b="0">
+                <a:solidFill>
+                  <a:srgbClr val="94A3B8"/>
+                </a:solidFill>
+                <a:latin typeface="Aptos"/>
+              </a:rPr>
+              <a:t>Secure foundations first; integrate only what can be verified.</a:t>
+            </a:r>
+          </a:p>
+        </p:txBody>
+      </p:sp>
+      <p:sp>
+        <p:nvSpPr>
+          <p:cNvPr id="4" name="Rounded Rectangle 3"/>
+          <p:cNvSpPr/>
+          <p:nvPr/>
+        </p:nvSpPr>
+        <p:spPr>
+          <a:xfrm>
+            <a:off x="685800" y="1645920"/>
+            <a:ext cx="3474720" cy="3291840"/>
+          </a:xfrm>
+          <a:prstGeom prst="roundRect">
+            <a:avLst/>
+          </a:prstGeom>
+          <a:solidFill>
+            <a:srgbClr val="111A2D"/>
+          </a:solidFill>
+          <a:ln>
+            <a:solidFill>
+              <a:srgbClr val="2D3A52"/>
+            </a:solidFill>
+          </a:ln>
+        </p:spPr>
+        <p:style>
+          <a:lnRef idx="1">
+            <a:schemeClr val="accent1"/>
+          </a:lnRef>
+          <a:fillRef idx="3">
+            <a:schemeClr val="accent1"/>
+          </a:fillRef>
+          <a:effectRef idx="2">
+            <a:schemeClr val="accent1"/>
+          </a:effectRef>
+          <a:fontRef idx="minor">
+            <a:schemeClr val="lt1"/>
+          </a:fontRef>
+        </p:style>
+        <p:txBody>
+          <a:bodyPr rtlCol="0" anchor="ctr"/>
+          <a:lstStyle/>
+          <a:p>
+            <a:pPr algn="ctr"/>
+          </a:p>
+        </p:txBody>
+      </p:sp>
+      <p:sp>
+        <p:nvSpPr>
+          <p:cNvPr id="5" name="TextBox 4"/>
+          <p:cNvSpPr txBox="1"/>
+          <p:nvPr/>
+        </p:nvSpPr>
+        <p:spPr>
+          <a:xfrm>
+            <a:off x="868680" y="1810512"/>
+            <a:ext cx="3108960" cy="320040"/>
+          </a:xfrm>
+          <a:prstGeom prst="rect">
+            <a:avLst/>
+          </a:prstGeom>
+          <a:noFill/>
+        </p:spPr>
+        <p:txBody>
+          <a:bodyPr wrap="square">
+            <a:spAutoFit/>
+          </a:bodyPr>
+          <a:lstStyle/>
+          <a:p>
+            <a:pPr algn="l"/>
+            <a:r>
+              <a:rPr sz="1600" b="1">
+                <a:solidFill>
+                  <a:srgbClr val="2DD4BF"/>
+                </a:solidFill>
+                <a:latin typeface="Aptos"/>
+              </a:rPr>
+              <a:t>Now</a:t>
+            </a:r>
+          </a:p>
+        </p:txBody>
+      </p:sp>
+      <p:sp>
+        <p:nvSpPr>
+          <p:cNvPr id="6" name="TextBox 5"/>
+          <p:cNvSpPr txBox="1"/>
+          <p:nvPr/>
+        </p:nvSpPr>
+        <p:spPr>
+          <a:xfrm>
+            <a:off x="868680" y="2240280"/>
+            <a:ext cx="3108960" cy="2560320"/>
+          </a:xfrm>
+          <a:prstGeom prst="rect">
+            <a:avLst/>
+          </a:prstGeom>
+          <a:noFill/>
+        </p:spPr>
+        <p:txBody>
+          <a:bodyPr wrap="square">
+            <a:spAutoFit/>
+          </a:bodyPr>
+          <a:lstStyle/>
+          <a:p>
+            <a:pPr algn="l"/>
+            <a:r>
+              <a:rPr sz="1200" b="0">
+                <a:solidFill>
+                  <a:srgbClr val="E5EDF7"/>
+                </a:solidFill>
+                <a:latin typeface="Aptos"/>
+              </a:rPr>
+              <a:t>Tenant-scoped FastAPI APIs, grounded RAG, OTP registration, dark-first auth UI, audit telemetry.</a:t>
+            </a:r>
+          </a:p>
+        </p:txBody>
+      </p:sp>
+      <p:sp>
+        <p:nvSpPr>
+          <p:cNvPr id="7" name="Rounded Rectangle 6"/>
+          <p:cNvSpPr/>
+          <p:nvPr/>
+        </p:nvSpPr>
+        <p:spPr>
+          <a:xfrm>
+            <a:off x="4389120" y="1645920"/>
+            <a:ext cx="3474720" cy="3291840"/>
+          </a:xfrm>
+          <a:prstGeom prst="roundRect">
+            <a:avLst/>
+          </a:prstGeom>
+          <a:solidFill>
+            <a:srgbClr val="111A2D"/>
+          </a:solidFill>
+          <a:ln>
+            <a:solidFill>
+              <a:srgbClr val="2D3A52"/>
+            </a:solidFill>
+          </a:ln>
+        </p:spPr>
+        <p:style>
+          <a:lnRef idx="1">
+            <a:schemeClr val="accent1"/>
+          </a:lnRef>
+          <a:fillRef idx="3">
+            <a:schemeClr val="accent1"/>
+          </a:fillRef>
+          <a:effectRef idx="2">
+            <a:schemeClr val="accent1"/>
+          </a:effectRef>
+          <a:fontRef idx="minor">
+            <a:schemeClr val="lt1"/>
+          </a:fontRef>
+        </p:style>
+        <p:txBody>
+          <a:bodyPr rtlCol="0" anchor="ctr"/>
+          <a:lstStyle/>
+          <a:p>
+            <a:pPr algn="ctr"/>
+          </a:p>
+        </p:txBody>
+      </p:sp>
+      <p:sp>
+        <p:nvSpPr>
+          <p:cNvPr id="8" name="TextBox 7"/>
+          <p:cNvSpPr txBox="1"/>
+          <p:nvPr/>
+        </p:nvSpPr>
+        <p:spPr>
+          <a:xfrm>
+            <a:off x="4572000" y="1810512"/>
+            <a:ext cx="3108960" cy="320040"/>
+          </a:xfrm>
+          <a:prstGeom prst="rect">
+            <a:avLst/>
+          </a:prstGeom>
+          <a:noFill/>
+        </p:spPr>
+        <p:txBody>
+          <a:bodyPr wrap="square">
+            <a:spAutoFit/>
+          </a:bodyPr>
+          <a:lstStyle/>
+          <a:p>
+            <a:pPr algn="l"/>
+            <a:r>
+              <a:rPr sz="1600" b="1">
+                <a:solidFill>
+                  <a:srgbClr val="2DD4BF"/>
+                </a:solidFill>
+                <a:latin typeface="Aptos"/>
+              </a:rPr>
+              <a:t>Next</a:t>
+            </a:r>
+          </a:p>
+        </p:txBody>
+      </p:sp>
+      <p:sp>
+        <p:nvSpPr>
+          <p:cNvPr id="9" name="TextBox 8"/>
+          <p:cNvSpPr txBox="1"/>
+          <p:nvPr/>
+        </p:nvSpPr>
+        <p:spPr>
+          <a:xfrm>
+            <a:off x="4572000" y="2240280"/>
+            <a:ext cx="3108960" cy="2560320"/>
+          </a:xfrm>
+          <a:prstGeom prst="rect">
+            <a:avLst/>
+          </a:prstGeom>
+          <a:noFill/>
+        </p:spPr>
+        <p:txBody>
+          <a:bodyPr wrap="square">
+            <a:spAutoFit/>
+          </a:bodyPr>
+          <a:lstStyle/>
+          <a:p>
+            <a:pPr algn="l"/>
+            <a:r>
+              <a:rPr sz="1200" b="0">
+                <a:solidFill>
+                  <a:srgbClr val="E5EDF7"/>
+                </a:solidFill>
+                <a:latin typeface="Aptos"/>
+              </a:rPr>
+              <a:t>Complete Telegram account linking and 120-second session enforcement on a shared bot service.</a:t>
+            </a:r>
+          </a:p>
+        </p:txBody>
+      </p:sp>
+      <p:sp>
+        <p:nvSpPr>
+          <p:cNvPr id="10" name="Rounded Rectangle 9"/>
+          <p:cNvSpPr/>
+          <p:nvPr/>
+        </p:nvSpPr>
+        <p:spPr>
+          <a:xfrm>
+            <a:off x="8092440" y="1645920"/>
+            <a:ext cx="3474720" cy="3291840"/>
+          </a:xfrm>
+          <a:prstGeom prst="roundRect">
+            <a:avLst/>
+          </a:prstGeom>
+          <a:solidFill>
+            <a:srgbClr val="111A2D"/>
+          </a:solidFill>
+          <a:ln>
+            <a:solidFill>
+              <a:srgbClr val="2D3A52"/>
+            </a:solidFill>
+          </a:ln>
+        </p:spPr>
+        <p:style>
+          <a:lnRef idx="1">
+            <a:schemeClr val="accent1"/>
+          </a:lnRef>
+          <a:fillRef idx="3">
+            <a:schemeClr val="accent1"/>
+          </a:fillRef>
+          <a:effectRef idx="2">
+            <a:schemeClr val="accent1"/>
+          </a:effectRef>
+          <a:fontRef idx="minor">
+            <a:schemeClr val="lt1"/>
+          </a:fontRef>
+        </p:style>
+        <p:txBody>
+          <a:bodyPr rtlCol="0" anchor="ctr"/>
+          <a:lstStyle/>
+          <a:p>
+            <a:pPr algn="ctr"/>
+          </a:p>
+        </p:txBody>
+      </p:sp>
+      <p:sp>
+        <p:nvSpPr>
+          <p:cNvPr id="11" name="TextBox 10"/>
+          <p:cNvSpPr txBox="1"/>
+          <p:nvPr/>
+        </p:nvSpPr>
+        <p:spPr>
+          <a:xfrm>
+            <a:off x="8275319" y="1810512"/>
+            <a:ext cx="3108960" cy="320040"/>
+          </a:xfrm>
+          <a:prstGeom prst="rect">
+            <a:avLst/>
+          </a:prstGeom>
+          <a:noFill/>
+        </p:spPr>
+        <p:txBody>
+          <a:bodyPr wrap="square">
+            <a:spAutoFit/>
+          </a:bodyPr>
+          <a:lstStyle/>
+          <a:p>
+            <a:pPr algn="l"/>
+            <a:r>
+              <a:rPr sz="1600" b="1">
+                <a:solidFill>
+                  <a:srgbClr val="2DD4BF"/>
+                </a:solidFill>
+                <a:latin typeface="Aptos"/>
+              </a:rPr>
+              <a:t>Future</a:t>
+            </a:r>
+          </a:p>
+        </p:txBody>
+      </p:sp>
+      <p:sp>
+        <p:nvSpPr>
+          <p:cNvPr id="12" name="TextBox 11"/>
+          <p:cNvSpPr txBox="1"/>
+          <p:nvPr/>
+        </p:nvSpPr>
+        <p:spPr>
+          <a:xfrm>
+            <a:off x="8275319" y="2240280"/>
+            <a:ext cx="3108960" cy="2560320"/>
+          </a:xfrm>
+          <a:prstGeom prst="rect">
+            <a:avLst/>
+          </a:prstGeom>
+          <a:noFill/>
+        </p:spPr>
+        <p:txBody>
+          <a:bodyPr wrap="square">
+            <a:spAutoFit/>
+          </a:bodyPr>
+          <a:lstStyle/>
+          <a:p>
+            <a:pPr algn="l"/>
+            <a:r>
+              <a:rPr sz="1200" b="0">
+                <a:solidFill>
+                  <a:srgbClr val="E5EDF7"/>
+                </a:solidFill>
+                <a:latin typeface="Aptos"/>
+              </a:rPr>
+              <a:t>Async workers, OCR, object storage, richer feedback/export, and managed deployment verification.</a:t>
+            </a:r>
+          </a:p>
+        </p:txBody>
+      </p:sp>
+      <p:sp>
+        <p:nvSpPr>
+          <p:cNvPr id="13" name="TextBox 12"/>
+          <p:cNvSpPr txBox="1"/>
+          <p:nvPr/>
+        </p:nvSpPr>
+        <p:spPr>
+          <a:xfrm>
+            <a:off x="914400" y="5715000"/>
+            <a:ext cx="10241280" cy="365760"/>
+          </a:xfrm>
+          <a:prstGeom prst="rect">
+            <a:avLst/>
+          </a:prstGeom>
+          <a:noFill/>
+        </p:spPr>
+        <p:txBody>
+          <a:bodyPr wrap="square">
+            <a:spAutoFit/>
+          </a:bodyPr>
+          <a:lstStyle/>
+          <a:p>
+            <a:pPr algn="ctr"/>
+            <a:r>
+              <a:rPr sz="1800" b="1">
+                <a:solidFill>
+                  <a:srgbClr val="2DD4BF"/>
+                </a:solidFill>
+                <a:latin typeface="Aptos"/>
+              </a:rPr>
+              <a:t>Build trust into the architecture, then make the demo visible.</a:t>
             </a:r>
           </a:p>
         </p:txBody>
@@ -4217,7 +7378,7 @@
                 </a:solidFill>
                 <a:latin typeface="Aptos"/>
               </a:rPr>
-              <a:t>Architecture</a:t>
+              <a:t>Who benefits?</a:t>
             </a:r>
           </a:p>
         </p:txBody>
@@ -4252,7 +7413,7 @@
                 </a:solidFill>
                 <a:latin typeface="Aptos"/>
               </a:rPr>
-              <a:t>Shared backend and database; tenant identity is derived from authenticated state.</a:t>
+              <a:t>One platform supports several enterprise personas without mixing their data.</a:t>
             </a:r>
           </a:p>
         </p:txBody>
@@ -4265,8 +7426,8 @@
         </p:nvSpPr>
         <p:spPr>
           <a:xfrm>
-            <a:off x="640080" y="1600200"/>
-            <a:ext cx="2377440" cy="1234440"/>
+            <a:off x="685800" y="1645920"/>
+            <a:ext cx="3474720" cy="3246120"/>
           </a:xfrm>
           <a:prstGeom prst="roundRect">
             <a:avLst/>
@@ -4310,8 +7471,8 @@
         </p:nvSpPr>
         <p:spPr>
           <a:xfrm>
-            <a:off x="822959" y="1764792"/>
-            <a:ext cx="2011680" cy="320040"/>
+            <a:off x="868680" y="1810512"/>
+            <a:ext cx="3108960" cy="320040"/>
           </a:xfrm>
           <a:prstGeom prst="rect">
             <a:avLst/>
@@ -4332,7 +7493,7 @@
                 </a:solidFill>
                 <a:latin typeface="Aptos"/>
               </a:rPr>
-              <a:t>Next.js</a:t>
+              <a:t>Company administrator</a:t>
             </a:r>
           </a:p>
         </p:txBody>
@@ -4345,8 +7506,8 @@
         </p:nvSpPr>
         <p:spPr>
           <a:xfrm>
-            <a:off x="822959" y="2194560"/>
-            <a:ext cx="2011680" cy="502920"/>
+            <a:off x="868680" y="2240280"/>
+            <a:ext cx="3108960" cy="2514600"/>
           </a:xfrm>
           <a:prstGeom prst="rect">
             <a:avLst/>
@@ -4367,7 +7528,7 @@
                 </a:solidFill>
                 <a:latin typeface="Aptos"/>
               </a:rPr>
-              <a:t>Dark-first web dashboard</a:t>
+              <a:t>Creates the workspace, manages members, reviews usage, and monitors security events.</a:t>
             </a:r>
           </a:p>
         </p:txBody>
@@ -4380,8 +7541,8 @@
         </p:nvSpPr>
         <p:spPr>
           <a:xfrm>
-            <a:off x="3337560" y="1600200"/>
-            <a:ext cx="2377440" cy="1234440"/>
+            <a:off x="4389120" y="1645920"/>
+            <a:ext cx="3474720" cy="3246120"/>
           </a:xfrm>
           <a:prstGeom prst="roundRect">
             <a:avLst/>
@@ -4425,8 +7586,8 @@
         </p:nvSpPr>
         <p:spPr>
           <a:xfrm>
-            <a:off x="3520440" y="1764792"/>
-            <a:ext cx="2011680" cy="320040"/>
+            <a:off x="4572000" y="1810512"/>
+            <a:ext cx="3108960" cy="320040"/>
           </a:xfrm>
           <a:prstGeom prst="rect">
             <a:avLst/>
@@ -4447,7 +7608,7 @@
                 </a:solidFill>
                 <a:latin typeface="Aptos"/>
               </a:rPr>
-              <a:t>FastAPI</a:t>
+              <a:t>Knowledge worker</a:t>
             </a:r>
           </a:p>
         </p:txBody>
@@ -4460,8 +7621,8 @@
         </p:nvSpPr>
         <p:spPr>
           <a:xfrm>
-            <a:off x="3520440" y="2194560"/>
-            <a:ext cx="2011680" cy="502920"/>
+            <a:off x="4572000" y="2240280"/>
+            <a:ext cx="3108960" cy="2514600"/>
           </a:xfrm>
           <a:prstGeom prst="rect">
             <a:avLst/>
@@ -4482,7 +7643,7 @@
                 </a:solidFill>
                 <a:latin typeface="Aptos"/>
               </a:rPr>
-              <a:t>Auth, RBAC, tenant guards</a:t>
+              <a:t>Uploads approved material, asks natural-language questions, and reuses conversation history.</a:t>
             </a:r>
           </a:p>
         </p:txBody>
@@ -4495,8 +7656,8 @@
         </p:nvSpPr>
         <p:spPr>
           <a:xfrm>
-            <a:off x="6035040" y="1600200"/>
-            <a:ext cx="2377440" cy="1234440"/>
+            <a:off x="8092440" y="1645920"/>
+            <a:ext cx="3474720" cy="3246120"/>
           </a:xfrm>
           <a:prstGeom prst="roundRect">
             <a:avLst/>
@@ -4540,8 +7701,8 @@
         </p:nvSpPr>
         <p:spPr>
           <a:xfrm>
-            <a:off x="6217920" y="1764792"/>
-            <a:ext cx="2011680" cy="320040"/>
+            <a:off x="8275319" y="1810512"/>
+            <a:ext cx="3108960" cy="320040"/>
           </a:xfrm>
           <a:prstGeom prst="rect">
             <a:avLst/>
@@ -4562,7 +7723,7 @@
                 </a:solidFill>
                 <a:latin typeface="Aptos"/>
               </a:rPr>
-              <a:t>SQLAlchemy</a:t>
+              <a:t>Platform operator</a:t>
             </a:r>
           </a:p>
         </p:txBody>
@@ -4575,8 +7736,8 @@
         </p:nvSpPr>
         <p:spPr>
           <a:xfrm>
-            <a:off x="6217920" y="2194560"/>
-            <a:ext cx="2011680" cy="502920"/>
+            <a:off x="8275319" y="2240280"/>
+            <a:ext cx="3108960" cy="2514600"/>
           </a:xfrm>
           <a:prstGeom prst="rect">
             <a:avLst/>
@@ -4597,192 +7758,42 @@
                 </a:solidFill>
                 <a:latin typeface="Aptos"/>
               </a:rPr>
-              <a:t>Shared relational data</a:t>
-            </a:r>
-          </a:p>
-        </p:txBody>
-      </p:sp>
-      <p:sp>
-        <p:nvSpPr>
-          <p:cNvPr id="13" name="Rounded Rectangle 12"/>
-          <p:cNvSpPr/>
-          <p:nvPr/>
-        </p:nvSpPr>
-        <p:spPr>
-          <a:xfrm>
-            <a:off x="8732520" y="1600200"/>
-            <a:ext cx="2377440" cy="1234440"/>
-          </a:xfrm>
-          <a:prstGeom prst="roundRect">
-            <a:avLst/>
-          </a:prstGeom>
-          <a:solidFill>
-            <a:srgbClr val="111A2D"/>
-          </a:solidFill>
-          <a:ln>
-            <a:solidFill>
-              <a:srgbClr val="2D3A52"/>
-            </a:solidFill>
-          </a:ln>
-        </p:spPr>
-        <p:style>
-          <a:lnRef idx="1">
-            <a:schemeClr val="accent1"/>
-          </a:lnRef>
-          <a:fillRef idx="3">
-            <a:schemeClr val="accent1"/>
-          </a:fillRef>
-          <a:effectRef idx="2">
-            <a:schemeClr val="accent1"/>
-          </a:effectRef>
-          <a:fontRef idx="minor">
-            <a:schemeClr val="lt1"/>
-          </a:fontRef>
-        </p:style>
-        <p:txBody>
-          <a:bodyPr rtlCol="0" anchor="ctr"/>
+              <a:t>Uses SuperAdmin analytics, tenant summaries, quotas, and the live IDOR simulator.</a:t>
+            </a:r>
+          </a:p>
+        </p:txBody>
+      </p:sp>
+      <p:sp>
+        <p:nvSpPr>
+          <p:cNvPr id="13" name="TextBox 12"/>
+          <p:cNvSpPr txBox="1"/>
+          <p:nvPr/>
+        </p:nvSpPr>
+        <p:spPr>
+          <a:xfrm>
+            <a:off x="868680" y="5486400"/>
+            <a:ext cx="10424160" cy="502920"/>
+          </a:xfrm>
+          <a:prstGeom prst="rect">
+            <a:avLst/>
+          </a:prstGeom>
+          <a:noFill/>
+        </p:spPr>
+        <p:txBody>
+          <a:bodyPr wrap="square">
+            <a:spAutoFit/>
+          </a:bodyPr>
           <a:lstStyle/>
           <a:p>
             <a:pPr algn="ctr"/>
-          </a:p>
-        </p:txBody>
-      </p:sp>
-      <p:sp>
-        <p:nvSpPr>
-          <p:cNvPr id="14" name="TextBox 13"/>
-          <p:cNvSpPr txBox="1"/>
-          <p:nvPr/>
-        </p:nvSpPr>
-        <p:spPr>
-          <a:xfrm>
-            <a:off x="8915400" y="1764792"/>
-            <a:ext cx="2011680" cy="320040"/>
-          </a:xfrm>
-          <a:prstGeom prst="rect">
-            <a:avLst/>
-          </a:prstGeom>
-          <a:noFill/>
-        </p:spPr>
-        <p:txBody>
-          <a:bodyPr wrap="square">
-            <a:spAutoFit/>
-          </a:bodyPr>
-          <a:lstStyle/>
-          <a:p>
-            <a:pPr algn="l"/>
-            <a:r>
-              <a:rPr sz="1600" b="1">
+            <a:r>
+              <a:rPr sz="1500" b="0">
                 <a:solidFill>
                   <a:srgbClr val="2DD4BF"/>
                 </a:solidFill>
                 <a:latin typeface="Aptos"/>
               </a:rPr>
-              <a:t>RAG</a:t>
-            </a:r>
-          </a:p>
-        </p:txBody>
-      </p:sp>
-      <p:sp>
-        <p:nvSpPr>
-          <p:cNvPr id="15" name="TextBox 14"/>
-          <p:cNvSpPr txBox="1"/>
-          <p:nvPr/>
-        </p:nvSpPr>
-        <p:spPr>
-          <a:xfrm>
-            <a:off x="8915400" y="2194560"/>
-            <a:ext cx="2011680" cy="502920"/>
-          </a:xfrm>
-          <a:prstGeom prst="rect">
-            <a:avLst/>
-          </a:prstGeom>
-          <a:noFill/>
-        </p:spPr>
-        <p:txBody>
-          <a:bodyPr wrap="square">
-            <a:spAutoFit/>
-          </a:bodyPr>
-          <a:lstStyle/>
-          <a:p>
-            <a:pPr algn="l"/>
-            <a:r>
-              <a:rPr sz="1200" b="0">
-                <a:solidFill>
-                  <a:srgbClr val="E5EDF7"/>
-                </a:solidFill>
-                <a:latin typeface="Aptos"/>
-              </a:rPr>
-              <a:t>Scoped retrieval + citations</a:t>
-            </a:r>
-          </a:p>
-        </p:txBody>
-      </p:sp>
-      <p:sp>
-        <p:nvSpPr>
-          <p:cNvPr id="16" name="TextBox 15"/>
-          <p:cNvSpPr txBox="1"/>
-          <p:nvPr/>
-        </p:nvSpPr>
-        <p:spPr>
-          <a:xfrm>
-            <a:off x="914400" y="3749039"/>
-            <a:ext cx="10241280" cy="640080"/>
-          </a:xfrm>
-          <a:prstGeom prst="rect">
-            <a:avLst/>
-          </a:prstGeom>
-          <a:noFill/>
-        </p:spPr>
-        <p:txBody>
-          <a:bodyPr wrap="square">
-            <a:spAutoFit/>
-          </a:bodyPr>
-          <a:lstStyle/>
-          <a:p>
-            <a:pPr algn="ctr"/>
-            <a:r>
-              <a:rPr sz="2000" b="1">
-                <a:solidFill>
-                  <a:srgbClr val="2DD4BF"/>
-                </a:solidFill>
-                <a:latin typeface="Aptos"/>
-              </a:rPr>
-              <a:t>Frontend → API gateway → database and document storage → RAG engine → grounded response</a:t>
-            </a:r>
-          </a:p>
-        </p:txBody>
-      </p:sp>
-      <p:sp>
-        <p:nvSpPr>
-          <p:cNvPr id="17" name="TextBox 16"/>
-          <p:cNvSpPr txBox="1"/>
-          <p:nvPr/>
-        </p:nvSpPr>
-        <p:spPr>
-          <a:xfrm>
-            <a:off x="914400" y="4754880"/>
-            <a:ext cx="10241280" cy="411480"/>
-          </a:xfrm>
-          <a:prstGeom prst="rect">
-            <a:avLst/>
-          </a:prstGeom>
-          <a:noFill/>
-        </p:spPr>
-        <p:txBody>
-          <a:bodyPr wrap="square">
-            <a:spAutoFit/>
-          </a:bodyPr>
-          <a:lstStyle/>
-          <a:p>
-            <a:pPr algn="ctr"/>
-            <a:r>
-              <a:rPr sz="1400" b="0">
-                <a:solidFill>
-                  <a:srgbClr val="E5EDF7"/>
-                </a:solidFill>
-                <a:latin typeface="Aptos"/>
-              </a:rPr>
-              <a:t>All tenant-sensitive paths validate ownership server-side; frontend IDs are never trusted.</a:t>
+              <a:t>Value: faster answers, fewer repeated support questions, and evidence that each answer stayed inside the correct workspace.</a:t>
             </a:r>
           </a:p>
         </p:txBody>
@@ -4843,7 +7854,7 @@
                 </a:solidFill>
                 <a:latin typeface="Aptos"/>
               </a:rPr>
-              <a:t>Workflow automation</a:t>
+              <a:t>Product surfaces</a:t>
             </a:r>
           </a:p>
         </p:txBody>
@@ -4878,7 +7889,7 @@
                 </a:solidFill>
                 <a:latin typeface="Aptos"/>
               </a:rPr>
-              <a:t>Document Upload → File Validation → Extraction → Chunking → Embeddings → Tenant-Scoped Indexing</a:t>
+              <a:t>The MVP is organized around the full knowledge-work lifecycle.</a:t>
             </a:r>
           </a:p>
         </p:txBody>
@@ -4891,8 +7902,8 @@
         </p:nvSpPr>
         <p:spPr>
           <a:xfrm>
-            <a:off x="502920" y="2011680"/>
-            <a:ext cx="1143000" cy="1097280"/>
+            <a:off x="594360" y="1600200"/>
+            <a:ext cx="2606040" cy="3566160"/>
           </a:xfrm>
           <a:prstGeom prst="roundRect">
             <a:avLst/>
@@ -4936,8 +7947,8 @@
         </p:nvSpPr>
         <p:spPr>
           <a:xfrm>
-            <a:off x="685800" y="2176272"/>
-            <a:ext cx="777240" cy="320040"/>
+            <a:off x="777240" y="1764792"/>
+            <a:ext cx="2240280" cy="320040"/>
           </a:xfrm>
           <a:prstGeom prst="rect">
             <a:avLst/>
@@ -4958,7 +7969,7 @@
                 </a:solidFill>
                 <a:latin typeface="Aptos"/>
               </a:rPr>
-              <a:t>1</a:t>
+              <a:t>Authentication</a:t>
             </a:r>
           </a:p>
         </p:txBody>
@@ -4971,8 +7982,8 @@
         </p:nvSpPr>
         <p:spPr>
           <a:xfrm>
-            <a:off x="685800" y="2606040"/>
-            <a:ext cx="777240" cy="365759"/>
+            <a:off x="777240" y="2194560"/>
+            <a:ext cx="2240280" cy="2834639"/>
           </a:xfrm>
           <a:prstGeom prst="rect">
             <a:avLst/>
@@ -4993,7 +8004,11 @@
                 </a:solidFill>
                 <a:latin typeface="Aptos"/>
               </a:rPr>
-              <a:t>Upload</a:t>
+              <a:t>Registration
+Email OTP verification
+Verified login
+JWT session
+Role-based access</a:t>
             </a:r>
           </a:p>
         </p:txBody>
@@ -5006,8 +8021,8 @@
         </p:nvSpPr>
         <p:spPr>
           <a:xfrm>
-            <a:off x="1947672" y="2011680"/>
-            <a:ext cx="1143000" cy="1097280"/>
+            <a:off x="3337560" y="1600200"/>
+            <a:ext cx="2606040" cy="3566160"/>
           </a:xfrm>
           <a:prstGeom prst="roundRect">
             <a:avLst/>
@@ -5051,8 +8066,8 @@
         </p:nvSpPr>
         <p:spPr>
           <a:xfrm>
-            <a:off x="2130552" y="2176272"/>
-            <a:ext cx="777240" cy="320040"/>
+            <a:off x="3520440" y="1764792"/>
+            <a:ext cx="2240280" cy="320040"/>
           </a:xfrm>
           <a:prstGeom prst="rect">
             <a:avLst/>
@@ -5073,7 +8088,7 @@
                 </a:solidFill>
                 <a:latin typeface="Aptos"/>
               </a:rPr>
-              <a:t>2</a:t>
+              <a:t>Knowledge base</a:t>
             </a:r>
           </a:p>
         </p:txBody>
@@ -5086,8 +8101,8 @@
         </p:nvSpPr>
         <p:spPr>
           <a:xfrm>
-            <a:off x="2130552" y="2606040"/>
-            <a:ext cx="777240" cy="365759"/>
+            <a:off x="3520440" y="2194560"/>
+            <a:ext cx="2240280" cy="2834639"/>
           </a:xfrm>
           <a:prstGeom prst="rect">
             <a:avLst/>
@@ -5108,7 +8123,11 @@
                 </a:solidFill>
                 <a:latin typeface="Aptos"/>
               </a:rPr>
-              <a:t>Validate</a:t>
+              <a:t>PDF/TXT upload
+File validation
+Text extraction
+Chunking
+Document lifecycle status</a:t>
             </a:r>
           </a:p>
         </p:txBody>
@@ -5121,8 +8140,8 @@
         </p:nvSpPr>
         <p:spPr>
           <a:xfrm>
-            <a:off x="3392424" y="2011680"/>
-            <a:ext cx="1143000" cy="1097280"/>
+            <a:off x="6080760" y="1600200"/>
+            <a:ext cx="2606040" cy="3566160"/>
           </a:xfrm>
           <a:prstGeom prst="roundRect">
             <a:avLst/>
@@ -5166,8 +8185,8 @@
         </p:nvSpPr>
         <p:spPr>
           <a:xfrm>
-            <a:off x="3575304" y="2176272"/>
-            <a:ext cx="777240" cy="320040"/>
+            <a:off x="6263640" y="1764792"/>
+            <a:ext cx="2240280" cy="320040"/>
           </a:xfrm>
           <a:prstGeom prst="rect">
             <a:avLst/>
@@ -5188,7 +8207,7 @@
                 </a:solidFill>
                 <a:latin typeface="Aptos"/>
               </a:rPr>
-              <a:t>3</a:t>
+              <a:t>AI workspace</a:t>
             </a:r>
           </a:p>
         </p:txBody>
@@ -5201,8 +8220,8 @@
         </p:nvSpPr>
         <p:spPr>
           <a:xfrm>
-            <a:off x="3575304" y="2606040"/>
-            <a:ext cx="777240" cy="365759"/>
+            <a:off x="6263640" y="2194560"/>
+            <a:ext cx="2240280" cy="2834639"/>
           </a:xfrm>
           <a:prstGeom prst="rect">
             <a:avLst/>
@@ -5223,7 +8242,11 @@
                 </a:solidFill>
                 <a:latin typeface="Aptos"/>
               </a:rPr>
-              <a:t>Extract</a:t>
+              <a:t>Grounded chat
+Similarity retrieval
+Page citations
+Conversation history
+Out-of-domain refusal</a:t>
             </a:r>
           </a:p>
         </p:txBody>
@@ -5236,8 +8259,8 @@
         </p:nvSpPr>
         <p:spPr>
           <a:xfrm>
-            <a:off x="4837176" y="2011680"/>
-            <a:ext cx="1143000" cy="1097280"/>
+            <a:off x="8823960" y="1600200"/>
+            <a:ext cx="2606040" cy="3566160"/>
           </a:xfrm>
           <a:prstGeom prst="roundRect">
             <a:avLst/>
@@ -5281,8 +8304,8 @@
         </p:nvSpPr>
         <p:spPr>
           <a:xfrm>
-            <a:off x="5020056" y="2176272"/>
-            <a:ext cx="777240" cy="320040"/>
+            <a:off x="9006840" y="1764792"/>
+            <a:ext cx="2240280" cy="320040"/>
           </a:xfrm>
           <a:prstGeom prst="rect">
             <a:avLst/>
@@ -5303,7 +8326,7 @@
                 </a:solidFill>
                 <a:latin typeface="Aptos"/>
               </a:rPr>
-              <a:t>4</a:t>
+              <a:t>Governance</a:t>
             </a:r>
           </a:p>
         </p:txBody>
@@ -5316,8 +8339,8 @@
         </p:nvSpPr>
         <p:spPr>
           <a:xfrm>
-            <a:off x="5020056" y="2606040"/>
-            <a:ext cx="777240" cy="365759"/>
+            <a:off x="9006840" y="2194560"/>
+            <a:ext cx="2240280" cy="2834639"/>
           </a:xfrm>
           <a:prstGeom prst="rect">
             <a:avLst/>
@@ -5338,502 +8361,11 @@
                 </a:solidFill>
                 <a:latin typeface="Aptos"/>
               </a:rPr>
-              <a:t>Chunk</a:t>
-            </a:r>
-          </a:p>
-        </p:txBody>
-      </p:sp>
-      <p:sp>
-        <p:nvSpPr>
-          <p:cNvPr id="16" name="Rounded Rectangle 15"/>
-          <p:cNvSpPr/>
-          <p:nvPr/>
-        </p:nvSpPr>
-        <p:spPr>
-          <a:xfrm>
-            <a:off x="6281928" y="2011680"/>
-            <a:ext cx="1143000" cy="1097280"/>
-          </a:xfrm>
-          <a:prstGeom prst="roundRect">
-            <a:avLst/>
-          </a:prstGeom>
-          <a:solidFill>
-            <a:srgbClr val="111A2D"/>
-          </a:solidFill>
-          <a:ln>
-            <a:solidFill>
-              <a:srgbClr val="2D3A52"/>
-            </a:solidFill>
-          </a:ln>
-        </p:spPr>
-        <p:style>
-          <a:lnRef idx="1">
-            <a:schemeClr val="accent1"/>
-          </a:lnRef>
-          <a:fillRef idx="3">
-            <a:schemeClr val="accent1"/>
-          </a:fillRef>
-          <a:effectRef idx="2">
-            <a:schemeClr val="accent1"/>
-          </a:effectRef>
-          <a:fontRef idx="minor">
-            <a:schemeClr val="lt1"/>
-          </a:fontRef>
-        </p:style>
-        <p:txBody>
-          <a:bodyPr rtlCol="0" anchor="ctr"/>
-          <a:lstStyle/>
-          <a:p>
-            <a:pPr algn="ctr"/>
-          </a:p>
-        </p:txBody>
-      </p:sp>
-      <p:sp>
-        <p:nvSpPr>
-          <p:cNvPr id="17" name="TextBox 16"/>
-          <p:cNvSpPr txBox="1"/>
-          <p:nvPr/>
-        </p:nvSpPr>
-        <p:spPr>
-          <a:xfrm>
-            <a:off x="6464808" y="2176272"/>
-            <a:ext cx="777240" cy="320040"/>
-          </a:xfrm>
-          <a:prstGeom prst="rect">
-            <a:avLst/>
-          </a:prstGeom>
-          <a:noFill/>
-        </p:spPr>
-        <p:txBody>
-          <a:bodyPr wrap="square">
-            <a:spAutoFit/>
-          </a:bodyPr>
-          <a:lstStyle/>
-          <a:p>
-            <a:pPr algn="l"/>
-            <a:r>
-              <a:rPr sz="1600" b="1">
-                <a:solidFill>
-                  <a:srgbClr val="2DD4BF"/>
-                </a:solidFill>
-                <a:latin typeface="Aptos"/>
-              </a:rPr>
-              <a:t>5</a:t>
-            </a:r>
-          </a:p>
-        </p:txBody>
-      </p:sp>
-      <p:sp>
-        <p:nvSpPr>
-          <p:cNvPr id="18" name="TextBox 17"/>
-          <p:cNvSpPr txBox="1"/>
-          <p:nvPr/>
-        </p:nvSpPr>
-        <p:spPr>
-          <a:xfrm>
-            <a:off x="6464808" y="2606040"/>
-            <a:ext cx="777240" cy="365759"/>
-          </a:xfrm>
-          <a:prstGeom prst="rect">
-            <a:avLst/>
-          </a:prstGeom>
-          <a:noFill/>
-        </p:spPr>
-        <p:txBody>
-          <a:bodyPr wrap="square">
-            <a:spAutoFit/>
-          </a:bodyPr>
-          <a:lstStyle/>
-          <a:p>
-            <a:pPr algn="l"/>
-            <a:r>
-              <a:rPr sz="1200" b="0">
-                <a:solidFill>
-                  <a:srgbClr val="E5EDF7"/>
-                </a:solidFill>
-                <a:latin typeface="Aptos"/>
-              </a:rPr>
-              <a:t>Embed</a:t>
-            </a:r>
-          </a:p>
-        </p:txBody>
-      </p:sp>
-      <p:sp>
-        <p:nvSpPr>
-          <p:cNvPr id="19" name="Rounded Rectangle 18"/>
-          <p:cNvSpPr/>
-          <p:nvPr/>
-        </p:nvSpPr>
-        <p:spPr>
-          <a:xfrm>
-            <a:off x="7726680" y="2011680"/>
-            <a:ext cx="1143000" cy="1097280"/>
-          </a:xfrm>
-          <a:prstGeom prst="roundRect">
-            <a:avLst/>
-          </a:prstGeom>
-          <a:solidFill>
-            <a:srgbClr val="111A2D"/>
-          </a:solidFill>
-          <a:ln>
-            <a:solidFill>
-              <a:srgbClr val="2D3A52"/>
-            </a:solidFill>
-          </a:ln>
-        </p:spPr>
-        <p:style>
-          <a:lnRef idx="1">
-            <a:schemeClr val="accent1"/>
-          </a:lnRef>
-          <a:fillRef idx="3">
-            <a:schemeClr val="accent1"/>
-          </a:fillRef>
-          <a:effectRef idx="2">
-            <a:schemeClr val="accent1"/>
-          </a:effectRef>
-          <a:fontRef idx="minor">
-            <a:schemeClr val="lt1"/>
-          </a:fontRef>
-        </p:style>
-        <p:txBody>
-          <a:bodyPr rtlCol="0" anchor="ctr"/>
-          <a:lstStyle/>
-          <a:p>
-            <a:pPr algn="ctr"/>
-          </a:p>
-        </p:txBody>
-      </p:sp>
-      <p:sp>
-        <p:nvSpPr>
-          <p:cNvPr id="20" name="TextBox 19"/>
-          <p:cNvSpPr txBox="1"/>
-          <p:nvPr/>
-        </p:nvSpPr>
-        <p:spPr>
-          <a:xfrm>
-            <a:off x="7909560" y="2176272"/>
-            <a:ext cx="777240" cy="320040"/>
-          </a:xfrm>
-          <a:prstGeom prst="rect">
-            <a:avLst/>
-          </a:prstGeom>
-          <a:noFill/>
-        </p:spPr>
-        <p:txBody>
-          <a:bodyPr wrap="square">
-            <a:spAutoFit/>
-          </a:bodyPr>
-          <a:lstStyle/>
-          <a:p>
-            <a:pPr algn="l"/>
-            <a:r>
-              <a:rPr sz="1600" b="1">
-                <a:solidFill>
-                  <a:srgbClr val="2DD4BF"/>
-                </a:solidFill>
-                <a:latin typeface="Aptos"/>
-              </a:rPr>
-              <a:t>6</a:t>
-            </a:r>
-          </a:p>
-        </p:txBody>
-      </p:sp>
-      <p:sp>
-        <p:nvSpPr>
-          <p:cNvPr id="21" name="TextBox 20"/>
-          <p:cNvSpPr txBox="1"/>
-          <p:nvPr/>
-        </p:nvSpPr>
-        <p:spPr>
-          <a:xfrm>
-            <a:off x="7909560" y="2606040"/>
-            <a:ext cx="777240" cy="365759"/>
-          </a:xfrm>
-          <a:prstGeom prst="rect">
-            <a:avLst/>
-          </a:prstGeom>
-          <a:noFill/>
-        </p:spPr>
-        <p:txBody>
-          <a:bodyPr wrap="square">
-            <a:spAutoFit/>
-          </a:bodyPr>
-          <a:lstStyle/>
-          <a:p>
-            <a:pPr algn="l"/>
-            <a:r>
-              <a:rPr sz="1200" b="0">
-                <a:solidFill>
-                  <a:srgbClr val="E5EDF7"/>
-                </a:solidFill>
-                <a:latin typeface="Aptos"/>
-              </a:rPr>
-              <a:t>Index</a:t>
-            </a:r>
-          </a:p>
-        </p:txBody>
-      </p:sp>
-      <p:sp>
-        <p:nvSpPr>
-          <p:cNvPr id="22" name="Rounded Rectangle 21"/>
-          <p:cNvSpPr/>
-          <p:nvPr/>
-        </p:nvSpPr>
-        <p:spPr>
-          <a:xfrm>
-            <a:off x="9171432" y="2011680"/>
-            <a:ext cx="1143000" cy="1097280"/>
-          </a:xfrm>
-          <a:prstGeom prst="roundRect">
-            <a:avLst/>
-          </a:prstGeom>
-          <a:solidFill>
-            <a:srgbClr val="111A2D"/>
-          </a:solidFill>
-          <a:ln>
-            <a:solidFill>
-              <a:srgbClr val="2D3A52"/>
-            </a:solidFill>
-          </a:ln>
-        </p:spPr>
-        <p:style>
-          <a:lnRef idx="1">
-            <a:schemeClr val="accent1"/>
-          </a:lnRef>
-          <a:fillRef idx="3">
-            <a:schemeClr val="accent1"/>
-          </a:fillRef>
-          <a:effectRef idx="2">
-            <a:schemeClr val="accent1"/>
-          </a:effectRef>
-          <a:fontRef idx="minor">
-            <a:schemeClr val="lt1"/>
-          </a:fontRef>
-        </p:style>
-        <p:txBody>
-          <a:bodyPr rtlCol="0" anchor="ctr"/>
-          <a:lstStyle/>
-          <a:p>
-            <a:pPr algn="ctr"/>
-          </a:p>
-        </p:txBody>
-      </p:sp>
-      <p:sp>
-        <p:nvSpPr>
-          <p:cNvPr id="23" name="TextBox 22"/>
-          <p:cNvSpPr txBox="1"/>
-          <p:nvPr/>
-        </p:nvSpPr>
-        <p:spPr>
-          <a:xfrm>
-            <a:off x="9354312" y="2176272"/>
-            <a:ext cx="777240" cy="320040"/>
-          </a:xfrm>
-          <a:prstGeom prst="rect">
-            <a:avLst/>
-          </a:prstGeom>
-          <a:noFill/>
-        </p:spPr>
-        <p:txBody>
-          <a:bodyPr wrap="square">
-            <a:spAutoFit/>
-          </a:bodyPr>
-          <a:lstStyle/>
-          <a:p>
-            <a:pPr algn="l"/>
-            <a:r>
-              <a:rPr sz="1600" b="1">
-                <a:solidFill>
-                  <a:srgbClr val="2DD4BF"/>
-                </a:solidFill>
-                <a:latin typeface="Aptos"/>
-              </a:rPr>
-              <a:t>7</a:t>
-            </a:r>
-          </a:p>
-        </p:txBody>
-      </p:sp>
-      <p:sp>
-        <p:nvSpPr>
-          <p:cNvPr id="24" name="TextBox 23"/>
-          <p:cNvSpPr txBox="1"/>
-          <p:nvPr/>
-        </p:nvSpPr>
-        <p:spPr>
-          <a:xfrm>
-            <a:off x="9354312" y="2606040"/>
-            <a:ext cx="777240" cy="365759"/>
-          </a:xfrm>
-          <a:prstGeom prst="rect">
-            <a:avLst/>
-          </a:prstGeom>
-          <a:noFill/>
-        </p:spPr>
-        <p:txBody>
-          <a:bodyPr wrap="square">
-            <a:spAutoFit/>
-          </a:bodyPr>
-          <a:lstStyle/>
-          <a:p>
-            <a:pPr algn="l"/>
-            <a:r>
-              <a:rPr sz="1200" b="0">
-                <a:solidFill>
-                  <a:srgbClr val="E5EDF7"/>
-                </a:solidFill>
-                <a:latin typeface="Aptos"/>
-              </a:rPr>
-              <a:t>Retrieve</a:t>
-            </a:r>
-          </a:p>
-        </p:txBody>
-      </p:sp>
-      <p:sp>
-        <p:nvSpPr>
-          <p:cNvPr id="25" name="Rounded Rectangle 24"/>
-          <p:cNvSpPr/>
-          <p:nvPr/>
-        </p:nvSpPr>
-        <p:spPr>
-          <a:xfrm>
-            <a:off x="10616184" y="2011680"/>
-            <a:ext cx="1143000" cy="1097280"/>
-          </a:xfrm>
-          <a:prstGeom prst="roundRect">
-            <a:avLst/>
-          </a:prstGeom>
-          <a:solidFill>
-            <a:srgbClr val="111A2D"/>
-          </a:solidFill>
-          <a:ln>
-            <a:solidFill>
-              <a:srgbClr val="2D3A52"/>
-            </a:solidFill>
-          </a:ln>
-        </p:spPr>
-        <p:style>
-          <a:lnRef idx="1">
-            <a:schemeClr val="accent1"/>
-          </a:lnRef>
-          <a:fillRef idx="3">
-            <a:schemeClr val="accent1"/>
-          </a:fillRef>
-          <a:effectRef idx="2">
-            <a:schemeClr val="accent1"/>
-          </a:effectRef>
-          <a:fontRef idx="minor">
-            <a:schemeClr val="lt1"/>
-          </a:fontRef>
-        </p:style>
-        <p:txBody>
-          <a:bodyPr rtlCol="0" anchor="ctr"/>
-          <a:lstStyle/>
-          <a:p>
-            <a:pPr algn="ctr"/>
-          </a:p>
-        </p:txBody>
-      </p:sp>
-      <p:sp>
-        <p:nvSpPr>
-          <p:cNvPr id="26" name="TextBox 25"/>
-          <p:cNvSpPr txBox="1"/>
-          <p:nvPr/>
-        </p:nvSpPr>
-        <p:spPr>
-          <a:xfrm>
-            <a:off x="10799064" y="2176272"/>
-            <a:ext cx="777240" cy="320040"/>
-          </a:xfrm>
-          <a:prstGeom prst="rect">
-            <a:avLst/>
-          </a:prstGeom>
-          <a:noFill/>
-        </p:spPr>
-        <p:txBody>
-          <a:bodyPr wrap="square">
-            <a:spAutoFit/>
-          </a:bodyPr>
-          <a:lstStyle/>
-          <a:p>
-            <a:pPr algn="l"/>
-            <a:r>
-              <a:rPr sz="1600" b="1">
-                <a:solidFill>
-                  <a:srgbClr val="2DD4BF"/>
-                </a:solidFill>
-                <a:latin typeface="Aptos"/>
-              </a:rPr>
-              <a:t>8</a:t>
-            </a:r>
-          </a:p>
-        </p:txBody>
-      </p:sp>
-      <p:sp>
-        <p:nvSpPr>
-          <p:cNvPr id="27" name="TextBox 26"/>
-          <p:cNvSpPr txBox="1"/>
-          <p:nvPr/>
-        </p:nvSpPr>
-        <p:spPr>
-          <a:xfrm>
-            <a:off x="10799064" y="2606040"/>
-            <a:ext cx="777240" cy="365759"/>
-          </a:xfrm>
-          <a:prstGeom prst="rect">
-            <a:avLst/>
-          </a:prstGeom>
-          <a:noFill/>
-        </p:spPr>
-        <p:txBody>
-          <a:bodyPr wrap="square">
-            <a:spAutoFit/>
-          </a:bodyPr>
-          <a:lstStyle/>
-          <a:p>
-            <a:pPr algn="l"/>
-            <a:r>
-              <a:rPr sz="1200" b="0">
-                <a:solidFill>
-                  <a:srgbClr val="E5EDF7"/>
-                </a:solidFill>
-                <a:latin typeface="Aptos"/>
-              </a:rPr>
-              <a:t>Cite</a:t>
-            </a:r>
-          </a:p>
-        </p:txBody>
-      </p:sp>
-      <p:sp>
-        <p:nvSpPr>
-          <p:cNvPr id="28" name="TextBox 27"/>
-          <p:cNvSpPr txBox="1"/>
-          <p:nvPr/>
-        </p:nvSpPr>
-        <p:spPr>
-          <a:xfrm>
-            <a:off x="914400" y="4114800"/>
-            <a:ext cx="10241280" cy="457200"/>
-          </a:xfrm>
-          <a:prstGeom prst="rect">
-            <a:avLst/>
-          </a:prstGeom>
-          <a:noFill/>
-        </p:spPr>
-        <p:txBody>
-          <a:bodyPr wrap="square">
-            <a:spAutoFit/>
-          </a:bodyPr>
-          <a:lstStyle/>
-          <a:p>
-            <a:pPr algn="ctr"/>
-            <a:r>
-              <a:rPr sz="1600" b="0">
-                <a:solidFill>
-                  <a:srgbClr val="E5EDF7"/>
-                </a:solidFill>
-                <a:latin typeface="Aptos"/>
-              </a:rPr>
-              <a:t>Processing status is persisted as PENDING / PROCESSING / READY / FAILED with safe retry visibility.</a:t>
+              <a:t>Audit logs
+Latency and token telemetry
+Tenant quotas
+Admin center
+IDOR simulator</a:t>
             </a:r>
           </a:p>
         </p:txBody>
@@ -5894,7 +8426,7 @@
                 </a:solidFill>
                 <a:latin typeface="Aptos"/>
               </a:rPr>
-              <a:t>Security model</a:t>
+              <a:t>Architecture</a:t>
             </a:r>
           </a:p>
         </p:txBody>
@@ -5929,7 +8461,7 @@
                 </a:solidFill>
                 <a:latin typeface="Aptos"/>
               </a:rPr>
-              <a:t>Verified identity and server-side scoping protect every workspace.</a:t>
+              <a:t>Shared backend and database; tenant identity is derived from authenticated state.</a:t>
             </a:r>
           </a:p>
         </p:txBody>
@@ -5942,8 +8474,8 @@
         </p:nvSpPr>
         <p:spPr>
           <a:xfrm>
-            <a:off x="685800" y="1600200"/>
-            <a:ext cx="3474720" cy="3337560"/>
+            <a:off x="640080" y="1600200"/>
+            <a:ext cx="2377440" cy="1234440"/>
           </a:xfrm>
           <a:prstGeom prst="roundRect">
             <a:avLst/>
@@ -5987,8 +8519,8 @@
         </p:nvSpPr>
         <p:spPr>
           <a:xfrm>
-            <a:off x="868680" y="1764792"/>
-            <a:ext cx="3108960" cy="320040"/>
+            <a:off x="822959" y="1764792"/>
+            <a:ext cx="2011680" cy="320040"/>
           </a:xfrm>
           <a:prstGeom prst="rect">
             <a:avLst/>
@@ -6009,7 +8541,7 @@
                 </a:solidFill>
                 <a:latin typeface="Aptos"/>
               </a:rPr>
-              <a:t>Email verification</a:t>
+              <a:t>Next.js</a:t>
             </a:r>
           </a:p>
         </p:txBody>
@@ -6022,8 +8554,8 @@
         </p:nvSpPr>
         <p:spPr>
           <a:xfrm>
-            <a:off x="868680" y="2194560"/>
-            <a:ext cx="3108960" cy="2606039"/>
+            <a:off x="822959" y="2194560"/>
+            <a:ext cx="2011680" cy="502920"/>
           </a:xfrm>
           <a:prstGeom prst="rect">
             <a:avLst/>
@@ -6044,7 +8576,7 @@
                 </a:solidFill>
                 <a:latin typeface="Aptos"/>
               </a:rPr>
-              <a:t>OTP is cryptographically random, hashed at rest, expires after five minutes, and is rate limited.</a:t>
+              <a:t>Dark-first web dashboard</a:t>
             </a:r>
           </a:p>
         </p:txBody>
@@ -6057,8 +8589,8 @@
         </p:nvSpPr>
         <p:spPr>
           <a:xfrm>
-            <a:off x="4389120" y="1600200"/>
-            <a:ext cx="3474720" cy="3337560"/>
+            <a:off x="3337560" y="1600200"/>
+            <a:ext cx="2377440" cy="1234440"/>
           </a:xfrm>
           <a:prstGeom prst="roundRect">
             <a:avLst/>
@@ -6102,8 +8634,8 @@
         </p:nvSpPr>
         <p:spPr>
           <a:xfrm>
-            <a:off x="4572000" y="1764792"/>
-            <a:ext cx="3108960" cy="320040"/>
+            <a:off x="3520440" y="1764792"/>
+            <a:ext cx="2011680" cy="320040"/>
           </a:xfrm>
           <a:prstGeom prst="rect">
             <a:avLst/>
@@ -6124,7 +8656,7 @@
                 </a:solidFill>
                 <a:latin typeface="Aptos"/>
               </a:rPr>
-              <a:t>Tenant isolation</a:t>
+              <a:t>FastAPI</a:t>
             </a:r>
           </a:p>
         </p:txBody>
@@ -6137,8 +8669,8 @@
         </p:nvSpPr>
         <p:spPr>
           <a:xfrm>
-            <a:off x="4572000" y="2194560"/>
-            <a:ext cx="3108960" cy="2606039"/>
+            <a:off x="3520440" y="2194560"/>
+            <a:ext cx="2011680" cy="502920"/>
           </a:xfrm>
           <a:prstGeom prst="rect">
             <a:avLst/>
@@ -6159,7 +8691,7 @@
                 </a:solidFill>
                 <a:latin typeface="Aptos"/>
               </a:rPr>
-              <a:t>Documents, chunks, conversations, logs, and retrieval queries require the authenticated tenant scope.</a:t>
+              <a:t>Auth, RBAC, tenant guards</a:t>
             </a:r>
           </a:p>
         </p:txBody>
@@ -6172,8 +8704,8 @@
         </p:nvSpPr>
         <p:spPr>
           <a:xfrm>
-            <a:off x="8092440" y="1600200"/>
-            <a:ext cx="3474720" cy="3337560"/>
+            <a:off x="6035040" y="1600200"/>
+            <a:ext cx="2377440" cy="1234440"/>
           </a:xfrm>
           <a:prstGeom prst="roundRect">
             <a:avLst/>
@@ -6217,8 +8749,8 @@
         </p:nvSpPr>
         <p:spPr>
           <a:xfrm>
-            <a:off x="8275319" y="1764792"/>
-            <a:ext cx="3108960" cy="320040"/>
+            <a:off x="6217920" y="1764792"/>
+            <a:ext cx="2011680" cy="320040"/>
           </a:xfrm>
           <a:prstGeom prst="rect">
             <a:avLst/>
@@ -6239,7 +8771,7 @@
                 </a:solidFill>
                 <a:latin typeface="Aptos"/>
               </a:rPr>
-              <a:t>Auditability</a:t>
+              <a:t>SQLAlchemy</a:t>
             </a:r>
           </a:p>
         </p:txBody>
@@ -6252,8 +8784,8 @@
         </p:nvSpPr>
         <p:spPr>
           <a:xfrm>
-            <a:off x="8275319" y="2194560"/>
-            <a:ext cx="3108960" cy="2606039"/>
+            <a:off x="6217920" y="2194560"/>
+            <a:ext cx="2011680" cy="502920"/>
           </a:xfrm>
           <a:prstGeom prst="rect">
             <a:avLst/>
@@ -6274,7 +8806,192 @@
                 </a:solidFill>
                 <a:latin typeface="Aptos"/>
               </a:rPr>
-              <a:t>Login, upload, deletion, query, and cross-tenant probes are recorded for review.</a:t>
+              <a:t>Shared relational data</a:t>
+            </a:r>
+          </a:p>
+        </p:txBody>
+      </p:sp>
+      <p:sp>
+        <p:nvSpPr>
+          <p:cNvPr id="13" name="Rounded Rectangle 12"/>
+          <p:cNvSpPr/>
+          <p:nvPr/>
+        </p:nvSpPr>
+        <p:spPr>
+          <a:xfrm>
+            <a:off x="8732520" y="1600200"/>
+            <a:ext cx="2377440" cy="1234440"/>
+          </a:xfrm>
+          <a:prstGeom prst="roundRect">
+            <a:avLst/>
+          </a:prstGeom>
+          <a:solidFill>
+            <a:srgbClr val="111A2D"/>
+          </a:solidFill>
+          <a:ln>
+            <a:solidFill>
+              <a:srgbClr val="2D3A52"/>
+            </a:solidFill>
+          </a:ln>
+        </p:spPr>
+        <p:style>
+          <a:lnRef idx="1">
+            <a:schemeClr val="accent1"/>
+          </a:lnRef>
+          <a:fillRef idx="3">
+            <a:schemeClr val="accent1"/>
+          </a:fillRef>
+          <a:effectRef idx="2">
+            <a:schemeClr val="accent1"/>
+          </a:effectRef>
+          <a:fontRef idx="minor">
+            <a:schemeClr val="lt1"/>
+          </a:fontRef>
+        </p:style>
+        <p:txBody>
+          <a:bodyPr rtlCol="0" anchor="ctr"/>
+          <a:lstStyle/>
+          <a:p>
+            <a:pPr algn="ctr"/>
+          </a:p>
+        </p:txBody>
+      </p:sp>
+      <p:sp>
+        <p:nvSpPr>
+          <p:cNvPr id="14" name="TextBox 13"/>
+          <p:cNvSpPr txBox="1"/>
+          <p:nvPr/>
+        </p:nvSpPr>
+        <p:spPr>
+          <a:xfrm>
+            <a:off x="8915400" y="1764792"/>
+            <a:ext cx="2011680" cy="320040"/>
+          </a:xfrm>
+          <a:prstGeom prst="rect">
+            <a:avLst/>
+          </a:prstGeom>
+          <a:noFill/>
+        </p:spPr>
+        <p:txBody>
+          <a:bodyPr wrap="square">
+            <a:spAutoFit/>
+          </a:bodyPr>
+          <a:lstStyle/>
+          <a:p>
+            <a:pPr algn="l"/>
+            <a:r>
+              <a:rPr sz="1600" b="1">
+                <a:solidFill>
+                  <a:srgbClr val="2DD4BF"/>
+                </a:solidFill>
+                <a:latin typeface="Aptos"/>
+              </a:rPr>
+              <a:t>RAG</a:t>
+            </a:r>
+          </a:p>
+        </p:txBody>
+      </p:sp>
+      <p:sp>
+        <p:nvSpPr>
+          <p:cNvPr id="15" name="TextBox 14"/>
+          <p:cNvSpPr txBox="1"/>
+          <p:nvPr/>
+        </p:nvSpPr>
+        <p:spPr>
+          <a:xfrm>
+            <a:off x="8915400" y="2194560"/>
+            <a:ext cx="2011680" cy="502920"/>
+          </a:xfrm>
+          <a:prstGeom prst="rect">
+            <a:avLst/>
+          </a:prstGeom>
+          <a:noFill/>
+        </p:spPr>
+        <p:txBody>
+          <a:bodyPr wrap="square">
+            <a:spAutoFit/>
+          </a:bodyPr>
+          <a:lstStyle/>
+          <a:p>
+            <a:pPr algn="l"/>
+            <a:r>
+              <a:rPr sz="1200" b="0">
+                <a:solidFill>
+                  <a:srgbClr val="E5EDF7"/>
+                </a:solidFill>
+                <a:latin typeface="Aptos"/>
+              </a:rPr>
+              <a:t>Scoped retrieval + citations</a:t>
+            </a:r>
+          </a:p>
+        </p:txBody>
+      </p:sp>
+      <p:sp>
+        <p:nvSpPr>
+          <p:cNvPr id="16" name="TextBox 15"/>
+          <p:cNvSpPr txBox="1"/>
+          <p:nvPr/>
+        </p:nvSpPr>
+        <p:spPr>
+          <a:xfrm>
+            <a:off x="914400" y="3749039"/>
+            <a:ext cx="10241280" cy="640080"/>
+          </a:xfrm>
+          <a:prstGeom prst="rect">
+            <a:avLst/>
+          </a:prstGeom>
+          <a:noFill/>
+        </p:spPr>
+        <p:txBody>
+          <a:bodyPr wrap="square">
+            <a:spAutoFit/>
+          </a:bodyPr>
+          <a:lstStyle/>
+          <a:p>
+            <a:pPr algn="ctr"/>
+            <a:r>
+              <a:rPr sz="2000" b="1">
+                <a:solidFill>
+                  <a:srgbClr val="2DD4BF"/>
+                </a:solidFill>
+                <a:latin typeface="Aptos"/>
+              </a:rPr>
+              <a:t>Frontend → API gateway → database and document storage → RAG engine → grounded response</a:t>
+            </a:r>
+          </a:p>
+        </p:txBody>
+      </p:sp>
+      <p:sp>
+        <p:nvSpPr>
+          <p:cNvPr id="17" name="TextBox 16"/>
+          <p:cNvSpPr txBox="1"/>
+          <p:nvPr/>
+        </p:nvSpPr>
+        <p:spPr>
+          <a:xfrm>
+            <a:off x="914400" y="4754880"/>
+            <a:ext cx="10241280" cy="411480"/>
+          </a:xfrm>
+          <a:prstGeom prst="rect">
+            <a:avLst/>
+          </a:prstGeom>
+          <a:noFill/>
+        </p:spPr>
+        <p:txBody>
+          <a:bodyPr wrap="square">
+            <a:spAutoFit/>
+          </a:bodyPr>
+          <a:lstStyle/>
+          <a:p>
+            <a:pPr algn="ctr"/>
+            <a:r>
+              <a:rPr sz="1400" b="0">
+                <a:solidFill>
+                  <a:srgbClr val="E5EDF7"/>
+                </a:solidFill>
+                <a:latin typeface="Aptos"/>
+              </a:rPr>
+              <a:t>All tenant-sensitive paths validate ownership server-side; frontend IDs are never trusted.</a:t>
             </a:r>
           </a:p>
         </p:txBody>
@@ -6335,7 +9052,7 @@
                 </a:solidFill>
                 <a:latin typeface="Aptos"/>
               </a:rPr>
-              <a:t>Live demo path</a:t>
+              <a:t>Workflow automation</a:t>
             </a:r>
           </a:p>
         </p:txBody>
@@ -6370,217 +9087,962 @@
                 </a:solidFill>
                 <a:latin typeface="Aptos"/>
               </a:rPr>
-              <a:t>Use real data and label anything not yet deployed.</a:t>
-            </a:r>
-          </a:p>
-        </p:txBody>
-      </p:sp>
-      <p:sp>
-        <p:nvSpPr>
-          <p:cNvPr id="4" name="TextBox 3"/>
-          <p:cNvSpPr txBox="1"/>
-          <p:nvPr/>
-        </p:nvSpPr>
-        <p:spPr>
-          <a:xfrm>
-            <a:off x="914400" y="1645920"/>
-            <a:ext cx="4754880" cy="457200"/>
-          </a:xfrm>
-          <a:prstGeom prst="rect">
-            <a:avLst/>
-          </a:prstGeom>
-          <a:noFill/>
-        </p:spPr>
-        <p:txBody>
-          <a:bodyPr wrap="square">
-            <a:spAutoFit/>
-          </a:bodyPr>
-          <a:lstStyle/>
-          <a:p>
-            <a:pPr algn="l"/>
-            <a:r>
-              <a:rPr sz="2000" b="1">
+              <a:t>Document Upload → File Validation → Extraction → Chunking → Embeddings → Tenant-Scoped Indexing</a:t>
+            </a:r>
+          </a:p>
+        </p:txBody>
+      </p:sp>
+      <p:sp>
+        <p:nvSpPr>
+          <p:cNvPr id="4" name="Rounded Rectangle 3"/>
+          <p:cNvSpPr/>
+          <p:nvPr/>
+        </p:nvSpPr>
+        <p:spPr>
+          <a:xfrm>
+            <a:off x="502920" y="2011680"/>
+            <a:ext cx="1143000" cy="1097280"/>
+          </a:xfrm>
+          <a:prstGeom prst="roundRect">
+            <a:avLst/>
+          </a:prstGeom>
+          <a:solidFill>
+            <a:srgbClr val="111A2D"/>
+          </a:solidFill>
+          <a:ln>
+            <a:solidFill>
+              <a:srgbClr val="2D3A52"/>
+            </a:solidFill>
+          </a:ln>
+        </p:spPr>
+        <p:style>
+          <a:lnRef idx="1">
+            <a:schemeClr val="accent1"/>
+          </a:lnRef>
+          <a:fillRef idx="3">
+            <a:schemeClr val="accent1"/>
+          </a:fillRef>
+          <a:effectRef idx="2">
+            <a:schemeClr val="accent1"/>
+          </a:effectRef>
+          <a:fontRef idx="minor">
+            <a:schemeClr val="lt1"/>
+          </a:fontRef>
+        </p:style>
+        <p:txBody>
+          <a:bodyPr rtlCol="0" anchor="ctr"/>
+          <a:lstStyle/>
+          <a:p>
+            <a:pPr algn="ctr"/>
+          </a:p>
+        </p:txBody>
+      </p:sp>
+      <p:sp>
+        <p:nvSpPr>
+          <p:cNvPr id="5" name="TextBox 4"/>
+          <p:cNvSpPr txBox="1"/>
+          <p:nvPr/>
+        </p:nvSpPr>
+        <p:spPr>
+          <a:xfrm>
+            <a:off x="685800" y="2176272"/>
+            <a:ext cx="777240" cy="320040"/>
+          </a:xfrm>
+          <a:prstGeom prst="rect">
+            <a:avLst/>
+          </a:prstGeom>
+          <a:noFill/>
+        </p:spPr>
+        <p:txBody>
+          <a:bodyPr wrap="square">
+            <a:spAutoFit/>
+          </a:bodyPr>
+          <a:lstStyle/>
+          <a:p>
+            <a:pPr algn="l"/>
+            <a:r>
+              <a:rPr sz="1600" b="1">
+                <a:solidFill>
+                  <a:srgbClr val="2DD4BF"/>
+                </a:solidFill>
+                <a:latin typeface="Aptos"/>
+              </a:rPr>
+              <a:t>1</a:t>
+            </a:r>
+          </a:p>
+        </p:txBody>
+      </p:sp>
+      <p:sp>
+        <p:nvSpPr>
+          <p:cNvPr id="6" name="TextBox 5"/>
+          <p:cNvSpPr txBox="1"/>
+          <p:nvPr/>
+        </p:nvSpPr>
+        <p:spPr>
+          <a:xfrm>
+            <a:off x="685800" y="2606040"/>
+            <a:ext cx="777240" cy="365759"/>
+          </a:xfrm>
+          <a:prstGeom prst="rect">
+            <a:avLst/>
+          </a:prstGeom>
+          <a:noFill/>
+        </p:spPr>
+        <p:txBody>
+          <a:bodyPr wrap="square">
+            <a:spAutoFit/>
+          </a:bodyPr>
+          <a:lstStyle/>
+          <a:p>
+            <a:pPr algn="l"/>
+            <a:r>
+              <a:rPr sz="1200" b="0">
                 <a:solidFill>
                   <a:srgbClr val="E5EDF7"/>
                 </a:solidFill>
                 <a:latin typeface="Aptos"/>
               </a:rPr>
-              <a:t>1  Register company</a:t>
-            </a:r>
-          </a:p>
-        </p:txBody>
-      </p:sp>
-      <p:sp>
-        <p:nvSpPr>
-          <p:cNvPr id="5" name="TextBox 4"/>
-          <p:cNvSpPr txBox="1"/>
-          <p:nvPr/>
-        </p:nvSpPr>
-        <p:spPr>
-          <a:xfrm>
-            <a:off x="914400" y="2286000"/>
-            <a:ext cx="6217920" cy="457200"/>
-          </a:xfrm>
-          <a:prstGeom prst="rect">
-            <a:avLst/>
-          </a:prstGeom>
-          <a:noFill/>
-        </p:spPr>
-        <p:txBody>
-          <a:bodyPr wrap="square">
-            <a:spAutoFit/>
-          </a:bodyPr>
-          <a:lstStyle/>
-          <a:p>
-            <a:pPr algn="l"/>
-            <a:r>
-              <a:rPr sz="2000" b="1">
+              <a:t>Upload</a:t>
+            </a:r>
+          </a:p>
+        </p:txBody>
+      </p:sp>
+      <p:sp>
+        <p:nvSpPr>
+          <p:cNvPr id="7" name="Rounded Rectangle 6"/>
+          <p:cNvSpPr/>
+          <p:nvPr/>
+        </p:nvSpPr>
+        <p:spPr>
+          <a:xfrm>
+            <a:off x="1947672" y="2011680"/>
+            <a:ext cx="1143000" cy="1097280"/>
+          </a:xfrm>
+          <a:prstGeom prst="roundRect">
+            <a:avLst/>
+          </a:prstGeom>
+          <a:solidFill>
+            <a:srgbClr val="111A2D"/>
+          </a:solidFill>
+          <a:ln>
+            <a:solidFill>
+              <a:srgbClr val="2D3A52"/>
+            </a:solidFill>
+          </a:ln>
+        </p:spPr>
+        <p:style>
+          <a:lnRef idx="1">
+            <a:schemeClr val="accent1"/>
+          </a:lnRef>
+          <a:fillRef idx="3">
+            <a:schemeClr val="accent1"/>
+          </a:fillRef>
+          <a:effectRef idx="2">
+            <a:schemeClr val="accent1"/>
+          </a:effectRef>
+          <a:fontRef idx="minor">
+            <a:schemeClr val="lt1"/>
+          </a:fontRef>
+        </p:style>
+        <p:txBody>
+          <a:bodyPr rtlCol="0" anchor="ctr"/>
+          <a:lstStyle/>
+          <a:p>
+            <a:pPr algn="ctr"/>
+          </a:p>
+        </p:txBody>
+      </p:sp>
+      <p:sp>
+        <p:nvSpPr>
+          <p:cNvPr id="8" name="TextBox 7"/>
+          <p:cNvSpPr txBox="1"/>
+          <p:nvPr/>
+        </p:nvSpPr>
+        <p:spPr>
+          <a:xfrm>
+            <a:off x="2130552" y="2176272"/>
+            <a:ext cx="777240" cy="320040"/>
+          </a:xfrm>
+          <a:prstGeom prst="rect">
+            <a:avLst/>
+          </a:prstGeom>
+          <a:noFill/>
+        </p:spPr>
+        <p:txBody>
+          <a:bodyPr wrap="square">
+            <a:spAutoFit/>
+          </a:bodyPr>
+          <a:lstStyle/>
+          <a:p>
+            <a:pPr algn="l"/>
+            <a:r>
+              <a:rPr sz="1600" b="1">
+                <a:solidFill>
+                  <a:srgbClr val="2DD4BF"/>
+                </a:solidFill>
+                <a:latin typeface="Aptos"/>
+              </a:rPr>
+              <a:t>2</a:t>
+            </a:r>
+          </a:p>
+        </p:txBody>
+      </p:sp>
+      <p:sp>
+        <p:nvSpPr>
+          <p:cNvPr id="9" name="TextBox 8"/>
+          <p:cNvSpPr txBox="1"/>
+          <p:nvPr/>
+        </p:nvSpPr>
+        <p:spPr>
+          <a:xfrm>
+            <a:off x="2130552" y="2606040"/>
+            <a:ext cx="777240" cy="365759"/>
+          </a:xfrm>
+          <a:prstGeom prst="rect">
+            <a:avLst/>
+          </a:prstGeom>
+          <a:noFill/>
+        </p:spPr>
+        <p:txBody>
+          <a:bodyPr wrap="square">
+            <a:spAutoFit/>
+          </a:bodyPr>
+          <a:lstStyle/>
+          <a:p>
+            <a:pPr algn="l"/>
+            <a:r>
+              <a:rPr sz="1200" b="0">
                 <a:solidFill>
                   <a:srgbClr val="E5EDF7"/>
                 </a:solidFill>
                 <a:latin typeface="Aptos"/>
               </a:rPr>
-              <a:t>2  Verify OTP from SMTP or development log</a:t>
-            </a:r>
-          </a:p>
-        </p:txBody>
-      </p:sp>
-      <p:sp>
-        <p:nvSpPr>
-          <p:cNvPr id="6" name="TextBox 5"/>
-          <p:cNvSpPr txBox="1"/>
-          <p:nvPr/>
-        </p:nvSpPr>
-        <p:spPr>
-          <a:xfrm>
-            <a:off x="914400" y="2926080"/>
-            <a:ext cx="6217920" cy="457200"/>
-          </a:xfrm>
-          <a:prstGeom prst="rect">
-            <a:avLst/>
-          </a:prstGeom>
-          <a:noFill/>
-        </p:spPr>
-        <p:txBody>
-          <a:bodyPr wrap="square">
-            <a:spAutoFit/>
-          </a:bodyPr>
-          <a:lstStyle/>
-          <a:p>
-            <a:pPr algn="l"/>
-            <a:r>
-              <a:rPr sz="2000" b="1">
+              <a:t>Validate</a:t>
+            </a:r>
+          </a:p>
+        </p:txBody>
+      </p:sp>
+      <p:sp>
+        <p:nvSpPr>
+          <p:cNvPr id="10" name="Rounded Rectangle 9"/>
+          <p:cNvSpPr/>
+          <p:nvPr/>
+        </p:nvSpPr>
+        <p:spPr>
+          <a:xfrm>
+            <a:off x="3392424" y="2011680"/>
+            <a:ext cx="1143000" cy="1097280"/>
+          </a:xfrm>
+          <a:prstGeom prst="roundRect">
+            <a:avLst/>
+          </a:prstGeom>
+          <a:solidFill>
+            <a:srgbClr val="111A2D"/>
+          </a:solidFill>
+          <a:ln>
+            <a:solidFill>
+              <a:srgbClr val="2D3A52"/>
+            </a:solidFill>
+          </a:ln>
+        </p:spPr>
+        <p:style>
+          <a:lnRef idx="1">
+            <a:schemeClr val="accent1"/>
+          </a:lnRef>
+          <a:fillRef idx="3">
+            <a:schemeClr val="accent1"/>
+          </a:fillRef>
+          <a:effectRef idx="2">
+            <a:schemeClr val="accent1"/>
+          </a:effectRef>
+          <a:fontRef idx="minor">
+            <a:schemeClr val="lt1"/>
+          </a:fontRef>
+        </p:style>
+        <p:txBody>
+          <a:bodyPr rtlCol="0" anchor="ctr"/>
+          <a:lstStyle/>
+          <a:p>
+            <a:pPr algn="ctr"/>
+          </a:p>
+        </p:txBody>
+      </p:sp>
+      <p:sp>
+        <p:nvSpPr>
+          <p:cNvPr id="11" name="TextBox 10"/>
+          <p:cNvSpPr txBox="1"/>
+          <p:nvPr/>
+        </p:nvSpPr>
+        <p:spPr>
+          <a:xfrm>
+            <a:off x="3575304" y="2176272"/>
+            <a:ext cx="777240" cy="320040"/>
+          </a:xfrm>
+          <a:prstGeom prst="rect">
+            <a:avLst/>
+          </a:prstGeom>
+          <a:noFill/>
+        </p:spPr>
+        <p:txBody>
+          <a:bodyPr wrap="square">
+            <a:spAutoFit/>
+          </a:bodyPr>
+          <a:lstStyle/>
+          <a:p>
+            <a:pPr algn="l"/>
+            <a:r>
+              <a:rPr sz="1600" b="1">
+                <a:solidFill>
+                  <a:srgbClr val="2DD4BF"/>
+                </a:solidFill>
+                <a:latin typeface="Aptos"/>
+              </a:rPr>
+              <a:t>3</a:t>
+            </a:r>
+          </a:p>
+        </p:txBody>
+      </p:sp>
+      <p:sp>
+        <p:nvSpPr>
+          <p:cNvPr id="12" name="TextBox 11"/>
+          <p:cNvSpPr txBox="1"/>
+          <p:nvPr/>
+        </p:nvSpPr>
+        <p:spPr>
+          <a:xfrm>
+            <a:off x="3575304" y="2606040"/>
+            <a:ext cx="777240" cy="365759"/>
+          </a:xfrm>
+          <a:prstGeom prst="rect">
+            <a:avLst/>
+          </a:prstGeom>
+          <a:noFill/>
+        </p:spPr>
+        <p:txBody>
+          <a:bodyPr wrap="square">
+            <a:spAutoFit/>
+          </a:bodyPr>
+          <a:lstStyle/>
+          <a:p>
+            <a:pPr algn="l"/>
+            <a:r>
+              <a:rPr sz="1200" b="0">
                 <a:solidFill>
                   <a:srgbClr val="E5EDF7"/>
                 </a:solidFill>
                 <a:latin typeface="Aptos"/>
               </a:rPr>
-              <a:t>3  Upload a PDF/TXT/MD document</a:t>
-            </a:r>
-          </a:p>
-        </p:txBody>
-      </p:sp>
-      <p:sp>
-        <p:nvSpPr>
-          <p:cNvPr id="7" name="TextBox 6"/>
-          <p:cNvSpPr txBox="1"/>
-          <p:nvPr/>
-        </p:nvSpPr>
-        <p:spPr>
-          <a:xfrm>
-            <a:off x="914400" y="3566160"/>
-            <a:ext cx="6858000" cy="457200"/>
-          </a:xfrm>
-          <a:prstGeom prst="rect">
-            <a:avLst/>
-          </a:prstGeom>
-          <a:noFill/>
-        </p:spPr>
-        <p:txBody>
-          <a:bodyPr wrap="square">
-            <a:spAutoFit/>
-          </a:bodyPr>
-          <a:lstStyle/>
-          <a:p>
-            <a:pPr algn="l"/>
-            <a:r>
-              <a:rPr sz="2000" b="1">
+              <a:t>Extract</a:t>
+            </a:r>
+          </a:p>
+        </p:txBody>
+      </p:sp>
+      <p:sp>
+        <p:nvSpPr>
+          <p:cNvPr id="13" name="Rounded Rectangle 12"/>
+          <p:cNvSpPr/>
+          <p:nvPr/>
+        </p:nvSpPr>
+        <p:spPr>
+          <a:xfrm>
+            <a:off x="4837176" y="2011680"/>
+            <a:ext cx="1143000" cy="1097280"/>
+          </a:xfrm>
+          <a:prstGeom prst="roundRect">
+            <a:avLst/>
+          </a:prstGeom>
+          <a:solidFill>
+            <a:srgbClr val="111A2D"/>
+          </a:solidFill>
+          <a:ln>
+            <a:solidFill>
+              <a:srgbClr val="2D3A52"/>
+            </a:solidFill>
+          </a:ln>
+        </p:spPr>
+        <p:style>
+          <a:lnRef idx="1">
+            <a:schemeClr val="accent1"/>
+          </a:lnRef>
+          <a:fillRef idx="3">
+            <a:schemeClr val="accent1"/>
+          </a:fillRef>
+          <a:effectRef idx="2">
+            <a:schemeClr val="accent1"/>
+          </a:effectRef>
+          <a:fontRef idx="minor">
+            <a:schemeClr val="lt1"/>
+          </a:fontRef>
+        </p:style>
+        <p:txBody>
+          <a:bodyPr rtlCol="0" anchor="ctr"/>
+          <a:lstStyle/>
+          <a:p>
+            <a:pPr algn="ctr"/>
+          </a:p>
+        </p:txBody>
+      </p:sp>
+      <p:sp>
+        <p:nvSpPr>
+          <p:cNvPr id="14" name="TextBox 13"/>
+          <p:cNvSpPr txBox="1"/>
+          <p:nvPr/>
+        </p:nvSpPr>
+        <p:spPr>
+          <a:xfrm>
+            <a:off x="5020056" y="2176272"/>
+            <a:ext cx="777240" cy="320040"/>
+          </a:xfrm>
+          <a:prstGeom prst="rect">
+            <a:avLst/>
+          </a:prstGeom>
+          <a:noFill/>
+        </p:spPr>
+        <p:txBody>
+          <a:bodyPr wrap="square">
+            <a:spAutoFit/>
+          </a:bodyPr>
+          <a:lstStyle/>
+          <a:p>
+            <a:pPr algn="l"/>
+            <a:r>
+              <a:rPr sz="1600" b="1">
+                <a:solidFill>
+                  <a:srgbClr val="2DD4BF"/>
+                </a:solidFill>
+                <a:latin typeface="Aptos"/>
+              </a:rPr>
+              <a:t>4</a:t>
+            </a:r>
+          </a:p>
+        </p:txBody>
+      </p:sp>
+      <p:sp>
+        <p:nvSpPr>
+          <p:cNvPr id="15" name="TextBox 14"/>
+          <p:cNvSpPr txBox="1"/>
+          <p:nvPr/>
+        </p:nvSpPr>
+        <p:spPr>
+          <a:xfrm>
+            <a:off x="5020056" y="2606040"/>
+            <a:ext cx="777240" cy="365759"/>
+          </a:xfrm>
+          <a:prstGeom prst="rect">
+            <a:avLst/>
+          </a:prstGeom>
+          <a:noFill/>
+        </p:spPr>
+        <p:txBody>
+          <a:bodyPr wrap="square">
+            <a:spAutoFit/>
+          </a:bodyPr>
+          <a:lstStyle/>
+          <a:p>
+            <a:pPr algn="l"/>
+            <a:r>
+              <a:rPr sz="1200" b="0">
                 <a:solidFill>
                   <a:srgbClr val="E5EDF7"/>
                 </a:solidFill>
                 <a:latin typeface="Aptos"/>
               </a:rPr>
-              <a:t>4  Ask a grounded question and inspect citations</a:t>
-            </a:r>
-          </a:p>
-        </p:txBody>
-      </p:sp>
-      <p:sp>
-        <p:nvSpPr>
-          <p:cNvPr id="8" name="TextBox 7"/>
-          <p:cNvSpPr txBox="1"/>
-          <p:nvPr/>
-        </p:nvSpPr>
-        <p:spPr>
-          <a:xfrm>
-            <a:off x="914400" y="4206240"/>
-            <a:ext cx="7680960" cy="457200"/>
-          </a:xfrm>
-          <a:prstGeom prst="rect">
-            <a:avLst/>
-          </a:prstGeom>
-          <a:noFill/>
-        </p:spPr>
-        <p:txBody>
-          <a:bodyPr wrap="square">
-            <a:spAutoFit/>
-          </a:bodyPr>
-          <a:lstStyle/>
-          <a:p>
-            <a:pPr algn="l"/>
-            <a:r>
-              <a:rPr sz="2000" b="1">
+              <a:t>Chunk</a:t>
+            </a:r>
+          </a:p>
+        </p:txBody>
+      </p:sp>
+      <p:sp>
+        <p:nvSpPr>
+          <p:cNvPr id="16" name="Rounded Rectangle 15"/>
+          <p:cNvSpPr/>
+          <p:nvPr/>
+        </p:nvSpPr>
+        <p:spPr>
+          <a:xfrm>
+            <a:off x="6281928" y="2011680"/>
+            <a:ext cx="1143000" cy="1097280"/>
+          </a:xfrm>
+          <a:prstGeom prst="roundRect">
+            <a:avLst/>
+          </a:prstGeom>
+          <a:solidFill>
+            <a:srgbClr val="111A2D"/>
+          </a:solidFill>
+          <a:ln>
+            <a:solidFill>
+              <a:srgbClr val="2D3A52"/>
+            </a:solidFill>
+          </a:ln>
+        </p:spPr>
+        <p:style>
+          <a:lnRef idx="1">
+            <a:schemeClr val="accent1"/>
+          </a:lnRef>
+          <a:fillRef idx="3">
+            <a:schemeClr val="accent1"/>
+          </a:fillRef>
+          <a:effectRef idx="2">
+            <a:schemeClr val="accent1"/>
+          </a:effectRef>
+          <a:fontRef idx="minor">
+            <a:schemeClr val="lt1"/>
+          </a:fontRef>
+        </p:style>
+        <p:txBody>
+          <a:bodyPr rtlCol="0" anchor="ctr"/>
+          <a:lstStyle/>
+          <a:p>
+            <a:pPr algn="ctr"/>
+          </a:p>
+        </p:txBody>
+      </p:sp>
+      <p:sp>
+        <p:nvSpPr>
+          <p:cNvPr id="17" name="TextBox 16"/>
+          <p:cNvSpPr txBox="1"/>
+          <p:nvPr/>
+        </p:nvSpPr>
+        <p:spPr>
+          <a:xfrm>
+            <a:off x="6464808" y="2176272"/>
+            <a:ext cx="777240" cy="320040"/>
+          </a:xfrm>
+          <a:prstGeom prst="rect">
+            <a:avLst/>
+          </a:prstGeom>
+          <a:noFill/>
+        </p:spPr>
+        <p:txBody>
+          <a:bodyPr wrap="square">
+            <a:spAutoFit/>
+          </a:bodyPr>
+          <a:lstStyle/>
+          <a:p>
+            <a:pPr algn="l"/>
+            <a:r>
+              <a:rPr sz="1600" b="1">
+                <a:solidFill>
+                  <a:srgbClr val="2DD4BF"/>
+                </a:solidFill>
+                <a:latin typeface="Aptos"/>
+              </a:rPr>
+              <a:t>5</a:t>
+            </a:r>
+          </a:p>
+        </p:txBody>
+      </p:sp>
+      <p:sp>
+        <p:nvSpPr>
+          <p:cNvPr id="18" name="TextBox 17"/>
+          <p:cNvSpPr txBox="1"/>
+          <p:nvPr/>
+        </p:nvSpPr>
+        <p:spPr>
+          <a:xfrm>
+            <a:off x="6464808" y="2606040"/>
+            <a:ext cx="777240" cy="365759"/>
+          </a:xfrm>
+          <a:prstGeom prst="rect">
+            <a:avLst/>
+          </a:prstGeom>
+          <a:noFill/>
+        </p:spPr>
+        <p:txBody>
+          <a:bodyPr wrap="square">
+            <a:spAutoFit/>
+          </a:bodyPr>
+          <a:lstStyle/>
+          <a:p>
+            <a:pPr algn="l"/>
+            <a:r>
+              <a:rPr sz="1200" b="0">
                 <a:solidFill>
                   <a:srgbClr val="E5EDF7"/>
                 </a:solidFill>
                 <a:latin typeface="Aptos"/>
               </a:rPr>
-              <a:t>5  Register a second company and verify isolation</a:t>
-            </a:r>
-          </a:p>
-        </p:txBody>
-      </p:sp>
-      <p:sp>
-        <p:nvSpPr>
-          <p:cNvPr id="9" name="TextBox 8"/>
-          <p:cNvSpPr txBox="1"/>
-          <p:nvPr/>
-        </p:nvSpPr>
-        <p:spPr>
-          <a:xfrm>
-            <a:off x="914400" y="5715000"/>
-            <a:ext cx="10058400" cy="320040"/>
-          </a:xfrm>
-          <a:prstGeom prst="rect">
-            <a:avLst/>
-          </a:prstGeom>
-          <a:noFill/>
-        </p:spPr>
-        <p:txBody>
-          <a:bodyPr wrap="square">
-            <a:spAutoFit/>
-          </a:bodyPr>
-          <a:lstStyle/>
-          <a:p>
-            <a:pPr algn="l"/>
-            <a:r>
-              <a:rPr sz="1300" b="0">
+              <a:t>Embed</a:t>
+            </a:r>
+          </a:p>
+        </p:txBody>
+      </p:sp>
+      <p:sp>
+        <p:nvSpPr>
+          <p:cNvPr id="19" name="Rounded Rectangle 18"/>
+          <p:cNvSpPr/>
+          <p:nvPr/>
+        </p:nvSpPr>
+        <p:spPr>
+          <a:xfrm>
+            <a:off x="7726680" y="2011680"/>
+            <a:ext cx="1143000" cy="1097280"/>
+          </a:xfrm>
+          <a:prstGeom prst="roundRect">
+            <a:avLst/>
+          </a:prstGeom>
+          <a:solidFill>
+            <a:srgbClr val="111A2D"/>
+          </a:solidFill>
+          <a:ln>
+            <a:solidFill>
+              <a:srgbClr val="2D3A52"/>
+            </a:solidFill>
+          </a:ln>
+        </p:spPr>
+        <p:style>
+          <a:lnRef idx="1">
+            <a:schemeClr val="accent1"/>
+          </a:lnRef>
+          <a:fillRef idx="3">
+            <a:schemeClr val="accent1"/>
+          </a:fillRef>
+          <a:effectRef idx="2">
+            <a:schemeClr val="accent1"/>
+          </a:effectRef>
+          <a:fontRef idx="minor">
+            <a:schemeClr val="lt1"/>
+          </a:fontRef>
+        </p:style>
+        <p:txBody>
+          <a:bodyPr rtlCol="0" anchor="ctr"/>
+          <a:lstStyle/>
+          <a:p>
+            <a:pPr algn="ctr"/>
+          </a:p>
+        </p:txBody>
+      </p:sp>
+      <p:sp>
+        <p:nvSpPr>
+          <p:cNvPr id="20" name="TextBox 19"/>
+          <p:cNvSpPr txBox="1"/>
+          <p:nvPr/>
+        </p:nvSpPr>
+        <p:spPr>
+          <a:xfrm>
+            <a:off x="7909560" y="2176272"/>
+            <a:ext cx="777240" cy="320040"/>
+          </a:xfrm>
+          <a:prstGeom prst="rect">
+            <a:avLst/>
+          </a:prstGeom>
+          <a:noFill/>
+        </p:spPr>
+        <p:txBody>
+          <a:bodyPr wrap="square">
+            <a:spAutoFit/>
+          </a:bodyPr>
+          <a:lstStyle/>
+          <a:p>
+            <a:pPr algn="l"/>
+            <a:r>
+              <a:rPr sz="1600" b="1">
                 <a:solidFill>
                   <a:srgbClr val="2DD4BF"/>
                 </a:solidFill>
                 <a:latin typeface="Aptos"/>
               </a:rPr>
-              <a:t>Telegram bot: integration point documented; no fabricated bot or token.</a:t>
+              <a:t>6</a:t>
+            </a:r>
+          </a:p>
+        </p:txBody>
+      </p:sp>
+      <p:sp>
+        <p:nvSpPr>
+          <p:cNvPr id="21" name="TextBox 20"/>
+          <p:cNvSpPr txBox="1"/>
+          <p:nvPr/>
+        </p:nvSpPr>
+        <p:spPr>
+          <a:xfrm>
+            <a:off x="7909560" y="2606040"/>
+            <a:ext cx="777240" cy="365759"/>
+          </a:xfrm>
+          <a:prstGeom prst="rect">
+            <a:avLst/>
+          </a:prstGeom>
+          <a:noFill/>
+        </p:spPr>
+        <p:txBody>
+          <a:bodyPr wrap="square">
+            <a:spAutoFit/>
+          </a:bodyPr>
+          <a:lstStyle/>
+          <a:p>
+            <a:pPr algn="l"/>
+            <a:r>
+              <a:rPr sz="1200" b="0">
+                <a:solidFill>
+                  <a:srgbClr val="E5EDF7"/>
+                </a:solidFill>
+                <a:latin typeface="Aptos"/>
+              </a:rPr>
+              <a:t>Index</a:t>
+            </a:r>
+          </a:p>
+        </p:txBody>
+      </p:sp>
+      <p:sp>
+        <p:nvSpPr>
+          <p:cNvPr id="22" name="Rounded Rectangle 21"/>
+          <p:cNvSpPr/>
+          <p:nvPr/>
+        </p:nvSpPr>
+        <p:spPr>
+          <a:xfrm>
+            <a:off x="9171432" y="2011680"/>
+            <a:ext cx="1143000" cy="1097280"/>
+          </a:xfrm>
+          <a:prstGeom prst="roundRect">
+            <a:avLst/>
+          </a:prstGeom>
+          <a:solidFill>
+            <a:srgbClr val="111A2D"/>
+          </a:solidFill>
+          <a:ln>
+            <a:solidFill>
+              <a:srgbClr val="2D3A52"/>
+            </a:solidFill>
+          </a:ln>
+        </p:spPr>
+        <p:style>
+          <a:lnRef idx="1">
+            <a:schemeClr val="accent1"/>
+          </a:lnRef>
+          <a:fillRef idx="3">
+            <a:schemeClr val="accent1"/>
+          </a:fillRef>
+          <a:effectRef idx="2">
+            <a:schemeClr val="accent1"/>
+          </a:effectRef>
+          <a:fontRef idx="minor">
+            <a:schemeClr val="lt1"/>
+          </a:fontRef>
+        </p:style>
+        <p:txBody>
+          <a:bodyPr rtlCol="0" anchor="ctr"/>
+          <a:lstStyle/>
+          <a:p>
+            <a:pPr algn="ctr"/>
+          </a:p>
+        </p:txBody>
+      </p:sp>
+      <p:sp>
+        <p:nvSpPr>
+          <p:cNvPr id="23" name="TextBox 22"/>
+          <p:cNvSpPr txBox="1"/>
+          <p:nvPr/>
+        </p:nvSpPr>
+        <p:spPr>
+          <a:xfrm>
+            <a:off x="9354312" y="2176272"/>
+            <a:ext cx="777240" cy="320040"/>
+          </a:xfrm>
+          <a:prstGeom prst="rect">
+            <a:avLst/>
+          </a:prstGeom>
+          <a:noFill/>
+        </p:spPr>
+        <p:txBody>
+          <a:bodyPr wrap="square">
+            <a:spAutoFit/>
+          </a:bodyPr>
+          <a:lstStyle/>
+          <a:p>
+            <a:pPr algn="l"/>
+            <a:r>
+              <a:rPr sz="1600" b="1">
+                <a:solidFill>
+                  <a:srgbClr val="2DD4BF"/>
+                </a:solidFill>
+                <a:latin typeface="Aptos"/>
+              </a:rPr>
+              <a:t>7</a:t>
+            </a:r>
+          </a:p>
+        </p:txBody>
+      </p:sp>
+      <p:sp>
+        <p:nvSpPr>
+          <p:cNvPr id="24" name="TextBox 23"/>
+          <p:cNvSpPr txBox="1"/>
+          <p:nvPr/>
+        </p:nvSpPr>
+        <p:spPr>
+          <a:xfrm>
+            <a:off x="9354312" y="2606040"/>
+            <a:ext cx="777240" cy="365759"/>
+          </a:xfrm>
+          <a:prstGeom prst="rect">
+            <a:avLst/>
+          </a:prstGeom>
+          <a:noFill/>
+        </p:spPr>
+        <p:txBody>
+          <a:bodyPr wrap="square">
+            <a:spAutoFit/>
+          </a:bodyPr>
+          <a:lstStyle/>
+          <a:p>
+            <a:pPr algn="l"/>
+            <a:r>
+              <a:rPr sz="1200" b="0">
+                <a:solidFill>
+                  <a:srgbClr val="E5EDF7"/>
+                </a:solidFill>
+                <a:latin typeface="Aptos"/>
+              </a:rPr>
+              <a:t>Retrieve</a:t>
+            </a:r>
+          </a:p>
+        </p:txBody>
+      </p:sp>
+      <p:sp>
+        <p:nvSpPr>
+          <p:cNvPr id="25" name="Rounded Rectangle 24"/>
+          <p:cNvSpPr/>
+          <p:nvPr/>
+        </p:nvSpPr>
+        <p:spPr>
+          <a:xfrm>
+            <a:off x="10616184" y="2011680"/>
+            <a:ext cx="1143000" cy="1097280"/>
+          </a:xfrm>
+          <a:prstGeom prst="roundRect">
+            <a:avLst/>
+          </a:prstGeom>
+          <a:solidFill>
+            <a:srgbClr val="111A2D"/>
+          </a:solidFill>
+          <a:ln>
+            <a:solidFill>
+              <a:srgbClr val="2D3A52"/>
+            </a:solidFill>
+          </a:ln>
+        </p:spPr>
+        <p:style>
+          <a:lnRef idx="1">
+            <a:schemeClr val="accent1"/>
+          </a:lnRef>
+          <a:fillRef idx="3">
+            <a:schemeClr val="accent1"/>
+          </a:fillRef>
+          <a:effectRef idx="2">
+            <a:schemeClr val="accent1"/>
+          </a:effectRef>
+          <a:fontRef idx="minor">
+            <a:schemeClr val="lt1"/>
+          </a:fontRef>
+        </p:style>
+        <p:txBody>
+          <a:bodyPr rtlCol="0" anchor="ctr"/>
+          <a:lstStyle/>
+          <a:p>
+            <a:pPr algn="ctr"/>
+          </a:p>
+        </p:txBody>
+      </p:sp>
+      <p:sp>
+        <p:nvSpPr>
+          <p:cNvPr id="26" name="TextBox 25"/>
+          <p:cNvSpPr txBox="1"/>
+          <p:nvPr/>
+        </p:nvSpPr>
+        <p:spPr>
+          <a:xfrm>
+            <a:off x="10799064" y="2176272"/>
+            <a:ext cx="777240" cy="320040"/>
+          </a:xfrm>
+          <a:prstGeom prst="rect">
+            <a:avLst/>
+          </a:prstGeom>
+          <a:noFill/>
+        </p:spPr>
+        <p:txBody>
+          <a:bodyPr wrap="square">
+            <a:spAutoFit/>
+          </a:bodyPr>
+          <a:lstStyle/>
+          <a:p>
+            <a:pPr algn="l"/>
+            <a:r>
+              <a:rPr sz="1600" b="1">
+                <a:solidFill>
+                  <a:srgbClr val="2DD4BF"/>
+                </a:solidFill>
+                <a:latin typeface="Aptos"/>
+              </a:rPr>
+              <a:t>8</a:t>
+            </a:r>
+          </a:p>
+        </p:txBody>
+      </p:sp>
+      <p:sp>
+        <p:nvSpPr>
+          <p:cNvPr id="27" name="TextBox 26"/>
+          <p:cNvSpPr txBox="1"/>
+          <p:nvPr/>
+        </p:nvSpPr>
+        <p:spPr>
+          <a:xfrm>
+            <a:off x="10799064" y="2606040"/>
+            <a:ext cx="777240" cy="365759"/>
+          </a:xfrm>
+          <a:prstGeom prst="rect">
+            <a:avLst/>
+          </a:prstGeom>
+          <a:noFill/>
+        </p:spPr>
+        <p:txBody>
+          <a:bodyPr wrap="square">
+            <a:spAutoFit/>
+          </a:bodyPr>
+          <a:lstStyle/>
+          <a:p>
+            <a:pPr algn="l"/>
+            <a:r>
+              <a:rPr sz="1200" b="0">
+                <a:solidFill>
+                  <a:srgbClr val="E5EDF7"/>
+                </a:solidFill>
+                <a:latin typeface="Aptos"/>
+              </a:rPr>
+              <a:t>Cite</a:t>
+            </a:r>
+          </a:p>
+        </p:txBody>
+      </p:sp>
+      <p:sp>
+        <p:nvSpPr>
+          <p:cNvPr id="28" name="TextBox 27"/>
+          <p:cNvSpPr txBox="1"/>
+          <p:nvPr/>
+        </p:nvSpPr>
+        <p:spPr>
+          <a:xfrm>
+            <a:off x="914400" y="4114800"/>
+            <a:ext cx="10241280" cy="457200"/>
+          </a:xfrm>
+          <a:prstGeom prst="rect">
+            <a:avLst/>
+          </a:prstGeom>
+          <a:noFill/>
+        </p:spPr>
+        <p:txBody>
+          <a:bodyPr wrap="square">
+            <a:spAutoFit/>
+          </a:bodyPr>
+          <a:lstStyle/>
+          <a:p>
+            <a:pPr algn="ctr"/>
+            <a:r>
+              <a:rPr sz="1600" b="0">
+                <a:solidFill>
+                  <a:srgbClr val="E5EDF7"/>
+                </a:solidFill>
+                <a:latin typeface="Aptos"/>
+              </a:rPr>
+              <a:t>Processing status is persisted as PENDING / PROCESSING / READY / FAILED with safe retry visibility.</a:t>
             </a:r>
           </a:p>
         </p:txBody>
@@ -6641,7 +10103,7 @@
                 </a:solidFill>
                 <a:latin typeface="Aptos"/>
               </a:rPr>
-              <a:t>Deployment and testing</a:t>
+              <a:t>Security model</a:t>
             </a:r>
           </a:p>
         </p:txBody>
@@ -6676,7 +10138,7 @@
                 </a:solidFill>
                 <a:latin typeface="Aptos"/>
               </a:rPr>
-              <a:t>Prepare production infrastructure without performing paid or irreversible actions.</a:t>
+              <a:t>Verified identity and server-side scoping protect every workspace.</a:t>
             </a:r>
           </a:p>
         </p:txBody>
@@ -6689,8 +10151,8 @@
         </p:nvSpPr>
         <p:spPr>
           <a:xfrm>
-            <a:off x="685800" y="1645920"/>
-            <a:ext cx="3474720" cy="3291840"/>
+            <a:off x="685800" y="1600200"/>
+            <a:ext cx="3474720" cy="3337560"/>
           </a:xfrm>
           <a:prstGeom prst="roundRect">
             <a:avLst/>
@@ -6734,7 +10196,7 @@
         </p:nvSpPr>
         <p:spPr>
           <a:xfrm>
-            <a:off x="868680" y="1810512"/>
+            <a:off x="868680" y="1764792"/>
             <a:ext cx="3108960" cy="320040"/>
           </a:xfrm>
           <a:prstGeom prst="rect">
@@ -6756,7 +10218,7 @@
                 </a:solidFill>
                 <a:latin typeface="Aptos"/>
               </a:rPr>
-              <a:t>Runtime</a:t>
+              <a:t>Email verification</a:t>
             </a:r>
           </a:p>
         </p:txBody>
@@ -6769,8 +10231,8 @@
         </p:nvSpPr>
         <p:spPr>
           <a:xfrm>
-            <a:off x="868680" y="2240280"/>
-            <a:ext cx="3108960" cy="2560320"/>
+            <a:off x="868680" y="2194560"/>
+            <a:ext cx="3108960" cy="2606039"/>
           </a:xfrm>
           <a:prstGeom prst="rect">
             <a:avLst/>
@@ -6791,7 +10253,7 @@
                 </a:solidFill>
                 <a:latin typeface="Aptos"/>
               </a:rPr>
-              <a:t>Frontend and backend containers, managed PostgreSQL, persistent document storage, SMTP provider.</a:t>
+              <a:t>OTP is cryptographically random, hashed at rest, expires after five minutes, and is rate limited.</a:t>
             </a:r>
           </a:p>
         </p:txBody>
@@ -6804,8 +10266,8 @@
         </p:nvSpPr>
         <p:spPr>
           <a:xfrm>
-            <a:off x="4389120" y="1645920"/>
-            <a:ext cx="3474720" cy="3291840"/>
+            <a:off x="4389120" y="1600200"/>
+            <a:ext cx="3474720" cy="3337560"/>
           </a:xfrm>
           <a:prstGeom prst="roundRect">
             <a:avLst/>
@@ -6849,7 +10311,7 @@
         </p:nvSpPr>
         <p:spPr>
           <a:xfrm>
-            <a:off x="4572000" y="1810512"/>
+            <a:off x="4572000" y="1764792"/>
             <a:ext cx="3108960" cy="320040"/>
           </a:xfrm>
           <a:prstGeom prst="rect">
@@ -6871,7 +10333,7 @@
                 </a:solidFill>
                 <a:latin typeface="Aptos"/>
               </a:rPr>
-              <a:t>Checks</a:t>
+              <a:t>Tenant isolation</a:t>
             </a:r>
           </a:p>
         </p:txBody>
@@ -6884,8 +10346,8 @@
         </p:nvSpPr>
         <p:spPr>
           <a:xfrm>
-            <a:off x="4572000" y="2240280"/>
-            <a:ext cx="3108960" cy="2560320"/>
+            <a:off x="4572000" y="2194560"/>
+            <a:ext cx="3108960" cy="2606039"/>
           </a:xfrm>
           <a:prstGeom prst="rect">
             <a:avLst/>
@@ -6906,7 +10368,7 @@
                 </a:solidFill>
                 <a:latin typeface="Aptos"/>
               </a:rPr>
-              <a:t>19 existing backend tests pass, including tenant isolation, RAG citations, admin access, and uploads.</a:t>
+              <a:t>Documents, chunks, conversations, logs, and retrieval queries require the authenticated tenant scope.</a:t>
             </a:r>
           </a:p>
         </p:txBody>
@@ -6919,8 +10381,8 @@
         </p:nvSpPr>
         <p:spPr>
           <a:xfrm>
-            <a:off x="8092440" y="1645920"/>
-            <a:ext cx="3474720" cy="3291840"/>
+            <a:off x="8092440" y="1600200"/>
+            <a:ext cx="3474720" cy="3337560"/>
           </a:xfrm>
           <a:prstGeom prst="roundRect">
             <a:avLst/>
@@ -6964,7 +10426,7 @@
         </p:nvSpPr>
         <p:spPr>
           <a:xfrm>
-            <a:off x="8275319" y="1810512"/>
+            <a:off x="8275319" y="1764792"/>
             <a:ext cx="3108960" cy="320040"/>
           </a:xfrm>
           <a:prstGeom prst="rect">
@@ -6986,7 +10448,7 @@
                 </a:solidFill>
                 <a:latin typeface="Aptos"/>
               </a:rPr>
-              <a:t>Operator checklist</a:t>
+              <a:t>Auditability</a:t>
             </a:r>
           </a:p>
         </p:txBody>
@@ -6999,8 +10461,8 @@
         </p:nvSpPr>
         <p:spPr>
           <a:xfrm>
-            <a:off x="8275319" y="2240280"/>
-            <a:ext cx="3108960" cy="2560320"/>
+            <a:off x="8275319" y="2194560"/>
+            <a:ext cx="3108960" cy="2606039"/>
           </a:xfrm>
           <a:prstGeom prst="rect">
             <a:avLst/>
@@ -7021,7 +10483,7 @@
                 </a:solidFill>
                 <a:latin typeface="Aptos"/>
               </a:rPr>
-              <a:t>Set secrets, CORS, storage, health checks, migrations, and verify registration before launch.</a:t>
+              <a:t>Login, upload, deletion, query, and cross-tenant probes are recorded for review.</a:t>
             </a:r>
           </a:p>
         </p:txBody>
@@ -7082,7 +10544,7 @@
                 </a:solidFill>
                 <a:latin typeface="Aptos"/>
               </a:rPr>
-              <a:t>Conclusion and roadmap</a:t>
+              <a:t>Security proof: the IDOR demo</a:t>
             </a:r>
           </a:p>
         </p:txBody>
@@ -7117,387 +10579,254 @@
                 </a:solidFill>
                 <a:latin typeface="Aptos"/>
               </a:rPr>
-              <a:t>Secure foundations first; integrate only what can be verified.</a:t>
-            </a:r>
-          </a:p>
-        </p:txBody>
-      </p:sp>
-      <p:sp>
-        <p:nvSpPr>
-          <p:cNvPr id="4" name="Rounded Rectangle 3"/>
-          <p:cNvSpPr/>
-          <p:nvPr/>
-        </p:nvSpPr>
-        <p:spPr>
-          <a:xfrm>
-            <a:off x="685800" y="1645920"/>
-            <a:ext cx="3474720" cy="3291840"/>
-          </a:xfrm>
-          <a:prstGeom prst="roundRect">
-            <a:avLst/>
-          </a:prstGeom>
-          <a:solidFill>
-            <a:srgbClr val="111A2D"/>
-          </a:solidFill>
-          <a:ln>
-            <a:solidFill>
-              <a:srgbClr val="2D3A52"/>
-            </a:solidFill>
-          </a:ln>
-        </p:spPr>
-        <p:style>
-          <a:lnRef idx="1">
-            <a:schemeClr val="accent1"/>
-          </a:lnRef>
-          <a:fillRef idx="3">
-            <a:schemeClr val="accent1"/>
-          </a:fillRef>
-          <a:effectRef idx="2">
-            <a:schemeClr val="accent1"/>
-          </a:effectRef>
-          <a:fontRef idx="minor">
-            <a:schemeClr val="lt1"/>
-          </a:fontRef>
-        </p:style>
-        <p:txBody>
-          <a:bodyPr rtlCol="0" anchor="ctr"/>
+              <a:t>The project demonstrates prevention, not only a security claim.</a:t>
+            </a:r>
+          </a:p>
+        </p:txBody>
+      </p:sp>
+      <p:sp>
+        <p:nvSpPr>
+          <p:cNvPr id="4" name="TextBox 3"/>
+          <p:cNvSpPr txBox="1"/>
+          <p:nvPr/>
+        </p:nvSpPr>
+        <p:spPr>
+          <a:xfrm>
+            <a:off x="822960" y="1554480"/>
+            <a:ext cx="2743200" cy="365760"/>
+          </a:xfrm>
+          <a:prstGeom prst="rect">
+            <a:avLst/>
+          </a:prstGeom>
+          <a:noFill/>
+        </p:spPr>
+        <p:txBody>
+          <a:bodyPr wrap="square">
+            <a:spAutoFit/>
+          </a:bodyPr>
+          <a:lstStyle/>
+          <a:p>
+            <a:pPr algn="l"/>
+            <a:r>
+              <a:rPr sz="1800" b="1">
+                <a:solidFill>
+                  <a:srgbClr val="2DD4BF"/>
+                </a:solidFill>
+                <a:latin typeface="Aptos"/>
+              </a:rPr>
+              <a:t>Attacker scenario</a:t>
+            </a:r>
+          </a:p>
+        </p:txBody>
+      </p:sp>
+      <p:sp>
+        <p:nvSpPr>
+          <p:cNvPr id="5" name="TextBox 4"/>
+          <p:cNvSpPr txBox="1"/>
+          <p:nvPr/>
+        </p:nvSpPr>
+        <p:spPr>
+          <a:xfrm>
+            <a:off x="822960" y="2011680"/>
+            <a:ext cx="4114800" cy="822960"/>
+          </a:xfrm>
+          <a:prstGeom prst="rect">
+            <a:avLst/>
+          </a:prstGeom>
+          <a:noFill/>
+        </p:spPr>
+        <p:txBody>
+          <a:bodyPr wrap="square">
+            <a:spAutoFit/>
+          </a:bodyPr>
+          <a:lstStyle/>
+          <a:p>
+            <a:pPr algn="l"/>
+            <a:r>
+              <a:rPr sz="1900" b="1">
+                <a:solidFill>
+                  <a:srgbClr val="E5EDF7"/>
+                </a:solidFill>
+                <a:latin typeface="Aptos"/>
+              </a:rPr>
+              <a:t>GreenLeaf user attempts to fetch TechNova document ID #1.</a:t>
+            </a:r>
+          </a:p>
+        </p:txBody>
+      </p:sp>
+      <p:sp>
+        <p:nvSpPr>
+          <p:cNvPr id="6" name="TextBox 5"/>
+          <p:cNvSpPr txBox="1"/>
+          <p:nvPr/>
+        </p:nvSpPr>
+        <p:spPr>
+          <a:xfrm>
+            <a:off x="4572000" y="1554480"/>
+            <a:ext cx="2743200" cy="365760"/>
+          </a:xfrm>
+          <a:prstGeom prst="rect">
+            <a:avLst/>
+          </a:prstGeom>
+          <a:noFill/>
+        </p:spPr>
+        <p:txBody>
+          <a:bodyPr wrap="square">
+            <a:spAutoFit/>
+          </a:bodyPr>
+          <a:lstStyle/>
+          <a:p>
+            <a:pPr algn="l"/>
+            <a:r>
+              <a:rPr sz="1800" b="1">
+                <a:solidFill>
+                  <a:srgbClr val="2DD4BF"/>
+                </a:solidFill>
+                <a:latin typeface="Aptos"/>
+              </a:rPr>
+              <a:t>Server enforcement</a:t>
+            </a:r>
+          </a:p>
+        </p:txBody>
+      </p:sp>
+      <p:sp>
+        <p:nvSpPr>
+          <p:cNvPr id="7" name="TextBox 6"/>
+          <p:cNvSpPr txBox="1"/>
+          <p:nvPr/>
+        </p:nvSpPr>
+        <p:spPr>
+          <a:xfrm>
+            <a:off x="4572000" y="2011680"/>
+            <a:ext cx="3200400" cy="1234440"/>
+          </a:xfrm>
+          <a:prstGeom prst="rect">
+            <a:avLst/>
+          </a:prstGeom>
+          <a:noFill/>
+        </p:spPr>
+        <p:txBody>
+          <a:bodyPr wrap="square">
+            <a:spAutoFit/>
+          </a:bodyPr>
+          <a:lstStyle/>
+          <a:p>
+            <a:pPr algn="l"/>
+            <a:r>
+              <a:rPr sz="1700" b="1">
+                <a:solidFill>
+                  <a:srgbClr val="E5EDF7"/>
+                </a:solidFill>
+                <a:latin typeface="Aptos"/>
+              </a:rPr>
+              <a:t>JWT tenant identity overrides client-supplied IDs and applies tenant filters to the query.</a:t>
+            </a:r>
+          </a:p>
+        </p:txBody>
+      </p:sp>
+      <p:sp>
+        <p:nvSpPr>
+          <p:cNvPr id="8" name="TextBox 7"/>
+          <p:cNvSpPr txBox="1"/>
+          <p:nvPr/>
+        </p:nvSpPr>
+        <p:spPr>
+          <a:xfrm>
+            <a:off x="8229600" y="1554480"/>
+            <a:ext cx="2743200" cy="365760"/>
+          </a:xfrm>
+          <a:prstGeom prst="rect">
+            <a:avLst/>
+          </a:prstGeom>
+          <a:noFill/>
+        </p:spPr>
+        <p:txBody>
+          <a:bodyPr wrap="square">
+            <a:spAutoFit/>
+          </a:bodyPr>
+          <a:lstStyle/>
+          <a:p>
+            <a:pPr algn="l"/>
+            <a:r>
+              <a:rPr sz="1800" b="1">
+                <a:solidFill>
+                  <a:srgbClr val="2DD4BF"/>
+                </a:solidFill>
+                <a:latin typeface="Aptos"/>
+              </a:rPr>
+              <a:t>Observed result</a:t>
+            </a:r>
+          </a:p>
+        </p:txBody>
+      </p:sp>
+      <p:sp>
+        <p:nvSpPr>
+          <p:cNvPr id="9" name="TextBox 8"/>
+          <p:cNvSpPr txBox="1"/>
+          <p:nvPr/>
+        </p:nvSpPr>
+        <p:spPr>
+          <a:xfrm>
+            <a:off x="8229600" y="2011680"/>
+            <a:ext cx="3108960" cy="1371600"/>
+          </a:xfrm>
+          <a:prstGeom prst="rect">
+            <a:avLst/>
+          </a:prstGeom>
+          <a:noFill/>
+        </p:spPr>
+        <p:txBody>
+          <a:bodyPr wrap="square">
+            <a:spAutoFit/>
+          </a:bodyPr>
+          <a:lstStyle/>
+          <a:p>
+            <a:pPr algn="l"/>
+            <a:r>
+              <a:rPr sz="2100" b="1">
+                <a:solidFill>
+                  <a:srgbClr val="E5EDF7"/>
+                </a:solidFill>
+                <a:latin typeface="Aptos"/>
+              </a:rPr>
+              <a:t>HTTP 404
+0 bytes leaked
+cross_tenant_denied audit event</a:t>
+            </a:r>
+          </a:p>
+        </p:txBody>
+      </p:sp>
+      <p:sp>
+        <p:nvSpPr>
+          <p:cNvPr id="10" name="TextBox 9"/>
+          <p:cNvSpPr txBox="1"/>
+          <p:nvPr/>
+        </p:nvSpPr>
+        <p:spPr>
+          <a:xfrm>
+            <a:off x="914400" y="5120640"/>
+            <a:ext cx="10241280" cy="457200"/>
+          </a:xfrm>
+          <a:prstGeom prst="rect">
+            <a:avLst/>
+          </a:prstGeom>
+          <a:noFill/>
+        </p:spPr>
+        <p:txBody>
+          <a:bodyPr wrap="square">
+            <a:spAutoFit/>
+          </a:bodyPr>
           <a:lstStyle/>
           <a:p>
             <a:pPr algn="ctr"/>
-          </a:p>
-        </p:txBody>
-      </p:sp>
-      <p:sp>
-        <p:nvSpPr>
-          <p:cNvPr id="5" name="TextBox 4"/>
-          <p:cNvSpPr txBox="1"/>
-          <p:nvPr/>
-        </p:nvSpPr>
-        <p:spPr>
-          <a:xfrm>
-            <a:off x="868680" y="1810512"/>
-            <a:ext cx="3108960" cy="320040"/>
-          </a:xfrm>
-          <a:prstGeom prst="rect">
-            <a:avLst/>
-          </a:prstGeom>
-          <a:noFill/>
-        </p:spPr>
-        <p:txBody>
-          <a:bodyPr wrap="square">
-            <a:spAutoFit/>
-          </a:bodyPr>
-          <a:lstStyle/>
-          <a:p>
-            <a:pPr algn="l"/>
-            <a:r>
-              <a:rPr sz="1600" b="1">
+            <a:r>
+              <a:rPr sz="1600" b="0">
                 <a:solidFill>
                   <a:srgbClr val="2DD4BF"/>
                 </a:solidFill>
                 <a:latin typeface="Aptos"/>
               </a:rPr>
-              <a:t>Now</a:t>
-            </a:r>
-          </a:p>
-        </p:txBody>
-      </p:sp>
-      <p:sp>
-        <p:nvSpPr>
-          <p:cNvPr id="6" name="TextBox 5"/>
-          <p:cNvSpPr txBox="1"/>
-          <p:nvPr/>
-        </p:nvSpPr>
-        <p:spPr>
-          <a:xfrm>
-            <a:off x="868680" y="2240280"/>
-            <a:ext cx="3108960" cy="2560320"/>
-          </a:xfrm>
-          <a:prstGeom prst="rect">
-            <a:avLst/>
-          </a:prstGeom>
-          <a:noFill/>
-        </p:spPr>
-        <p:txBody>
-          <a:bodyPr wrap="square">
-            <a:spAutoFit/>
-          </a:bodyPr>
-          <a:lstStyle/>
-          <a:p>
-            <a:pPr algn="l"/>
-            <a:r>
-              <a:rPr sz="1200" b="0">
-                <a:solidFill>
-                  <a:srgbClr val="E5EDF7"/>
-                </a:solidFill>
-                <a:latin typeface="Aptos"/>
-              </a:rPr>
-              <a:t>Tenant-scoped FastAPI APIs, grounded RAG, OTP registration, dark-first auth UI, audit telemetry.</a:t>
-            </a:r>
-          </a:p>
-        </p:txBody>
-      </p:sp>
-      <p:sp>
-        <p:nvSpPr>
-          <p:cNvPr id="7" name="Rounded Rectangle 6"/>
-          <p:cNvSpPr/>
-          <p:nvPr/>
-        </p:nvSpPr>
-        <p:spPr>
-          <a:xfrm>
-            <a:off x="4389120" y="1645920"/>
-            <a:ext cx="3474720" cy="3291840"/>
-          </a:xfrm>
-          <a:prstGeom prst="roundRect">
-            <a:avLst/>
-          </a:prstGeom>
-          <a:solidFill>
-            <a:srgbClr val="111A2D"/>
-          </a:solidFill>
-          <a:ln>
-            <a:solidFill>
-              <a:srgbClr val="2D3A52"/>
-            </a:solidFill>
-          </a:ln>
-        </p:spPr>
-        <p:style>
-          <a:lnRef idx="1">
-            <a:schemeClr val="accent1"/>
-          </a:lnRef>
-          <a:fillRef idx="3">
-            <a:schemeClr val="accent1"/>
-          </a:fillRef>
-          <a:effectRef idx="2">
-            <a:schemeClr val="accent1"/>
-          </a:effectRef>
-          <a:fontRef idx="minor">
-            <a:schemeClr val="lt1"/>
-          </a:fontRef>
-        </p:style>
-        <p:txBody>
-          <a:bodyPr rtlCol="0" anchor="ctr"/>
-          <a:lstStyle/>
-          <a:p>
-            <a:pPr algn="ctr"/>
-          </a:p>
-        </p:txBody>
-      </p:sp>
-      <p:sp>
-        <p:nvSpPr>
-          <p:cNvPr id="8" name="TextBox 7"/>
-          <p:cNvSpPr txBox="1"/>
-          <p:nvPr/>
-        </p:nvSpPr>
-        <p:spPr>
-          <a:xfrm>
-            <a:off x="4572000" y="1810512"/>
-            <a:ext cx="3108960" cy="320040"/>
-          </a:xfrm>
-          <a:prstGeom prst="rect">
-            <a:avLst/>
-          </a:prstGeom>
-          <a:noFill/>
-        </p:spPr>
-        <p:txBody>
-          <a:bodyPr wrap="square">
-            <a:spAutoFit/>
-          </a:bodyPr>
-          <a:lstStyle/>
-          <a:p>
-            <a:pPr algn="l"/>
-            <a:r>
-              <a:rPr sz="1600" b="1">
-                <a:solidFill>
-                  <a:srgbClr val="2DD4BF"/>
-                </a:solidFill>
-                <a:latin typeface="Aptos"/>
-              </a:rPr>
-              <a:t>Next</a:t>
-            </a:r>
-          </a:p>
-        </p:txBody>
-      </p:sp>
-      <p:sp>
-        <p:nvSpPr>
-          <p:cNvPr id="9" name="TextBox 8"/>
-          <p:cNvSpPr txBox="1"/>
-          <p:nvPr/>
-        </p:nvSpPr>
-        <p:spPr>
-          <a:xfrm>
-            <a:off x="4572000" y="2240280"/>
-            <a:ext cx="3108960" cy="2560320"/>
-          </a:xfrm>
-          <a:prstGeom prst="rect">
-            <a:avLst/>
-          </a:prstGeom>
-          <a:noFill/>
-        </p:spPr>
-        <p:txBody>
-          <a:bodyPr wrap="square">
-            <a:spAutoFit/>
-          </a:bodyPr>
-          <a:lstStyle/>
-          <a:p>
-            <a:pPr algn="l"/>
-            <a:r>
-              <a:rPr sz="1200" b="0">
-                <a:solidFill>
-                  <a:srgbClr val="E5EDF7"/>
-                </a:solidFill>
-                <a:latin typeface="Aptos"/>
-              </a:rPr>
-              <a:t>Complete Telegram account linking and 120-second session enforcement on a shared bot service.</a:t>
-            </a:r>
-          </a:p>
-        </p:txBody>
-      </p:sp>
-      <p:sp>
-        <p:nvSpPr>
-          <p:cNvPr id="10" name="Rounded Rectangle 9"/>
-          <p:cNvSpPr/>
-          <p:nvPr/>
-        </p:nvSpPr>
-        <p:spPr>
-          <a:xfrm>
-            <a:off x="8092440" y="1645920"/>
-            <a:ext cx="3474720" cy="3291840"/>
-          </a:xfrm>
-          <a:prstGeom prst="roundRect">
-            <a:avLst/>
-          </a:prstGeom>
-          <a:solidFill>
-            <a:srgbClr val="111A2D"/>
-          </a:solidFill>
-          <a:ln>
-            <a:solidFill>
-              <a:srgbClr val="2D3A52"/>
-            </a:solidFill>
-          </a:ln>
-        </p:spPr>
-        <p:style>
-          <a:lnRef idx="1">
-            <a:schemeClr val="accent1"/>
-          </a:lnRef>
-          <a:fillRef idx="3">
-            <a:schemeClr val="accent1"/>
-          </a:fillRef>
-          <a:effectRef idx="2">
-            <a:schemeClr val="accent1"/>
-          </a:effectRef>
-          <a:fontRef idx="minor">
-            <a:schemeClr val="lt1"/>
-          </a:fontRef>
-        </p:style>
-        <p:txBody>
-          <a:bodyPr rtlCol="0" anchor="ctr"/>
-          <a:lstStyle/>
-          <a:p>
-            <a:pPr algn="ctr"/>
-          </a:p>
-        </p:txBody>
-      </p:sp>
-      <p:sp>
-        <p:nvSpPr>
-          <p:cNvPr id="11" name="TextBox 10"/>
-          <p:cNvSpPr txBox="1"/>
-          <p:nvPr/>
-        </p:nvSpPr>
-        <p:spPr>
-          <a:xfrm>
-            <a:off x="8275319" y="1810512"/>
-            <a:ext cx="3108960" cy="320040"/>
-          </a:xfrm>
-          <a:prstGeom prst="rect">
-            <a:avLst/>
-          </a:prstGeom>
-          <a:noFill/>
-        </p:spPr>
-        <p:txBody>
-          <a:bodyPr wrap="square">
-            <a:spAutoFit/>
-          </a:bodyPr>
-          <a:lstStyle/>
-          <a:p>
-            <a:pPr algn="l"/>
-            <a:r>
-              <a:rPr sz="1600" b="1">
-                <a:solidFill>
-                  <a:srgbClr val="2DD4BF"/>
-                </a:solidFill>
-                <a:latin typeface="Aptos"/>
-              </a:rPr>
-              <a:t>Future</a:t>
-            </a:r>
-          </a:p>
-        </p:txBody>
-      </p:sp>
-      <p:sp>
-        <p:nvSpPr>
-          <p:cNvPr id="12" name="TextBox 11"/>
-          <p:cNvSpPr txBox="1"/>
-          <p:nvPr/>
-        </p:nvSpPr>
-        <p:spPr>
-          <a:xfrm>
-            <a:off x="8275319" y="2240280"/>
-            <a:ext cx="3108960" cy="2560320"/>
-          </a:xfrm>
-          <a:prstGeom prst="rect">
-            <a:avLst/>
-          </a:prstGeom>
-          <a:noFill/>
-        </p:spPr>
-        <p:txBody>
-          <a:bodyPr wrap="square">
-            <a:spAutoFit/>
-          </a:bodyPr>
-          <a:lstStyle/>
-          <a:p>
-            <a:pPr algn="l"/>
-            <a:r>
-              <a:rPr sz="1200" b="0">
-                <a:solidFill>
-                  <a:srgbClr val="E5EDF7"/>
-                </a:solidFill>
-                <a:latin typeface="Aptos"/>
-              </a:rPr>
-              <a:t>Async workers, OCR, object storage, richer feedback/export, and managed deployment verification.</a:t>
-            </a:r>
-          </a:p>
-        </p:txBody>
-      </p:sp>
-      <p:sp>
-        <p:nvSpPr>
-          <p:cNvPr id="13" name="TextBox 12"/>
-          <p:cNvSpPr txBox="1"/>
-          <p:nvPr/>
-        </p:nvSpPr>
-        <p:spPr>
-          <a:xfrm>
-            <a:off x="914400" y="5715000"/>
-            <a:ext cx="10241280" cy="365760"/>
-          </a:xfrm>
-          <a:prstGeom prst="rect">
-            <a:avLst/>
-          </a:prstGeom>
-          <a:noFill/>
-        </p:spPr>
-        <p:txBody>
-          <a:bodyPr wrap="square">
-            <a:spAutoFit/>
-          </a:bodyPr>
-          <a:lstStyle/>
-          <a:p>
-            <a:pPr algn="ctr"/>
-            <a:r>
-              <a:rPr sz="1800" b="1">
-                <a:solidFill>
-                  <a:srgbClr val="2DD4BF"/>
-                </a:solidFill>
-                <a:latin typeface="Aptos"/>
-              </a:rPr>
-              <a:t>Build trust into the architecture, then make the demo visible.</a:t>
+              <a:t>404 instead of 403 also avoids revealing whether another tenant's resource exists.</a:t>
             </a:r>
           </a:p>
         </p:txBody>

--- a/presentation/SaaSsum_AI_Presentation.pptx
+++ b/presentation/SaaSsum_AI_Presentation.pptx
@@ -21,6 +21,13 @@
     <p:sldId id="269" r:id="rId20"/>
     <p:sldId id="270" r:id="rId21"/>
     <p:sldId id="271" r:id="rId22"/>
+    <p:sldId id="272" r:id="rId23"/>
+    <p:sldId id="273" r:id="rId24"/>
+    <p:sldId id="274" r:id="rId25"/>
+    <p:sldId id="275" r:id="rId26"/>
+    <p:sldId id="276" r:id="rId27"/>
+    <p:sldId id="277" r:id="rId28"/>
+    <p:sldId id="278" r:id="rId29"/>
   </p:sldIdLst>
   <p:sldSz cx="12191695" cy="6858000" type="screen4x3"/>
   <p:notesSz cx="6858000" cy="9144000"/>
@@ -6020,7 +6027,7 @@
                 </a:solidFill>
                 <a:latin typeface="Aptos"/>
               </a:rPr>
-              <a:t>Conclusion and roadmap</a:t>
+              <a:t>Data model and isolation boundary</a:t>
             </a:r>
           </a:p>
         </p:txBody>
@@ -6055,7 +6062,7 @@
                 </a:solidFill>
                 <a:latin typeface="Aptos"/>
               </a:rPr>
-              <a:t>Secure foundations first; integrate only what can be verified.</a:t>
+              <a:t>Tenant identity is carried through every relationship that contains private knowledge.</a:t>
             </a:r>
           </a:p>
         </p:txBody>
@@ -6068,8 +6075,8 @@
         </p:nvSpPr>
         <p:spPr>
           <a:xfrm>
-            <a:off x="685800" y="1645920"/>
-            <a:ext cx="3474720" cy="3291840"/>
+            <a:off x="502920" y="1554480"/>
+            <a:ext cx="2148840" cy="3611880"/>
           </a:xfrm>
           <a:prstGeom prst="roundRect">
             <a:avLst/>
@@ -6113,8 +6120,8 @@
         </p:nvSpPr>
         <p:spPr>
           <a:xfrm>
-            <a:off x="868680" y="1810512"/>
-            <a:ext cx="3108960" cy="320040"/>
+            <a:off x="685800" y="1719072"/>
+            <a:ext cx="1783080" cy="320040"/>
           </a:xfrm>
           <a:prstGeom prst="rect">
             <a:avLst/>
@@ -6135,7 +6142,7 @@
                 </a:solidFill>
                 <a:latin typeface="Aptos"/>
               </a:rPr>
-              <a:t>Now</a:t>
+              <a:t>Tenant</a:t>
             </a:r>
           </a:p>
         </p:txBody>
@@ -6148,8 +6155,8 @@
         </p:nvSpPr>
         <p:spPr>
           <a:xfrm>
-            <a:off x="868680" y="2240280"/>
-            <a:ext cx="3108960" cy="2560320"/>
+            <a:off x="685800" y="2148840"/>
+            <a:ext cx="1783080" cy="2880360"/>
           </a:xfrm>
           <a:prstGeom prst="rect">
             <a:avLst/>
@@ -6170,7 +6177,10 @@
                 </a:solidFill>
                 <a:latin typeface="Aptos"/>
               </a:rPr>
-              <a:t>Tenant-scoped FastAPI APIs, grounded RAG, OTP registration, dark-first auth UI, audit telemetry.</a:t>
+              <a:t>Company workspace
+Slug and quota
+Admin membership
+Owns all private records</a:t>
             </a:r>
           </a:p>
         </p:txBody>
@@ -6183,8 +6193,8 @@
         </p:nvSpPr>
         <p:spPr>
           <a:xfrm>
-            <a:off x="4389120" y="1645920"/>
-            <a:ext cx="3474720" cy="3291840"/>
+            <a:off x="2788920" y="1554480"/>
+            <a:ext cx="2148840" cy="3611880"/>
           </a:xfrm>
           <a:prstGeom prst="roundRect">
             <a:avLst/>
@@ -6228,8 +6238,8 @@
         </p:nvSpPr>
         <p:spPr>
           <a:xfrm>
-            <a:off x="4572000" y="1810512"/>
-            <a:ext cx="3108960" cy="320040"/>
+            <a:off x="2971800" y="1719072"/>
+            <a:ext cx="1783080" cy="320040"/>
           </a:xfrm>
           <a:prstGeom prst="rect">
             <a:avLst/>
@@ -6250,7 +6260,7 @@
                 </a:solidFill>
                 <a:latin typeface="Aptos"/>
               </a:rPr>
-              <a:t>Next</a:t>
+              <a:t>User</a:t>
             </a:r>
           </a:p>
         </p:txBody>
@@ -6263,8 +6273,8 @@
         </p:nvSpPr>
         <p:spPr>
           <a:xfrm>
-            <a:off x="4572000" y="2240280"/>
-            <a:ext cx="3108960" cy="2560320"/>
+            <a:off x="2971800" y="2148840"/>
+            <a:ext cx="1783080" cy="2880360"/>
           </a:xfrm>
           <a:prstGeom prst="rect">
             <a:avLst/>
@@ -6285,7 +6295,10 @@
                 </a:solidFill>
                 <a:latin typeface="Aptos"/>
               </a:rPr>
-              <a:t>Complete Telegram account linking and 120-second session enforcement on a shared bot service.</a:t>
+              <a:t>Email and password hash
+Verified status
+Role: admin/user
+Belongs to one tenant</a:t>
             </a:r>
           </a:p>
         </p:txBody>
@@ -6298,8 +6311,8 @@
         </p:nvSpPr>
         <p:spPr>
           <a:xfrm>
-            <a:off x="8092440" y="1645920"/>
-            <a:ext cx="3474720" cy="3291840"/>
+            <a:off x="5074920" y="1554480"/>
+            <a:ext cx="2148840" cy="3611880"/>
           </a:xfrm>
           <a:prstGeom prst="roundRect">
             <a:avLst/>
@@ -6343,7 +6356,1470 @@
         </p:nvSpPr>
         <p:spPr>
           <a:xfrm>
-            <a:off x="8275319" y="1810512"/>
+            <a:off x="5257800" y="1719072"/>
+            <a:ext cx="1783080" cy="320040"/>
+          </a:xfrm>
+          <a:prstGeom prst="rect">
+            <a:avLst/>
+          </a:prstGeom>
+          <a:noFill/>
+        </p:spPr>
+        <p:txBody>
+          <a:bodyPr wrap="square">
+            <a:spAutoFit/>
+          </a:bodyPr>
+          <a:lstStyle/>
+          <a:p>
+            <a:pPr algn="l"/>
+            <a:r>
+              <a:rPr sz="1600" b="1">
+                <a:solidFill>
+                  <a:srgbClr val="2DD4BF"/>
+                </a:solidFill>
+                <a:latin typeface="Aptos"/>
+              </a:rPr>
+              <a:t>Document</a:t>
+            </a:r>
+          </a:p>
+        </p:txBody>
+      </p:sp>
+      <p:sp>
+        <p:nvSpPr>
+          <p:cNvPr id="12" name="TextBox 11"/>
+          <p:cNvSpPr txBox="1"/>
+          <p:nvPr/>
+        </p:nvSpPr>
+        <p:spPr>
+          <a:xfrm>
+            <a:off x="5257800" y="2148840"/>
+            <a:ext cx="1783080" cy="2880360"/>
+          </a:xfrm>
+          <a:prstGeom prst="rect">
+            <a:avLst/>
+          </a:prstGeom>
+          <a:noFill/>
+        </p:spPr>
+        <p:txBody>
+          <a:bodyPr wrap="square">
+            <a:spAutoFit/>
+          </a:bodyPr>
+          <a:lstStyle/>
+          <a:p>
+            <a:pPr algn="l"/>
+            <a:r>
+              <a:rPr sz="1200" b="0">
+                <a:solidFill>
+                  <a:srgbClr val="E5EDF7"/>
+                </a:solidFill>
+                <a:latin typeface="Aptos"/>
+              </a:rPr>
+              <a:t>Tenant-owned file
+PENDING → READY
+Parser metadata
+Safe deletion boundary</a:t>
+            </a:r>
+          </a:p>
+        </p:txBody>
+      </p:sp>
+      <p:sp>
+        <p:nvSpPr>
+          <p:cNvPr id="13" name="Rounded Rectangle 12"/>
+          <p:cNvSpPr/>
+          <p:nvPr/>
+        </p:nvSpPr>
+        <p:spPr>
+          <a:xfrm>
+            <a:off x="7360920" y="1554480"/>
+            <a:ext cx="2148840" cy="3611880"/>
+          </a:xfrm>
+          <a:prstGeom prst="roundRect">
+            <a:avLst/>
+          </a:prstGeom>
+          <a:solidFill>
+            <a:srgbClr val="111A2D"/>
+          </a:solidFill>
+          <a:ln>
+            <a:solidFill>
+              <a:srgbClr val="2D3A52"/>
+            </a:solidFill>
+          </a:ln>
+        </p:spPr>
+        <p:style>
+          <a:lnRef idx="1">
+            <a:schemeClr val="accent1"/>
+          </a:lnRef>
+          <a:fillRef idx="3">
+            <a:schemeClr val="accent1"/>
+          </a:fillRef>
+          <a:effectRef idx="2">
+            <a:schemeClr val="accent1"/>
+          </a:effectRef>
+          <a:fontRef idx="minor">
+            <a:schemeClr val="lt1"/>
+          </a:fontRef>
+        </p:style>
+        <p:txBody>
+          <a:bodyPr rtlCol="0" anchor="ctr"/>
+          <a:lstStyle/>
+          <a:p>
+            <a:pPr algn="ctr"/>
+          </a:p>
+        </p:txBody>
+      </p:sp>
+      <p:sp>
+        <p:nvSpPr>
+          <p:cNvPr id="14" name="TextBox 13"/>
+          <p:cNvSpPr txBox="1"/>
+          <p:nvPr/>
+        </p:nvSpPr>
+        <p:spPr>
+          <a:xfrm>
+            <a:off x="7543800" y="1719072"/>
+            <a:ext cx="1783080" cy="320040"/>
+          </a:xfrm>
+          <a:prstGeom prst="rect">
+            <a:avLst/>
+          </a:prstGeom>
+          <a:noFill/>
+        </p:spPr>
+        <p:txBody>
+          <a:bodyPr wrap="square">
+            <a:spAutoFit/>
+          </a:bodyPr>
+          <a:lstStyle/>
+          <a:p>
+            <a:pPr algn="l"/>
+            <a:r>
+              <a:rPr sz="1600" b="1">
+                <a:solidFill>
+                  <a:srgbClr val="2DD4BF"/>
+                </a:solidFill>
+                <a:latin typeface="Aptos"/>
+              </a:rPr>
+              <a:t>Chunks</a:t>
+            </a:r>
+          </a:p>
+        </p:txBody>
+      </p:sp>
+      <p:sp>
+        <p:nvSpPr>
+          <p:cNvPr id="15" name="TextBox 14"/>
+          <p:cNvSpPr txBox="1"/>
+          <p:nvPr/>
+        </p:nvSpPr>
+        <p:spPr>
+          <a:xfrm>
+            <a:off x="7543800" y="2148840"/>
+            <a:ext cx="1783080" cy="2880360"/>
+          </a:xfrm>
+          <a:prstGeom prst="rect">
+            <a:avLst/>
+          </a:prstGeom>
+          <a:noFill/>
+        </p:spPr>
+        <p:txBody>
+          <a:bodyPr wrap="square">
+            <a:spAutoFit/>
+          </a:bodyPr>
+          <a:lstStyle/>
+          <a:p>
+            <a:pPr algn="l"/>
+            <a:r>
+              <a:rPr sz="1200" b="0">
+                <a:solidFill>
+                  <a:srgbClr val="E5EDF7"/>
+                </a:solidFill>
+                <a:latin typeface="Aptos"/>
+              </a:rPr>
+              <a:t>Text segments
+Embedding vectors
+Page/source metadata
+Tenant-scoped retrieval</a:t>
+            </a:r>
+          </a:p>
+        </p:txBody>
+      </p:sp>
+      <p:sp>
+        <p:nvSpPr>
+          <p:cNvPr id="16" name="Rounded Rectangle 15"/>
+          <p:cNvSpPr/>
+          <p:nvPr/>
+        </p:nvSpPr>
+        <p:spPr>
+          <a:xfrm>
+            <a:off x="9646920" y="1554480"/>
+            <a:ext cx="2148840" cy="3611880"/>
+          </a:xfrm>
+          <a:prstGeom prst="roundRect">
+            <a:avLst/>
+          </a:prstGeom>
+          <a:solidFill>
+            <a:srgbClr val="111A2D"/>
+          </a:solidFill>
+          <a:ln>
+            <a:solidFill>
+              <a:srgbClr val="2D3A52"/>
+            </a:solidFill>
+          </a:ln>
+        </p:spPr>
+        <p:style>
+          <a:lnRef idx="1">
+            <a:schemeClr val="accent1"/>
+          </a:lnRef>
+          <a:fillRef idx="3">
+            <a:schemeClr val="accent1"/>
+          </a:fillRef>
+          <a:effectRef idx="2">
+            <a:schemeClr val="accent1"/>
+          </a:effectRef>
+          <a:fontRef idx="minor">
+            <a:schemeClr val="lt1"/>
+          </a:fontRef>
+        </p:style>
+        <p:txBody>
+          <a:bodyPr rtlCol="0" anchor="ctr"/>
+          <a:lstStyle/>
+          <a:p>
+            <a:pPr algn="ctr"/>
+          </a:p>
+        </p:txBody>
+      </p:sp>
+      <p:sp>
+        <p:nvSpPr>
+          <p:cNvPr id="17" name="TextBox 16"/>
+          <p:cNvSpPr txBox="1"/>
+          <p:nvPr/>
+        </p:nvSpPr>
+        <p:spPr>
+          <a:xfrm>
+            <a:off x="9829800" y="1719072"/>
+            <a:ext cx="1783080" cy="320040"/>
+          </a:xfrm>
+          <a:prstGeom prst="rect">
+            <a:avLst/>
+          </a:prstGeom>
+          <a:noFill/>
+        </p:spPr>
+        <p:txBody>
+          <a:bodyPr wrap="square">
+            <a:spAutoFit/>
+          </a:bodyPr>
+          <a:lstStyle/>
+          <a:p>
+            <a:pPr algn="l"/>
+            <a:r>
+              <a:rPr sz="1600" b="1">
+                <a:solidFill>
+                  <a:srgbClr val="2DD4BF"/>
+                </a:solidFill>
+                <a:latin typeface="Aptos"/>
+              </a:rPr>
+              <a:t>Conversation</a:t>
+            </a:r>
+          </a:p>
+        </p:txBody>
+      </p:sp>
+      <p:sp>
+        <p:nvSpPr>
+          <p:cNvPr id="18" name="TextBox 17"/>
+          <p:cNvSpPr txBox="1"/>
+          <p:nvPr/>
+        </p:nvSpPr>
+        <p:spPr>
+          <a:xfrm>
+            <a:off x="9829800" y="2148840"/>
+            <a:ext cx="1783080" cy="2880360"/>
+          </a:xfrm>
+          <a:prstGeom prst="rect">
+            <a:avLst/>
+          </a:prstGeom>
+          <a:noFill/>
+        </p:spPr>
+        <p:txBody>
+          <a:bodyPr wrap="square">
+            <a:spAutoFit/>
+          </a:bodyPr>
+          <a:lstStyle/>
+          <a:p>
+            <a:pPr algn="l"/>
+            <a:r>
+              <a:rPr sz="1200" b="0">
+                <a:solidFill>
+                  <a:srgbClr val="E5EDF7"/>
+                </a:solidFill>
+                <a:latin typeface="Aptos"/>
+              </a:rPr>
+              <a:t>Tenant-owned thread
+Messages and citations
+Audit-linked question
+No cross-tenant joins</a:t>
+            </a:r>
+          </a:p>
+        </p:txBody>
+      </p:sp>
+      <p:sp>
+        <p:nvSpPr>
+          <p:cNvPr id="19" name="TextBox 18"/>
+          <p:cNvSpPr txBox="1"/>
+          <p:nvPr/>
+        </p:nvSpPr>
+        <p:spPr>
+          <a:xfrm>
+            <a:off x="777240" y="5623560"/>
+            <a:ext cx="10607040" cy="365760"/>
+          </a:xfrm>
+          <a:prstGeom prst="rect">
+            <a:avLst/>
+          </a:prstGeom>
+          <a:noFill/>
+        </p:spPr>
+        <p:txBody>
+          <a:bodyPr wrap="square">
+            <a:spAutoFit/>
+          </a:bodyPr>
+          <a:lstStyle/>
+          <a:p>
+            <a:pPr algn="ctr"/>
+            <a:r>
+              <a:rPr sz="1500" b="0">
+                <a:solidFill>
+                  <a:srgbClr val="2DD4BF"/>
+                </a:solidFill>
+                <a:latin typeface="Aptos"/>
+              </a:rPr>
+              <a:t>Security invariant: a valid resource ID is not sufficient; the authenticated tenant must also own the resource.</a:t>
+            </a:r>
+          </a:p>
+        </p:txBody>
+      </p:sp>
+    </p:spTree>
+  </p:cSld>
+  <p:clrMapOvr>
+    <a:masterClrMapping/>
+  </p:clrMapOvr>
+</p:sld>
+</file>
+
+<file path=ppt/slides/slide17.xml><?xml version="1.0" encoding="utf-8"?>
+<p:sld xmlns:a="http://schemas.openxmlformats.org/drawingml/2006/main" xmlns:p="http://schemas.openxmlformats.org/presentationml/2006/main" xmlns:r="http://schemas.openxmlformats.org/officeDocument/2006/relationships">
+  <p:cSld>
+    <p:bg>
+      <p:bgPr>
+        <a:solidFill>
+          <a:srgbClr val="0B1120"/>
+        </a:solidFill>
+        <a:effectLst/>
+      </p:bgPr>
+    </p:bg>
+    <p:spTree>
+      <p:nvGrpSpPr>
+        <p:cNvPr id="1" name=""/>
+        <p:cNvGrpSpPr/>
+        <p:nvPr/>
+      </p:nvGrpSpPr>
+      <p:grpSpPr/>
+      <p:sp>
+        <p:nvSpPr>
+          <p:cNvPr id="2" name="TextBox 1"/>
+          <p:cNvSpPr txBox="1"/>
+          <p:nvPr/>
+        </p:nvSpPr>
+        <p:spPr>
+          <a:xfrm>
+            <a:off x="594360" y="411480"/>
+            <a:ext cx="10972800" cy="502920"/>
+          </a:xfrm>
+          <a:prstGeom prst="rect">
+            <a:avLst/>
+          </a:prstGeom>
+          <a:noFill/>
+        </p:spPr>
+        <p:txBody>
+          <a:bodyPr wrap="square">
+            <a:spAutoFit/>
+          </a:bodyPr>
+          <a:lstStyle/>
+          <a:p>
+            <a:pPr algn="l"/>
+            <a:r>
+              <a:rPr sz="2800" b="1">
+                <a:solidFill>
+                  <a:srgbClr val="E5EDF7"/>
+                </a:solidFill>
+                <a:latin typeface="Aptos"/>
+              </a:rPr>
+              <a:t>Request security flow</a:t>
+            </a:r>
+          </a:p>
+        </p:txBody>
+      </p:sp>
+      <p:sp>
+        <p:nvSpPr>
+          <p:cNvPr id="3" name="TextBox 2"/>
+          <p:cNvSpPr txBox="1"/>
+          <p:nvPr/>
+        </p:nvSpPr>
+        <p:spPr>
+          <a:xfrm>
+            <a:off x="621792" y="987552"/>
+            <a:ext cx="10789920" cy="320040"/>
+          </a:xfrm>
+          <a:prstGeom prst="rect">
+            <a:avLst/>
+          </a:prstGeom>
+          <a:noFill/>
+        </p:spPr>
+        <p:txBody>
+          <a:bodyPr wrap="square">
+            <a:spAutoFit/>
+          </a:bodyPr>
+          <a:lstStyle/>
+          <a:p>
+            <a:pPr algn="l"/>
+            <a:r>
+              <a:rPr sz="1200" b="0">
+                <a:solidFill>
+                  <a:srgbClr val="94A3B8"/>
+                </a:solidFill>
+                <a:latin typeface="Aptos"/>
+              </a:rPr>
+              <a:t>A typical chat request is authorized before retrieval or generation.</a:t>
+            </a:r>
+          </a:p>
+        </p:txBody>
+      </p:sp>
+      <p:sp>
+        <p:nvSpPr>
+          <p:cNvPr id="4" name="Rounded Rectangle 3"/>
+          <p:cNvSpPr/>
+          <p:nvPr/>
+        </p:nvSpPr>
+        <p:spPr>
+          <a:xfrm>
+            <a:off x="411480" y="1920240"/>
+            <a:ext cx="1371600" cy="1508760"/>
+          </a:xfrm>
+          <a:prstGeom prst="roundRect">
+            <a:avLst/>
+          </a:prstGeom>
+          <a:solidFill>
+            <a:srgbClr val="111A2D"/>
+          </a:solidFill>
+          <a:ln>
+            <a:solidFill>
+              <a:srgbClr val="2D3A52"/>
+            </a:solidFill>
+          </a:ln>
+        </p:spPr>
+        <p:style>
+          <a:lnRef idx="1">
+            <a:schemeClr val="accent1"/>
+          </a:lnRef>
+          <a:fillRef idx="3">
+            <a:schemeClr val="accent1"/>
+          </a:fillRef>
+          <a:effectRef idx="2">
+            <a:schemeClr val="accent1"/>
+          </a:effectRef>
+          <a:fontRef idx="minor">
+            <a:schemeClr val="lt1"/>
+          </a:fontRef>
+        </p:style>
+        <p:txBody>
+          <a:bodyPr rtlCol="0" anchor="ctr"/>
+          <a:lstStyle/>
+          <a:p>
+            <a:pPr algn="ctr"/>
+          </a:p>
+        </p:txBody>
+      </p:sp>
+      <p:sp>
+        <p:nvSpPr>
+          <p:cNvPr id="5" name="TextBox 4"/>
+          <p:cNvSpPr txBox="1"/>
+          <p:nvPr/>
+        </p:nvSpPr>
+        <p:spPr>
+          <a:xfrm>
+            <a:off x="594360" y="2084832"/>
+            <a:ext cx="1005840" cy="320040"/>
+          </a:xfrm>
+          <a:prstGeom prst="rect">
+            <a:avLst/>
+          </a:prstGeom>
+          <a:noFill/>
+        </p:spPr>
+        <p:txBody>
+          <a:bodyPr wrap="square">
+            <a:spAutoFit/>
+          </a:bodyPr>
+          <a:lstStyle/>
+          <a:p>
+            <a:pPr algn="l"/>
+            <a:r>
+              <a:rPr sz="1600" b="1">
+                <a:solidFill>
+                  <a:srgbClr val="2DD4BF"/>
+                </a:solidFill>
+                <a:latin typeface="Aptos"/>
+              </a:rPr>
+              <a:t>1</a:t>
+            </a:r>
+          </a:p>
+        </p:txBody>
+      </p:sp>
+      <p:sp>
+        <p:nvSpPr>
+          <p:cNvPr id="6" name="TextBox 5"/>
+          <p:cNvSpPr txBox="1"/>
+          <p:nvPr/>
+        </p:nvSpPr>
+        <p:spPr>
+          <a:xfrm>
+            <a:off x="594360" y="2514600"/>
+            <a:ext cx="1005840" cy="777239"/>
+          </a:xfrm>
+          <a:prstGeom prst="rect">
+            <a:avLst/>
+          </a:prstGeom>
+          <a:noFill/>
+        </p:spPr>
+        <p:txBody>
+          <a:bodyPr wrap="square">
+            <a:spAutoFit/>
+          </a:bodyPr>
+          <a:lstStyle/>
+          <a:p>
+            <a:pPr algn="l"/>
+            <a:r>
+              <a:rPr sz="1200" b="0">
+                <a:solidFill>
+                  <a:srgbClr val="E5EDF7"/>
+                </a:solidFill>
+                <a:latin typeface="Aptos"/>
+              </a:rPr>
+              <a:t>JWT
+verified</a:t>
+            </a:r>
+          </a:p>
+        </p:txBody>
+      </p:sp>
+      <p:sp>
+        <p:nvSpPr>
+          <p:cNvPr id="7" name="Rounded Rectangle 6"/>
+          <p:cNvSpPr/>
+          <p:nvPr/>
+        </p:nvSpPr>
+        <p:spPr>
+          <a:xfrm>
+            <a:off x="2075688" y="1920240"/>
+            <a:ext cx="1371600" cy="1508760"/>
+          </a:xfrm>
+          <a:prstGeom prst="roundRect">
+            <a:avLst/>
+          </a:prstGeom>
+          <a:solidFill>
+            <a:srgbClr val="111A2D"/>
+          </a:solidFill>
+          <a:ln>
+            <a:solidFill>
+              <a:srgbClr val="2D3A52"/>
+            </a:solidFill>
+          </a:ln>
+        </p:spPr>
+        <p:style>
+          <a:lnRef idx="1">
+            <a:schemeClr val="accent1"/>
+          </a:lnRef>
+          <a:fillRef idx="3">
+            <a:schemeClr val="accent1"/>
+          </a:fillRef>
+          <a:effectRef idx="2">
+            <a:schemeClr val="accent1"/>
+          </a:effectRef>
+          <a:fontRef idx="minor">
+            <a:schemeClr val="lt1"/>
+          </a:fontRef>
+        </p:style>
+        <p:txBody>
+          <a:bodyPr rtlCol="0" anchor="ctr"/>
+          <a:lstStyle/>
+          <a:p>
+            <a:pPr algn="ctr"/>
+          </a:p>
+        </p:txBody>
+      </p:sp>
+      <p:sp>
+        <p:nvSpPr>
+          <p:cNvPr id="8" name="TextBox 7"/>
+          <p:cNvSpPr txBox="1"/>
+          <p:nvPr/>
+        </p:nvSpPr>
+        <p:spPr>
+          <a:xfrm>
+            <a:off x="2258568" y="2084832"/>
+            <a:ext cx="1005840" cy="320040"/>
+          </a:xfrm>
+          <a:prstGeom prst="rect">
+            <a:avLst/>
+          </a:prstGeom>
+          <a:noFill/>
+        </p:spPr>
+        <p:txBody>
+          <a:bodyPr wrap="square">
+            <a:spAutoFit/>
+          </a:bodyPr>
+          <a:lstStyle/>
+          <a:p>
+            <a:pPr algn="l"/>
+            <a:r>
+              <a:rPr sz="1600" b="1">
+                <a:solidFill>
+                  <a:srgbClr val="2DD4BF"/>
+                </a:solidFill>
+                <a:latin typeface="Aptos"/>
+              </a:rPr>
+              <a:t>2</a:t>
+            </a:r>
+          </a:p>
+        </p:txBody>
+      </p:sp>
+      <p:sp>
+        <p:nvSpPr>
+          <p:cNvPr id="9" name="TextBox 8"/>
+          <p:cNvSpPr txBox="1"/>
+          <p:nvPr/>
+        </p:nvSpPr>
+        <p:spPr>
+          <a:xfrm>
+            <a:off x="2258568" y="2514600"/>
+            <a:ext cx="1005840" cy="777239"/>
+          </a:xfrm>
+          <a:prstGeom prst="rect">
+            <a:avLst/>
+          </a:prstGeom>
+          <a:noFill/>
+        </p:spPr>
+        <p:txBody>
+          <a:bodyPr wrap="square">
+            <a:spAutoFit/>
+          </a:bodyPr>
+          <a:lstStyle/>
+          <a:p>
+            <a:pPr algn="l"/>
+            <a:r>
+              <a:rPr sz="1200" b="0">
+                <a:solidFill>
+                  <a:srgbClr val="E5EDF7"/>
+                </a:solidFill>
+                <a:latin typeface="Aptos"/>
+              </a:rPr>
+              <a:t>User + role
+loaded</a:t>
+            </a:r>
+          </a:p>
+        </p:txBody>
+      </p:sp>
+      <p:sp>
+        <p:nvSpPr>
+          <p:cNvPr id="10" name="Rounded Rectangle 9"/>
+          <p:cNvSpPr/>
+          <p:nvPr/>
+        </p:nvSpPr>
+        <p:spPr>
+          <a:xfrm>
+            <a:off x="3739896" y="1920240"/>
+            <a:ext cx="1371600" cy="1508760"/>
+          </a:xfrm>
+          <a:prstGeom prst="roundRect">
+            <a:avLst/>
+          </a:prstGeom>
+          <a:solidFill>
+            <a:srgbClr val="111A2D"/>
+          </a:solidFill>
+          <a:ln>
+            <a:solidFill>
+              <a:srgbClr val="2D3A52"/>
+            </a:solidFill>
+          </a:ln>
+        </p:spPr>
+        <p:style>
+          <a:lnRef idx="1">
+            <a:schemeClr val="accent1"/>
+          </a:lnRef>
+          <a:fillRef idx="3">
+            <a:schemeClr val="accent1"/>
+          </a:fillRef>
+          <a:effectRef idx="2">
+            <a:schemeClr val="accent1"/>
+          </a:effectRef>
+          <a:fontRef idx="minor">
+            <a:schemeClr val="lt1"/>
+          </a:fontRef>
+        </p:style>
+        <p:txBody>
+          <a:bodyPr rtlCol="0" anchor="ctr"/>
+          <a:lstStyle/>
+          <a:p>
+            <a:pPr algn="ctr"/>
+          </a:p>
+        </p:txBody>
+      </p:sp>
+      <p:sp>
+        <p:nvSpPr>
+          <p:cNvPr id="11" name="TextBox 10"/>
+          <p:cNvSpPr txBox="1"/>
+          <p:nvPr/>
+        </p:nvSpPr>
+        <p:spPr>
+          <a:xfrm>
+            <a:off x="3922776" y="2084832"/>
+            <a:ext cx="1005840" cy="320040"/>
+          </a:xfrm>
+          <a:prstGeom prst="rect">
+            <a:avLst/>
+          </a:prstGeom>
+          <a:noFill/>
+        </p:spPr>
+        <p:txBody>
+          <a:bodyPr wrap="square">
+            <a:spAutoFit/>
+          </a:bodyPr>
+          <a:lstStyle/>
+          <a:p>
+            <a:pPr algn="l"/>
+            <a:r>
+              <a:rPr sz="1600" b="1">
+                <a:solidFill>
+                  <a:srgbClr val="2DD4BF"/>
+                </a:solidFill>
+                <a:latin typeface="Aptos"/>
+              </a:rPr>
+              <a:t>3</a:t>
+            </a:r>
+          </a:p>
+        </p:txBody>
+      </p:sp>
+      <p:sp>
+        <p:nvSpPr>
+          <p:cNvPr id="12" name="TextBox 11"/>
+          <p:cNvSpPr txBox="1"/>
+          <p:nvPr/>
+        </p:nvSpPr>
+        <p:spPr>
+          <a:xfrm>
+            <a:off x="3922776" y="2514600"/>
+            <a:ext cx="1005840" cy="777239"/>
+          </a:xfrm>
+          <a:prstGeom prst="rect">
+            <a:avLst/>
+          </a:prstGeom>
+          <a:noFill/>
+        </p:spPr>
+        <p:txBody>
+          <a:bodyPr wrap="square">
+            <a:spAutoFit/>
+          </a:bodyPr>
+          <a:lstStyle/>
+          <a:p>
+            <a:pPr algn="l"/>
+            <a:r>
+              <a:rPr sz="1200" b="0">
+                <a:solidFill>
+                  <a:srgbClr val="E5EDF7"/>
+                </a:solidFill>
+                <a:latin typeface="Aptos"/>
+              </a:rPr>
+              <a:t>Tenant ID
+resolved</a:t>
+            </a:r>
+          </a:p>
+        </p:txBody>
+      </p:sp>
+      <p:sp>
+        <p:nvSpPr>
+          <p:cNvPr id="13" name="Rounded Rectangle 12"/>
+          <p:cNvSpPr/>
+          <p:nvPr/>
+        </p:nvSpPr>
+        <p:spPr>
+          <a:xfrm>
+            <a:off x="5404104" y="1920240"/>
+            <a:ext cx="1371600" cy="1508760"/>
+          </a:xfrm>
+          <a:prstGeom prst="roundRect">
+            <a:avLst/>
+          </a:prstGeom>
+          <a:solidFill>
+            <a:srgbClr val="111A2D"/>
+          </a:solidFill>
+          <a:ln>
+            <a:solidFill>
+              <a:srgbClr val="2D3A52"/>
+            </a:solidFill>
+          </a:ln>
+        </p:spPr>
+        <p:style>
+          <a:lnRef idx="1">
+            <a:schemeClr val="accent1"/>
+          </a:lnRef>
+          <a:fillRef idx="3">
+            <a:schemeClr val="accent1"/>
+          </a:fillRef>
+          <a:effectRef idx="2">
+            <a:schemeClr val="accent1"/>
+          </a:effectRef>
+          <a:fontRef idx="minor">
+            <a:schemeClr val="lt1"/>
+          </a:fontRef>
+        </p:style>
+        <p:txBody>
+          <a:bodyPr rtlCol="0" anchor="ctr"/>
+          <a:lstStyle/>
+          <a:p>
+            <a:pPr algn="ctr"/>
+          </a:p>
+        </p:txBody>
+      </p:sp>
+      <p:sp>
+        <p:nvSpPr>
+          <p:cNvPr id="14" name="TextBox 13"/>
+          <p:cNvSpPr txBox="1"/>
+          <p:nvPr/>
+        </p:nvSpPr>
+        <p:spPr>
+          <a:xfrm>
+            <a:off x="5586984" y="2084832"/>
+            <a:ext cx="1005840" cy="320040"/>
+          </a:xfrm>
+          <a:prstGeom prst="rect">
+            <a:avLst/>
+          </a:prstGeom>
+          <a:noFill/>
+        </p:spPr>
+        <p:txBody>
+          <a:bodyPr wrap="square">
+            <a:spAutoFit/>
+          </a:bodyPr>
+          <a:lstStyle/>
+          <a:p>
+            <a:pPr algn="l"/>
+            <a:r>
+              <a:rPr sz="1600" b="1">
+                <a:solidFill>
+                  <a:srgbClr val="2DD4BF"/>
+                </a:solidFill>
+                <a:latin typeface="Aptos"/>
+              </a:rPr>
+              <a:t>4</a:t>
+            </a:r>
+          </a:p>
+        </p:txBody>
+      </p:sp>
+      <p:sp>
+        <p:nvSpPr>
+          <p:cNvPr id="15" name="TextBox 14"/>
+          <p:cNvSpPr txBox="1"/>
+          <p:nvPr/>
+        </p:nvSpPr>
+        <p:spPr>
+          <a:xfrm>
+            <a:off x="5586984" y="2514600"/>
+            <a:ext cx="1005840" cy="777239"/>
+          </a:xfrm>
+          <a:prstGeom prst="rect">
+            <a:avLst/>
+          </a:prstGeom>
+          <a:noFill/>
+        </p:spPr>
+        <p:txBody>
+          <a:bodyPr wrap="square">
+            <a:spAutoFit/>
+          </a:bodyPr>
+          <a:lstStyle/>
+          <a:p>
+            <a:pPr algn="l"/>
+            <a:r>
+              <a:rPr sz="1200" b="0">
+                <a:solidFill>
+                  <a:srgbClr val="E5EDF7"/>
+                </a:solidFill>
+                <a:latin typeface="Aptos"/>
+              </a:rPr>
+              <a:t>Documents
+filtered</a:t>
+            </a:r>
+          </a:p>
+        </p:txBody>
+      </p:sp>
+      <p:sp>
+        <p:nvSpPr>
+          <p:cNvPr id="16" name="Rounded Rectangle 15"/>
+          <p:cNvSpPr/>
+          <p:nvPr/>
+        </p:nvSpPr>
+        <p:spPr>
+          <a:xfrm>
+            <a:off x="7068312" y="1920240"/>
+            <a:ext cx="1371600" cy="1508760"/>
+          </a:xfrm>
+          <a:prstGeom prst="roundRect">
+            <a:avLst/>
+          </a:prstGeom>
+          <a:solidFill>
+            <a:srgbClr val="111A2D"/>
+          </a:solidFill>
+          <a:ln>
+            <a:solidFill>
+              <a:srgbClr val="2D3A52"/>
+            </a:solidFill>
+          </a:ln>
+        </p:spPr>
+        <p:style>
+          <a:lnRef idx="1">
+            <a:schemeClr val="accent1"/>
+          </a:lnRef>
+          <a:fillRef idx="3">
+            <a:schemeClr val="accent1"/>
+          </a:fillRef>
+          <a:effectRef idx="2">
+            <a:schemeClr val="accent1"/>
+          </a:effectRef>
+          <a:fontRef idx="minor">
+            <a:schemeClr val="lt1"/>
+          </a:fontRef>
+        </p:style>
+        <p:txBody>
+          <a:bodyPr rtlCol="0" anchor="ctr"/>
+          <a:lstStyle/>
+          <a:p>
+            <a:pPr algn="ctr"/>
+          </a:p>
+        </p:txBody>
+      </p:sp>
+      <p:sp>
+        <p:nvSpPr>
+          <p:cNvPr id="17" name="TextBox 16"/>
+          <p:cNvSpPr txBox="1"/>
+          <p:nvPr/>
+        </p:nvSpPr>
+        <p:spPr>
+          <a:xfrm>
+            <a:off x="7251192" y="2084832"/>
+            <a:ext cx="1005840" cy="320040"/>
+          </a:xfrm>
+          <a:prstGeom prst="rect">
+            <a:avLst/>
+          </a:prstGeom>
+          <a:noFill/>
+        </p:spPr>
+        <p:txBody>
+          <a:bodyPr wrap="square">
+            <a:spAutoFit/>
+          </a:bodyPr>
+          <a:lstStyle/>
+          <a:p>
+            <a:pPr algn="l"/>
+            <a:r>
+              <a:rPr sz="1600" b="1">
+                <a:solidFill>
+                  <a:srgbClr val="2DD4BF"/>
+                </a:solidFill>
+                <a:latin typeface="Aptos"/>
+              </a:rPr>
+              <a:t>5</a:t>
+            </a:r>
+          </a:p>
+        </p:txBody>
+      </p:sp>
+      <p:sp>
+        <p:nvSpPr>
+          <p:cNvPr id="18" name="TextBox 17"/>
+          <p:cNvSpPr txBox="1"/>
+          <p:nvPr/>
+        </p:nvSpPr>
+        <p:spPr>
+          <a:xfrm>
+            <a:off x="7251192" y="2514600"/>
+            <a:ext cx="1005840" cy="777239"/>
+          </a:xfrm>
+          <a:prstGeom prst="rect">
+            <a:avLst/>
+          </a:prstGeom>
+          <a:noFill/>
+        </p:spPr>
+        <p:txBody>
+          <a:bodyPr wrap="square">
+            <a:spAutoFit/>
+          </a:bodyPr>
+          <a:lstStyle/>
+          <a:p>
+            <a:pPr algn="l"/>
+            <a:r>
+              <a:rPr sz="1200" b="0">
+                <a:solidFill>
+                  <a:srgbClr val="E5EDF7"/>
+                </a:solidFill>
+                <a:latin typeface="Aptos"/>
+              </a:rPr>
+              <a:t>Chunks
+retrieved</a:t>
+            </a:r>
+          </a:p>
+        </p:txBody>
+      </p:sp>
+      <p:sp>
+        <p:nvSpPr>
+          <p:cNvPr id="19" name="Rounded Rectangle 18"/>
+          <p:cNvSpPr/>
+          <p:nvPr/>
+        </p:nvSpPr>
+        <p:spPr>
+          <a:xfrm>
+            <a:off x="8732519" y="1920240"/>
+            <a:ext cx="1371600" cy="1508760"/>
+          </a:xfrm>
+          <a:prstGeom prst="roundRect">
+            <a:avLst/>
+          </a:prstGeom>
+          <a:solidFill>
+            <a:srgbClr val="111A2D"/>
+          </a:solidFill>
+          <a:ln>
+            <a:solidFill>
+              <a:srgbClr val="2D3A52"/>
+            </a:solidFill>
+          </a:ln>
+        </p:spPr>
+        <p:style>
+          <a:lnRef idx="1">
+            <a:schemeClr val="accent1"/>
+          </a:lnRef>
+          <a:fillRef idx="3">
+            <a:schemeClr val="accent1"/>
+          </a:fillRef>
+          <a:effectRef idx="2">
+            <a:schemeClr val="accent1"/>
+          </a:effectRef>
+          <a:fontRef idx="minor">
+            <a:schemeClr val="lt1"/>
+          </a:fontRef>
+        </p:style>
+        <p:txBody>
+          <a:bodyPr rtlCol="0" anchor="ctr"/>
+          <a:lstStyle/>
+          <a:p>
+            <a:pPr algn="ctr"/>
+          </a:p>
+        </p:txBody>
+      </p:sp>
+      <p:sp>
+        <p:nvSpPr>
+          <p:cNvPr id="20" name="TextBox 19"/>
+          <p:cNvSpPr txBox="1"/>
+          <p:nvPr/>
+        </p:nvSpPr>
+        <p:spPr>
+          <a:xfrm>
+            <a:off x="8915399" y="2084832"/>
+            <a:ext cx="1005840" cy="320040"/>
+          </a:xfrm>
+          <a:prstGeom prst="rect">
+            <a:avLst/>
+          </a:prstGeom>
+          <a:noFill/>
+        </p:spPr>
+        <p:txBody>
+          <a:bodyPr wrap="square">
+            <a:spAutoFit/>
+          </a:bodyPr>
+          <a:lstStyle/>
+          <a:p>
+            <a:pPr algn="l"/>
+            <a:r>
+              <a:rPr sz="1600" b="1">
+                <a:solidFill>
+                  <a:srgbClr val="2DD4BF"/>
+                </a:solidFill>
+                <a:latin typeface="Aptos"/>
+              </a:rPr>
+              <a:t>6</a:t>
+            </a:r>
+          </a:p>
+        </p:txBody>
+      </p:sp>
+      <p:sp>
+        <p:nvSpPr>
+          <p:cNvPr id="21" name="TextBox 20"/>
+          <p:cNvSpPr txBox="1"/>
+          <p:nvPr/>
+        </p:nvSpPr>
+        <p:spPr>
+          <a:xfrm>
+            <a:off x="8915399" y="2514600"/>
+            <a:ext cx="1005840" cy="777239"/>
+          </a:xfrm>
+          <a:prstGeom prst="rect">
+            <a:avLst/>
+          </a:prstGeom>
+          <a:noFill/>
+        </p:spPr>
+        <p:txBody>
+          <a:bodyPr wrap="square">
+            <a:spAutoFit/>
+          </a:bodyPr>
+          <a:lstStyle/>
+          <a:p>
+            <a:pPr algn="l"/>
+            <a:r>
+              <a:rPr sz="1200" b="0">
+                <a:solidFill>
+                  <a:srgbClr val="E5EDF7"/>
+                </a:solidFill>
+                <a:latin typeface="Aptos"/>
+              </a:rPr>
+              <a:t>Answer +
+citations</a:t>
+            </a:r>
+          </a:p>
+        </p:txBody>
+      </p:sp>
+      <p:sp>
+        <p:nvSpPr>
+          <p:cNvPr id="22" name="Rounded Rectangle 21"/>
+          <p:cNvSpPr/>
+          <p:nvPr/>
+        </p:nvSpPr>
+        <p:spPr>
+          <a:xfrm>
+            <a:off x="10396728" y="1920240"/>
+            <a:ext cx="1371600" cy="1508760"/>
+          </a:xfrm>
+          <a:prstGeom prst="roundRect">
+            <a:avLst/>
+          </a:prstGeom>
+          <a:solidFill>
+            <a:srgbClr val="111A2D"/>
+          </a:solidFill>
+          <a:ln>
+            <a:solidFill>
+              <a:srgbClr val="2D3A52"/>
+            </a:solidFill>
+          </a:ln>
+        </p:spPr>
+        <p:style>
+          <a:lnRef idx="1">
+            <a:schemeClr val="accent1"/>
+          </a:lnRef>
+          <a:fillRef idx="3">
+            <a:schemeClr val="accent1"/>
+          </a:fillRef>
+          <a:effectRef idx="2">
+            <a:schemeClr val="accent1"/>
+          </a:effectRef>
+          <a:fontRef idx="minor">
+            <a:schemeClr val="lt1"/>
+          </a:fontRef>
+        </p:style>
+        <p:txBody>
+          <a:bodyPr rtlCol="0" anchor="ctr"/>
+          <a:lstStyle/>
+          <a:p>
+            <a:pPr algn="ctr"/>
+          </a:p>
+        </p:txBody>
+      </p:sp>
+      <p:sp>
+        <p:nvSpPr>
+          <p:cNvPr id="23" name="TextBox 22"/>
+          <p:cNvSpPr txBox="1"/>
+          <p:nvPr/>
+        </p:nvSpPr>
+        <p:spPr>
+          <a:xfrm>
+            <a:off x="10579607" y="2084832"/>
+            <a:ext cx="1005840" cy="320040"/>
+          </a:xfrm>
+          <a:prstGeom prst="rect">
+            <a:avLst/>
+          </a:prstGeom>
+          <a:noFill/>
+        </p:spPr>
+        <p:txBody>
+          <a:bodyPr wrap="square">
+            <a:spAutoFit/>
+          </a:bodyPr>
+          <a:lstStyle/>
+          <a:p>
+            <a:pPr algn="l"/>
+            <a:r>
+              <a:rPr sz="1600" b="1">
+                <a:solidFill>
+                  <a:srgbClr val="2DD4BF"/>
+                </a:solidFill>
+                <a:latin typeface="Aptos"/>
+              </a:rPr>
+              <a:t>7</a:t>
+            </a:r>
+          </a:p>
+        </p:txBody>
+      </p:sp>
+      <p:sp>
+        <p:nvSpPr>
+          <p:cNvPr id="24" name="TextBox 23"/>
+          <p:cNvSpPr txBox="1"/>
+          <p:nvPr/>
+        </p:nvSpPr>
+        <p:spPr>
+          <a:xfrm>
+            <a:off x="10579607" y="2514600"/>
+            <a:ext cx="1005840" cy="777239"/>
+          </a:xfrm>
+          <a:prstGeom prst="rect">
+            <a:avLst/>
+          </a:prstGeom>
+          <a:noFill/>
+        </p:spPr>
+        <p:txBody>
+          <a:bodyPr wrap="square">
+            <a:spAutoFit/>
+          </a:bodyPr>
+          <a:lstStyle/>
+          <a:p>
+            <a:pPr algn="l"/>
+            <a:r>
+              <a:rPr sz="1200" b="0">
+                <a:solidFill>
+                  <a:srgbClr val="E5EDF7"/>
+                </a:solidFill>
+                <a:latin typeface="Aptos"/>
+              </a:rPr>
+              <a:t>Audit
+written</a:t>
+            </a:r>
+          </a:p>
+        </p:txBody>
+      </p:sp>
+      <p:sp>
+        <p:nvSpPr>
+          <p:cNvPr id="25" name="TextBox 24"/>
+          <p:cNvSpPr txBox="1"/>
+          <p:nvPr/>
+        </p:nvSpPr>
+        <p:spPr>
+          <a:xfrm>
+            <a:off x="914400" y="4251960"/>
+            <a:ext cx="10241280" cy="411480"/>
+          </a:xfrm>
+          <a:prstGeom prst="rect">
+            <a:avLst/>
+          </a:prstGeom>
+          <a:noFill/>
+        </p:spPr>
+        <p:txBody>
+          <a:bodyPr wrap="square">
+            <a:spAutoFit/>
+          </a:bodyPr>
+          <a:lstStyle/>
+          <a:p>
+            <a:pPr algn="ctr"/>
+            <a:r>
+              <a:rPr sz="1700" b="0">
+                <a:solidFill>
+                  <a:srgbClr val="E5EDF7"/>
+                </a:solidFill>
+                <a:latin typeface="Aptos"/>
+              </a:rPr>
+              <a:t>Client input: question only. Tenant identity, ownership, and authorization are server decisions.</a:t>
+            </a:r>
+          </a:p>
+        </p:txBody>
+      </p:sp>
+      <p:sp>
+        <p:nvSpPr>
+          <p:cNvPr id="26" name="TextBox 25"/>
+          <p:cNvSpPr txBox="1"/>
+          <p:nvPr/>
+        </p:nvSpPr>
+        <p:spPr>
+          <a:xfrm>
+            <a:off x="822960" y="5074920"/>
+            <a:ext cx="10515600" cy="457200"/>
+          </a:xfrm>
+          <a:prstGeom prst="rect">
+            <a:avLst/>
+          </a:prstGeom>
+          <a:noFill/>
+        </p:spPr>
+        <p:txBody>
+          <a:bodyPr wrap="square">
+            <a:spAutoFit/>
+          </a:bodyPr>
+          <a:lstStyle/>
+          <a:p>
+            <a:pPr algn="ctr"/>
+            <a:r>
+              <a:rPr sz="1500" b="0">
+                <a:solidFill>
+                  <a:srgbClr val="2DD4BF"/>
+                </a:solidFill>
+                <a:latin typeface="Aptos"/>
+              </a:rPr>
+              <a:t>Failure paths are explicit: 401 unauthenticated, 403 insufficient role, 404 hidden cross-tenant resource, or a grounded refusal.</a:t>
+            </a:r>
+          </a:p>
+        </p:txBody>
+      </p:sp>
+    </p:spTree>
+  </p:cSld>
+  <p:clrMapOvr>
+    <a:masterClrMapping/>
+  </p:clrMapOvr>
+</p:sld>
+</file>
+
+<file path=ppt/slides/slide18.xml><?xml version="1.0" encoding="utf-8"?>
+<p:sld xmlns:a="http://schemas.openxmlformats.org/drawingml/2006/main" xmlns:p="http://schemas.openxmlformats.org/presentationml/2006/main" xmlns:r="http://schemas.openxmlformats.org/officeDocument/2006/relationships">
+  <p:cSld>
+    <p:bg>
+      <p:bgPr>
+        <a:solidFill>
+          <a:srgbClr val="0B1120"/>
+        </a:solidFill>
+        <a:effectLst/>
+      </p:bgPr>
+    </p:bg>
+    <p:spTree>
+      <p:nvGrpSpPr>
+        <p:cNvPr id="1" name=""/>
+        <p:cNvGrpSpPr/>
+        <p:nvPr/>
+      </p:nvGrpSpPr>
+      <p:grpSpPr/>
+      <p:sp>
+        <p:nvSpPr>
+          <p:cNvPr id="2" name="TextBox 1"/>
+          <p:cNvSpPr txBox="1"/>
+          <p:nvPr/>
+        </p:nvSpPr>
+        <p:spPr>
+          <a:xfrm>
+            <a:off x="594360" y="411480"/>
+            <a:ext cx="10972800" cy="502920"/>
+          </a:xfrm>
+          <a:prstGeom prst="rect">
+            <a:avLst/>
+          </a:prstGeom>
+          <a:noFill/>
+        </p:spPr>
+        <p:txBody>
+          <a:bodyPr wrap="square">
+            <a:spAutoFit/>
+          </a:bodyPr>
+          <a:lstStyle/>
+          <a:p>
+            <a:pPr algn="l"/>
+            <a:r>
+              <a:rPr sz="2800" b="1">
+                <a:solidFill>
+                  <a:srgbClr val="E5EDF7"/>
+                </a:solidFill>
+                <a:latin typeface="Aptos"/>
+              </a:rPr>
+              <a:t>Telegram assistant</a:t>
+            </a:r>
+          </a:p>
+        </p:txBody>
+      </p:sp>
+      <p:sp>
+        <p:nvSpPr>
+          <p:cNvPr id="3" name="TextBox 2"/>
+          <p:cNvSpPr txBox="1"/>
+          <p:nvPr/>
+        </p:nvSpPr>
+        <p:spPr>
+          <a:xfrm>
+            <a:off x="621792" y="987552"/>
+            <a:ext cx="10789920" cy="320040"/>
+          </a:xfrm>
+          <a:prstGeom prst="rect">
+            <a:avLst/>
+          </a:prstGeom>
+          <a:noFill/>
+        </p:spPr>
+        <p:txBody>
+          <a:bodyPr wrap="square">
+            <a:spAutoFit/>
+          </a:bodyPr>
+          <a:lstStyle/>
+          <a:p>
+            <a:pPr algn="l"/>
+            <a:r>
+              <a:rPr sz="1200" b="0">
+                <a:solidFill>
+                  <a:srgbClr val="94A3B8"/>
+                </a:solidFill>
+                <a:latin typeface="Aptos"/>
+              </a:rPr>
+              <a:t>The bot uses the same tenant-scoped backend concepts instead of creating a second data silo.</a:t>
+            </a:r>
+          </a:p>
+        </p:txBody>
+      </p:sp>
+      <p:sp>
+        <p:nvSpPr>
+          <p:cNvPr id="4" name="Rounded Rectangle 3"/>
+          <p:cNvSpPr/>
+          <p:nvPr/>
+        </p:nvSpPr>
+        <p:spPr>
+          <a:xfrm>
+            <a:off x="685800" y="1600200"/>
+            <a:ext cx="3474720" cy="3520440"/>
+          </a:xfrm>
+          <a:prstGeom prst="roundRect">
+            <a:avLst/>
+          </a:prstGeom>
+          <a:solidFill>
+            <a:srgbClr val="111A2D"/>
+          </a:solidFill>
+          <a:ln>
+            <a:solidFill>
+              <a:srgbClr val="2D3A52"/>
+            </a:solidFill>
+          </a:ln>
+        </p:spPr>
+        <p:style>
+          <a:lnRef idx="1">
+            <a:schemeClr val="accent1"/>
+          </a:lnRef>
+          <a:fillRef idx="3">
+            <a:schemeClr val="accent1"/>
+          </a:fillRef>
+          <a:effectRef idx="2">
+            <a:schemeClr val="accent1"/>
+          </a:effectRef>
+          <a:fontRef idx="minor">
+            <a:schemeClr val="lt1"/>
+          </a:fontRef>
+        </p:style>
+        <p:txBody>
+          <a:bodyPr rtlCol="0" anchor="ctr"/>
+          <a:lstStyle/>
+          <a:p>
+            <a:pPr algn="ctr"/>
+          </a:p>
+        </p:txBody>
+      </p:sp>
+      <p:sp>
+        <p:nvSpPr>
+          <p:cNvPr id="5" name="TextBox 4"/>
+          <p:cNvSpPr txBox="1"/>
+          <p:nvPr/>
+        </p:nvSpPr>
+        <p:spPr>
+          <a:xfrm>
+            <a:off x="868680" y="1764792"/>
             <a:ext cx="3108960" cy="320040"/>
           </a:xfrm>
           <a:prstGeom prst="rect">
@@ -6365,7 +7841,245 @@
                 </a:solidFill>
                 <a:latin typeface="Aptos"/>
               </a:rPr>
-              <a:t>Future</a:t>
+              <a:t>Authentication</a:t>
+            </a:r>
+          </a:p>
+        </p:txBody>
+      </p:sp>
+      <p:sp>
+        <p:nvSpPr>
+          <p:cNvPr id="6" name="TextBox 5"/>
+          <p:cNvSpPr txBox="1"/>
+          <p:nvPr/>
+        </p:nvSpPr>
+        <p:spPr>
+          <a:xfrm>
+            <a:off x="868680" y="2194560"/>
+            <a:ext cx="3108960" cy="2788920"/>
+          </a:xfrm>
+          <a:prstGeom prst="rect">
+            <a:avLst/>
+          </a:prstGeom>
+          <a:noFill/>
+        </p:spPr>
+        <p:txBody>
+          <a:bodyPr wrap="square">
+            <a:spAutoFit/>
+          </a:bodyPr>
+          <a:lstStyle/>
+          <a:p>
+            <a:pPr algn="l"/>
+            <a:r>
+              <a:rPr sz="1200" b="0">
+                <a:solidFill>
+                  <a:srgbClr val="E5EDF7"/>
+                </a:solidFill>
+                <a:latin typeface="Aptos"/>
+              </a:rPr>
+              <a:t>/start and login flow
+Tenant-aware Telegram session
+120-second sliding inactivity timeout
+Session state persisted in the database</a:t>
+            </a:r>
+          </a:p>
+        </p:txBody>
+      </p:sp>
+      <p:sp>
+        <p:nvSpPr>
+          <p:cNvPr id="7" name="Rounded Rectangle 6"/>
+          <p:cNvSpPr/>
+          <p:nvPr/>
+        </p:nvSpPr>
+        <p:spPr>
+          <a:xfrm>
+            <a:off x="4389120" y="1600200"/>
+            <a:ext cx="3474720" cy="3520440"/>
+          </a:xfrm>
+          <a:prstGeom prst="roundRect">
+            <a:avLst/>
+          </a:prstGeom>
+          <a:solidFill>
+            <a:srgbClr val="111A2D"/>
+          </a:solidFill>
+          <a:ln>
+            <a:solidFill>
+              <a:srgbClr val="2D3A52"/>
+            </a:solidFill>
+          </a:ln>
+        </p:spPr>
+        <p:style>
+          <a:lnRef idx="1">
+            <a:schemeClr val="accent1"/>
+          </a:lnRef>
+          <a:fillRef idx="3">
+            <a:schemeClr val="accent1"/>
+          </a:fillRef>
+          <a:effectRef idx="2">
+            <a:schemeClr val="accent1"/>
+          </a:effectRef>
+          <a:fontRef idx="minor">
+            <a:schemeClr val="lt1"/>
+          </a:fontRef>
+        </p:style>
+        <p:txBody>
+          <a:bodyPr rtlCol="0" anchor="ctr"/>
+          <a:lstStyle/>
+          <a:p>
+            <a:pPr algn="ctr"/>
+          </a:p>
+        </p:txBody>
+      </p:sp>
+      <p:sp>
+        <p:nvSpPr>
+          <p:cNvPr id="8" name="TextBox 7"/>
+          <p:cNvSpPr txBox="1"/>
+          <p:nvPr/>
+        </p:nvSpPr>
+        <p:spPr>
+          <a:xfrm>
+            <a:off x="4572000" y="1764792"/>
+            <a:ext cx="3108960" cy="320040"/>
+          </a:xfrm>
+          <a:prstGeom prst="rect">
+            <a:avLst/>
+          </a:prstGeom>
+          <a:noFill/>
+        </p:spPr>
+        <p:txBody>
+          <a:bodyPr wrap="square">
+            <a:spAutoFit/>
+          </a:bodyPr>
+          <a:lstStyle/>
+          <a:p>
+            <a:pPr algn="l"/>
+            <a:r>
+              <a:rPr sz="1600" b="1">
+                <a:solidFill>
+                  <a:srgbClr val="2DD4BF"/>
+                </a:solidFill>
+                <a:latin typeface="Aptos"/>
+              </a:rPr>
+              <a:t>Commands</a:t>
+            </a:r>
+          </a:p>
+        </p:txBody>
+      </p:sp>
+      <p:sp>
+        <p:nvSpPr>
+          <p:cNvPr id="9" name="TextBox 8"/>
+          <p:cNvSpPr txBox="1"/>
+          <p:nvPr/>
+        </p:nvSpPr>
+        <p:spPr>
+          <a:xfrm>
+            <a:off x="4572000" y="2194560"/>
+            <a:ext cx="3108960" cy="2788920"/>
+          </a:xfrm>
+          <a:prstGeom prst="rect">
+            <a:avLst/>
+          </a:prstGeom>
+          <a:noFill/>
+        </p:spPr>
+        <p:txBody>
+          <a:bodyPr wrap="square">
+            <a:spAutoFit/>
+          </a:bodyPr>
+          <a:lstStyle/>
+          <a:p>
+            <a:pPr algn="l"/>
+            <a:r>
+              <a:rPr sz="1200" b="0">
+                <a:solidFill>
+                  <a:srgbClr val="E5EDF7"/>
+                </a:solidFill>
+                <a:latin typeface="Aptos"/>
+              </a:rPr>
+              <a:t>/chat
+/documents
+/upload
+/conversations
+/audits
+/telemetry</a:t>
+            </a:r>
+          </a:p>
+        </p:txBody>
+      </p:sp>
+      <p:sp>
+        <p:nvSpPr>
+          <p:cNvPr id="10" name="Rounded Rectangle 9"/>
+          <p:cNvSpPr/>
+          <p:nvPr/>
+        </p:nvSpPr>
+        <p:spPr>
+          <a:xfrm>
+            <a:off x="8092440" y="1600200"/>
+            <a:ext cx="3474720" cy="3520440"/>
+          </a:xfrm>
+          <a:prstGeom prst="roundRect">
+            <a:avLst/>
+          </a:prstGeom>
+          <a:solidFill>
+            <a:srgbClr val="111A2D"/>
+          </a:solidFill>
+          <a:ln>
+            <a:solidFill>
+              <a:srgbClr val="2D3A52"/>
+            </a:solidFill>
+          </a:ln>
+        </p:spPr>
+        <p:style>
+          <a:lnRef idx="1">
+            <a:schemeClr val="accent1"/>
+          </a:lnRef>
+          <a:fillRef idx="3">
+            <a:schemeClr val="accent1"/>
+          </a:fillRef>
+          <a:effectRef idx="2">
+            <a:schemeClr val="accent1"/>
+          </a:effectRef>
+          <a:fontRef idx="minor">
+            <a:schemeClr val="lt1"/>
+          </a:fontRef>
+        </p:style>
+        <p:txBody>
+          <a:bodyPr rtlCol="0" anchor="ctr"/>
+          <a:lstStyle/>
+          <a:p>
+            <a:pPr algn="ctr"/>
+          </a:p>
+        </p:txBody>
+      </p:sp>
+      <p:sp>
+        <p:nvSpPr>
+          <p:cNvPr id="11" name="TextBox 10"/>
+          <p:cNvSpPr txBox="1"/>
+          <p:nvPr/>
+        </p:nvSpPr>
+        <p:spPr>
+          <a:xfrm>
+            <a:off x="8275319" y="1764792"/>
+            <a:ext cx="3108960" cy="320040"/>
+          </a:xfrm>
+          <a:prstGeom prst="rect">
+            <a:avLst/>
+          </a:prstGeom>
+          <a:noFill/>
+        </p:spPr>
+        <p:txBody>
+          <a:bodyPr wrap="square">
+            <a:spAutoFit/>
+          </a:bodyPr>
+          <a:lstStyle/>
+          <a:p>
+            <a:pPr algn="l"/>
+            <a:r>
+              <a:rPr sz="1600" b="1">
+                <a:solidFill>
+                  <a:srgbClr val="2DD4BF"/>
+                </a:solidFill>
+                <a:latin typeface="Aptos"/>
+              </a:rPr>
+              <a:t>Administration</a:t>
             </a:r>
           </a:p>
         </p:txBody>
@@ -6378,8 +8092,8 @@
         </p:nvSpPr>
         <p:spPr>
           <a:xfrm>
-            <a:off x="8275319" y="2240280"/>
-            <a:ext cx="3108960" cy="2560320"/>
+            <a:off x="8275319" y="2194560"/>
+            <a:ext cx="3108960" cy="2788920"/>
           </a:xfrm>
           <a:prstGeom prst="rect">
             <a:avLst/>
@@ -6400,7 +8114,11 @@
                 </a:solidFill>
                 <a:latin typeface="Aptos"/>
               </a:rPr>
-              <a:t>Async workers, OCR, object storage, richer feedback/export, and managed deployment verification.</a:t>
+              <a:t>/settings
+/setcompany
+/setdomain
+Admin-only settings changes
+Friendly upload success/failure responses</a:t>
             </a:r>
           </a:p>
         </p:txBody>
@@ -6413,8 +8131,8 @@
         </p:nvSpPr>
         <p:spPr>
           <a:xfrm>
-            <a:off x="914400" y="5715000"/>
-            <a:ext cx="10241280" cy="365760"/>
+            <a:off x="868680" y="5623560"/>
+            <a:ext cx="10424160" cy="320040"/>
           </a:xfrm>
           <a:prstGeom prst="rect">
             <a:avLst/>
@@ -6429,13 +8147,502 @@
           <a:p>
             <a:pPr algn="ctr"/>
             <a:r>
-              <a:rPr sz="1800" b="1">
+              <a:rPr sz="1400" b="0">
                 <a:solidFill>
                   <a:srgbClr val="2DD4BF"/>
                 </a:solidFill>
                 <a:latin typeface="Aptos"/>
               </a:rPr>
-              <a:t>Build trust into the architecture, then make the demo visible.</a:t>
+              <a:t>Operational rule: every authenticated command refreshes activity; only inactivity expires the session.</a:t>
+            </a:r>
+          </a:p>
+        </p:txBody>
+      </p:sp>
+    </p:spTree>
+  </p:cSld>
+  <p:clrMapOvr>
+    <a:masterClrMapping/>
+  </p:clrMapOvr>
+</p:sld>
+</file>
+
+<file path=ppt/slides/slide19.xml><?xml version="1.0" encoding="utf-8"?>
+<p:sld xmlns:a="http://schemas.openxmlformats.org/drawingml/2006/main" xmlns:p="http://schemas.openxmlformats.org/presentationml/2006/main" xmlns:r="http://schemas.openxmlformats.org/officeDocument/2006/relationships">
+  <p:cSld>
+    <p:bg>
+      <p:bgPr>
+        <a:solidFill>
+          <a:srgbClr val="0B1120"/>
+        </a:solidFill>
+        <a:effectLst/>
+      </p:bgPr>
+    </p:bg>
+    <p:spTree>
+      <p:nvGrpSpPr>
+        <p:cNvPr id="1" name=""/>
+        <p:cNvGrpSpPr/>
+        <p:nvPr/>
+      </p:nvGrpSpPr>
+      <p:grpSpPr/>
+      <p:sp>
+        <p:nvSpPr>
+          <p:cNvPr id="2" name="TextBox 1"/>
+          <p:cNvSpPr txBox="1"/>
+          <p:nvPr/>
+        </p:nvSpPr>
+        <p:spPr>
+          <a:xfrm>
+            <a:off x="594360" y="411480"/>
+            <a:ext cx="10972800" cy="502920"/>
+          </a:xfrm>
+          <a:prstGeom prst="rect">
+            <a:avLst/>
+          </a:prstGeom>
+          <a:noFill/>
+        </p:spPr>
+        <p:txBody>
+          <a:bodyPr wrap="square">
+            <a:spAutoFit/>
+          </a:bodyPr>
+          <a:lstStyle/>
+          <a:p>
+            <a:pPr algn="l"/>
+            <a:r>
+              <a:rPr sz="2800" b="1">
+                <a:solidFill>
+                  <a:srgbClr val="E5EDF7"/>
+                </a:solidFill>
+                <a:latin typeface="Aptos"/>
+              </a:rPr>
+              <a:t>Quality and verification</a:t>
+            </a:r>
+          </a:p>
+        </p:txBody>
+      </p:sp>
+      <p:sp>
+        <p:nvSpPr>
+          <p:cNvPr id="3" name="TextBox 2"/>
+          <p:cNvSpPr txBox="1"/>
+          <p:nvPr/>
+        </p:nvSpPr>
+        <p:spPr>
+          <a:xfrm>
+            <a:off x="621792" y="987552"/>
+            <a:ext cx="10789920" cy="320040"/>
+          </a:xfrm>
+          <a:prstGeom prst="rect">
+            <a:avLst/>
+          </a:prstGeom>
+          <a:noFill/>
+        </p:spPr>
+        <p:txBody>
+          <a:bodyPr wrap="square">
+            <a:spAutoFit/>
+          </a:bodyPr>
+          <a:lstStyle/>
+          <a:p>
+            <a:pPr algn="l"/>
+            <a:r>
+              <a:rPr sz="1200" b="0">
+                <a:solidFill>
+                  <a:srgbClr val="94A3B8"/>
+                </a:solidFill>
+                <a:latin typeface="Aptos"/>
+              </a:rPr>
+              <a:t>Evidence used to reduce regression risk before the jury demo.</a:t>
+            </a:r>
+          </a:p>
+        </p:txBody>
+      </p:sp>
+      <p:sp>
+        <p:nvSpPr>
+          <p:cNvPr id="4" name="Rounded Rectangle 3"/>
+          <p:cNvSpPr/>
+          <p:nvPr/>
+        </p:nvSpPr>
+        <p:spPr>
+          <a:xfrm>
+            <a:off x="685800" y="1600200"/>
+            <a:ext cx="3474720" cy="3474720"/>
+          </a:xfrm>
+          <a:prstGeom prst="roundRect">
+            <a:avLst/>
+          </a:prstGeom>
+          <a:solidFill>
+            <a:srgbClr val="111A2D"/>
+          </a:solidFill>
+          <a:ln>
+            <a:solidFill>
+              <a:srgbClr val="2D3A52"/>
+            </a:solidFill>
+          </a:ln>
+        </p:spPr>
+        <p:style>
+          <a:lnRef idx="1">
+            <a:schemeClr val="accent1"/>
+          </a:lnRef>
+          <a:fillRef idx="3">
+            <a:schemeClr val="accent1"/>
+          </a:fillRef>
+          <a:effectRef idx="2">
+            <a:schemeClr val="accent1"/>
+          </a:effectRef>
+          <a:fontRef idx="minor">
+            <a:schemeClr val="lt1"/>
+          </a:fontRef>
+        </p:style>
+        <p:txBody>
+          <a:bodyPr rtlCol="0" anchor="ctr"/>
+          <a:lstStyle/>
+          <a:p>
+            <a:pPr algn="ctr"/>
+          </a:p>
+        </p:txBody>
+      </p:sp>
+      <p:sp>
+        <p:nvSpPr>
+          <p:cNvPr id="5" name="TextBox 4"/>
+          <p:cNvSpPr txBox="1"/>
+          <p:nvPr/>
+        </p:nvSpPr>
+        <p:spPr>
+          <a:xfrm>
+            <a:off x="868680" y="1764792"/>
+            <a:ext cx="3108960" cy="320040"/>
+          </a:xfrm>
+          <a:prstGeom prst="rect">
+            <a:avLst/>
+          </a:prstGeom>
+          <a:noFill/>
+        </p:spPr>
+        <p:txBody>
+          <a:bodyPr wrap="square">
+            <a:spAutoFit/>
+          </a:bodyPr>
+          <a:lstStyle/>
+          <a:p>
+            <a:pPr algn="l"/>
+            <a:r>
+              <a:rPr sz="1600" b="1">
+                <a:solidFill>
+                  <a:srgbClr val="2DD4BF"/>
+                </a:solidFill>
+                <a:latin typeface="Aptos"/>
+              </a:rPr>
+              <a:t>Backend tests</a:t>
+            </a:r>
+          </a:p>
+        </p:txBody>
+      </p:sp>
+      <p:sp>
+        <p:nvSpPr>
+          <p:cNvPr id="6" name="TextBox 5"/>
+          <p:cNvSpPr txBox="1"/>
+          <p:nvPr/>
+        </p:nvSpPr>
+        <p:spPr>
+          <a:xfrm>
+            <a:off x="868680" y="2194560"/>
+            <a:ext cx="3108960" cy="2743200"/>
+          </a:xfrm>
+          <a:prstGeom prst="rect">
+            <a:avLst/>
+          </a:prstGeom>
+          <a:noFill/>
+        </p:spPr>
+        <p:txBody>
+          <a:bodyPr wrap="square">
+            <a:spAutoFit/>
+          </a:bodyPr>
+          <a:lstStyle/>
+          <a:p>
+            <a:pPr algn="l"/>
+            <a:r>
+              <a:rPr sz="1200" b="0">
+                <a:solidFill>
+                  <a:srgbClr val="E5EDF7"/>
+                </a:solidFill>
+                <a:latin typeface="Aptos"/>
+              </a:rPr>
+              <a:t>Authentication and verification
+Tenant authorization
+Admin access
+Document lifecycle
+RAG citations
+Telegram session expiry</a:t>
+            </a:r>
+          </a:p>
+        </p:txBody>
+      </p:sp>
+      <p:sp>
+        <p:nvSpPr>
+          <p:cNvPr id="7" name="Rounded Rectangle 6"/>
+          <p:cNvSpPr/>
+          <p:nvPr/>
+        </p:nvSpPr>
+        <p:spPr>
+          <a:xfrm>
+            <a:off x="4389120" y="1600200"/>
+            <a:ext cx="3474720" cy="3474720"/>
+          </a:xfrm>
+          <a:prstGeom prst="roundRect">
+            <a:avLst/>
+          </a:prstGeom>
+          <a:solidFill>
+            <a:srgbClr val="111A2D"/>
+          </a:solidFill>
+          <a:ln>
+            <a:solidFill>
+              <a:srgbClr val="2D3A52"/>
+            </a:solidFill>
+          </a:ln>
+        </p:spPr>
+        <p:style>
+          <a:lnRef idx="1">
+            <a:schemeClr val="accent1"/>
+          </a:lnRef>
+          <a:fillRef idx="3">
+            <a:schemeClr val="accent1"/>
+          </a:fillRef>
+          <a:effectRef idx="2">
+            <a:schemeClr val="accent1"/>
+          </a:effectRef>
+          <a:fontRef idx="minor">
+            <a:schemeClr val="lt1"/>
+          </a:fontRef>
+        </p:style>
+        <p:txBody>
+          <a:bodyPr rtlCol="0" anchor="ctr"/>
+          <a:lstStyle/>
+          <a:p>
+            <a:pPr algn="ctr"/>
+          </a:p>
+        </p:txBody>
+      </p:sp>
+      <p:sp>
+        <p:nvSpPr>
+          <p:cNvPr id="8" name="TextBox 7"/>
+          <p:cNvSpPr txBox="1"/>
+          <p:nvPr/>
+        </p:nvSpPr>
+        <p:spPr>
+          <a:xfrm>
+            <a:off x="4572000" y="1764792"/>
+            <a:ext cx="3108960" cy="320040"/>
+          </a:xfrm>
+          <a:prstGeom prst="rect">
+            <a:avLst/>
+          </a:prstGeom>
+          <a:noFill/>
+        </p:spPr>
+        <p:txBody>
+          <a:bodyPr wrap="square">
+            <a:spAutoFit/>
+          </a:bodyPr>
+          <a:lstStyle/>
+          <a:p>
+            <a:pPr algn="l"/>
+            <a:r>
+              <a:rPr sz="1600" b="1">
+                <a:solidFill>
+                  <a:srgbClr val="2DD4BF"/>
+                </a:solidFill>
+                <a:latin typeface="Aptos"/>
+              </a:rPr>
+              <a:t>Frontend checks</a:t>
+            </a:r>
+          </a:p>
+        </p:txBody>
+      </p:sp>
+      <p:sp>
+        <p:nvSpPr>
+          <p:cNvPr id="9" name="TextBox 8"/>
+          <p:cNvSpPr txBox="1"/>
+          <p:nvPr/>
+        </p:nvSpPr>
+        <p:spPr>
+          <a:xfrm>
+            <a:off x="4572000" y="2194560"/>
+            <a:ext cx="3108960" cy="2743200"/>
+          </a:xfrm>
+          <a:prstGeom prst="rect">
+            <a:avLst/>
+          </a:prstGeom>
+          <a:noFill/>
+        </p:spPr>
+        <p:txBody>
+          <a:bodyPr wrap="square">
+            <a:spAutoFit/>
+          </a:bodyPr>
+          <a:lstStyle/>
+          <a:p>
+            <a:pPr algn="l"/>
+            <a:r>
+              <a:rPr sz="1200" b="0">
+                <a:solidFill>
+                  <a:srgbClr val="E5EDF7"/>
+                </a:solidFill>
+                <a:latin typeface="Aptos"/>
+              </a:rPr>
+              <a:t>Production build
+16 generated routes
+Accessible labels and focus states
+Responsive landing/auth flows
+Reduced-motion support</a:t>
+            </a:r>
+          </a:p>
+        </p:txBody>
+      </p:sp>
+      <p:sp>
+        <p:nvSpPr>
+          <p:cNvPr id="10" name="Rounded Rectangle 9"/>
+          <p:cNvSpPr/>
+          <p:nvPr/>
+        </p:nvSpPr>
+        <p:spPr>
+          <a:xfrm>
+            <a:off x="8092440" y="1600200"/>
+            <a:ext cx="3474720" cy="3474720"/>
+          </a:xfrm>
+          <a:prstGeom prst="roundRect">
+            <a:avLst/>
+          </a:prstGeom>
+          <a:solidFill>
+            <a:srgbClr val="111A2D"/>
+          </a:solidFill>
+          <a:ln>
+            <a:solidFill>
+              <a:srgbClr val="2D3A52"/>
+            </a:solidFill>
+          </a:ln>
+        </p:spPr>
+        <p:style>
+          <a:lnRef idx="1">
+            <a:schemeClr val="accent1"/>
+          </a:lnRef>
+          <a:fillRef idx="3">
+            <a:schemeClr val="accent1"/>
+          </a:fillRef>
+          <a:effectRef idx="2">
+            <a:schemeClr val="accent1"/>
+          </a:effectRef>
+          <a:fontRef idx="minor">
+            <a:schemeClr val="lt1"/>
+          </a:fontRef>
+        </p:style>
+        <p:txBody>
+          <a:bodyPr rtlCol="0" anchor="ctr"/>
+          <a:lstStyle/>
+          <a:p>
+            <a:pPr algn="ctr"/>
+          </a:p>
+        </p:txBody>
+      </p:sp>
+      <p:sp>
+        <p:nvSpPr>
+          <p:cNvPr id="11" name="TextBox 10"/>
+          <p:cNvSpPr txBox="1"/>
+          <p:nvPr/>
+        </p:nvSpPr>
+        <p:spPr>
+          <a:xfrm>
+            <a:off x="8275319" y="1764792"/>
+            <a:ext cx="3108960" cy="320040"/>
+          </a:xfrm>
+          <a:prstGeom prst="rect">
+            <a:avLst/>
+          </a:prstGeom>
+          <a:noFill/>
+        </p:spPr>
+        <p:txBody>
+          <a:bodyPr wrap="square">
+            <a:spAutoFit/>
+          </a:bodyPr>
+          <a:lstStyle/>
+          <a:p>
+            <a:pPr algn="l"/>
+            <a:r>
+              <a:rPr sz="1600" b="1">
+                <a:solidFill>
+                  <a:srgbClr val="2DD4BF"/>
+                </a:solidFill>
+                <a:latin typeface="Aptos"/>
+              </a:rPr>
+              <a:t>Operational checks</a:t>
+            </a:r>
+          </a:p>
+        </p:txBody>
+      </p:sp>
+      <p:sp>
+        <p:nvSpPr>
+          <p:cNvPr id="12" name="TextBox 11"/>
+          <p:cNvSpPr txBox="1"/>
+          <p:nvPr/>
+        </p:nvSpPr>
+        <p:spPr>
+          <a:xfrm>
+            <a:off x="8275319" y="2194560"/>
+            <a:ext cx="3108960" cy="2743200"/>
+          </a:xfrm>
+          <a:prstGeom prst="rect">
+            <a:avLst/>
+          </a:prstGeom>
+          <a:noFill/>
+        </p:spPr>
+        <p:txBody>
+          <a:bodyPr wrap="square">
+            <a:spAutoFit/>
+          </a:bodyPr>
+          <a:lstStyle/>
+          <a:p>
+            <a:pPr algn="l"/>
+            <a:r>
+              <a:rPr sz="1200" b="0">
+                <a:solidFill>
+                  <a:srgbClr val="E5EDF7"/>
+                </a:solidFill>
+                <a:latin typeface="Aptos"/>
+              </a:rPr>
+              <a:t>Health endpoint
+Strict CORS defaults
+Production reload disabled
+Generic user-facing failures
+Diff and presentation validation</a:t>
+            </a:r>
+          </a:p>
+        </p:txBody>
+      </p:sp>
+      <p:sp>
+        <p:nvSpPr>
+          <p:cNvPr id="13" name="TextBox 12"/>
+          <p:cNvSpPr txBox="1"/>
+          <p:nvPr/>
+        </p:nvSpPr>
+        <p:spPr>
+          <a:xfrm>
+            <a:off x="868680" y="5623560"/>
+            <a:ext cx="10424160" cy="320040"/>
+          </a:xfrm>
+          <a:prstGeom prst="rect">
+            <a:avLst/>
+          </a:prstGeom>
+          <a:noFill/>
+        </p:spPr>
+        <p:txBody>
+          <a:bodyPr wrap="square">
+            <a:spAutoFit/>
+          </a:bodyPr>
+          <a:lstStyle/>
+          <a:p>
+            <a:pPr algn="ctr"/>
+            <a:r>
+              <a:rPr sz="1400" b="0">
+                <a:solidFill>
+                  <a:srgbClr val="2DD4BF"/>
+                </a:solidFill>
+                <a:latin typeface="Aptos"/>
+              </a:rPr>
+              <a:t>The demo separates verified behavior from roadmap items so the jury can evaluate the working MVP honestly.</a:t>
             </a:r>
           </a:p>
         </p:txBody>
@@ -6877,6 +9084,1975 @@
                 <a:latin typeface="Aptos"/>
               </a:rPr>
               <a:t>A shared retrieval layer can expose another company's private information.</a:t>
+            </a:r>
+          </a:p>
+        </p:txBody>
+      </p:sp>
+    </p:spTree>
+  </p:cSld>
+  <p:clrMapOvr>
+    <a:masterClrMapping/>
+  </p:clrMapOvr>
+</p:sld>
+</file>
+
+<file path=ppt/slides/slide20.xml><?xml version="1.0" encoding="utf-8"?>
+<p:sld xmlns:a="http://schemas.openxmlformats.org/drawingml/2006/main" xmlns:p="http://schemas.openxmlformats.org/presentationml/2006/main" xmlns:r="http://schemas.openxmlformats.org/officeDocument/2006/relationships">
+  <p:cSld>
+    <p:bg>
+      <p:bgPr>
+        <a:solidFill>
+          <a:srgbClr val="0B1120"/>
+        </a:solidFill>
+        <a:effectLst/>
+      </p:bgPr>
+    </p:bg>
+    <p:spTree>
+      <p:nvGrpSpPr>
+        <p:cNvPr id="1" name=""/>
+        <p:cNvGrpSpPr/>
+        <p:nvPr/>
+      </p:nvGrpSpPr>
+      <p:grpSpPr/>
+      <p:sp>
+        <p:nvSpPr>
+          <p:cNvPr id="2" name="TextBox 1"/>
+          <p:cNvSpPr txBox="1"/>
+          <p:nvPr/>
+        </p:nvSpPr>
+        <p:spPr>
+          <a:xfrm>
+            <a:off x="594360" y="411480"/>
+            <a:ext cx="10972800" cy="502920"/>
+          </a:xfrm>
+          <a:prstGeom prst="rect">
+            <a:avLst/>
+          </a:prstGeom>
+          <a:noFill/>
+        </p:spPr>
+        <p:txBody>
+          <a:bodyPr wrap="square">
+            <a:spAutoFit/>
+          </a:bodyPr>
+          <a:lstStyle/>
+          <a:p>
+            <a:pPr algn="l"/>
+            <a:r>
+              <a:rPr sz="2800" b="1">
+                <a:solidFill>
+                  <a:srgbClr val="E5EDF7"/>
+                </a:solidFill>
+                <a:latin typeface="Aptos"/>
+              </a:rPr>
+              <a:t>Render deployment runbook</a:t>
+            </a:r>
+          </a:p>
+        </p:txBody>
+      </p:sp>
+      <p:sp>
+        <p:nvSpPr>
+          <p:cNvPr id="3" name="TextBox 2"/>
+          <p:cNvSpPr txBox="1"/>
+          <p:nvPr/>
+        </p:nvSpPr>
+        <p:spPr>
+          <a:xfrm>
+            <a:off x="621792" y="987552"/>
+            <a:ext cx="10789920" cy="320040"/>
+          </a:xfrm>
+          <a:prstGeom prst="rect">
+            <a:avLst/>
+          </a:prstGeom>
+          <a:noFill/>
+        </p:spPr>
+        <p:txBody>
+          <a:bodyPr wrap="square">
+            <a:spAutoFit/>
+          </a:bodyPr>
+          <a:lstStyle/>
+          <a:p>
+            <a:pPr algn="l"/>
+            <a:r>
+              <a:rPr sz="1200" b="0">
+                <a:solidFill>
+                  <a:srgbClr val="94A3B8"/>
+                </a:solidFill>
+                <a:latin typeface="Aptos"/>
+              </a:rPr>
+              <a:t>A repeatable path from the repository to a public demo environment.</a:t>
+            </a:r>
+          </a:p>
+        </p:txBody>
+      </p:sp>
+      <p:sp>
+        <p:nvSpPr>
+          <p:cNvPr id="4" name="TextBox 3"/>
+          <p:cNvSpPr txBox="1"/>
+          <p:nvPr/>
+        </p:nvSpPr>
+        <p:spPr>
+          <a:xfrm>
+            <a:off x="822960" y="1554480"/>
+            <a:ext cx="4846320" cy="411480"/>
+          </a:xfrm>
+          <a:prstGeom prst="rect">
+            <a:avLst/>
+          </a:prstGeom>
+          <a:noFill/>
+        </p:spPr>
+        <p:txBody>
+          <a:bodyPr wrap="square">
+            <a:spAutoFit/>
+          </a:bodyPr>
+          <a:lstStyle/>
+          <a:p>
+            <a:pPr algn="l"/>
+            <a:r>
+              <a:rPr sz="1900" b="1">
+                <a:solidFill>
+                  <a:srgbClr val="E5EDF7"/>
+                </a:solidFill>
+                <a:latin typeface="Aptos"/>
+              </a:rPr>
+              <a:t>1  Create Blueprint</a:t>
+            </a:r>
+          </a:p>
+        </p:txBody>
+      </p:sp>
+      <p:sp>
+        <p:nvSpPr>
+          <p:cNvPr id="5" name="TextBox 4"/>
+          <p:cNvSpPr txBox="1"/>
+          <p:nvPr/>
+        </p:nvSpPr>
+        <p:spPr>
+          <a:xfrm>
+            <a:off x="822960" y="1965960"/>
+            <a:ext cx="5029200" cy="320040"/>
+          </a:xfrm>
+          <a:prstGeom prst="rect">
+            <a:avLst/>
+          </a:prstGeom>
+          <a:noFill/>
+        </p:spPr>
+        <p:txBody>
+          <a:bodyPr wrap="square">
+            <a:spAutoFit/>
+          </a:bodyPr>
+          <a:lstStyle/>
+          <a:p>
+            <a:pPr algn="l"/>
+            <a:r>
+              <a:rPr sz="1400" b="0">
+                <a:solidFill>
+                  <a:srgbClr val="94A3B8"/>
+                </a:solidFill>
+                <a:latin typeface="Aptos"/>
+              </a:rPr>
+              <a:t>Select the repository and apply render.yaml.</a:t>
+            </a:r>
+          </a:p>
+        </p:txBody>
+      </p:sp>
+      <p:sp>
+        <p:nvSpPr>
+          <p:cNvPr id="6" name="TextBox 5"/>
+          <p:cNvSpPr txBox="1"/>
+          <p:nvPr/>
+        </p:nvSpPr>
+        <p:spPr>
+          <a:xfrm>
+            <a:off x="822960" y="2606040"/>
+            <a:ext cx="4846320" cy="411480"/>
+          </a:xfrm>
+          <a:prstGeom prst="rect">
+            <a:avLst/>
+          </a:prstGeom>
+          <a:noFill/>
+        </p:spPr>
+        <p:txBody>
+          <a:bodyPr wrap="square">
+            <a:spAutoFit/>
+          </a:bodyPr>
+          <a:lstStyle/>
+          <a:p>
+            <a:pPr algn="l"/>
+            <a:r>
+              <a:rPr sz="1900" b="1">
+                <a:solidFill>
+                  <a:srgbClr val="E5EDF7"/>
+                </a:solidFill>
+                <a:latin typeface="Aptos"/>
+              </a:rPr>
+              <a:t>2  Configure secrets</a:t>
+            </a:r>
+          </a:p>
+        </p:txBody>
+      </p:sp>
+      <p:sp>
+        <p:nvSpPr>
+          <p:cNvPr id="7" name="TextBox 6"/>
+          <p:cNvSpPr txBox="1"/>
+          <p:nvPr/>
+        </p:nvSpPr>
+        <p:spPr>
+          <a:xfrm>
+            <a:off x="822960" y="3017520"/>
+            <a:ext cx="5303520" cy="502920"/>
+          </a:xfrm>
+          <a:prstGeom prst="rect">
+            <a:avLst/>
+          </a:prstGeom>
+          <a:noFill/>
+        </p:spPr>
+        <p:txBody>
+          <a:bodyPr wrap="square">
+            <a:spAutoFit/>
+          </a:bodyPr>
+          <a:lstStyle/>
+          <a:p>
+            <a:pPr algn="l"/>
+            <a:r>
+              <a:rPr sz="1400" b="0">
+                <a:solidFill>
+                  <a:srgbClr val="94A3B8"/>
+                </a:solidFill>
+                <a:latin typeface="Aptos"/>
+              </a:rPr>
+              <a:t>DATABASE_URL, SECRET_KEY, CORS_ORIGINS, SMTP, and Telegram token.</a:t>
+            </a:r>
+          </a:p>
+        </p:txBody>
+      </p:sp>
+      <p:sp>
+        <p:nvSpPr>
+          <p:cNvPr id="8" name="TextBox 7"/>
+          <p:cNvSpPr txBox="1"/>
+          <p:nvPr/>
+        </p:nvSpPr>
+        <p:spPr>
+          <a:xfrm>
+            <a:off x="822960" y="3657600"/>
+            <a:ext cx="4846320" cy="411480"/>
+          </a:xfrm>
+          <a:prstGeom prst="rect">
+            <a:avLst/>
+          </a:prstGeom>
+          <a:noFill/>
+        </p:spPr>
+        <p:txBody>
+          <a:bodyPr wrap="square">
+            <a:spAutoFit/>
+          </a:bodyPr>
+          <a:lstStyle/>
+          <a:p>
+            <a:pPr algn="l"/>
+            <a:r>
+              <a:rPr sz="1900" b="1">
+                <a:solidFill>
+                  <a:srgbClr val="E5EDF7"/>
+                </a:solidFill>
+                <a:latin typeface="Aptos"/>
+              </a:rPr>
+              <a:t>3  Seed and verify</a:t>
+            </a:r>
+          </a:p>
+        </p:txBody>
+      </p:sp>
+      <p:sp>
+        <p:nvSpPr>
+          <p:cNvPr id="9" name="TextBox 8"/>
+          <p:cNvSpPr txBox="1"/>
+          <p:nvPr/>
+        </p:nvSpPr>
+        <p:spPr>
+          <a:xfrm>
+            <a:off x="822960" y="4069080"/>
+            <a:ext cx="5486400" cy="640080"/>
+          </a:xfrm>
+          <a:prstGeom prst="rect">
+            <a:avLst/>
+          </a:prstGeom>
+          <a:noFill/>
+        </p:spPr>
+        <p:txBody>
+          <a:bodyPr wrap="square">
+            <a:spAutoFit/>
+          </a:bodyPr>
+          <a:lstStyle/>
+          <a:p>
+            <a:pPr algn="l"/>
+            <a:r>
+              <a:rPr sz="1400" b="0">
+                <a:solidFill>
+                  <a:srgbClr val="94A3B8"/>
+                </a:solidFill>
+                <a:latin typeface="Aptos"/>
+              </a:rPr>
+              <a:t>Run the explicit jury seed command, then test health, login, upload, chat, and logs.</a:t>
+            </a:r>
+          </a:p>
+        </p:txBody>
+      </p:sp>
+      <p:sp>
+        <p:nvSpPr>
+          <p:cNvPr id="10" name="Rounded Rectangle 9"/>
+          <p:cNvSpPr/>
+          <p:nvPr/>
+        </p:nvSpPr>
+        <p:spPr>
+          <a:xfrm>
+            <a:off x="6675120" y="1554480"/>
+            <a:ext cx="4754880" cy="3383280"/>
+          </a:xfrm>
+          <a:prstGeom prst="roundRect">
+            <a:avLst/>
+          </a:prstGeom>
+          <a:solidFill>
+            <a:srgbClr val="111A2D"/>
+          </a:solidFill>
+          <a:ln>
+            <a:solidFill>
+              <a:srgbClr val="2D3A52"/>
+            </a:solidFill>
+          </a:ln>
+        </p:spPr>
+        <p:style>
+          <a:lnRef idx="1">
+            <a:schemeClr val="accent1"/>
+          </a:lnRef>
+          <a:fillRef idx="3">
+            <a:schemeClr val="accent1"/>
+          </a:fillRef>
+          <a:effectRef idx="2">
+            <a:schemeClr val="accent1"/>
+          </a:effectRef>
+          <a:fontRef idx="minor">
+            <a:schemeClr val="lt1"/>
+          </a:fontRef>
+        </p:style>
+        <p:txBody>
+          <a:bodyPr rtlCol="0" anchor="ctr"/>
+          <a:lstStyle/>
+          <a:p>
+            <a:pPr algn="ctr"/>
+          </a:p>
+        </p:txBody>
+      </p:sp>
+      <p:sp>
+        <p:nvSpPr>
+          <p:cNvPr id="11" name="TextBox 10"/>
+          <p:cNvSpPr txBox="1"/>
+          <p:nvPr/>
+        </p:nvSpPr>
+        <p:spPr>
+          <a:xfrm>
+            <a:off x="6858000" y="1719072"/>
+            <a:ext cx="4389120" cy="320040"/>
+          </a:xfrm>
+          <a:prstGeom prst="rect">
+            <a:avLst/>
+          </a:prstGeom>
+          <a:noFill/>
+        </p:spPr>
+        <p:txBody>
+          <a:bodyPr wrap="square">
+            <a:spAutoFit/>
+          </a:bodyPr>
+          <a:lstStyle/>
+          <a:p>
+            <a:pPr algn="l"/>
+            <a:r>
+              <a:rPr sz="1600" b="1">
+                <a:solidFill>
+                  <a:srgbClr val="2DD4BF"/>
+                </a:solidFill>
+                <a:latin typeface="Aptos"/>
+              </a:rPr>
+              <a:t>Production checklist</a:t>
+            </a:r>
+          </a:p>
+        </p:txBody>
+      </p:sp>
+      <p:sp>
+        <p:nvSpPr>
+          <p:cNvPr id="12" name="TextBox 11"/>
+          <p:cNvSpPr txBox="1"/>
+          <p:nvPr/>
+        </p:nvSpPr>
+        <p:spPr>
+          <a:xfrm>
+            <a:off x="6858000" y="2148840"/>
+            <a:ext cx="4389120" cy="2651760"/>
+          </a:xfrm>
+          <a:prstGeom prst="rect">
+            <a:avLst/>
+          </a:prstGeom>
+          <a:noFill/>
+        </p:spPr>
+        <p:txBody>
+          <a:bodyPr wrap="square">
+            <a:spAutoFit/>
+          </a:bodyPr>
+          <a:lstStyle/>
+          <a:p>
+            <a:pPr algn="l"/>
+            <a:r>
+              <a:rPr sz="1200" b="0">
+                <a:solidFill>
+                  <a:srgbClr val="E5EDF7"/>
+                </a:solidFill>
+                <a:latin typeface="Aptos"/>
+              </a:rPr>
+              <a:t>Frontend URL added to backend CORS
+Managed PostgreSQL connected
+Persistent file storage selected
+SMTP delivery verified
+Secrets stored in Render, not Git
+Worker health and logs monitored</a:t>
+            </a:r>
+          </a:p>
+        </p:txBody>
+      </p:sp>
+      <p:sp>
+        <p:nvSpPr>
+          <p:cNvPr id="13" name="TextBox 12"/>
+          <p:cNvSpPr txBox="1"/>
+          <p:nvPr/>
+        </p:nvSpPr>
+        <p:spPr>
+          <a:xfrm>
+            <a:off x="822960" y="5669280"/>
+            <a:ext cx="10515600" cy="320040"/>
+          </a:xfrm>
+          <a:prstGeom prst="rect">
+            <a:avLst/>
+          </a:prstGeom>
+          <a:noFill/>
+        </p:spPr>
+        <p:txBody>
+          <a:bodyPr wrap="square">
+            <a:spAutoFit/>
+          </a:bodyPr>
+          <a:lstStyle/>
+          <a:p>
+            <a:pPr algn="ctr"/>
+            <a:r>
+              <a:rPr sz="1400" b="0">
+                <a:solidFill>
+                  <a:srgbClr val="2DD4BF"/>
+                </a:solidFill>
+                <a:latin typeface="Aptos"/>
+              </a:rPr>
+              <a:t>Deployment is an operator-controlled step; no paid or irreversible action is performed by the application.</a:t>
+            </a:r>
+          </a:p>
+        </p:txBody>
+      </p:sp>
+    </p:spTree>
+  </p:cSld>
+  <p:clrMapOvr>
+    <a:masterClrMapping/>
+  </p:clrMapOvr>
+</p:sld>
+</file>
+
+<file path=ppt/slides/slide21.xml><?xml version="1.0" encoding="utf-8"?>
+<p:sld xmlns:a="http://schemas.openxmlformats.org/drawingml/2006/main" xmlns:p="http://schemas.openxmlformats.org/presentationml/2006/main" xmlns:r="http://schemas.openxmlformats.org/officeDocument/2006/relationships">
+  <p:cSld>
+    <p:bg>
+      <p:bgPr>
+        <a:solidFill>
+          <a:srgbClr val="0B1120"/>
+        </a:solidFill>
+        <a:effectLst/>
+      </p:bgPr>
+    </p:bg>
+    <p:spTree>
+      <p:nvGrpSpPr>
+        <p:cNvPr id="1" name=""/>
+        <p:cNvGrpSpPr/>
+        <p:nvPr/>
+      </p:nvGrpSpPr>
+      <p:grpSpPr/>
+      <p:sp>
+        <p:nvSpPr>
+          <p:cNvPr id="2" name="TextBox 1"/>
+          <p:cNvSpPr txBox="1"/>
+          <p:nvPr/>
+        </p:nvSpPr>
+        <p:spPr>
+          <a:xfrm>
+            <a:off x="594360" y="411480"/>
+            <a:ext cx="10972800" cy="502920"/>
+          </a:xfrm>
+          <a:prstGeom prst="rect">
+            <a:avLst/>
+          </a:prstGeom>
+          <a:noFill/>
+        </p:spPr>
+        <p:txBody>
+          <a:bodyPr wrap="square">
+            <a:spAutoFit/>
+          </a:bodyPr>
+          <a:lstStyle/>
+          <a:p>
+            <a:pPr algn="l"/>
+            <a:r>
+              <a:rPr sz="2800" b="1">
+                <a:solidFill>
+                  <a:srgbClr val="E5EDF7"/>
+                </a:solidFill>
+                <a:latin typeface="Aptos"/>
+              </a:rPr>
+              <a:t>Risks and mitigations</a:t>
+            </a:r>
+          </a:p>
+        </p:txBody>
+      </p:sp>
+      <p:sp>
+        <p:nvSpPr>
+          <p:cNvPr id="3" name="TextBox 2"/>
+          <p:cNvSpPr txBox="1"/>
+          <p:nvPr/>
+        </p:nvSpPr>
+        <p:spPr>
+          <a:xfrm>
+            <a:off x="621792" y="987552"/>
+            <a:ext cx="10789920" cy="320040"/>
+          </a:xfrm>
+          <a:prstGeom prst="rect">
+            <a:avLst/>
+          </a:prstGeom>
+          <a:noFill/>
+        </p:spPr>
+        <p:txBody>
+          <a:bodyPr wrap="square">
+            <a:spAutoFit/>
+          </a:bodyPr>
+          <a:lstStyle/>
+          <a:p>
+            <a:pPr algn="l"/>
+            <a:r>
+              <a:rPr sz="1200" b="0">
+                <a:solidFill>
+                  <a:srgbClr val="94A3B8"/>
+                </a:solidFill>
+                <a:latin typeface="Aptos"/>
+              </a:rPr>
+              <a:t>The design acknowledges what can fail and how the platform responds.</a:t>
+            </a:r>
+          </a:p>
+        </p:txBody>
+      </p:sp>
+      <p:sp>
+        <p:nvSpPr>
+          <p:cNvPr id="4" name="Rounded Rectangle 3"/>
+          <p:cNvSpPr/>
+          <p:nvPr/>
+        </p:nvSpPr>
+        <p:spPr>
+          <a:xfrm>
+            <a:off x="685800" y="1600200"/>
+            <a:ext cx="3474720" cy="3520440"/>
+          </a:xfrm>
+          <a:prstGeom prst="roundRect">
+            <a:avLst/>
+          </a:prstGeom>
+          <a:solidFill>
+            <a:srgbClr val="111A2D"/>
+          </a:solidFill>
+          <a:ln>
+            <a:solidFill>
+              <a:srgbClr val="2D3A52"/>
+            </a:solidFill>
+          </a:ln>
+        </p:spPr>
+        <p:style>
+          <a:lnRef idx="1">
+            <a:schemeClr val="accent1"/>
+          </a:lnRef>
+          <a:fillRef idx="3">
+            <a:schemeClr val="accent1"/>
+          </a:fillRef>
+          <a:effectRef idx="2">
+            <a:schemeClr val="accent1"/>
+          </a:effectRef>
+          <a:fontRef idx="minor">
+            <a:schemeClr val="lt1"/>
+          </a:fontRef>
+        </p:style>
+        <p:txBody>
+          <a:bodyPr rtlCol="0" anchor="ctr"/>
+          <a:lstStyle/>
+          <a:p>
+            <a:pPr algn="ctr"/>
+          </a:p>
+        </p:txBody>
+      </p:sp>
+      <p:sp>
+        <p:nvSpPr>
+          <p:cNvPr id="5" name="TextBox 4"/>
+          <p:cNvSpPr txBox="1"/>
+          <p:nvPr/>
+        </p:nvSpPr>
+        <p:spPr>
+          <a:xfrm>
+            <a:off x="868680" y="1764792"/>
+            <a:ext cx="3108960" cy="320040"/>
+          </a:xfrm>
+          <a:prstGeom prst="rect">
+            <a:avLst/>
+          </a:prstGeom>
+          <a:noFill/>
+        </p:spPr>
+        <p:txBody>
+          <a:bodyPr wrap="square">
+            <a:spAutoFit/>
+          </a:bodyPr>
+          <a:lstStyle/>
+          <a:p>
+            <a:pPr algn="l"/>
+            <a:r>
+              <a:rPr sz="1600" b="1">
+                <a:solidFill>
+                  <a:srgbClr val="2DD4BF"/>
+                </a:solidFill>
+                <a:latin typeface="Aptos"/>
+              </a:rPr>
+              <a:t>Hallucination risk</a:t>
+            </a:r>
+          </a:p>
+        </p:txBody>
+      </p:sp>
+      <p:sp>
+        <p:nvSpPr>
+          <p:cNvPr id="6" name="TextBox 5"/>
+          <p:cNvSpPr txBox="1"/>
+          <p:nvPr/>
+        </p:nvSpPr>
+        <p:spPr>
+          <a:xfrm>
+            <a:off x="868680" y="2194560"/>
+            <a:ext cx="3108960" cy="2788920"/>
+          </a:xfrm>
+          <a:prstGeom prst="rect">
+            <a:avLst/>
+          </a:prstGeom>
+          <a:noFill/>
+        </p:spPr>
+        <p:txBody>
+          <a:bodyPr wrap="square">
+            <a:spAutoFit/>
+          </a:bodyPr>
+          <a:lstStyle/>
+          <a:p>
+            <a:pPr algn="l"/>
+            <a:r>
+              <a:rPr sz="1200" b="0">
+                <a:solidFill>
+                  <a:srgbClr val="E5EDF7"/>
+                </a:solidFill>
+                <a:latin typeface="Aptos"/>
+              </a:rPr>
+              <a:t>Mitigation: tenant-scoped retrieval, grounded prompts, citations, and explicit out-of-domain refusal.</a:t>
+            </a:r>
+          </a:p>
+        </p:txBody>
+      </p:sp>
+      <p:sp>
+        <p:nvSpPr>
+          <p:cNvPr id="7" name="Rounded Rectangle 6"/>
+          <p:cNvSpPr/>
+          <p:nvPr/>
+        </p:nvSpPr>
+        <p:spPr>
+          <a:xfrm>
+            <a:off x="4389120" y="1600200"/>
+            <a:ext cx="3474720" cy="3520440"/>
+          </a:xfrm>
+          <a:prstGeom prst="roundRect">
+            <a:avLst/>
+          </a:prstGeom>
+          <a:solidFill>
+            <a:srgbClr val="111A2D"/>
+          </a:solidFill>
+          <a:ln>
+            <a:solidFill>
+              <a:srgbClr val="2D3A52"/>
+            </a:solidFill>
+          </a:ln>
+        </p:spPr>
+        <p:style>
+          <a:lnRef idx="1">
+            <a:schemeClr val="accent1"/>
+          </a:lnRef>
+          <a:fillRef idx="3">
+            <a:schemeClr val="accent1"/>
+          </a:fillRef>
+          <a:effectRef idx="2">
+            <a:schemeClr val="accent1"/>
+          </a:effectRef>
+          <a:fontRef idx="minor">
+            <a:schemeClr val="lt1"/>
+          </a:fontRef>
+        </p:style>
+        <p:txBody>
+          <a:bodyPr rtlCol="0" anchor="ctr"/>
+          <a:lstStyle/>
+          <a:p>
+            <a:pPr algn="ctr"/>
+          </a:p>
+        </p:txBody>
+      </p:sp>
+      <p:sp>
+        <p:nvSpPr>
+          <p:cNvPr id="8" name="TextBox 7"/>
+          <p:cNvSpPr txBox="1"/>
+          <p:nvPr/>
+        </p:nvSpPr>
+        <p:spPr>
+          <a:xfrm>
+            <a:off x="4572000" y="1764792"/>
+            <a:ext cx="3108960" cy="320040"/>
+          </a:xfrm>
+          <a:prstGeom prst="rect">
+            <a:avLst/>
+          </a:prstGeom>
+          <a:noFill/>
+        </p:spPr>
+        <p:txBody>
+          <a:bodyPr wrap="square">
+            <a:spAutoFit/>
+          </a:bodyPr>
+          <a:lstStyle/>
+          <a:p>
+            <a:pPr algn="l"/>
+            <a:r>
+              <a:rPr sz="1600" b="1">
+                <a:solidFill>
+                  <a:srgbClr val="2DD4BF"/>
+                </a:solidFill>
+                <a:latin typeface="Aptos"/>
+              </a:rPr>
+              <a:t>Data leakage risk</a:t>
+            </a:r>
+          </a:p>
+        </p:txBody>
+      </p:sp>
+      <p:sp>
+        <p:nvSpPr>
+          <p:cNvPr id="9" name="TextBox 8"/>
+          <p:cNvSpPr txBox="1"/>
+          <p:nvPr/>
+        </p:nvSpPr>
+        <p:spPr>
+          <a:xfrm>
+            <a:off x="4572000" y="2194560"/>
+            <a:ext cx="3108960" cy="2788920"/>
+          </a:xfrm>
+          <a:prstGeom prst="rect">
+            <a:avLst/>
+          </a:prstGeom>
+          <a:noFill/>
+        </p:spPr>
+        <p:txBody>
+          <a:bodyPr wrap="square">
+            <a:spAutoFit/>
+          </a:bodyPr>
+          <a:lstStyle/>
+          <a:p>
+            <a:pPr algn="l"/>
+            <a:r>
+              <a:rPr sz="1200" b="0">
+                <a:solidFill>
+                  <a:srgbClr val="E5EDF7"/>
+                </a:solidFill>
+                <a:latin typeface="Aptos"/>
+              </a:rPr>
+              <a:t>Mitigation: server-side tenant filters, hidden 404 responses, role guards, audit events, and IDOR simulation.</a:t>
+            </a:r>
+          </a:p>
+        </p:txBody>
+      </p:sp>
+      <p:sp>
+        <p:nvSpPr>
+          <p:cNvPr id="10" name="Rounded Rectangle 9"/>
+          <p:cNvSpPr/>
+          <p:nvPr/>
+        </p:nvSpPr>
+        <p:spPr>
+          <a:xfrm>
+            <a:off x="8092440" y="1600200"/>
+            <a:ext cx="3474720" cy="3520440"/>
+          </a:xfrm>
+          <a:prstGeom prst="roundRect">
+            <a:avLst/>
+          </a:prstGeom>
+          <a:solidFill>
+            <a:srgbClr val="111A2D"/>
+          </a:solidFill>
+          <a:ln>
+            <a:solidFill>
+              <a:srgbClr val="2D3A52"/>
+            </a:solidFill>
+          </a:ln>
+        </p:spPr>
+        <p:style>
+          <a:lnRef idx="1">
+            <a:schemeClr val="accent1"/>
+          </a:lnRef>
+          <a:fillRef idx="3">
+            <a:schemeClr val="accent1"/>
+          </a:fillRef>
+          <a:effectRef idx="2">
+            <a:schemeClr val="accent1"/>
+          </a:effectRef>
+          <a:fontRef idx="minor">
+            <a:schemeClr val="lt1"/>
+          </a:fontRef>
+        </p:style>
+        <p:txBody>
+          <a:bodyPr rtlCol="0" anchor="ctr"/>
+          <a:lstStyle/>
+          <a:p>
+            <a:pPr algn="ctr"/>
+          </a:p>
+        </p:txBody>
+      </p:sp>
+      <p:sp>
+        <p:nvSpPr>
+          <p:cNvPr id="11" name="TextBox 10"/>
+          <p:cNvSpPr txBox="1"/>
+          <p:nvPr/>
+        </p:nvSpPr>
+        <p:spPr>
+          <a:xfrm>
+            <a:off x="8275319" y="1764792"/>
+            <a:ext cx="3108960" cy="320040"/>
+          </a:xfrm>
+          <a:prstGeom prst="rect">
+            <a:avLst/>
+          </a:prstGeom>
+          <a:noFill/>
+        </p:spPr>
+        <p:txBody>
+          <a:bodyPr wrap="square">
+            <a:spAutoFit/>
+          </a:bodyPr>
+          <a:lstStyle/>
+          <a:p>
+            <a:pPr algn="l"/>
+            <a:r>
+              <a:rPr sz="1600" b="1">
+                <a:solidFill>
+                  <a:srgbClr val="2DD4BF"/>
+                </a:solidFill>
+                <a:latin typeface="Aptos"/>
+              </a:rPr>
+              <a:t>Production scale risk</a:t>
+            </a:r>
+          </a:p>
+        </p:txBody>
+      </p:sp>
+      <p:sp>
+        <p:nvSpPr>
+          <p:cNvPr id="12" name="TextBox 11"/>
+          <p:cNvSpPr txBox="1"/>
+          <p:nvPr/>
+        </p:nvSpPr>
+        <p:spPr>
+          <a:xfrm>
+            <a:off x="8275319" y="2194560"/>
+            <a:ext cx="3108960" cy="2788920"/>
+          </a:xfrm>
+          <a:prstGeom prst="rect">
+            <a:avLst/>
+          </a:prstGeom>
+          <a:noFill/>
+        </p:spPr>
+        <p:txBody>
+          <a:bodyPr wrap="square">
+            <a:spAutoFit/>
+          </a:bodyPr>
+          <a:lstStyle/>
+          <a:p>
+            <a:pPr algn="l"/>
+            <a:r>
+              <a:rPr sz="1200" b="0">
+                <a:solidFill>
+                  <a:srgbClr val="E5EDF7"/>
+                </a:solidFill>
+                <a:latin typeface="Aptos"/>
+              </a:rPr>
+              <a:t>Mitigation roadmap: Alembic migrations, object storage, async workers, OCR, rate limits, and managed observability.</a:t>
+            </a:r>
+          </a:p>
+        </p:txBody>
+      </p:sp>
+      <p:sp>
+        <p:nvSpPr>
+          <p:cNvPr id="13" name="TextBox 12"/>
+          <p:cNvSpPr txBox="1"/>
+          <p:nvPr/>
+        </p:nvSpPr>
+        <p:spPr>
+          <a:xfrm>
+            <a:off x="868680" y="5623560"/>
+            <a:ext cx="10424160" cy="320040"/>
+          </a:xfrm>
+          <a:prstGeom prst="rect">
+            <a:avLst/>
+          </a:prstGeom>
+          <a:noFill/>
+        </p:spPr>
+        <p:txBody>
+          <a:bodyPr wrap="square">
+            <a:spAutoFit/>
+          </a:bodyPr>
+          <a:lstStyle/>
+          <a:p>
+            <a:pPr algn="ctr"/>
+            <a:r>
+              <a:rPr sz="1400" b="0">
+                <a:solidFill>
+                  <a:srgbClr val="2DD4BF"/>
+                </a:solidFill>
+                <a:latin typeface="Aptos"/>
+              </a:rPr>
+              <a:t>Security is treated as a product feature and an observable operating process, not a UI promise.</a:t>
+            </a:r>
+          </a:p>
+        </p:txBody>
+      </p:sp>
+    </p:spTree>
+  </p:cSld>
+  <p:clrMapOvr>
+    <a:masterClrMapping/>
+  </p:clrMapOvr>
+</p:sld>
+</file>
+
+<file path=ppt/slides/slide22.xml><?xml version="1.0" encoding="utf-8"?>
+<p:sld xmlns:a="http://schemas.openxmlformats.org/drawingml/2006/main" xmlns:p="http://schemas.openxmlformats.org/presentationml/2006/main" xmlns:r="http://schemas.openxmlformats.org/officeDocument/2006/relationships">
+  <p:cSld>
+    <p:bg>
+      <p:bgPr>
+        <a:solidFill>
+          <a:srgbClr val="0B1120"/>
+        </a:solidFill>
+        <a:effectLst/>
+      </p:bgPr>
+    </p:bg>
+    <p:spTree>
+      <p:nvGrpSpPr>
+        <p:cNvPr id="1" name=""/>
+        <p:cNvGrpSpPr/>
+        <p:nvPr/>
+      </p:nvGrpSpPr>
+      <p:grpSpPr/>
+      <p:sp>
+        <p:nvSpPr>
+          <p:cNvPr id="2" name="TextBox 1"/>
+          <p:cNvSpPr txBox="1"/>
+          <p:nvPr/>
+        </p:nvSpPr>
+        <p:spPr>
+          <a:xfrm>
+            <a:off x="594360" y="411480"/>
+            <a:ext cx="10972800" cy="502920"/>
+          </a:xfrm>
+          <a:prstGeom prst="rect">
+            <a:avLst/>
+          </a:prstGeom>
+          <a:noFill/>
+        </p:spPr>
+        <p:txBody>
+          <a:bodyPr wrap="square">
+            <a:spAutoFit/>
+          </a:bodyPr>
+          <a:lstStyle/>
+          <a:p>
+            <a:pPr algn="l"/>
+            <a:r>
+              <a:rPr sz="2800" b="1">
+                <a:solidFill>
+                  <a:srgbClr val="E5EDF7"/>
+                </a:solidFill>
+                <a:latin typeface="Aptos"/>
+              </a:rPr>
+              <a:t>Jury questions: concise answers</a:t>
+            </a:r>
+          </a:p>
+        </p:txBody>
+      </p:sp>
+      <p:sp>
+        <p:nvSpPr>
+          <p:cNvPr id="3" name="TextBox 2"/>
+          <p:cNvSpPr txBox="1"/>
+          <p:nvPr/>
+        </p:nvSpPr>
+        <p:spPr>
+          <a:xfrm>
+            <a:off x="621792" y="987552"/>
+            <a:ext cx="10789920" cy="320040"/>
+          </a:xfrm>
+          <a:prstGeom prst="rect">
+            <a:avLst/>
+          </a:prstGeom>
+          <a:noFill/>
+        </p:spPr>
+        <p:txBody>
+          <a:bodyPr wrap="square">
+            <a:spAutoFit/>
+          </a:bodyPr>
+          <a:lstStyle/>
+          <a:p>
+            <a:pPr algn="l"/>
+            <a:r>
+              <a:rPr sz="1200" b="0">
+                <a:solidFill>
+                  <a:srgbClr val="94A3B8"/>
+                </a:solidFill>
+                <a:latin typeface="Aptos"/>
+              </a:rPr>
+              <a:t>Use this slide as a speaker prompt during evaluation.</a:t>
+            </a:r>
+          </a:p>
+        </p:txBody>
+      </p:sp>
+      <p:sp>
+        <p:nvSpPr>
+          <p:cNvPr id="4" name="Rounded Rectangle 3"/>
+          <p:cNvSpPr/>
+          <p:nvPr/>
+        </p:nvSpPr>
+        <p:spPr>
+          <a:xfrm>
+            <a:off x="594360" y="1554480"/>
+            <a:ext cx="2606040" cy="3657600"/>
+          </a:xfrm>
+          <a:prstGeom prst="roundRect">
+            <a:avLst/>
+          </a:prstGeom>
+          <a:solidFill>
+            <a:srgbClr val="111A2D"/>
+          </a:solidFill>
+          <a:ln>
+            <a:solidFill>
+              <a:srgbClr val="2D3A52"/>
+            </a:solidFill>
+          </a:ln>
+        </p:spPr>
+        <p:style>
+          <a:lnRef idx="1">
+            <a:schemeClr val="accent1"/>
+          </a:lnRef>
+          <a:fillRef idx="3">
+            <a:schemeClr val="accent1"/>
+          </a:fillRef>
+          <a:effectRef idx="2">
+            <a:schemeClr val="accent1"/>
+          </a:effectRef>
+          <a:fontRef idx="minor">
+            <a:schemeClr val="lt1"/>
+          </a:fontRef>
+        </p:style>
+        <p:txBody>
+          <a:bodyPr rtlCol="0" anchor="ctr"/>
+          <a:lstStyle/>
+          <a:p>
+            <a:pPr algn="ctr"/>
+          </a:p>
+        </p:txBody>
+      </p:sp>
+      <p:sp>
+        <p:nvSpPr>
+          <p:cNvPr id="5" name="TextBox 4"/>
+          <p:cNvSpPr txBox="1"/>
+          <p:nvPr/>
+        </p:nvSpPr>
+        <p:spPr>
+          <a:xfrm>
+            <a:off x="777240" y="1719072"/>
+            <a:ext cx="2240280" cy="320040"/>
+          </a:xfrm>
+          <a:prstGeom prst="rect">
+            <a:avLst/>
+          </a:prstGeom>
+          <a:noFill/>
+        </p:spPr>
+        <p:txBody>
+          <a:bodyPr wrap="square">
+            <a:spAutoFit/>
+          </a:bodyPr>
+          <a:lstStyle/>
+          <a:p>
+            <a:pPr algn="l"/>
+            <a:r>
+              <a:rPr sz="1600" b="1">
+                <a:solidFill>
+                  <a:srgbClr val="2DD4BF"/>
+                </a:solidFill>
+                <a:latin typeface="Aptos"/>
+              </a:rPr>
+              <a:t>Why multi-tenant?</a:t>
+            </a:r>
+          </a:p>
+        </p:txBody>
+      </p:sp>
+      <p:sp>
+        <p:nvSpPr>
+          <p:cNvPr id="6" name="TextBox 5"/>
+          <p:cNvSpPr txBox="1"/>
+          <p:nvPr/>
+        </p:nvSpPr>
+        <p:spPr>
+          <a:xfrm>
+            <a:off x="777240" y="2148840"/>
+            <a:ext cx="2240280" cy="2926080"/>
+          </a:xfrm>
+          <a:prstGeom prst="rect">
+            <a:avLst/>
+          </a:prstGeom>
+          <a:noFill/>
+        </p:spPr>
+        <p:txBody>
+          <a:bodyPr wrap="square">
+            <a:spAutoFit/>
+          </a:bodyPr>
+          <a:lstStyle/>
+          <a:p>
+            <a:pPr algn="l"/>
+            <a:r>
+              <a:rPr sz="1200" b="0">
+                <a:solidFill>
+                  <a:srgbClr val="E5EDF7"/>
+                </a:solidFill>
+                <a:latin typeface="Aptos"/>
+              </a:rPr>
+              <a:t>A company assistant must be useful without mixing confidential workspaces. Tenant scope is enforced in backend queries.</a:t>
+            </a:r>
+          </a:p>
+        </p:txBody>
+      </p:sp>
+      <p:sp>
+        <p:nvSpPr>
+          <p:cNvPr id="7" name="Rounded Rectangle 6"/>
+          <p:cNvSpPr/>
+          <p:nvPr/>
+        </p:nvSpPr>
+        <p:spPr>
+          <a:xfrm>
+            <a:off x="3337560" y="1554480"/>
+            <a:ext cx="2606040" cy="3657600"/>
+          </a:xfrm>
+          <a:prstGeom prst="roundRect">
+            <a:avLst/>
+          </a:prstGeom>
+          <a:solidFill>
+            <a:srgbClr val="111A2D"/>
+          </a:solidFill>
+          <a:ln>
+            <a:solidFill>
+              <a:srgbClr val="2D3A52"/>
+            </a:solidFill>
+          </a:ln>
+        </p:spPr>
+        <p:style>
+          <a:lnRef idx="1">
+            <a:schemeClr val="accent1"/>
+          </a:lnRef>
+          <a:fillRef idx="3">
+            <a:schemeClr val="accent1"/>
+          </a:fillRef>
+          <a:effectRef idx="2">
+            <a:schemeClr val="accent1"/>
+          </a:effectRef>
+          <a:fontRef idx="minor">
+            <a:schemeClr val="lt1"/>
+          </a:fontRef>
+        </p:style>
+        <p:txBody>
+          <a:bodyPr rtlCol="0" anchor="ctr"/>
+          <a:lstStyle/>
+          <a:p>
+            <a:pPr algn="ctr"/>
+          </a:p>
+        </p:txBody>
+      </p:sp>
+      <p:sp>
+        <p:nvSpPr>
+          <p:cNvPr id="8" name="TextBox 7"/>
+          <p:cNvSpPr txBox="1"/>
+          <p:nvPr/>
+        </p:nvSpPr>
+        <p:spPr>
+          <a:xfrm>
+            <a:off x="3520440" y="1719072"/>
+            <a:ext cx="2240280" cy="320040"/>
+          </a:xfrm>
+          <a:prstGeom prst="rect">
+            <a:avLst/>
+          </a:prstGeom>
+          <a:noFill/>
+        </p:spPr>
+        <p:txBody>
+          <a:bodyPr wrap="square">
+            <a:spAutoFit/>
+          </a:bodyPr>
+          <a:lstStyle/>
+          <a:p>
+            <a:pPr algn="l"/>
+            <a:r>
+              <a:rPr sz="1600" b="1">
+                <a:solidFill>
+                  <a:srgbClr val="2DD4BF"/>
+                </a:solidFill>
+                <a:latin typeface="Aptos"/>
+              </a:rPr>
+              <a:t>Why RAG?</a:t>
+            </a:r>
+          </a:p>
+        </p:txBody>
+      </p:sp>
+      <p:sp>
+        <p:nvSpPr>
+          <p:cNvPr id="9" name="TextBox 8"/>
+          <p:cNvSpPr txBox="1"/>
+          <p:nvPr/>
+        </p:nvSpPr>
+        <p:spPr>
+          <a:xfrm>
+            <a:off x="3520440" y="2148840"/>
+            <a:ext cx="2240280" cy="2926080"/>
+          </a:xfrm>
+          <a:prstGeom prst="rect">
+            <a:avLst/>
+          </a:prstGeom>
+          <a:noFill/>
+        </p:spPr>
+        <p:txBody>
+          <a:bodyPr wrap="square">
+            <a:spAutoFit/>
+          </a:bodyPr>
+          <a:lstStyle/>
+          <a:p>
+            <a:pPr algn="l"/>
+            <a:r>
+              <a:rPr sz="1200" b="0">
+                <a:solidFill>
+                  <a:srgbClr val="E5EDF7"/>
+                </a:solidFill>
+                <a:latin typeface="Aptos"/>
+              </a:rPr>
+              <a:t>Company policies change. Retrieval grounds answers in the latest approved documents instead of model memory.</a:t>
+            </a:r>
+          </a:p>
+        </p:txBody>
+      </p:sp>
+      <p:sp>
+        <p:nvSpPr>
+          <p:cNvPr id="10" name="Rounded Rectangle 9"/>
+          <p:cNvSpPr/>
+          <p:nvPr/>
+        </p:nvSpPr>
+        <p:spPr>
+          <a:xfrm>
+            <a:off x="6080760" y="1554480"/>
+            <a:ext cx="2606040" cy="3657600"/>
+          </a:xfrm>
+          <a:prstGeom prst="roundRect">
+            <a:avLst/>
+          </a:prstGeom>
+          <a:solidFill>
+            <a:srgbClr val="111A2D"/>
+          </a:solidFill>
+          <a:ln>
+            <a:solidFill>
+              <a:srgbClr val="2D3A52"/>
+            </a:solidFill>
+          </a:ln>
+        </p:spPr>
+        <p:style>
+          <a:lnRef idx="1">
+            <a:schemeClr val="accent1"/>
+          </a:lnRef>
+          <a:fillRef idx="3">
+            <a:schemeClr val="accent1"/>
+          </a:fillRef>
+          <a:effectRef idx="2">
+            <a:schemeClr val="accent1"/>
+          </a:effectRef>
+          <a:fontRef idx="minor">
+            <a:schemeClr val="lt1"/>
+          </a:fontRef>
+        </p:style>
+        <p:txBody>
+          <a:bodyPr rtlCol="0" anchor="ctr"/>
+          <a:lstStyle/>
+          <a:p>
+            <a:pPr algn="ctr"/>
+          </a:p>
+        </p:txBody>
+      </p:sp>
+      <p:sp>
+        <p:nvSpPr>
+          <p:cNvPr id="11" name="TextBox 10"/>
+          <p:cNvSpPr txBox="1"/>
+          <p:nvPr/>
+        </p:nvSpPr>
+        <p:spPr>
+          <a:xfrm>
+            <a:off x="6263640" y="1719072"/>
+            <a:ext cx="2240280" cy="320040"/>
+          </a:xfrm>
+          <a:prstGeom prst="rect">
+            <a:avLst/>
+          </a:prstGeom>
+          <a:noFill/>
+        </p:spPr>
+        <p:txBody>
+          <a:bodyPr wrap="square">
+            <a:spAutoFit/>
+          </a:bodyPr>
+          <a:lstStyle/>
+          <a:p>
+            <a:pPr algn="l"/>
+            <a:r>
+              <a:rPr sz="1600" b="1">
+                <a:solidFill>
+                  <a:srgbClr val="2DD4BF"/>
+                </a:solidFill>
+                <a:latin typeface="Aptos"/>
+              </a:rPr>
+              <a:t>How do you prove security?</a:t>
+            </a:r>
+          </a:p>
+        </p:txBody>
+      </p:sp>
+      <p:sp>
+        <p:nvSpPr>
+          <p:cNvPr id="12" name="TextBox 11"/>
+          <p:cNvSpPr txBox="1"/>
+          <p:nvPr/>
+        </p:nvSpPr>
+        <p:spPr>
+          <a:xfrm>
+            <a:off x="6263640" y="2148840"/>
+            <a:ext cx="2240280" cy="2926080"/>
+          </a:xfrm>
+          <a:prstGeom prst="rect">
+            <a:avLst/>
+          </a:prstGeom>
+          <a:noFill/>
+        </p:spPr>
+        <p:txBody>
+          <a:bodyPr wrap="square">
+            <a:spAutoFit/>
+          </a:bodyPr>
+          <a:lstStyle/>
+          <a:p>
+            <a:pPr algn="l"/>
+            <a:r>
+              <a:rPr sz="1200" b="0">
+                <a:solidFill>
+                  <a:srgbClr val="E5EDF7"/>
+                </a:solidFill>
+                <a:latin typeface="Aptos"/>
+              </a:rPr>
+              <a:t>Run the IDOR simulator, observe 404 and zero leaked bytes, then inspect the audit event.</a:t>
+            </a:r>
+          </a:p>
+        </p:txBody>
+      </p:sp>
+      <p:sp>
+        <p:nvSpPr>
+          <p:cNvPr id="13" name="Rounded Rectangle 12"/>
+          <p:cNvSpPr/>
+          <p:nvPr/>
+        </p:nvSpPr>
+        <p:spPr>
+          <a:xfrm>
+            <a:off x="8823960" y="1554480"/>
+            <a:ext cx="2606040" cy="3657600"/>
+          </a:xfrm>
+          <a:prstGeom prst="roundRect">
+            <a:avLst/>
+          </a:prstGeom>
+          <a:solidFill>
+            <a:srgbClr val="111A2D"/>
+          </a:solidFill>
+          <a:ln>
+            <a:solidFill>
+              <a:srgbClr val="2D3A52"/>
+            </a:solidFill>
+          </a:ln>
+        </p:spPr>
+        <p:style>
+          <a:lnRef idx="1">
+            <a:schemeClr val="accent1"/>
+          </a:lnRef>
+          <a:fillRef idx="3">
+            <a:schemeClr val="accent1"/>
+          </a:fillRef>
+          <a:effectRef idx="2">
+            <a:schemeClr val="accent1"/>
+          </a:effectRef>
+          <a:fontRef idx="minor">
+            <a:schemeClr val="lt1"/>
+          </a:fontRef>
+        </p:style>
+        <p:txBody>
+          <a:bodyPr rtlCol="0" anchor="ctr"/>
+          <a:lstStyle/>
+          <a:p>
+            <a:pPr algn="ctr"/>
+          </a:p>
+        </p:txBody>
+      </p:sp>
+      <p:sp>
+        <p:nvSpPr>
+          <p:cNvPr id="14" name="TextBox 13"/>
+          <p:cNvSpPr txBox="1"/>
+          <p:nvPr/>
+        </p:nvSpPr>
+        <p:spPr>
+          <a:xfrm>
+            <a:off x="9006840" y="1719072"/>
+            <a:ext cx="2240280" cy="320040"/>
+          </a:xfrm>
+          <a:prstGeom prst="rect">
+            <a:avLst/>
+          </a:prstGeom>
+          <a:noFill/>
+        </p:spPr>
+        <p:txBody>
+          <a:bodyPr wrap="square">
+            <a:spAutoFit/>
+          </a:bodyPr>
+          <a:lstStyle/>
+          <a:p>
+            <a:pPr algn="l"/>
+            <a:r>
+              <a:rPr sz="1600" b="1">
+                <a:solidFill>
+                  <a:srgbClr val="2DD4BF"/>
+                </a:solidFill>
+                <a:latin typeface="Aptos"/>
+              </a:rPr>
+              <a:t>What is next?</a:t>
+            </a:r>
+          </a:p>
+        </p:txBody>
+      </p:sp>
+      <p:sp>
+        <p:nvSpPr>
+          <p:cNvPr id="15" name="TextBox 14"/>
+          <p:cNvSpPr txBox="1"/>
+          <p:nvPr/>
+        </p:nvSpPr>
+        <p:spPr>
+          <a:xfrm>
+            <a:off x="9006840" y="2148840"/>
+            <a:ext cx="2240280" cy="2926080"/>
+          </a:xfrm>
+          <a:prstGeom prst="rect">
+            <a:avLst/>
+          </a:prstGeom>
+          <a:noFill/>
+        </p:spPr>
+        <p:txBody>
+          <a:bodyPr wrap="square">
+            <a:spAutoFit/>
+          </a:bodyPr>
+          <a:lstStyle/>
+          <a:p>
+            <a:pPr algn="l"/>
+            <a:r>
+              <a:rPr sz="1200" b="0">
+                <a:solidFill>
+                  <a:srgbClr val="E5EDF7"/>
+                </a:solidFill>
+                <a:latin typeface="Aptos"/>
+              </a:rPr>
+              <a:t>Production migrations, storage, OCR, async processing, and verified Render rollout.</a:t>
+            </a:r>
+          </a:p>
+        </p:txBody>
+      </p:sp>
+    </p:spTree>
+  </p:cSld>
+  <p:clrMapOvr>
+    <a:masterClrMapping/>
+  </p:clrMapOvr>
+</p:sld>
+</file>
+
+<file path=ppt/slides/slide23.xml><?xml version="1.0" encoding="utf-8"?>
+<p:sld xmlns:a="http://schemas.openxmlformats.org/drawingml/2006/main" xmlns:p="http://schemas.openxmlformats.org/presentationml/2006/main" xmlns:r="http://schemas.openxmlformats.org/officeDocument/2006/relationships">
+  <p:cSld>
+    <p:bg>
+      <p:bgPr>
+        <a:solidFill>
+          <a:srgbClr val="0B1120"/>
+        </a:solidFill>
+        <a:effectLst/>
+      </p:bgPr>
+    </p:bg>
+    <p:spTree>
+      <p:nvGrpSpPr>
+        <p:cNvPr id="1" name=""/>
+        <p:cNvGrpSpPr/>
+        <p:nvPr/>
+      </p:nvGrpSpPr>
+      <p:grpSpPr/>
+      <p:sp>
+        <p:nvSpPr>
+          <p:cNvPr id="2" name="TextBox 1"/>
+          <p:cNvSpPr txBox="1"/>
+          <p:nvPr/>
+        </p:nvSpPr>
+        <p:spPr>
+          <a:xfrm>
+            <a:off x="594360" y="411480"/>
+            <a:ext cx="10972800" cy="502920"/>
+          </a:xfrm>
+          <a:prstGeom prst="rect">
+            <a:avLst/>
+          </a:prstGeom>
+          <a:noFill/>
+        </p:spPr>
+        <p:txBody>
+          <a:bodyPr wrap="square">
+            <a:spAutoFit/>
+          </a:bodyPr>
+          <a:lstStyle/>
+          <a:p>
+            <a:pPr algn="l"/>
+            <a:r>
+              <a:rPr sz="2800" b="1">
+                <a:solidFill>
+                  <a:srgbClr val="E5EDF7"/>
+                </a:solidFill>
+                <a:latin typeface="Aptos"/>
+              </a:rPr>
+              <a:t>Conclusion and roadmap</a:t>
+            </a:r>
+          </a:p>
+        </p:txBody>
+      </p:sp>
+      <p:sp>
+        <p:nvSpPr>
+          <p:cNvPr id="3" name="TextBox 2"/>
+          <p:cNvSpPr txBox="1"/>
+          <p:nvPr/>
+        </p:nvSpPr>
+        <p:spPr>
+          <a:xfrm>
+            <a:off x="621792" y="987552"/>
+            <a:ext cx="10789920" cy="320040"/>
+          </a:xfrm>
+          <a:prstGeom prst="rect">
+            <a:avLst/>
+          </a:prstGeom>
+          <a:noFill/>
+        </p:spPr>
+        <p:txBody>
+          <a:bodyPr wrap="square">
+            <a:spAutoFit/>
+          </a:bodyPr>
+          <a:lstStyle/>
+          <a:p>
+            <a:pPr algn="l"/>
+            <a:r>
+              <a:rPr sz="1200" b="0">
+                <a:solidFill>
+                  <a:srgbClr val="94A3B8"/>
+                </a:solidFill>
+                <a:latin typeface="Aptos"/>
+              </a:rPr>
+              <a:t>Secure foundations first; integrate only what can be verified.</a:t>
+            </a:r>
+          </a:p>
+        </p:txBody>
+      </p:sp>
+      <p:sp>
+        <p:nvSpPr>
+          <p:cNvPr id="4" name="Rounded Rectangle 3"/>
+          <p:cNvSpPr/>
+          <p:nvPr/>
+        </p:nvSpPr>
+        <p:spPr>
+          <a:xfrm>
+            <a:off x="685800" y="1645920"/>
+            <a:ext cx="3474720" cy="3291840"/>
+          </a:xfrm>
+          <a:prstGeom prst="roundRect">
+            <a:avLst/>
+          </a:prstGeom>
+          <a:solidFill>
+            <a:srgbClr val="111A2D"/>
+          </a:solidFill>
+          <a:ln>
+            <a:solidFill>
+              <a:srgbClr val="2D3A52"/>
+            </a:solidFill>
+          </a:ln>
+        </p:spPr>
+        <p:style>
+          <a:lnRef idx="1">
+            <a:schemeClr val="accent1"/>
+          </a:lnRef>
+          <a:fillRef idx="3">
+            <a:schemeClr val="accent1"/>
+          </a:fillRef>
+          <a:effectRef idx="2">
+            <a:schemeClr val="accent1"/>
+          </a:effectRef>
+          <a:fontRef idx="minor">
+            <a:schemeClr val="lt1"/>
+          </a:fontRef>
+        </p:style>
+        <p:txBody>
+          <a:bodyPr rtlCol="0" anchor="ctr"/>
+          <a:lstStyle/>
+          <a:p>
+            <a:pPr algn="ctr"/>
+          </a:p>
+        </p:txBody>
+      </p:sp>
+      <p:sp>
+        <p:nvSpPr>
+          <p:cNvPr id="5" name="TextBox 4"/>
+          <p:cNvSpPr txBox="1"/>
+          <p:nvPr/>
+        </p:nvSpPr>
+        <p:spPr>
+          <a:xfrm>
+            <a:off x="868680" y="1810512"/>
+            <a:ext cx="3108960" cy="320040"/>
+          </a:xfrm>
+          <a:prstGeom prst="rect">
+            <a:avLst/>
+          </a:prstGeom>
+          <a:noFill/>
+        </p:spPr>
+        <p:txBody>
+          <a:bodyPr wrap="square">
+            <a:spAutoFit/>
+          </a:bodyPr>
+          <a:lstStyle/>
+          <a:p>
+            <a:pPr algn="l"/>
+            <a:r>
+              <a:rPr sz="1600" b="1">
+                <a:solidFill>
+                  <a:srgbClr val="2DD4BF"/>
+                </a:solidFill>
+                <a:latin typeface="Aptos"/>
+              </a:rPr>
+              <a:t>Now</a:t>
+            </a:r>
+          </a:p>
+        </p:txBody>
+      </p:sp>
+      <p:sp>
+        <p:nvSpPr>
+          <p:cNvPr id="6" name="TextBox 5"/>
+          <p:cNvSpPr txBox="1"/>
+          <p:nvPr/>
+        </p:nvSpPr>
+        <p:spPr>
+          <a:xfrm>
+            <a:off x="868680" y="2240280"/>
+            <a:ext cx="3108960" cy="2560320"/>
+          </a:xfrm>
+          <a:prstGeom prst="rect">
+            <a:avLst/>
+          </a:prstGeom>
+          <a:noFill/>
+        </p:spPr>
+        <p:txBody>
+          <a:bodyPr wrap="square">
+            <a:spAutoFit/>
+          </a:bodyPr>
+          <a:lstStyle/>
+          <a:p>
+            <a:pPr algn="l"/>
+            <a:r>
+              <a:rPr sz="1200" b="0">
+                <a:solidFill>
+                  <a:srgbClr val="E5EDF7"/>
+                </a:solidFill>
+                <a:latin typeface="Aptos"/>
+              </a:rPr>
+              <a:t>Tenant-scoped FastAPI APIs, grounded RAG, OTP registration, dark-first auth UI, audit telemetry.</a:t>
+            </a:r>
+          </a:p>
+        </p:txBody>
+      </p:sp>
+      <p:sp>
+        <p:nvSpPr>
+          <p:cNvPr id="7" name="Rounded Rectangle 6"/>
+          <p:cNvSpPr/>
+          <p:nvPr/>
+        </p:nvSpPr>
+        <p:spPr>
+          <a:xfrm>
+            <a:off x="4389120" y="1645920"/>
+            <a:ext cx="3474720" cy="3291840"/>
+          </a:xfrm>
+          <a:prstGeom prst="roundRect">
+            <a:avLst/>
+          </a:prstGeom>
+          <a:solidFill>
+            <a:srgbClr val="111A2D"/>
+          </a:solidFill>
+          <a:ln>
+            <a:solidFill>
+              <a:srgbClr val="2D3A52"/>
+            </a:solidFill>
+          </a:ln>
+        </p:spPr>
+        <p:style>
+          <a:lnRef idx="1">
+            <a:schemeClr val="accent1"/>
+          </a:lnRef>
+          <a:fillRef idx="3">
+            <a:schemeClr val="accent1"/>
+          </a:fillRef>
+          <a:effectRef idx="2">
+            <a:schemeClr val="accent1"/>
+          </a:effectRef>
+          <a:fontRef idx="minor">
+            <a:schemeClr val="lt1"/>
+          </a:fontRef>
+        </p:style>
+        <p:txBody>
+          <a:bodyPr rtlCol="0" anchor="ctr"/>
+          <a:lstStyle/>
+          <a:p>
+            <a:pPr algn="ctr"/>
+          </a:p>
+        </p:txBody>
+      </p:sp>
+      <p:sp>
+        <p:nvSpPr>
+          <p:cNvPr id="8" name="TextBox 7"/>
+          <p:cNvSpPr txBox="1"/>
+          <p:nvPr/>
+        </p:nvSpPr>
+        <p:spPr>
+          <a:xfrm>
+            <a:off x="4572000" y="1810512"/>
+            <a:ext cx="3108960" cy="320040"/>
+          </a:xfrm>
+          <a:prstGeom prst="rect">
+            <a:avLst/>
+          </a:prstGeom>
+          <a:noFill/>
+        </p:spPr>
+        <p:txBody>
+          <a:bodyPr wrap="square">
+            <a:spAutoFit/>
+          </a:bodyPr>
+          <a:lstStyle/>
+          <a:p>
+            <a:pPr algn="l"/>
+            <a:r>
+              <a:rPr sz="1600" b="1">
+                <a:solidFill>
+                  <a:srgbClr val="2DD4BF"/>
+                </a:solidFill>
+                <a:latin typeface="Aptos"/>
+              </a:rPr>
+              <a:t>Next</a:t>
+            </a:r>
+          </a:p>
+        </p:txBody>
+      </p:sp>
+      <p:sp>
+        <p:nvSpPr>
+          <p:cNvPr id="9" name="TextBox 8"/>
+          <p:cNvSpPr txBox="1"/>
+          <p:nvPr/>
+        </p:nvSpPr>
+        <p:spPr>
+          <a:xfrm>
+            <a:off x="4572000" y="2240280"/>
+            <a:ext cx="3108960" cy="2560320"/>
+          </a:xfrm>
+          <a:prstGeom prst="rect">
+            <a:avLst/>
+          </a:prstGeom>
+          <a:noFill/>
+        </p:spPr>
+        <p:txBody>
+          <a:bodyPr wrap="square">
+            <a:spAutoFit/>
+          </a:bodyPr>
+          <a:lstStyle/>
+          <a:p>
+            <a:pPr algn="l"/>
+            <a:r>
+              <a:rPr sz="1200" b="0">
+                <a:solidFill>
+                  <a:srgbClr val="E5EDF7"/>
+                </a:solidFill>
+                <a:latin typeface="Aptos"/>
+              </a:rPr>
+              <a:t>Complete Telegram account linking and 120-second session enforcement on a shared bot service.</a:t>
+            </a:r>
+          </a:p>
+        </p:txBody>
+      </p:sp>
+      <p:sp>
+        <p:nvSpPr>
+          <p:cNvPr id="10" name="Rounded Rectangle 9"/>
+          <p:cNvSpPr/>
+          <p:nvPr/>
+        </p:nvSpPr>
+        <p:spPr>
+          <a:xfrm>
+            <a:off x="8092440" y="1645920"/>
+            <a:ext cx="3474720" cy="3291840"/>
+          </a:xfrm>
+          <a:prstGeom prst="roundRect">
+            <a:avLst/>
+          </a:prstGeom>
+          <a:solidFill>
+            <a:srgbClr val="111A2D"/>
+          </a:solidFill>
+          <a:ln>
+            <a:solidFill>
+              <a:srgbClr val="2D3A52"/>
+            </a:solidFill>
+          </a:ln>
+        </p:spPr>
+        <p:style>
+          <a:lnRef idx="1">
+            <a:schemeClr val="accent1"/>
+          </a:lnRef>
+          <a:fillRef idx="3">
+            <a:schemeClr val="accent1"/>
+          </a:fillRef>
+          <a:effectRef idx="2">
+            <a:schemeClr val="accent1"/>
+          </a:effectRef>
+          <a:fontRef idx="minor">
+            <a:schemeClr val="lt1"/>
+          </a:fontRef>
+        </p:style>
+        <p:txBody>
+          <a:bodyPr rtlCol="0" anchor="ctr"/>
+          <a:lstStyle/>
+          <a:p>
+            <a:pPr algn="ctr"/>
+          </a:p>
+        </p:txBody>
+      </p:sp>
+      <p:sp>
+        <p:nvSpPr>
+          <p:cNvPr id="11" name="TextBox 10"/>
+          <p:cNvSpPr txBox="1"/>
+          <p:nvPr/>
+        </p:nvSpPr>
+        <p:spPr>
+          <a:xfrm>
+            <a:off x="8275319" y="1810512"/>
+            <a:ext cx="3108960" cy="320040"/>
+          </a:xfrm>
+          <a:prstGeom prst="rect">
+            <a:avLst/>
+          </a:prstGeom>
+          <a:noFill/>
+        </p:spPr>
+        <p:txBody>
+          <a:bodyPr wrap="square">
+            <a:spAutoFit/>
+          </a:bodyPr>
+          <a:lstStyle/>
+          <a:p>
+            <a:pPr algn="l"/>
+            <a:r>
+              <a:rPr sz="1600" b="1">
+                <a:solidFill>
+                  <a:srgbClr val="2DD4BF"/>
+                </a:solidFill>
+                <a:latin typeface="Aptos"/>
+              </a:rPr>
+              <a:t>Future</a:t>
+            </a:r>
+          </a:p>
+        </p:txBody>
+      </p:sp>
+      <p:sp>
+        <p:nvSpPr>
+          <p:cNvPr id="12" name="TextBox 11"/>
+          <p:cNvSpPr txBox="1"/>
+          <p:nvPr/>
+        </p:nvSpPr>
+        <p:spPr>
+          <a:xfrm>
+            <a:off x="8275319" y="2240280"/>
+            <a:ext cx="3108960" cy="2560320"/>
+          </a:xfrm>
+          <a:prstGeom prst="rect">
+            <a:avLst/>
+          </a:prstGeom>
+          <a:noFill/>
+        </p:spPr>
+        <p:txBody>
+          <a:bodyPr wrap="square">
+            <a:spAutoFit/>
+          </a:bodyPr>
+          <a:lstStyle/>
+          <a:p>
+            <a:pPr algn="l"/>
+            <a:r>
+              <a:rPr sz="1200" b="0">
+                <a:solidFill>
+                  <a:srgbClr val="E5EDF7"/>
+                </a:solidFill>
+                <a:latin typeface="Aptos"/>
+              </a:rPr>
+              <a:t>Async workers, OCR, object storage, richer feedback/export, and managed deployment verification.</a:t>
+            </a:r>
+          </a:p>
+        </p:txBody>
+      </p:sp>
+      <p:sp>
+        <p:nvSpPr>
+          <p:cNvPr id="13" name="TextBox 12"/>
+          <p:cNvSpPr txBox="1"/>
+          <p:nvPr/>
+        </p:nvSpPr>
+        <p:spPr>
+          <a:xfrm>
+            <a:off x="914400" y="5715000"/>
+            <a:ext cx="10241280" cy="365760"/>
+          </a:xfrm>
+          <a:prstGeom prst="rect">
+            <a:avLst/>
+          </a:prstGeom>
+          <a:noFill/>
+        </p:spPr>
+        <p:txBody>
+          <a:bodyPr wrap="square">
+            <a:spAutoFit/>
+          </a:bodyPr>
+          <a:lstStyle/>
+          <a:p>
+            <a:pPr algn="ctr"/>
+            <a:r>
+              <a:rPr sz="1800" b="1">
+                <a:solidFill>
+                  <a:srgbClr val="2DD4BF"/>
+                </a:solidFill>
+                <a:latin typeface="Aptos"/>
+              </a:rPr>
+              <a:t>Build trust into the architecture, then make the demo visible.</a:t>
             </a:r>
           </a:p>
         </p:txBody>

--- a/presentation/SaaSsum_AI_Presentation.pptx
+++ b/presentation/SaaSsum_AI_Presentation.pptx
@@ -3196,6 +3196,41 @@
         </p:nvSpPr>
         <p:spPr>
           <a:xfrm>
+            <a:off x="621792" y="6547104"/>
+            <a:ext cx="10972800" cy="182880"/>
+          </a:xfrm>
+          <a:prstGeom prst="rect">
+            <a:avLst/>
+          </a:prstGeom>
+          <a:noFill/>
+        </p:spPr>
+        <p:txBody>
+          <a:bodyPr wrap="square">
+            <a:spAutoFit/>
+          </a:bodyPr>
+          <a:lstStyle/>
+          <a:p>
+            <a:pPr algn="l"/>
+            <a:r>
+              <a:rPr sz="800" b="0">
+                <a:solidFill>
+                  <a:srgbClr val="94A3B8"/>
+                </a:solidFill>
+                <a:latin typeface="Aptos"/>
+              </a:rPr>
+              <a:t>tenantAI  |  jury presentation  |  01</a:t>
+            </a:r>
+          </a:p>
+        </p:txBody>
+      </p:sp>
+      <p:sp>
+        <p:nvSpPr>
+          <p:cNvPr id="5" name="TextBox 4"/>
+          <p:cNvSpPr txBox="1"/>
+          <p:nvPr/>
+        </p:nvSpPr>
+        <p:spPr>
+          <a:xfrm>
             <a:off x="731520" y="1920240"/>
             <a:ext cx="10515600" cy="914400"/>
           </a:xfrm>
@@ -3225,7 +3260,7 @@
       </p:sp>
       <p:sp>
         <p:nvSpPr>
-          <p:cNvPr id="5" name="TextBox 4"/>
+          <p:cNvPr id="6" name="TextBox 5"/>
           <p:cNvSpPr txBox="1"/>
           <p:nvPr/>
         </p:nvSpPr>
@@ -3260,7 +3295,42 @@
       </p:sp>
       <p:sp>
         <p:nvSpPr>
-          <p:cNvPr id="6" name="TextBox 5"/>
+          <p:cNvPr id="7" name="TextBox 6"/>
+          <p:cNvSpPr txBox="1"/>
+          <p:nvPr/>
+        </p:nvSpPr>
+        <p:spPr>
+          <a:xfrm>
+            <a:off x="777240" y="3794760"/>
+            <a:ext cx="10332720" cy="594360"/>
+          </a:xfrm>
+          <a:prstGeom prst="rect">
+            <a:avLst/>
+          </a:prstGeom>
+          <a:noFill/>
+        </p:spPr>
+        <p:txBody>
+          <a:bodyPr wrap="square">
+            <a:spAutoFit/>
+          </a:bodyPr>
+          <a:lstStyle/>
+          <a:p>
+            <a:pPr algn="l"/>
+            <a:r>
+              <a:rPr sz="1600" b="0">
+                <a:solidFill>
+                  <a:srgbClr val="E5EDF7"/>
+                </a:solidFill>
+                <a:latin typeface="Aptos"/>
+              </a:rPr>
+              <a:t>The product turns scattered company documents into a searchable, auditable assistant without making privacy a configuration afterthought.</a:t>
+            </a:r>
+          </a:p>
+        </p:txBody>
+      </p:sp>
+      <p:sp>
+        <p:nvSpPr>
+          <p:cNvPr id="8" name="TextBox 7"/>
           <p:cNvSpPr txBox="1"/>
           <p:nvPr/>
         </p:nvSpPr>
@@ -3288,7 +3358,7 @@
                 </a:solidFill>
                 <a:latin typeface="Aptos"/>
               </a:rPr>
-              <a:t>TriCity AI Hackathon | SaaSsum AI track</a:t>
+              <a:t>TriCity AI Hackathon | SaaSsum AI track | MVP built for a jury-verifiable demo</a:t>
             </a:r>
           </a:p>
         </p:txBody>
@@ -3391,7 +3461,42 @@
       </p:sp>
       <p:sp>
         <p:nvSpPr>
-          <p:cNvPr id="4" name="Rounded Rectangle 3"/>
+          <p:cNvPr id="4" name="TextBox 3"/>
+          <p:cNvSpPr txBox="1"/>
+          <p:nvPr/>
+        </p:nvSpPr>
+        <p:spPr>
+          <a:xfrm>
+            <a:off x="621792" y="6547104"/>
+            <a:ext cx="10972800" cy="182880"/>
+          </a:xfrm>
+          <a:prstGeom prst="rect">
+            <a:avLst/>
+          </a:prstGeom>
+          <a:noFill/>
+        </p:spPr>
+        <p:txBody>
+          <a:bodyPr wrap="square">
+            <a:spAutoFit/>
+          </a:bodyPr>
+          <a:lstStyle/>
+          <a:p>
+            <a:pPr algn="l"/>
+            <a:r>
+              <a:rPr sz="800" b="0">
+                <a:solidFill>
+                  <a:srgbClr val="94A3B8"/>
+                </a:solidFill>
+                <a:latin typeface="Aptos"/>
+              </a:rPr>
+              <a:t>tenantAI  |  jury presentation  |  10</a:t>
+            </a:r>
+          </a:p>
+        </p:txBody>
+      </p:sp>
+      <p:sp>
+        <p:nvSpPr>
+          <p:cNvPr id="5" name="Rounded Rectangle 4"/>
           <p:cNvSpPr/>
           <p:nvPr/>
         </p:nvSpPr>
@@ -3436,7 +3541,7 @@
       </p:sp>
       <p:sp>
         <p:nvSpPr>
-          <p:cNvPr id="5" name="TextBox 4"/>
+          <p:cNvPr id="6" name="TextBox 5"/>
           <p:cNvSpPr txBox="1"/>
           <p:nvPr/>
         </p:nvSpPr>
@@ -3458,7 +3563,7 @@
           <a:p>
             <a:pPr algn="l"/>
             <a:r>
-              <a:rPr sz="1600" b="1">
+              <a:rPr sz="1500" b="1">
                 <a:solidFill>
                   <a:srgbClr val="2DD4BF"/>
                 </a:solidFill>
@@ -3471,7 +3576,7 @@
       </p:sp>
       <p:sp>
         <p:nvSpPr>
-          <p:cNvPr id="6" name="TextBox 5"/>
+          <p:cNvPr id="7" name="TextBox 6"/>
           <p:cNvSpPr txBox="1"/>
           <p:nvPr/>
         </p:nvSpPr>
@@ -3493,20 +3598,21 @@
           <a:p>
             <a:pPr algn="l"/>
             <a:r>
-              <a:rPr sz="1200" b="0">
+              <a:rPr sz="1100" b="0">
                 <a:solidFill>
                   <a:srgbClr val="E5EDF7"/>
                 </a:solidFill>
                 <a:latin typeface="Aptos"/>
               </a:rPr>
-              <a:t>The query is embedded and compared against chunks from READY documents in the caller's tenant only.</a:t>
-            </a:r>
-          </a:p>
-        </p:txBody>
-      </p:sp>
-      <p:sp>
-        <p:nvSpPr>
-          <p:cNvPr id="7" name="Rounded Rectangle 6"/>
+              <a:t>The query is embedded and compared against chunks from READY documents in the caller's tenant only.
+Filter: tenant ID + document status + relevance.</a:t>
+            </a:r>
+          </a:p>
+        </p:txBody>
+      </p:sp>
+      <p:sp>
+        <p:nvSpPr>
+          <p:cNvPr id="8" name="Rounded Rectangle 7"/>
           <p:cNvSpPr/>
           <p:nvPr/>
         </p:nvSpPr>
@@ -3551,7 +3657,7 @@
       </p:sp>
       <p:sp>
         <p:nvSpPr>
-          <p:cNvPr id="8" name="TextBox 7"/>
+          <p:cNvPr id="9" name="TextBox 8"/>
           <p:cNvSpPr txBox="1"/>
           <p:nvPr/>
         </p:nvSpPr>
@@ -3573,7 +3679,7 @@
           <a:p>
             <a:pPr algn="l"/>
             <a:r>
-              <a:rPr sz="1600" b="1">
+              <a:rPr sz="1500" b="1">
                 <a:solidFill>
                   <a:srgbClr val="2DD4BF"/>
                 </a:solidFill>
@@ -3586,7 +3692,7 @@
       </p:sp>
       <p:sp>
         <p:nvSpPr>
-          <p:cNvPr id="9" name="TextBox 8"/>
+          <p:cNvPr id="10" name="TextBox 9"/>
           <p:cNvSpPr txBox="1"/>
           <p:nvPr/>
         </p:nvSpPr>
@@ -3608,20 +3714,21 @@
           <a:p>
             <a:pPr algn="l"/>
             <a:r>
-              <a:rPr sz="1200" b="0">
+              <a:rPr sz="1100" b="0">
                 <a:solidFill>
                   <a:srgbClr val="E5EDF7"/>
                 </a:solidFill>
                 <a:latin typeface="Aptos"/>
               </a:rPr>
-              <a:t>Relevant chunks are passed as context to the response layer; unsupported claims are not treated as facts.</a:t>
-            </a:r>
-          </a:p>
-        </p:txBody>
-      </p:sp>
-      <p:sp>
-        <p:nvSpPr>
-          <p:cNvPr id="10" name="Rounded Rectangle 9"/>
+              <a:t>Relevant chunks are passed as context to the response layer; unsupported claims are not treated as facts.
+Traceability: source text and page metadata stay attached.</a:t>
+            </a:r>
+          </a:p>
+        </p:txBody>
+      </p:sp>
+      <p:sp>
+        <p:nvSpPr>
+          <p:cNvPr id="11" name="Rounded Rectangle 10"/>
           <p:cNvSpPr/>
           <p:nvPr/>
         </p:nvSpPr>
@@ -3666,7 +3773,7 @@
       </p:sp>
       <p:sp>
         <p:nvSpPr>
-          <p:cNvPr id="11" name="TextBox 10"/>
+          <p:cNvPr id="12" name="TextBox 11"/>
           <p:cNvSpPr txBox="1"/>
           <p:nvPr/>
         </p:nvSpPr>
@@ -3688,7 +3795,7 @@
           <a:p>
             <a:pPr algn="l"/>
             <a:r>
-              <a:rPr sz="1600" b="1">
+              <a:rPr sz="1500" b="1">
                 <a:solidFill>
                   <a:srgbClr val="2DD4BF"/>
                 </a:solidFill>
@@ -3701,7 +3808,7 @@
       </p:sp>
       <p:sp>
         <p:nvSpPr>
-          <p:cNvPr id="12" name="TextBox 11"/>
+          <p:cNvPr id="13" name="TextBox 12"/>
           <p:cNvSpPr txBox="1"/>
           <p:nvPr/>
         </p:nvSpPr>
@@ -3723,20 +3830,21 @@
           <a:p>
             <a:pPr algn="l"/>
             <a:r>
-              <a:rPr sz="1200" b="0">
+              <a:rPr sz="1100" b="0">
                 <a:solidFill>
                   <a:srgbClr val="E5EDF7"/>
                 </a:solidFill>
                 <a:latin typeface="Aptos"/>
               </a:rPr>
-              <a:t>The answer includes document/page evidence or explicitly refuses when the workspace has no support.</a:t>
-            </a:r>
-          </a:p>
-        </p:txBody>
-      </p:sp>
-      <p:sp>
-        <p:nvSpPr>
-          <p:cNvPr id="13" name="TextBox 12"/>
+              <a:t>The answer includes document/page evidence or explicitly refuses when the workspace has no support.
+Safety: absence of evidence is communicated instead of invented.</a:t>
+            </a:r>
+          </a:p>
+        </p:txBody>
+      </p:sp>
+      <p:sp>
+        <p:nvSpPr>
+          <p:cNvPr id="14" name="TextBox 13"/>
           <p:cNvSpPr txBox="1"/>
           <p:nvPr/>
         </p:nvSpPr>
@@ -3873,6 +3981,41 @@
         </p:nvSpPr>
         <p:spPr>
           <a:xfrm>
+            <a:off x="621792" y="6547104"/>
+            <a:ext cx="10972800" cy="182880"/>
+          </a:xfrm>
+          <a:prstGeom prst="rect">
+            <a:avLst/>
+          </a:prstGeom>
+          <a:noFill/>
+        </p:spPr>
+        <p:txBody>
+          <a:bodyPr wrap="square">
+            <a:spAutoFit/>
+          </a:bodyPr>
+          <a:lstStyle/>
+          <a:p>
+            <a:pPr algn="l"/>
+            <a:r>
+              <a:rPr sz="800" b="0">
+                <a:solidFill>
+                  <a:srgbClr val="94A3B8"/>
+                </a:solidFill>
+                <a:latin typeface="Aptos"/>
+              </a:rPr>
+              <a:t>tenantAI  |  jury presentation  |  11</a:t>
+            </a:r>
+          </a:p>
+        </p:txBody>
+      </p:sp>
+      <p:sp>
+        <p:nvSpPr>
+          <p:cNvPr id="5" name="TextBox 4"/>
+          <p:cNvSpPr txBox="1"/>
+          <p:nvPr/>
+        </p:nvSpPr>
+        <p:spPr>
+          <a:xfrm>
             <a:off x="914400" y="1645920"/>
             <a:ext cx="4754880" cy="457200"/>
           </a:xfrm>
@@ -3902,7 +4045,7 @@
       </p:sp>
       <p:sp>
         <p:nvSpPr>
-          <p:cNvPr id="5" name="TextBox 4"/>
+          <p:cNvPr id="6" name="TextBox 5"/>
           <p:cNvSpPr txBox="1"/>
           <p:nvPr/>
         </p:nvSpPr>
@@ -3937,7 +4080,7 @@
       </p:sp>
       <p:sp>
         <p:nvSpPr>
-          <p:cNvPr id="6" name="TextBox 5"/>
+          <p:cNvPr id="7" name="TextBox 6"/>
           <p:cNvSpPr txBox="1"/>
           <p:nvPr/>
         </p:nvSpPr>
@@ -3972,7 +4115,7 @@
       </p:sp>
       <p:sp>
         <p:nvSpPr>
-          <p:cNvPr id="7" name="TextBox 6"/>
+          <p:cNvPr id="8" name="TextBox 7"/>
           <p:cNvSpPr txBox="1"/>
           <p:nvPr/>
         </p:nvSpPr>
@@ -4007,7 +4150,7 @@
       </p:sp>
       <p:sp>
         <p:nvSpPr>
-          <p:cNvPr id="8" name="TextBox 7"/>
+          <p:cNvPr id="9" name="TextBox 8"/>
           <p:cNvSpPr txBox="1"/>
           <p:nvPr/>
         </p:nvSpPr>
@@ -4042,29 +4185,64 @@
       </p:sp>
       <p:sp>
         <p:nvSpPr>
-          <p:cNvPr id="9" name="TextBox 8"/>
-          <p:cNvSpPr txBox="1"/>
-          <p:nvPr/>
-        </p:nvSpPr>
-        <p:spPr>
-          <a:xfrm>
-            <a:off x="914400" y="5715000"/>
-            <a:ext cx="10058400" cy="320040"/>
-          </a:xfrm>
-          <a:prstGeom prst="rect">
-            <a:avLst/>
-          </a:prstGeom>
-          <a:noFill/>
-        </p:spPr>
-        <p:txBody>
-          <a:bodyPr wrap="square">
-            <a:spAutoFit/>
-          </a:bodyPr>
-          <a:lstStyle/>
-          <a:p>
-            <a:pPr algn="l"/>
-            <a:r>
-              <a:rPr sz="1300" b="0">
+          <p:cNvPr id="10" name="TextBox 9"/>
+          <p:cNvSpPr txBox="1"/>
+          <p:nvPr/>
+        </p:nvSpPr>
+        <p:spPr>
+          <a:xfrm>
+            <a:off x="914400" y="4800600"/>
+            <a:ext cx="9601200" cy="411480"/>
+          </a:xfrm>
+          <a:prstGeom prst="rect">
+            <a:avLst/>
+          </a:prstGeom>
+          <a:noFill/>
+        </p:spPr>
+        <p:txBody>
+          <a:bodyPr wrap="square">
+            <a:spAutoFit/>
+          </a:bodyPr>
+          <a:lstStyle/>
+          <a:p>
+            <a:pPr algn="l"/>
+            <a:r>
+              <a:rPr sz="1700" b="1">
+                <a:solidFill>
+                  <a:srgbClr val="E5EDF7"/>
+                </a:solidFill>
+                <a:latin typeface="Aptos"/>
+              </a:rPr>
+              <a:t>6  Open logs and explain the evidence: actor, tenant, action, result, latency, and citations.</a:t>
+            </a:r>
+          </a:p>
+        </p:txBody>
+      </p:sp>
+      <p:sp>
+        <p:nvSpPr>
+          <p:cNvPr id="11" name="TextBox 10"/>
+          <p:cNvSpPr txBox="1"/>
+          <p:nvPr/>
+        </p:nvSpPr>
+        <p:spPr>
+          <a:xfrm>
+            <a:off x="914400" y="5989320"/>
+            <a:ext cx="10058400" cy="274320"/>
+          </a:xfrm>
+          <a:prstGeom prst="rect">
+            <a:avLst/>
+          </a:prstGeom>
+          <a:noFill/>
+        </p:spPr>
+        <p:txBody>
+          <a:bodyPr wrap="square">
+            <a:spAutoFit/>
+          </a:bodyPr>
+          <a:lstStyle/>
+          <a:p>
+            <a:pPr algn="l"/>
+            <a:r>
+              <a:rPr sz="1200" b="0">
                 <a:solidFill>
                   <a:srgbClr val="2DD4BF"/>
                 </a:solidFill>
@@ -4173,7 +4351,42 @@
       </p:sp>
       <p:sp>
         <p:nvSpPr>
-          <p:cNvPr id="4" name="Rounded Rectangle 3"/>
+          <p:cNvPr id="4" name="TextBox 3"/>
+          <p:cNvSpPr txBox="1"/>
+          <p:nvPr/>
+        </p:nvSpPr>
+        <p:spPr>
+          <a:xfrm>
+            <a:off x="621792" y="6547104"/>
+            <a:ext cx="10972800" cy="182880"/>
+          </a:xfrm>
+          <a:prstGeom prst="rect">
+            <a:avLst/>
+          </a:prstGeom>
+          <a:noFill/>
+        </p:spPr>
+        <p:txBody>
+          <a:bodyPr wrap="square">
+            <a:spAutoFit/>
+          </a:bodyPr>
+          <a:lstStyle/>
+          <a:p>
+            <a:pPr algn="l"/>
+            <a:r>
+              <a:rPr sz="800" b="0">
+                <a:solidFill>
+                  <a:srgbClr val="94A3B8"/>
+                </a:solidFill>
+                <a:latin typeface="Aptos"/>
+              </a:rPr>
+              <a:t>tenantAI  |  jury presentation  |  12</a:t>
+            </a:r>
+          </a:p>
+        </p:txBody>
+      </p:sp>
+      <p:sp>
+        <p:nvSpPr>
+          <p:cNvPr id="5" name="Rounded Rectangle 4"/>
           <p:cNvSpPr/>
           <p:nvPr/>
         </p:nvSpPr>
@@ -4218,7 +4431,7 @@
       </p:sp>
       <p:sp>
         <p:nvSpPr>
-          <p:cNvPr id="5" name="TextBox 4"/>
+          <p:cNvPr id="6" name="TextBox 5"/>
           <p:cNvSpPr txBox="1"/>
           <p:nvPr/>
         </p:nvSpPr>
@@ -4240,7 +4453,7 @@
           <a:p>
             <a:pPr algn="l"/>
             <a:r>
-              <a:rPr sz="1600" b="1">
+              <a:rPr sz="1500" b="1">
                 <a:solidFill>
                   <a:srgbClr val="2DD4BF"/>
                 </a:solidFill>
@@ -4253,7 +4466,7 @@
       </p:sp>
       <p:sp>
         <p:nvSpPr>
-          <p:cNvPr id="6" name="TextBox 5"/>
+          <p:cNvPr id="7" name="TextBox 6"/>
           <p:cNvSpPr txBox="1"/>
           <p:nvPr/>
         </p:nvSpPr>
@@ -4275,7 +4488,7 @@
           <a:p>
             <a:pPr algn="l"/>
             <a:r>
-              <a:rPr sz="1200" b="0">
+              <a:rPr sz="1100" b="0">
                 <a:solidFill>
                   <a:srgbClr val="E5EDF7"/>
                 </a:solidFill>
@@ -4283,14 +4496,15 @@
               </a:rPr>
               <a:t>Admin: admin@technova.com
 Password: DemoPass123!
-Knowledge: UltraBook Pro X15 hardware manual</a:t>
-            </a:r>
-          </a:p>
-        </p:txBody>
-      </p:sp>
-      <p:sp>
-        <p:nvSpPr>
-          <p:cNvPr id="7" name="Rounded Rectangle 6"/>
+Knowledge: UltraBook Pro X15 hardware manual
+Ask: “What is the battery warranty?”</a:t>
+            </a:r>
+          </a:p>
+        </p:txBody>
+      </p:sp>
+      <p:sp>
+        <p:nvSpPr>
+          <p:cNvPr id="8" name="Rounded Rectangle 7"/>
           <p:cNvSpPr/>
           <p:nvPr/>
         </p:nvSpPr>
@@ -4335,7 +4549,7 @@
       </p:sp>
       <p:sp>
         <p:nvSpPr>
-          <p:cNvPr id="8" name="TextBox 7"/>
+          <p:cNvPr id="9" name="TextBox 8"/>
           <p:cNvSpPr txBox="1"/>
           <p:nvPr/>
         </p:nvSpPr>
@@ -4357,7 +4571,7 @@
           <a:p>
             <a:pPr algn="l"/>
             <a:r>
-              <a:rPr sz="1600" b="1">
+              <a:rPr sz="1500" b="1">
                 <a:solidFill>
                   <a:srgbClr val="2DD4BF"/>
                 </a:solidFill>
@@ -4370,7 +4584,7 @@
       </p:sp>
       <p:sp>
         <p:nvSpPr>
-          <p:cNvPr id="9" name="TextBox 8"/>
+          <p:cNvPr id="10" name="TextBox 9"/>
           <p:cNvSpPr txBox="1"/>
           <p:nvPr/>
         </p:nvSpPr>
@@ -4392,7 +4606,7 @@
           <a:p>
             <a:pPr algn="l"/>
             <a:r>
-              <a:rPr sz="1200" b="0">
+              <a:rPr sz="1100" b="0">
                 <a:solidFill>
                   <a:srgbClr val="E5EDF7"/>
                 </a:solidFill>
@@ -4400,14 +4614,15 @@
               </a:rPr>
               <a:t>Admin: admin@greenleaf.com
 Password: DemoPass123!
-Knowledge: customer refund and return policy</a:t>
-            </a:r>
-          </a:p>
-        </p:txBody>
-      </p:sp>
-      <p:sp>
-        <p:nvSpPr>
-          <p:cNvPr id="10" name="Rounded Rectangle 9"/>
+Knowledge: customer refund and return policy
+Ask: “What is the return window?”</a:t>
+            </a:r>
+          </a:p>
+        </p:txBody>
+      </p:sp>
+      <p:sp>
+        <p:nvSpPr>
+          <p:cNvPr id="11" name="Rounded Rectangle 10"/>
           <p:cNvSpPr/>
           <p:nvPr/>
         </p:nvSpPr>
@@ -4452,7 +4667,7 @@
       </p:sp>
       <p:sp>
         <p:nvSpPr>
-          <p:cNvPr id="11" name="TextBox 10"/>
+          <p:cNvPr id="12" name="TextBox 11"/>
           <p:cNvSpPr txBox="1"/>
           <p:nvPr/>
         </p:nvSpPr>
@@ -4474,7 +4689,7 @@
           <a:p>
             <a:pPr algn="l"/>
             <a:r>
-              <a:rPr sz="1600" b="1">
+              <a:rPr sz="1500" b="1">
                 <a:solidFill>
                   <a:srgbClr val="2DD4BF"/>
                 </a:solidFill>
@@ -4487,7 +4702,7 @@
       </p:sp>
       <p:sp>
         <p:nvSpPr>
-          <p:cNvPr id="12" name="TextBox 11"/>
+          <p:cNvPr id="13" name="TextBox 12"/>
           <p:cNvSpPr txBox="1"/>
           <p:nvPr/>
         </p:nvSpPr>
@@ -4509,20 +4724,20 @@
           <a:p>
             <a:pPr algn="l"/>
             <a:r>
-              <a:rPr sz="1200" b="0">
+              <a:rPr sz="1100" b="0">
                 <a:solidFill>
                   <a:srgbClr val="E5EDF7"/>
                 </a:solidFill>
                 <a:latin typeface="Aptos"/>
               </a:rPr>
-              <a:t>Login as TechNova → ask a warranty question → switch to GreenLeaf → verify TechNova data is invisible → run the IDOR simulator.</a:t>
-            </a:r>
-          </a:p>
-        </p:txBody>
-      </p:sp>
-      <p:sp>
-        <p:nvSpPr>
-          <p:cNvPr id="13" name="TextBox 12"/>
+              <a:t>Login as TechNova → ask a warranty question → inspect citation → switch to GreenLeaf → verify invisibility → run the IDOR simulator → inspect logs.</a:t>
+            </a:r>
+          </a:p>
+        </p:txBody>
+      </p:sp>
+      <p:sp>
+        <p:nvSpPr>
+          <p:cNvPr id="14" name="TextBox 13"/>
           <p:cNvSpPr txBox="1"/>
           <p:nvPr/>
         </p:nvSpPr>
@@ -4653,7 +4868,42 @@
       </p:sp>
       <p:sp>
         <p:nvSpPr>
-          <p:cNvPr id="4" name="Rounded Rectangle 3"/>
+          <p:cNvPr id="4" name="TextBox 3"/>
+          <p:cNvSpPr txBox="1"/>
+          <p:nvPr/>
+        </p:nvSpPr>
+        <p:spPr>
+          <a:xfrm>
+            <a:off x="621792" y="6547104"/>
+            <a:ext cx="10972800" cy="182880"/>
+          </a:xfrm>
+          <a:prstGeom prst="rect">
+            <a:avLst/>
+          </a:prstGeom>
+          <a:noFill/>
+        </p:spPr>
+        <p:txBody>
+          <a:bodyPr wrap="square">
+            <a:spAutoFit/>
+          </a:bodyPr>
+          <a:lstStyle/>
+          <a:p>
+            <a:pPr algn="l"/>
+            <a:r>
+              <a:rPr sz="800" b="0">
+                <a:solidFill>
+                  <a:srgbClr val="94A3B8"/>
+                </a:solidFill>
+                <a:latin typeface="Aptos"/>
+              </a:rPr>
+              <a:t>tenantAI  |  jury presentation  |  13</a:t>
+            </a:r>
+          </a:p>
+        </p:txBody>
+      </p:sp>
+      <p:sp>
+        <p:nvSpPr>
+          <p:cNvPr id="5" name="Rounded Rectangle 4"/>
           <p:cNvSpPr/>
           <p:nvPr/>
         </p:nvSpPr>
@@ -4698,7 +4948,7 @@
       </p:sp>
       <p:sp>
         <p:nvSpPr>
-          <p:cNvPr id="5" name="TextBox 4"/>
+          <p:cNvPr id="6" name="TextBox 5"/>
           <p:cNvSpPr txBox="1"/>
           <p:nvPr/>
         </p:nvSpPr>
@@ -4720,7 +4970,7 @@
           <a:p>
             <a:pPr algn="l"/>
             <a:r>
-              <a:rPr sz="1600" b="1">
+              <a:rPr sz="1500" b="1">
                 <a:solidFill>
                   <a:srgbClr val="2DD4BF"/>
                 </a:solidFill>
@@ -4733,7 +4983,7 @@
       </p:sp>
       <p:sp>
         <p:nvSpPr>
-          <p:cNvPr id="6" name="TextBox 5"/>
+          <p:cNvPr id="7" name="TextBox 6"/>
           <p:cNvSpPr txBox="1"/>
           <p:nvPr/>
         </p:nvSpPr>
@@ -4755,7 +5005,7 @@
           <a:p>
             <a:pPr algn="l"/>
             <a:r>
-              <a:rPr sz="1200" b="0">
+              <a:rPr sz="1100" b="0">
                 <a:solidFill>
                   <a:srgbClr val="E5EDF7"/>
                 </a:solidFill>
@@ -4764,14 +5014,15 @@
               <a:t>Next.js at :3000
 FastAPI at :8001
 SQLite for zero-dependency development
-Pytest for API and isolation checks</a:t>
-            </a:r>
-          </a:p>
-        </p:txBody>
-      </p:sp>
-      <p:sp>
-        <p:nvSpPr>
-          <p:cNvPr id="7" name="Rounded Rectangle 6"/>
+Pytest for API and isolation checks
+Fast feedback: run frontend and backend independently.</a:t>
+            </a:r>
+          </a:p>
+        </p:txBody>
+      </p:sp>
+      <p:sp>
+        <p:nvSpPr>
+          <p:cNvPr id="8" name="Rounded Rectangle 7"/>
           <p:cNvSpPr/>
           <p:nvPr/>
         </p:nvSpPr>
@@ -4816,7 +5067,7 @@
       </p:sp>
       <p:sp>
         <p:nvSpPr>
-          <p:cNvPr id="8" name="TextBox 7"/>
+          <p:cNvPr id="9" name="TextBox 8"/>
           <p:cNvSpPr txBox="1"/>
           <p:nvPr/>
         </p:nvSpPr>
@@ -4838,7 +5089,7 @@
           <a:p>
             <a:pPr algn="l"/>
             <a:r>
-              <a:rPr sz="1600" b="1">
+              <a:rPr sz="1500" b="1">
                 <a:solidFill>
                   <a:srgbClr val="2DD4BF"/>
                 </a:solidFill>
@@ -4851,7 +5102,7 @@
       </p:sp>
       <p:sp>
         <p:nvSpPr>
-          <p:cNvPr id="9" name="TextBox 8"/>
+          <p:cNvPr id="10" name="TextBox 9"/>
           <p:cNvSpPr txBox="1"/>
           <p:nvPr/>
         </p:nvSpPr>
@@ -4873,7 +5124,7 @@
           <a:p>
             <a:pPr algn="l"/>
             <a:r>
-              <a:rPr sz="1200" b="0">
+              <a:rPr sz="1100" b="0">
                 <a:solidFill>
                   <a:srgbClr val="E5EDF7"/>
                 </a:solidFill>
@@ -4883,14 +5134,15 @@
 Managed PostgreSQL/pgvector
 SMTP provider
 Persistent object storage
-Environment-managed secrets</a:t>
-            </a:r>
-          </a:p>
-        </p:txBody>
-      </p:sp>
-      <p:sp>
-        <p:nvSpPr>
-          <p:cNvPr id="10" name="Rounded Rectangle 9"/>
+Environment-managed secrets
+Scale path: worker service for async processing.</a:t>
+            </a:r>
+          </a:p>
+        </p:txBody>
+      </p:sp>
+      <p:sp>
+        <p:nvSpPr>
+          <p:cNvPr id="11" name="Rounded Rectangle 10"/>
           <p:cNvSpPr/>
           <p:nvPr/>
         </p:nvSpPr>
@@ -4935,7 +5187,7 @@
       </p:sp>
       <p:sp>
         <p:nvSpPr>
-          <p:cNvPr id="11" name="TextBox 10"/>
+          <p:cNvPr id="12" name="TextBox 11"/>
           <p:cNvSpPr txBox="1"/>
           <p:nvPr/>
         </p:nvSpPr>
@@ -4957,7 +5209,7 @@
           <a:p>
             <a:pPr algn="l"/>
             <a:r>
-              <a:rPr sz="1600" b="1">
+              <a:rPr sz="1500" b="1">
                 <a:solidFill>
                   <a:srgbClr val="2DD4BF"/>
                 </a:solidFill>
@@ -4970,7 +5222,7 @@
       </p:sp>
       <p:sp>
         <p:nvSpPr>
-          <p:cNvPr id="12" name="TextBox 11"/>
+          <p:cNvPr id="13" name="TextBox 12"/>
           <p:cNvSpPr txBox="1"/>
           <p:nvPr/>
         </p:nvSpPr>
@@ -4992,7 +5244,7 @@
           <a:p>
             <a:pPr algn="l"/>
             <a:r>
-              <a:rPr sz="1200" b="0">
+              <a:rPr sz="1100" b="0">
                 <a:solidFill>
                   <a:srgbClr val="E5EDF7"/>
                 </a:solidFill>
@@ -5002,7 +5254,8 @@
 Strict CORS
 No development reload
 Registration and OTP test
-Tenant isolation regression test</a:t>
+Tenant isolation regression test
+Gate: no deployment is called complete until login and chat work.</a:t>
             </a:r>
           </a:p>
         </p:txBody>
@@ -5105,7 +5358,42 @@
       </p:sp>
       <p:sp>
         <p:nvSpPr>
-          <p:cNvPr id="4" name="Rounded Rectangle 3"/>
+          <p:cNvPr id="4" name="TextBox 3"/>
+          <p:cNvSpPr txBox="1"/>
+          <p:nvPr/>
+        </p:nvSpPr>
+        <p:spPr>
+          <a:xfrm>
+            <a:off x="621792" y="6547104"/>
+            <a:ext cx="10972800" cy="182880"/>
+          </a:xfrm>
+          <a:prstGeom prst="rect">
+            <a:avLst/>
+          </a:prstGeom>
+          <a:noFill/>
+        </p:spPr>
+        <p:txBody>
+          <a:bodyPr wrap="square">
+            <a:spAutoFit/>
+          </a:bodyPr>
+          <a:lstStyle/>
+          <a:p>
+            <a:pPr algn="l"/>
+            <a:r>
+              <a:rPr sz="800" b="0">
+                <a:solidFill>
+                  <a:srgbClr val="94A3B8"/>
+                </a:solidFill>
+                <a:latin typeface="Aptos"/>
+              </a:rPr>
+              <a:t>tenantAI  |  jury presentation  |  14</a:t>
+            </a:r>
+          </a:p>
+        </p:txBody>
+      </p:sp>
+      <p:sp>
+        <p:nvSpPr>
+          <p:cNvPr id="5" name="Rounded Rectangle 4"/>
           <p:cNvSpPr/>
           <p:nvPr/>
         </p:nvSpPr>
@@ -5150,7 +5438,7 @@
       </p:sp>
       <p:sp>
         <p:nvSpPr>
-          <p:cNvPr id="5" name="TextBox 4"/>
+          <p:cNvPr id="6" name="TextBox 5"/>
           <p:cNvSpPr txBox="1"/>
           <p:nvPr/>
         </p:nvSpPr>
@@ -5172,7 +5460,7 @@
           <a:p>
             <a:pPr algn="l"/>
             <a:r>
-              <a:rPr sz="1600" b="1">
+              <a:rPr sz="1500" b="1">
                 <a:solidFill>
                   <a:srgbClr val="2DD4BF"/>
                 </a:solidFill>
@@ -5185,7 +5473,7 @@
       </p:sp>
       <p:sp>
         <p:nvSpPr>
-          <p:cNvPr id="6" name="TextBox 5"/>
+          <p:cNvPr id="7" name="TextBox 6"/>
           <p:cNvSpPr txBox="1"/>
           <p:nvPr/>
         </p:nvSpPr>
@@ -5207,7 +5495,7 @@
           <a:p>
             <a:pPr algn="l"/>
             <a:r>
-              <a:rPr sz="1200" b="0">
+              <a:rPr sz="1100" b="0">
                 <a:solidFill>
                   <a:srgbClr val="E5EDF7"/>
                 </a:solidFill>
@@ -5217,14 +5505,15 @@
 verify-email
 resend-verification
 login
-me</a:t>
-            </a:r>
-          </a:p>
-        </p:txBody>
-      </p:sp>
-      <p:sp>
-        <p:nvSpPr>
-          <p:cNvPr id="7" name="Rounded Rectangle 6"/>
+me
+Boundary: public registration ends at verified identity.</a:t>
+            </a:r>
+          </a:p>
+        </p:txBody>
+      </p:sp>
+      <p:sp>
+        <p:nvSpPr>
+          <p:cNvPr id="8" name="Rounded Rectangle 7"/>
           <p:cNvSpPr/>
           <p:nvPr/>
         </p:nvSpPr>
@@ -5269,7 +5558,7 @@
       </p:sp>
       <p:sp>
         <p:nvSpPr>
-          <p:cNvPr id="8" name="TextBox 7"/>
+          <p:cNvPr id="9" name="TextBox 8"/>
           <p:cNvSpPr txBox="1"/>
           <p:nvPr/>
         </p:nvSpPr>
@@ -5291,7 +5580,7 @@
           <a:p>
             <a:pPr algn="l"/>
             <a:r>
-              <a:rPr sz="1600" b="1">
+              <a:rPr sz="1500" b="1">
                 <a:solidFill>
                   <a:srgbClr val="2DD4BF"/>
                 </a:solidFill>
@@ -5304,7 +5593,7 @@
       </p:sp>
       <p:sp>
         <p:nvSpPr>
-          <p:cNvPr id="9" name="TextBox 8"/>
+          <p:cNvPr id="10" name="TextBox 9"/>
           <p:cNvSpPr txBox="1"/>
           <p:nvPr/>
         </p:nvSpPr>
@@ -5326,7 +5615,7 @@
           <a:p>
             <a:pPr algn="l"/>
             <a:r>
-              <a:rPr sz="1200" b="0">
+              <a:rPr sz="1100" b="0">
                 <a:solidFill>
                   <a:srgbClr val="E5EDF7"/>
                 </a:solidFill>
@@ -5336,14 +5625,15 @@
 upload
 inspect/delete document
 chat message
-conversation history</a:t>
-            </a:r>
-          </a:p>
-        </p:txBody>
-      </p:sp>
-      <p:sp>
-        <p:nvSpPr>
-          <p:cNvPr id="10" name="Rounded Rectangle 9"/>
+conversation history
+Boundary: all resources resolve through tenant ownership.</a:t>
+            </a:r>
+          </a:p>
+        </p:txBody>
+      </p:sp>
+      <p:sp>
+        <p:nvSpPr>
+          <p:cNvPr id="11" name="Rounded Rectangle 10"/>
           <p:cNvSpPr/>
           <p:nvPr/>
         </p:nvSpPr>
@@ -5388,7 +5678,7 @@
       </p:sp>
       <p:sp>
         <p:nvSpPr>
-          <p:cNvPr id="11" name="TextBox 10"/>
+          <p:cNvPr id="12" name="TextBox 11"/>
           <p:cNvSpPr txBox="1"/>
           <p:nvPr/>
         </p:nvSpPr>
@@ -5410,7 +5700,7 @@
           <a:p>
             <a:pPr algn="l"/>
             <a:r>
-              <a:rPr sz="1600" b="1">
+              <a:rPr sz="1500" b="1">
                 <a:solidFill>
                   <a:srgbClr val="2DD4BF"/>
                 </a:solidFill>
@@ -5423,7 +5713,7 @@
       </p:sp>
       <p:sp>
         <p:nvSpPr>
-          <p:cNvPr id="12" name="TextBox 11"/>
+          <p:cNvPr id="13" name="TextBox 12"/>
           <p:cNvSpPr txBox="1"/>
           <p:nvPr/>
         </p:nvSpPr>
@@ -5445,7 +5735,7 @@
           <a:p>
             <a:pPr algn="l"/>
             <a:r>
-              <a:rPr sz="1200" b="0">
+              <a:rPr sz="1100" b="0">
                 <a:solidFill>
                   <a:srgbClr val="E5EDF7"/>
                 </a:solidFill>
@@ -5455,14 +5745,15 @@
 admin stats
 tenant summaries
 provision tenants
-security simulation</a:t>
-            </a:r>
-          </a:p>
-        </p:txBody>
-      </p:sp>
-      <p:sp>
-        <p:nvSpPr>
-          <p:cNvPr id="13" name="TextBox 12"/>
+security simulation
+Boundary: global views require SuperAdmin role.</a:t>
+            </a:r>
+          </a:p>
+        </p:txBody>
+      </p:sp>
+      <p:sp>
+        <p:nvSpPr>
+          <p:cNvPr id="14" name="TextBox 13"/>
           <p:cNvSpPr txBox="1"/>
           <p:nvPr/>
         </p:nvSpPr>
@@ -5593,7 +5884,42 @@
       </p:sp>
       <p:sp>
         <p:nvSpPr>
-          <p:cNvPr id="4" name="Rounded Rectangle 3"/>
+          <p:cNvPr id="4" name="TextBox 3"/>
+          <p:cNvSpPr txBox="1"/>
+          <p:nvPr/>
+        </p:nvSpPr>
+        <p:spPr>
+          <a:xfrm>
+            <a:off x="621792" y="6547104"/>
+            <a:ext cx="10972800" cy="182880"/>
+          </a:xfrm>
+          <a:prstGeom prst="rect">
+            <a:avLst/>
+          </a:prstGeom>
+          <a:noFill/>
+        </p:spPr>
+        <p:txBody>
+          <a:bodyPr wrap="square">
+            <a:spAutoFit/>
+          </a:bodyPr>
+          <a:lstStyle/>
+          <a:p>
+            <a:pPr algn="l"/>
+            <a:r>
+              <a:rPr sz="800" b="0">
+                <a:solidFill>
+                  <a:srgbClr val="94A3B8"/>
+                </a:solidFill>
+                <a:latin typeface="Aptos"/>
+              </a:rPr>
+              <a:t>tenantAI  |  jury presentation  |  15</a:t>
+            </a:r>
+          </a:p>
+        </p:txBody>
+      </p:sp>
+      <p:sp>
+        <p:nvSpPr>
+          <p:cNvPr id="5" name="Rounded Rectangle 4"/>
           <p:cNvSpPr/>
           <p:nvPr/>
         </p:nvSpPr>
@@ -5638,7 +5964,7 @@
       </p:sp>
       <p:sp>
         <p:nvSpPr>
-          <p:cNvPr id="5" name="TextBox 4"/>
+          <p:cNvPr id="6" name="TextBox 5"/>
           <p:cNvSpPr txBox="1"/>
           <p:nvPr/>
         </p:nvSpPr>
@@ -5660,7 +5986,7 @@
           <a:p>
             <a:pPr algn="l"/>
             <a:r>
-              <a:rPr sz="1600" b="1">
+              <a:rPr sz="1500" b="1">
                 <a:solidFill>
                   <a:srgbClr val="2DD4BF"/>
                 </a:solidFill>
@@ -5673,7 +5999,7 @@
       </p:sp>
       <p:sp>
         <p:nvSpPr>
-          <p:cNvPr id="6" name="TextBox 5"/>
+          <p:cNvPr id="7" name="TextBox 6"/>
           <p:cNvSpPr txBox="1"/>
           <p:nvPr/>
         </p:nvSpPr>
@@ -5695,20 +6021,21 @@
           <a:p>
             <a:pPr algn="l"/>
             <a:r>
-              <a:rPr sz="1200" b="0">
+              <a:rPr sz="1100" b="0">
                 <a:solidFill>
                   <a:srgbClr val="E5EDF7"/>
                 </a:solidFill>
                 <a:latin typeface="Aptos"/>
               </a:rPr>
-              <a:t>Authentication, document upload, RAG chat, citations, tenant dashboards, logs, and an interactive security demo.</a:t>
-            </a:r>
-          </a:p>
-        </p:txBody>
-      </p:sp>
-      <p:sp>
-        <p:nvSpPr>
-          <p:cNvPr id="7" name="Rounded Rectangle 6"/>
+              <a:t>Authentication, document upload, RAG chat, citations, tenant dashboards, logs, and an interactive security demo.
+Proof: local backend tests pass and the production frontend build generates 16 routes.</a:t>
+            </a:r>
+          </a:p>
+        </p:txBody>
+      </p:sp>
+      <p:sp>
+        <p:nvSpPr>
+          <p:cNvPr id="8" name="Rounded Rectangle 7"/>
           <p:cNvSpPr/>
           <p:nvPr/>
         </p:nvSpPr>
@@ -5753,7 +6080,7 @@
       </p:sp>
       <p:sp>
         <p:nvSpPr>
-          <p:cNvPr id="8" name="TextBox 7"/>
+          <p:cNvPr id="9" name="TextBox 8"/>
           <p:cNvSpPr txBox="1"/>
           <p:nvPr/>
         </p:nvSpPr>
@@ -5775,7 +6102,7 @@
           <a:p>
             <a:pPr algn="l"/>
             <a:r>
-              <a:rPr sz="1600" b="1">
+              <a:rPr sz="1500" b="1">
                 <a:solidFill>
                   <a:srgbClr val="2DD4BF"/>
                 </a:solidFill>
@@ -5788,7 +6115,7 @@
       </p:sp>
       <p:sp>
         <p:nvSpPr>
-          <p:cNvPr id="9" name="TextBox 8"/>
+          <p:cNvPr id="10" name="TextBox 9"/>
           <p:cNvSpPr txBox="1"/>
           <p:nvPr/>
         </p:nvSpPr>
@@ -5810,20 +6137,21 @@
           <a:p>
             <a:pPr algn="l"/>
             <a:r>
-              <a:rPr sz="1200" b="0">
+              <a:rPr sz="1100" b="0">
                 <a:solidFill>
                   <a:srgbClr val="E5EDF7"/>
                 </a:solidFill>
                 <a:latin typeface="Aptos"/>
               </a:rPr>
-              <a:t>Security is visible and testable: out-of-domain refusal, tenant-scoped retrieval, 404 IDOR protection, and audit evidence.</a:t>
-            </a:r>
-          </a:p>
-        </p:txBody>
-      </p:sp>
-      <p:sp>
-        <p:nvSpPr>
-          <p:cNvPr id="10" name="Rounded Rectangle 9"/>
+              <a:t>Security is visible and testable: out-of-domain refusal, tenant-scoped retrieval, 404 IDOR protection, and audit evidence.
+Proof: the jury can trigger and inspect the denial.</a:t>
+            </a:r>
+          </a:p>
+        </p:txBody>
+      </p:sp>
+      <p:sp>
+        <p:nvSpPr>
+          <p:cNvPr id="11" name="Rounded Rectangle 10"/>
           <p:cNvSpPr/>
           <p:nvPr/>
         </p:nvSpPr>
@@ -5868,7 +6196,7 @@
       </p:sp>
       <p:sp>
         <p:nvSpPr>
-          <p:cNvPr id="11" name="TextBox 10"/>
+          <p:cNvPr id="12" name="TextBox 11"/>
           <p:cNvSpPr txBox="1"/>
           <p:nvPr/>
         </p:nvSpPr>
@@ -5890,7 +6218,7 @@
           <a:p>
             <a:pPr algn="l"/>
             <a:r>
-              <a:rPr sz="1600" b="1">
+              <a:rPr sz="1500" b="1">
                 <a:solidFill>
                   <a:srgbClr val="2DD4BF"/>
                 </a:solidFill>
@@ -5903,7 +6231,7 @@
       </p:sp>
       <p:sp>
         <p:nvSpPr>
-          <p:cNvPr id="12" name="TextBox 11"/>
+          <p:cNvPr id="13" name="TextBox 12"/>
           <p:cNvSpPr txBox="1"/>
           <p:nvPr/>
         </p:nvSpPr>
@@ -5925,20 +6253,21 @@
           <a:p>
             <a:pPr algn="l"/>
             <a:r>
-              <a:rPr sz="1200" b="0">
+              <a:rPr sz="1100" b="0">
                 <a:solidFill>
                   <a:srgbClr val="E5EDF7"/>
                 </a:solidFill>
                 <a:latin typeface="Aptos"/>
               </a:rPr>
-              <a:t>Reusable company knowledge, faster support decisions, lower information risk, and a path to per-tenant SaaS pricing.</a:t>
-            </a:r>
-          </a:p>
-        </p:txBody>
-      </p:sp>
-      <p:sp>
-        <p:nvSpPr>
-          <p:cNvPr id="13" name="TextBox 12"/>
+              <a:t>Reusable company knowledge, faster support decisions, lower information risk, and a path to per-tenant SaaS pricing.
+Model: charge per workspace, seats, storage, or usage.</a:t>
+            </a:r>
+          </a:p>
+        </p:txBody>
+      </p:sp>
+      <p:sp>
+        <p:nvSpPr>
+          <p:cNvPr id="14" name="TextBox 13"/>
           <p:cNvSpPr txBox="1"/>
           <p:nvPr/>
         </p:nvSpPr>
@@ -6069,7 +6398,42 @@
       </p:sp>
       <p:sp>
         <p:nvSpPr>
-          <p:cNvPr id="4" name="Rounded Rectangle 3"/>
+          <p:cNvPr id="4" name="TextBox 3"/>
+          <p:cNvSpPr txBox="1"/>
+          <p:nvPr/>
+        </p:nvSpPr>
+        <p:spPr>
+          <a:xfrm>
+            <a:off x="621792" y="6547104"/>
+            <a:ext cx="10972800" cy="182880"/>
+          </a:xfrm>
+          <a:prstGeom prst="rect">
+            <a:avLst/>
+          </a:prstGeom>
+          <a:noFill/>
+        </p:spPr>
+        <p:txBody>
+          <a:bodyPr wrap="square">
+            <a:spAutoFit/>
+          </a:bodyPr>
+          <a:lstStyle/>
+          <a:p>
+            <a:pPr algn="l"/>
+            <a:r>
+              <a:rPr sz="800" b="0">
+                <a:solidFill>
+                  <a:srgbClr val="94A3B8"/>
+                </a:solidFill>
+                <a:latin typeface="Aptos"/>
+              </a:rPr>
+              <a:t>tenantAI  |  jury presentation  |  16</a:t>
+            </a:r>
+          </a:p>
+        </p:txBody>
+      </p:sp>
+      <p:sp>
+        <p:nvSpPr>
+          <p:cNvPr id="5" name="Rounded Rectangle 4"/>
           <p:cNvSpPr/>
           <p:nvPr/>
         </p:nvSpPr>
@@ -6114,7 +6478,7 @@
       </p:sp>
       <p:sp>
         <p:nvSpPr>
-          <p:cNvPr id="5" name="TextBox 4"/>
+          <p:cNvPr id="6" name="TextBox 5"/>
           <p:cNvSpPr txBox="1"/>
           <p:nvPr/>
         </p:nvSpPr>
@@ -6136,7 +6500,7 @@
           <a:p>
             <a:pPr algn="l"/>
             <a:r>
-              <a:rPr sz="1600" b="1">
+              <a:rPr sz="1500" b="1">
                 <a:solidFill>
                   <a:srgbClr val="2DD4BF"/>
                 </a:solidFill>
@@ -6149,7 +6513,7 @@
       </p:sp>
       <p:sp>
         <p:nvSpPr>
-          <p:cNvPr id="6" name="TextBox 5"/>
+          <p:cNvPr id="7" name="TextBox 6"/>
           <p:cNvSpPr txBox="1"/>
           <p:nvPr/>
         </p:nvSpPr>
@@ -6171,7 +6535,7 @@
           <a:p>
             <a:pPr algn="l"/>
             <a:r>
-              <a:rPr sz="1200" b="0">
+              <a:rPr sz="1100" b="0">
                 <a:solidFill>
                   <a:srgbClr val="E5EDF7"/>
                 </a:solidFill>
@@ -6180,14 +6544,15 @@
               <a:t>Company workspace
 Slug and quota
 Admin membership
-Owns all private records</a:t>
-            </a:r>
-          </a:p>
-        </p:txBody>
-      </p:sp>
-      <p:sp>
-        <p:nvSpPr>
-          <p:cNvPr id="7" name="Rounded Rectangle 6"/>
+Owns all private records
+Boundary: root of ownership.</a:t>
+            </a:r>
+          </a:p>
+        </p:txBody>
+      </p:sp>
+      <p:sp>
+        <p:nvSpPr>
+          <p:cNvPr id="8" name="Rounded Rectangle 7"/>
           <p:cNvSpPr/>
           <p:nvPr/>
         </p:nvSpPr>
@@ -6232,7 +6597,7 @@
       </p:sp>
       <p:sp>
         <p:nvSpPr>
-          <p:cNvPr id="8" name="TextBox 7"/>
+          <p:cNvPr id="9" name="TextBox 8"/>
           <p:cNvSpPr txBox="1"/>
           <p:nvPr/>
         </p:nvSpPr>
@@ -6254,7 +6619,7 @@
           <a:p>
             <a:pPr algn="l"/>
             <a:r>
-              <a:rPr sz="1600" b="1">
+              <a:rPr sz="1500" b="1">
                 <a:solidFill>
                   <a:srgbClr val="2DD4BF"/>
                 </a:solidFill>
@@ -6267,7 +6632,7 @@
       </p:sp>
       <p:sp>
         <p:nvSpPr>
-          <p:cNvPr id="9" name="TextBox 8"/>
+          <p:cNvPr id="10" name="TextBox 9"/>
           <p:cNvSpPr txBox="1"/>
           <p:nvPr/>
         </p:nvSpPr>
@@ -6289,7 +6654,7 @@
           <a:p>
             <a:pPr algn="l"/>
             <a:r>
-              <a:rPr sz="1200" b="0">
+              <a:rPr sz="1100" b="0">
                 <a:solidFill>
                   <a:srgbClr val="E5EDF7"/>
                 </a:solidFill>
@@ -6298,14 +6663,15 @@
               <a:t>Email and password hash
 Verified status
 Role: admin/user
-Belongs to one tenant</a:t>
-            </a:r>
-          </a:p>
-        </p:txBody>
-      </p:sp>
-      <p:sp>
-        <p:nvSpPr>
-          <p:cNvPr id="10" name="Rounded Rectangle 9"/>
+Belongs to one tenant
+Boundary: JWT carries identity.</a:t>
+            </a:r>
+          </a:p>
+        </p:txBody>
+      </p:sp>
+      <p:sp>
+        <p:nvSpPr>
+          <p:cNvPr id="11" name="Rounded Rectangle 10"/>
           <p:cNvSpPr/>
           <p:nvPr/>
         </p:nvSpPr>
@@ -6350,7 +6716,7 @@
       </p:sp>
       <p:sp>
         <p:nvSpPr>
-          <p:cNvPr id="11" name="TextBox 10"/>
+          <p:cNvPr id="12" name="TextBox 11"/>
           <p:cNvSpPr txBox="1"/>
           <p:nvPr/>
         </p:nvSpPr>
@@ -6372,7 +6738,7 @@
           <a:p>
             <a:pPr algn="l"/>
             <a:r>
-              <a:rPr sz="1600" b="1">
+              <a:rPr sz="1500" b="1">
                 <a:solidFill>
                   <a:srgbClr val="2DD4BF"/>
                 </a:solidFill>
@@ -6385,7 +6751,7 @@
       </p:sp>
       <p:sp>
         <p:nvSpPr>
-          <p:cNvPr id="12" name="TextBox 11"/>
+          <p:cNvPr id="13" name="TextBox 12"/>
           <p:cNvSpPr txBox="1"/>
           <p:nvPr/>
         </p:nvSpPr>
@@ -6407,7 +6773,7 @@
           <a:p>
             <a:pPr algn="l"/>
             <a:r>
-              <a:rPr sz="1200" b="0">
+              <a:rPr sz="1100" b="0">
                 <a:solidFill>
                   <a:srgbClr val="E5EDF7"/>
                 </a:solidFill>
@@ -6416,14 +6782,15 @@
               <a:t>Tenant-owned file
 PENDING → READY
 Parser metadata
-Safe deletion boundary</a:t>
-            </a:r>
-          </a:p>
-        </p:txBody>
-      </p:sp>
-      <p:sp>
-        <p:nvSpPr>
-          <p:cNvPr id="13" name="Rounded Rectangle 12"/>
+Safe deletion boundary
+Boundary: status gates retrieval.</a:t>
+            </a:r>
+          </a:p>
+        </p:txBody>
+      </p:sp>
+      <p:sp>
+        <p:nvSpPr>
+          <p:cNvPr id="14" name="Rounded Rectangle 13"/>
           <p:cNvSpPr/>
           <p:nvPr/>
         </p:nvSpPr>
@@ -6468,7 +6835,7 @@
       </p:sp>
       <p:sp>
         <p:nvSpPr>
-          <p:cNvPr id="14" name="TextBox 13"/>
+          <p:cNvPr id="15" name="TextBox 14"/>
           <p:cNvSpPr txBox="1"/>
           <p:nvPr/>
         </p:nvSpPr>
@@ -6490,7 +6857,7 @@
           <a:p>
             <a:pPr algn="l"/>
             <a:r>
-              <a:rPr sz="1600" b="1">
+              <a:rPr sz="1500" b="1">
                 <a:solidFill>
                   <a:srgbClr val="2DD4BF"/>
                 </a:solidFill>
@@ -6503,7 +6870,7 @@
       </p:sp>
       <p:sp>
         <p:nvSpPr>
-          <p:cNvPr id="15" name="TextBox 14"/>
+          <p:cNvPr id="16" name="TextBox 15"/>
           <p:cNvSpPr txBox="1"/>
           <p:nvPr/>
         </p:nvSpPr>
@@ -6525,7 +6892,7 @@
           <a:p>
             <a:pPr algn="l"/>
             <a:r>
-              <a:rPr sz="1200" b="0">
+              <a:rPr sz="1100" b="0">
                 <a:solidFill>
                   <a:srgbClr val="E5EDF7"/>
                 </a:solidFill>
@@ -6534,14 +6901,15 @@
               <a:t>Text segments
 Embedding vectors
 Page/source metadata
-Tenant-scoped retrieval</a:t>
-            </a:r>
-          </a:p>
-        </p:txBody>
-      </p:sp>
-      <p:sp>
-        <p:nvSpPr>
-          <p:cNvPr id="16" name="Rounded Rectangle 15"/>
+Tenant-scoped retrieval
+Boundary: no global search.</a:t>
+            </a:r>
+          </a:p>
+        </p:txBody>
+      </p:sp>
+      <p:sp>
+        <p:nvSpPr>
+          <p:cNvPr id="17" name="Rounded Rectangle 16"/>
           <p:cNvSpPr/>
           <p:nvPr/>
         </p:nvSpPr>
@@ -6586,7 +6954,7 @@
       </p:sp>
       <p:sp>
         <p:nvSpPr>
-          <p:cNvPr id="17" name="TextBox 16"/>
+          <p:cNvPr id="18" name="TextBox 17"/>
           <p:cNvSpPr txBox="1"/>
           <p:nvPr/>
         </p:nvSpPr>
@@ -6608,7 +6976,7 @@
           <a:p>
             <a:pPr algn="l"/>
             <a:r>
-              <a:rPr sz="1600" b="1">
+              <a:rPr sz="1500" b="1">
                 <a:solidFill>
                   <a:srgbClr val="2DD4BF"/>
                 </a:solidFill>
@@ -6621,7 +6989,7 @@
       </p:sp>
       <p:sp>
         <p:nvSpPr>
-          <p:cNvPr id="18" name="TextBox 17"/>
+          <p:cNvPr id="19" name="TextBox 18"/>
           <p:cNvSpPr txBox="1"/>
           <p:nvPr/>
         </p:nvSpPr>
@@ -6643,7 +7011,7 @@
           <a:p>
             <a:pPr algn="l"/>
             <a:r>
-              <a:rPr sz="1200" b="0">
+              <a:rPr sz="1100" b="0">
                 <a:solidFill>
                   <a:srgbClr val="E5EDF7"/>
                 </a:solidFill>
@@ -6652,14 +7020,15 @@
               <a:t>Tenant-owned thread
 Messages and citations
 Audit-linked question
-No cross-tenant joins</a:t>
-            </a:r>
-          </a:p>
-        </p:txBody>
-      </p:sp>
-      <p:sp>
-        <p:nvSpPr>
-          <p:cNvPr id="19" name="TextBox 18"/>
+No cross-tenant joins
+Boundary: history stays private.</a:t>
+            </a:r>
+          </a:p>
+        </p:txBody>
+      </p:sp>
+      <p:sp>
+        <p:nvSpPr>
+          <p:cNvPr id="20" name="TextBox 19"/>
           <p:cNvSpPr txBox="1"/>
           <p:nvPr/>
         </p:nvSpPr>
@@ -6790,7 +7159,42 @@
       </p:sp>
       <p:sp>
         <p:nvSpPr>
-          <p:cNvPr id="4" name="Rounded Rectangle 3"/>
+          <p:cNvPr id="4" name="TextBox 3"/>
+          <p:cNvSpPr txBox="1"/>
+          <p:nvPr/>
+        </p:nvSpPr>
+        <p:spPr>
+          <a:xfrm>
+            <a:off x="621792" y="6547104"/>
+            <a:ext cx="10972800" cy="182880"/>
+          </a:xfrm>
+          <a:prstGeom prst="rect">
+            <a:avLst/>
+          </a:prstGeom>
+          <a:noFill/>
+        </p:spPr>
+        <p:txBody>
+          <a:bodyPr wrap="square">
+            <a:spAutoFit/>
+          </a:bodyPr>
+          <a:lstStyle/>
+          <a:p>
+            <a:pPr algn="l"/>
+            <a:r>
+              <a:rPr sz="800" b="0">
+                <a:solidFill>
+                  <a:srgbClr val="94A3B8"/>
+                </a:solidFill>
+                <a:latin typeface="Aptos"/>
+              </a:rPr>
+              <a:t>tenantAI  |  jury presentation  |  17</a:t>
+            </a:r>
+          </a:p>
+        </p:txBody>
+      </p:sp>
+      <p:sp>
+        <p:nvSpPr>
+          <p:cNvPr id="5" name="Rounded Rectangle 4"/>
           <p:cNvSpPr/>
           <p:nvPr/>
         </p:nvSpPr>
@@ -6835,7 +7239,7 @@
       </p:sp>
       <p:sp>
         <p:nvSpPr>
-          <p:cNvPr id="5" name="TextBox 4"/>
+          <p:cNvPr id="6" name="TextBox 5"/>
           <p:cNvSpPr txBox="1"/>
           <p:nvPr/>
         </p:nvSpPr>
@@ -6857,7 +7261,7 @@
           <a:p>
             <a:pPr algn="l"/>
             <a:r>
-              <a:rPr sz="1600" b="1">
+              <a:rPr sz="1500" b="1">
                 <a:solidFill>
                   <a:srgbClr val="2DD4BF"/>
                 </a:solidFill>
@@ -6870,7 +7274,7 @@
       </p:sp>
       <p:sp>
         <p:nvSpPr>
-          <p:cNvPr id="6" name="TextBox 5"/>
+          <p:cNvPr id="7" name="TextBox 6"/>
           <p:cNvSpPr txBox="1"/>
           <p:nvPr/>
         </p:nvSpPr>
@@ -6892,7 +7296,7 @@
           <a:p>
             <a:pPr algn="l"/>
             <a:r>
-              <a:rPr sz="1200" b="0">
+              <a:rPr sz="1100" b="0">
                 <a:solidFill>
                   <a:srgbClr val="E5EDF7"/>
                 </a:solidFill>
@@ -6906,7 +7310,7 @@
       </p:sp>
       <p:sp>
         <p:nvSpPr>
-          <p:cNvPr id="7" name="Rounded Rectangle 6"/>
+          <p:cNvPr id="8" name="Rounded Rectangle 7"/>
           <p:cNvSpPr/>
           <p:nvPr/>
         </p:nvSpPr>
@@ -6951,7 +7355,7 @@
       </p:sp>
       <p:sp>
         <p:nvSpPr>
-          <p:cNvPr id="8" name="TextBox 7"/>
+          <p:cNvPr id="9" name="TextBox 8"/>
           <p:cNvSpPr txBox="1"/>
           <p:nvPr/>
         </p:nvSpPr>
@@ -6973,7 +7377,7 @@
           <a:p>
             <a:pPr algn="l"/>
             <a:r>
-              <a:rPr sz="1600" b="1">
+              <a:rPr sz="1500" b="1">
                 <a:solidFill>
                   <a:srgbClr val="2DD4BF"/>
                 </a:solidFill>
@@ -6986,7 +7390,7 @@
       </p:sp>
       <p:sp>
         <p:nvSpPr>
-          <p:cNvPr id="9" name="TextBox 8"/>
+          <p:cNvPr id="10" name="TextBox 9"/>
           <p:cNvSpPr txBox="1"/>
           <p:nvPr/>
         </p:nvSpPr>
@@ -7008,7 +7412,7 @@
           <a:p>
             <a:pPr algn="l"/>
             <a:r>
-              <a:rPr sz="1200" b="0">
+              <a:rPr sz="1100" b="0">
                 <a:solidFill>
                   <a:srgbClr val="E5EDF7"/>
                 </a:solidFill>
@@ -7022,7 +7426,7 @@
       </p:sp>
       <p:sp>
         <p:nvSpPr>
-          <p:cNvPr id="10" name="Rounded Rectangle 9"/>
+          <p:cNvPr id="11" name="Rounded Rectangle 10"/>
           <p:cNvSpPr/>
           <p:nvPr/>
         </p:nvSpPr>
@@ -7067,7 +7471,7 @@
       </p:sp>
       <p:sp>
         <p:nvSpPr>
-          <p:cNvPr id="11" name="TextBox 10"/>
+          <p:cNvPr id="12" name="TextBox 11"/>
           <p:cNvSpPr txBox="1"/>
           <p:nvPr/>
         </p:nvSpPr>
@@ -7089,7 +7493,7 @@
           <a:p>
             <a:pPr algn="l"/>
             <a:r>
-              <a:rPr sz="1600" b="1">
+              <a:rPr sz="1500" b="1">
                 <a:solidFill>
                   <a:srgbClr val="2DD4BF"/>
                 </a:solidFill>
@@ -7102,7 +7506,7 @@
       </p:sp>
       <p:sp>
         <p:nvSpPr>
-          <p:cNvPr id="12" name="TextBox 11"/>
+          <p:cNvPr id="13" name="TextBox 12"/>
           <p:cNvSpPr txBox="1"/>
           <p:nvPr/>
         </p:nvSpPr>
@@ -7124,7 +7528,7 @@
           <a:p>
             <a:pPr algn="l"/>
             <a:r>
-              <a:rPr sz="1200" b="0">
+              <a:rPr sz="1100" b="0">
                 <a:solidFill>
                   <a:srgbClr val="E5EDF7"/>
                 </a:solidFill>
@@ -7138,7 +7542,7 @@
       </p:sp>
       <p:sp>
         <p:nvSpPr>
-          <p:cNvPr id="13" name="Rounded Rectangle 12"/>
+          <p:cNvPr id="14" name="Rounded Rectangle 13"/>
           <p:cNvSpPr/>
           <p:nvPr/>
         </p:nvSpPr>
@@ -7183,7 +7587,7 @@
       </p:sp>
       <p:sp>
         <p:nvSpPr>
-          <p:cNvPr id="14" name="TextBox 13"/>
+          <p:cNvPr id="15" name="TextBox 14"/>
           <p:cNvSpPr txBox="1"/>
           <p:nvPr/>
         </p:nvSpPr>
@@ -7205,7 +7609,7 @@
           <a:p>
             <a:pPr algn="l"/>
             <a:r>
-              <a:rPr sz="1600" b="1">
+              <a:rPr sz="1500" b="1">
                 <a:solidFill>
                   <a:srgbClr val="2DD4BF"/>
                 </a:solidFill>
@@ -7218,7 +7622,7 @@
       </p:sp>
       <p:sp>
         <p:nvSpPr>
-          <p:cNvPr id="15" name="TextBox 14"/>
+          <p:cNvPr id="16" name="TextBox 15"/>
           <p:cNvSpPr txBox="1"/>
           <p:nvPr/>
         </p:nvSpPr>
@@ -7240,7 +7644,7 @@
           <a:p>
             <a:pPr algn="l"/>
             <a:r>
-              <a:rPr sz="1200" b="0">
+              <a:rPr sz="1100" b="0">
                 <a:solidFill>
                   <a:srgbClr val="E5EDF7"/>
                 </a:solidFill>
@@ -7254,7 +7658,7 @@
       </p:sp>
       <p:sp>
         <p:nvSpPr>
-          <p:cNvPr id="16" name="Rounded Rectangle 15"/>
+          <p:cNvPr id="17" name="Rounded Rectangle 16"/>
           <p:cNvSpPr/>
           <p:nvPr/>
         </p:nvSpPr>
@@ -7299,7 +7703,7 @@
       </p:sp>
       <p:sp>
         <p:nvSpPr>
-          <p:cNvPr id="17" name="TextBox 16"/>
+          <p:cNvPr id="18" name="TextBox 17"/>
           <p:cNvSpPr txBox="1"/>
           <p:nvPr/>
         </p:nvSpPr>
@@ -7321,7 +7725,7 @@
           <a:p>
             <a:pPr algn="l"/>
             <a:r>
-              <a:rPr sz="1600" b="1">
+              <a:rPr sz="1500" b="1">
                 <a:solidFill>
                   <a:srgbClr val="2DD4BF"/>
                 </a:solidFill>
@@ -7334,7 +7738,7 @@
       </p:sp>
       <p:sp>
         <p:nvSpPr>
-          <p:cNvPr id="18" name="TextBox 17"/>
+          <p:cNvPr id="19" name="TextBox 18"/>
           <p:cNvSpPr txBox="1"/>
           <p:nvPr/>
         </p:nvSpPr>
@@ -7356,7 +7760,7 @@
           <a:p>
             <a:pPr algn="l"/>
             <a:r>
-              <a:rPr sz="1200" b="0">
+              <a:rPr sz="1100" b="0">
                 <a:solidFill>
                   <a:srgbClr val="E5EDF7"/>
                 </a:solidFill>
@@ -7370,7 +7774,7 @@
       </p:sp>
       <p:sp>
         <p:nvSpPr>
-          <p:cNvPr id="19" name="Rounded Rectangle 18"/>
+          <p:cNvPr id="20" name="Rounded Rectangle 19"/>
           <p:cNvSpPr/>
           <p:nvPr/>
         </p:nvSpPr>
@@ -7415,7 +7819,7 @@
       </p:sp>
       <p:sp>
         <p:nvSpPr>
-          <p:cNvPr id="20" name="TextBox 19"/>
+          <p:cNvPr id="21" name="TextBox 20"/>
           <p:cNvSpPr txBox="1"/>
           <p:nvPr/>
         </p:nvSpPr>
@@ -7437,7 +7841,7 @@
           <a:p>
             <a:pPr algn="l"/>
             <a:r>
-              <a:rPr sz="1600" b="1">
+              <a:rPr sz="1500" b="1">
                 <a:solidFill>
                   <a:srgbClr val="2DD4BF"/>
                 </a:solidFill>
@@ -7450,7 +7854,7 @@
       </p:sp>
       <p:sp>
         <p:nvSpPr>
-          <p:cNvPr id="21" name="TextBox 20"/>
+          <p:cNvPr id="22" name="TextBox 21"/>
           <p:cNvSpPr txBox="1"/>
           <p:nvPr/>
         </p:nvSpPr>
@@ -7472,7 +7876,7 @@
           <a:p>
             <a:pPr algn="l"/>
             <a:r>
-              <a:rPr sz="1200" b="0">
+              <a:rPr sz="1100" b="0">
                 <a:solidFill>
                   <a:srgbClr val="E5EDF7"/>
                 </a:solidFill>
@@ -7486,7 +7890,7 @@
       </p:sp>
       <p:sp>
         <p:nvSpPr>
-          <p:cNvPr id="22" name="Rounded Rectangle 21"/>
+          <p:cNvPr id="23" name="Rounded Rectangle 22"/>
           <p:cNvSpPr/>
           <p:nvPr/>
         </p:nvSpPr>
@@ -7531,7 +7935,7 @@
       </p:sp>
       <p:sp>
         <p:nvSpPr>
-          <p:cNvPr id="23" name="TextBox 22"/>
+          <p:cNvPr id="24" name="TextBox 23"/>
           <p:cNvSpPr txBox="1"/>
           <p:nvPr/>
         </p:nvSpPr>
@@ -7553,7 +7957,7 @@
           <a:p>
             <a:pPr algn="l"/>
             <a:r>
-              <a:rPr sz="1600" b="1">
+              <a:rPr sz="1500" b="1">
                 <a:solidFill>
                   <a:srgbClr val="2DD4BF"/>
                 </a:solidFill>
@@ -7566,7 +7970,7 @@
       </p:sp>
       <p:sp>
         <p:nvSpPr>
-          <p:cNvPr id="24" name="TextBox 23"/>
+          <p:cNvPr id="25" name="TextBox 24"/>
           <p:cNvSpPr txBox="1"/>
           <p:nvPr/>
         </p:nvSpPr>
@@ -7588,7 +7992,7 @@
           <a:p>
             <a:pPr algn="l"/>
             <a:r>
-              <a:rPr sz="1200" b="0">
+              <a:rPr sz="1100" b="0">
                 <a:solidFill>
                   <a:srgbClr val="E5EDF7"/>
                 </a:solidFill>
@@ -7602,7 +8006,7 @@
       </p:sp>
       <p:sp>
         <p:nvSpPr>
-          <p:cNvPr id="25" name="TextBox 24"/>
+          <p:cNvPr id="26" name="TextBox 25"/>
           <p:cNvSpPr txBox="1"/>
           <p:nvPr/>
         </p:nvSpPr>
@@ -7637,7 +8041,7 @@
       </p:sp>
       <p:sp>
         <p:nvSpPr>
-          <p:cNvPr id="26" name="TextBox 25"/>
+          <p:cNvPr id="27" name="TextBox 26"/>
           <p:cNvSpPr txBox="1"/>
           <p:nvPr/>
         </p:nvSpPr>
@@ -7768,7 +8172,42 @@
       </p:sp>
       <p:sp>
         <p:nvSpPr>
-          <p:cNvPr id="4" name="Rounded Rectangle 3"/>
+          <p:cNvPr id="4" name="TextBox 3"/>
+          <p:cNvSpPr txBox="1"/>
+          <p:nvPr/>
+        </p:nvSpPr>
+        <p:spPr>
+          <a:xfrm>
+            <a:off x="621792" y="6547104"/>
+            <a:ext cx="10972800" cy="182880"/>
+          </a:xfrm>
+          <a:prstGeom prst="rect">
+            <a:avLst/>
+          </a:prstGeom>
+          <a:noFill/>
+        </p:spPr>
+        <p:txBody>
+          <a:bodyPr wrap="square">
+            <a:spAutoFit/>
+          </a:bodyPr>
+          <a:lstStyle/>
+          <a:p>
+            <a:pPr algn="l"/>
+            <a:r>
+              <a:rPr sz="800" b="0">
+                <a:solidFill>
+                  <a:srgbClr val="94A3B8"/>
+                </a:solidFill>
+                <a:latin typeface="Aptos"/>
+              </a:rPr>
+              <a:t>tenantAI  |  jury presentation  |  18</a:t>
+            </a:r>
+          </a:p>
+        </p:txBody>
+      </p:sp>
+      <p:sp>
+        <p:nvSpPr>
+          <p:cNvPr id="5" name="Rounded Rectangle 4"/>
           <p:cNvSpPr/>
           <p:nvPr/>
         </p:nvSpPr>
@@ -7813,7 +8252,7 @@
       </p:sp>
       <p:sp>
         <p:nvSpPr>
-          <p:cNvPr id="5" name="TextBox 4"/>
+          <p:cNvPr id="6" name="TextBox 5"/>
           <p:cNvSpPr txBox="1"/>
           <p:nvPr/>
         </p:nvSpPr>
@@ -7835,7 +8274,7 @@
           <a:p>
             <a:pPr algn="l"/>
             <a:r>
-              <a:rPr sz="1600" b="1">
+              <a:rPr sz="1500" b="1">
                 <a:solidFill>
                   <a:srgbClr val="2DD4BF"/>
                 </a:solidFill>
@@ -7848,7 +8287,7 @@
       </p:sp>
       <p:sp>
         <p:nvSpPr>
-          <p:cNvPr id="6" name="TextBox 5"/>
+          <p:cNvPr id="7" name="TextBox 6"/>
           <p:cNvSpPr txBox="1"/>
           <p:nvPr/>
         </p:nvSpPr>
@@ -7870,7 +8309,7 @@
           <a:p>
             <a:pPr algn="l"/>
             <a:r>
-              <a:rPr sz="1200" b="0">
+              <a:rPr sz="1100" b="0">
                 <a:solidFill>
                   <a:srgbClr val="E5EDF7"/>
                 </a:solidFill>
@@ -7879,14 +8318,15 @@
               <a:t>/start and login flow
 Tenant-aware Telegram session
 120-second sliding inactivity timeout
-Session state persisted in the database</a:t>
-            </a:r>
-          </a:p>
-        </p:txBody>
-      </p:sp>
-      <p:sp>
-        <p:nvSpPr>
-          <p:cNvPr id="7" name="Rounded Rectangle 6"/>
+Session state persisted in the database
+Behavior: activity refreshes the window; only inactivity expires it.</a:t>
+            </a:r>
+          </a:p>
+        </p:txBody>
+      </p:sp>
+      <p:sp>
+        <p:nvSpPr>
+          <p:cNvPr id="8" name="Rounded Rectangle 7"/>
           <p:cNvSpPr/>
           <p:nvPr/>
         </p:nvSpPr>
@@ -7931,7 +8371,7 @@
       </p:sp>
       <p:sp>
         <p:nvSpPr>
-          <p:cNvPr id="8" name="TextBox 7"/>
+          <p:cNvPr id="9" name="TextBox 8"/>
           <p:cNvSpPr txBox="1"/>
           <p:nvPr/>
         </p:nvSpPr>
@@ -7953,7 +8393,7 @@
           <a:p>
             <a:pPr algn="l"/>
             <a:r>
-              <a:rPr sz="1600" b="1">
+              <a:rPr sz="1500" b="1">
                 <a:solidFill>
                   <a:srgbClr val="2DD4BF"/>
                 </a:solidFill>
@@ -7966,7 +8406,7 @@
       </p:sp>
       <p:sp>
         <p:nvSpPr>
-          <p:cNvPr id="9" name="TextBox 8"/>
+          <p:cNvPr id="10" name="TextBox 9"/>
           <p:cNvSpPr txBox="1"/>
           <p:nvPr/>
         </p:nvSpPr>
@@ -7988,7 +8428,7 @@
           <a:p>
             <a:pPr algn="l"/>
             <a:r>
-              <a:rPr sz="1200" b="0">
+              <a:rPr sz="1100" b="0">
                 <a:solidFill>
                   <a:srgbClr val="E5EDF7"/>
                 </a:solidFill>
@@ -7999,14 +8439,15 @@
 /upload
 /conversations
 /audits
-/telemetry</a:t>
-            </a:r>
-          </a:p>
-        </p:txBody>
-      </p:sp>
-      <p:sp>
-        <p:nvSpPr>
-          <p:cNvPr id="10" name="Rounded Rectangle 9"/>
+/telemetry
+Result: the bot exposes the same knowledge workflow through chat.</a:t>
+            </a:r>
+          </a:p>
+        </p:txBody>
+      </p:sp>
+      <p:sp>
+        <p:nvSpPr>
+          <p:cNvPr id="11" name="Rounded Rectangle 10"/>
           <p:cNvSpPr/>
           <p:nvPr/>
         </p:nvSpPr>
@@ -8051,7 +8492,7 @@
       </p:sp>
       <p:sp>
         <p:nvSpPr>
-          <p:cNvPr id="11" name="TextBox 10"/>
+          <p:cNvPr id="12" name="TextBox 11"/>
           <p:cNvSpPr txBox="1"/>
           <p:nvPr/>
         </p:nvSpPr>
@@ -8073,7 +8514,7 @@
           <a:p>
             <a:pPr algn="l"/>
             <a:r>
-              <a:rPr sz="1600" b="1">
+              <a:rPr sz="1500" b="1">
                 <a:solidFill>
                   <a:srgbClr val="2DD4BF"/>
                 </a:solidFill>
@@ -8086,7 +8527,7 @@
       </p:sp>
       <p:sp>
         <p:nvSpPr>
-          <p:cNvPr id="12" name="TextBox 11"/>
+          <p:cNvPr id="13" name="TextBox 12"/>
           <p:cNvSpPr txBox="1"/>
           <p:nvPr/>
         </p:nvSpPr>
@@ -8108,7 +8549,7 @@
           <a:p>
             <a:pPr algn="l"/>
             <a:r>
-              <a:rPr sz="1200" b="0">
+              <a:rPr sz="1100" b="0">
                 <a:solidFill>
                   <a:srgbClr val="E5EDF7"/>
                 </a:solidFill>
@@ -8118,14 +8559,15 @@
 /setcompany
 /setdomain
 Admin-only settings changes
-Friendly upload success/failure responses</a:t>
-            </a:r>
-          </a:p>
-        </p:txBody>
-      </p:sp>
-      <p:sp>
-        <p:nvSpPr>
-          <p:cNvPr id="13" name="TextBox 12"/>
+Friendly upload success/failure responses
+Safety: failed processing does not expose internal exception details.</a:t>
+            </a:r>
+          </a:p>
+        </p:txBody>
+      </p:sp>
+      <p:sp>
+        <p:nvSpPr>
+          <p:cNvPr id="14" name="TextBox 13"/>
           <p:cNvSpPr txBox="1"/>
           <p:nvPr/>
         </p:nvSpPr>
@@ -8256,7 +8698,42 @@
       </p:sp>
       <p:sp>
         <p:nvSpPr>
-          <p:cNvPr id="4" name="Rounded Rectangle 3"/>
+          <p:cNvPr id="4" name="TextBox 3"/>
+          <p:cNvSpPr txBox="1"/>
+          <p:nvPr/>
+        </p:nvSpPr>
+        <p:spPr>
+          <a:xfrm>
+            <a:off x="621792" y="6547104"/>
+            <a:ext cx="10972800" cy="182880"/>
+          </a:xfrm>
+          <a:prstGeom prst="rect">
+            <a:avLst/>
+          </a:prstGeom>
+          <a:noFill/>
+        </p:spPr>
+        <p:txBody>
+          <a:bodyPr wrap="square">
+            <a:spAutoFit/>
+          </a:bodyPr>
+          <a:lstStyle/>
+          <a:p>
+            <a:pPr algn="l"/>
+            <a:r>
+              <a:rPr sz="800" b="0">
+                <a:solidFill>
+                  <a:srgbClr val="94A3B8"/>
+                </a:solidFill>
+                <a:latin typeface="Aptos"/>
+              </a:rPr>
+              <a:t>tenantAI  |  jury presentation  |  19</a:t>
+            </a:r>
+          </a:p>
+        </p:txBody>
+      </p:sp>
+      <p:sp>
+        <p:nvSpPr>
+          <p:cNvPr id="5" name="Rounded Rectangle 4"/>
           <p:cNvSpPr/>
           <p:nvPr/>
         </p:nvSpPr>
@@ -8301,7 +8778,7 @@
       </p:sp>
       <p:sp>
         <p:nvSpPr>
-          <p:cNvPr id="5" name="TextBox 4"/>
+          <p:cNvPr id="6" name="TextBox 5"/>
           <p:cNvSpPr txBox="1"/>
           <p:nvPr/>
         </p:nvSpPr>
@@ -8323,7 +8800,7 @@
           <a:p>
             <a:pPr algn="l"/>
             <a:r>
-              <a:rPr sz="1600" b="1">
+              <a:rPr sz="1500" b="1">
                 <a:solidFill>
                   <a:srgbClr val="2DD4BF"/>
                 </a:solidFill>
@@ -8336,7 +8813,7 @@
       </p:sp>
       <p:sp>
         <p:nvSpPr>
-          <p:cNvPr id="6" name="TextBox 5"/>
+          <p:cNvPr id="7" name="TextBox 6"/>
           <p:cNvSpPr txBox="1"/>
           <p:nvPr/>
         </p:nvSpPr>
@@ -8358,7 +8835,7 @@
           <a:p>
             <a:pPr algn="l"/>
             <a:r>
-              <a:rPr sz="1200" b="0">
+              <a:rPr sz="1100" b="0">
                 <a:solidFill>
                   <a:srgbClr val="E5EDF7"/>
                 </a:solidFill>
@@ -8369,14 +8846,15 @@
 Admin access
 Document lifecycle
 RAG citations
-Telegram session expiry</a:t>
-            </a:r>
-          </a:p>
-        </p:txBody>
-      </p:sp>
-      <p:sp>
-        <p:nvSpPr>
-          <p:cNvPr id="7" name="Rounded Rectangle 6"/>
+Telegram session expiry
+Purpose: protect security and behavior regressions.</a:t>
+            </a:r>
+          </a:p>
+        </p:txBody>
+      </p:sp>
+      <p:sp>
+        <p:nvSpPr>
+          <p:cNvPr id="8" name="Rounded Rectangle 7"/>
           <p:cNvSpPr/>
           <p:nvPr/>
         </p:nvSpPr>
@@ -8421,7 +8899,7 @@
       </p:sp>
       <p:sp>
         <p:nvSpPr>
-          <p:cNvPr id="8" name="TextBox 7"/>
+          <p:cNvPr id="9" name="TextBox 8"/>
           <p:cNvSpPr txBox="1"/>
           <p:nvPr/>
         </p:nvSpPr>
@@ -8443,7 +8921,7 @@
           <a:p>
             <a:pPr algn="l"/>
             <a:r>
-              <a:rPr sz="1600" b="1">
+              <a:rPr sz="1500" b="1">
                 <a:solidFill>
                   <a:srgbClr val="2DD4BF"/>
                 </a:solidFill>
@@ -8456,7 +8934,7 @@
       </p:sp>
       <p:sp>
         <p:nvSpPr>
-          <p:cNvPr id="9" name="TextBox 8"/>
+          <p:cNvPr id="10" name="TextBox 9"/>
           <p:cNvSpPr txBox="1"/>
           <p:nvPr/>
         </p:nvSpPr>
@@ -8478,7 +8956,7 @@
           <a:p>
             <a:pPr algn="l"/>
             <a:r>
-              <a:rPr sz="1200" b="0">
+              <a:rPr sz="1100" b="0">
                 <a:solidFill>
                   <a:srgbClr val="E5EDF7"/>
                 </a:solidFill>
@@ -8488,14 +8966,15 @@
 16 generated routes
 Accessible labels and focus states
 Responsive landing/auth flows
-Reduced-motion support</a:t>
-            </a:r>
-          </a:p>
-        </p:txBody>
-      </p:sp>
-      <p:sp>
-        <p:nvSpPr>
-          <p:cNvPr id="10" name="Rounded Rectangle 9"/>
+Reduced-motion support
+Purpose: verify the jury-facing path builds cleanly.</a:t>
+            </a:r>
+          </a:p>
+        </p:txBody>
+      </p:sp>
+      <p:sp>
+        <p:nvSpPr>
+          <p:cNvPr id="11" name="Rounded Rectangle 10"/>
           <p:cNvSpPr/>
           <p:nvPr/>
         </p:nvSpPr>
@@ -8540,7 +9019,7 @@
       </p:sp>
       <p:sp>
         <p:nvSpPr>
-          <p:cNvPr id="11" name="TextBox 10"/>
+          <p:cNvPr id="12" name="TextBox 11"/>
           <p:cNvSpPr txBox="1"/>
           <p:nvPr/>
         </p:nvSpPr>
@@ -8562,7 +9041,7 @@
           <a:p>
             <a:pPr algn="l"/>
             <a:r>
-              <a:rPr sz="1600" b="1">
+              <a:rPr sz="1500" b="1">
                 <a:solidFill>
                   <a:srgbClr val="2DD4BF"/>
                 </a:solidFill>
@@ -8575,7 +9054,7 @@
       </p:sp>
       <p:sp>
         <p:nvSpPr>
-          <p:cNvPr id="12" name="TextBox 11"/>
+          <p:cNvPr id="13" name="TextBox 12"/>
           <p:cNvSpPr txBox="1"/>
           <p:nvPr/>
         </p:nvSpPr>
@@ -8597,7 +9076,7 @@
           <a:p>
             <a:pPr algn="l"/>
             <a:r>
-              <a:rPr sz="1200" b="0">
+              <a:rPr sz="1100" b="0">
                 <a:solidFill>
                   <a:srgbClr val="E5EDF7"/>
                 </a:solidFill>
@@ -8607,14 +9086,15 @@
 Strict CORS defaults
 Production reload disabled
 Generic user-facing failures
-Diff and presentation validation</a:t>
-            </a:r>
-          </a:p>
-        </p:txBody>
-      </p:sp>
-      <p:sp>
-        <p:nvSpPr>
-          <p:cNvPr id="13" name="TextBox 12"/>
+Diff and presentation validation
+Purpose: avoid demo-only configuration surprises.</a:t>
+            </a:r>
+          </a:p>
+        </p:txBody>
+      </p:sp>
+      <p:sp>
+        <p:nvSpPr>
+          <p:cNvPr id="14" name="TextBox 13"/>
           <p:cNvSpPr txBox="1"/>
           <p:nvPr/>
         </p:nvSpPr>
@@ -8745,7 +9225,42 @@
       </p:sp>
       <p:sp>
         <p:nvSpPr>
-          <p:cNvPr id="4" name="Rounded Rectangle 3"/>
+          <p:cNvPr id="4" name="TextBox 3"/>
+          <p:cNvSpPr txBox="1"/>
+          <p:nvPr/>
+        </p:nvSpPr>
+        <p:spPr>
+          <a:xfrm>
+            <a:off x="621792" y="6547104"/>
+            <a:ext cx="10972800" cy="182880"/>
+          </a:xfrm>
+          <a:prstGeom prst="rect">
+            <a:avLst/>
+          </a:prstGeom>
+          <a:noFill/>
+        </p:spPr>
+        <p:txBody>
+          <a:bodyPr wrap="square">
+            <a:spAutoFit/>
+          </a:bodyPr>
+          <a:lstStyle/>
+          <a:p>
+            <a:pPr algn="l"/>
+            <a:r>
+              <a:rPr sz="800" b="0">
+                <a:solidFill>
+                  <a:srgbClr val="94A3B8"/>
+                </a:solidFill>
+                <a:latin typeface="Aptos"/>
+              </a:rPr>
+              <a:t>tenantAI  |  jury presentation  |  02</a:t>
+            </a:r>
+          </a:p>
+        </p:txBody>
+      </p:sp>
+      <p:sp>
+        <p:nvSpPr>
+          <p:cNvPr id="5" name="Rounded Rectangle 4"/>
           <p:cNvSpPr/>
           <p:nvPr/>
         </p:nvSpPr>
@@ -8790,7 +9305,7 @@
       </p:sp>
       <p:sp>
         <p:nvSpPr>
-          <p:cNvPr id="5" name="TextBox 4"/>
+          <p:cNvPr id="6" name="TextBox 5"/>
           <p:cNvSpPr txBox="1"/>
           <p:nvPr/>
         </p:nvSpPr>
@@ -8812,7 +9327,7 @@
           <a:p>
             <a:pPr algn="l"/>
             <a:r>
-              <a:rPr sz="1600" b="1">
+              <a:rPr sz="1500" b="1">
                 <a:solidFill>
                   <a:srgbClr val="2DD4BF"/>
                 </a:solidFill>
@@ -8825,7 +9340,7 @@
       </p:sp>
       <p:sp>
         <p:nvSpPr>
-          <p:cNvPr id="6" name="TextBox 5"/>
+          <p:cNvPr id="7" name="TextBox 6"/>
           <p:cNvSpPr txBox="1"/>
           <p:nvPr/>
         </p:nvSpPr>
@@ -8847,20 +9362,21 @@
           <a:p>
             <a:pPr algn="l"/>
             <a:r>
-              <a:rPr sz="1200" b="0">
+              <a:rPr sz="1100" b="0">
                 <a:solidFill>
                   <a:srgbClr val="E5EDF7"/>
                 </a:solidFill>
                 <a:latin typeface="Aptos"/>
               </a:rPr>
-              <a:t>Teams search across PDFs, manuals, and policies with no consistent answer path.</a:t>
-            </a:r>
-          </a:p>
-        </p:txBody>
-      </p:sp>
-      <p:sp>
-        <p:nvSpPr>
-          <p:cNvPr id="7" name="Rounded Rectangle 6"/>
+              <a:t>Teams search across PDFs, manuals, and policies with no consistent answer path.
+Impact: duplicated effort, inconsistent guidance, and slow onboarding.</a:t>
+            </a:r>
+          </a:p>
+        </p:txBody>
+      </p:sp>
+      <p:sp>
+        <p:nvSpPr>
+          <p:cNvPr id="8" name="Rounded Rectangle 7"/>
           <p:cNvSpPr/>
           <p:nvPr/>
         </p:nvSpPr>
@@ -8905,7 +9421,7 @@
       </p:sp>
       <p:sp>
         <p:nvSpPr>
-          <p:cNvPr id="8" name="TextBox 7"/>
+          <p:cNvPr id="9" name="TextBox 8"/>
           <p:cNvSpPr txBox="1"/>
           <p:nvPr/>
         </p:nvSpPr>
@@ -8927,7 +9443,7 @@
           <a:p>
             <a:pPr algn="l"/>
             <a:r>
-              <a:rPr sz="1600" b="1">
+              <a:rPr sz="1500" b="1">
                 <a:solidFill>
                   <a:srgbClr val="2DD4BF"/>
                 </a:solidFill>
@@ -8940,7 +9456,7 @@
       </p:sp>
       <p:sp>
         <p:nvSpPr>
-          <p:cNvPr id="9" name="TextBox 8"/>
+          <p:cNvPr id="10" name="TextBox 9"/>
           <p:cNvSpPr txBox="1"/>
           <p:nvPr/>
         </p:nvSpPr>
@@ -8962,20 +9478,21 @@
           <a:p>
             <a:pPr algn="l"/>
             <a:r>
-              <a:rPr sz="1200" b="0">
+              <a:rPr sz="1100" b="0">
                 <a:solidFill>
                   <a:srgbClr val="E5EDF7"/>
                 </a:solidFill>
                 <a:latin typeface="Aptos"/>
               </a:rPr>
-              <a:t>Manual document review consumes time and makes answers difficult to audit.</a:t>
-            </a:r>
-          </a:p>
-        </p:txBody>
-      </p:sp>
-      <p:sp>
-        <p:nvSpPr>
-          <p:cNvPr id="10" name="Rounded Rectangle 9"/>
+              <a:t>Manual document review consumes time and makes answers difficult to audit.
+Impact: support teams spend time finding facts instead of acting on them.</a:t>
+            </a:r>
+          </a:p>
+        </p:txBody>
+      </p:sp>
+      <p:sp>
+        <p:nvSpPr>
+          <p:cNvPr id="11" name="Rounded Rectangle 10"/>
           <p:cNvSpPr/>
           <p:nvPr/>
         </p:nvSpPr>
@@ -9020,7 +9537,7 @@
       </p:sp>
       <p:sp>
         <p:nvSpPr>
-          <p:cNvPr id="11" name="TextBox 10"/>
+          <p:cNvPr id="12" name="TextBox 11"/>
           <p:cNvSpPr txBox="1"/>
           <p:nvPr/>
         </p:nvSpPr>
@@ -9042,7 +9559,7 @@
           <a:p>
             <a:pPr algn="l"/>
             <a:r>
-              <a:rPr sz="1600" b="1">
+              <a:rPr sz="1500" b="1">
                 <a:solidFill>
                   <a:srgbClr val="2DD4BF"/>
                 </a:solidFill>
@@ -9055,7 +9572,7 @@
       </p:sp>
       <p:sp>
         <p:nvSpPr>
-          <p:cNvPr id="12" name="TextBox 11"/>
+          <p:cNvPr id="13" name="TextBox 12"/>
           <p:cNvSpPr txBox="1"/>
           <p:nvPr/>
         </p:nvSpPr>
@@ -9077,13 +9594,14 @@
           <a:p>
             <a:pPr algn="l"/>
             <a:r>
-              <a:rPr sz="1200" b="0">
+              <a:rPr sz="1100" b="0">
                 <a:solidFill>
                   <a:srgbClr val="E5EDF7"/>
                 </a:solidFill>
                 <a:latin typeface="Aptos"/>
               </a:rPr>
-              <a:t>A shared retrieval layer can expose another company's private information.</a:t>
+              <a:t>A shared retrieval layer can expose another company's private information.
+Impact: one IDOR or missing filter can become a multi-tenant breach.</a:t>
             </a:r>
           </a:p>
         </p:txBody>
@@ -9192,6 +9710,41 @@
         </p:nvSpPr>
         <p:spPr>
           <a:xfrm>
+            <a:off x="621792" y="6547104"/>
+            <a:ext cx="10972800" cy="182880"/>
+          </a:xfrm>
+          <a:prstGeom prst="rect">
+            <a:avLst/>
+          </a:prstGeom>
+          <a:noFill/>
+        </p:spPr>
+        <p:txBody>
+          <a:bodyPr wrap="square">
+            <a:spAutoFit/>
+          </a:bodyPr>
+          <a:lstStyle/>
+          <a:p>
+            <a:pPr algn="l"/>
+            <a:r>
+              <a:rPr sz="800" b="0">
+                <a:solidFill>
+                  <a:srgbClr val="94A3B8"/>
+                </a:solidFill>
+                <a:latin typeface="Aptos"/>
+              </a:rPr>
+              <a:t>tenantAI  |  jury presentation  |  20</a:t>
+            </a:r>
+          </a:p>
+        </p:txBody>
+      </p:sp>
+      <p:sp>
+        <p:nvSpPr>
+          <p:cNvPr id="5" name="TextBox 4"/>
+          <p:cNvSpPr txBox="1"/>
+          <p:nvPr/>
+        </p:nvSpPr>
+        <p:spPr>
+          <a:xfrm>
             <a:off x="822960" y="1554480"/>
             <a:ext cx="4846320" cy="411480"/>
           </a:xfrm>
@@ -9221,7 +9774,7 @@
       </p:sp>
       <p:sp>
         <p:nvSpPr>
-          <p:cNvPr id="5" name="TextBox 4"/>
+          <p:cNvPr id="6" name="TextBox 5"/>
           <p:cNvSpPr txBox="1"/>
           <p:nvPr/>
         </p:nvSpPr>
@@ -9256,7 +9809,7 @@
       </p:sp>
       <p:sp>
         <p:nvSpPr>
-          <p:cNvPr id="6" name="TextBox 5"/>
+          <p:cNvPr id="7" name="TextBox 6"/>
           <p:cNvSpPr txBox="1"/>
           <p:nvPr/>
         </p:nvSpPr>
@@ -9291,7 +9844,7 @@
       </p:sp>
       <p:sp>
         <p:nvSpPr>
-          <p:cNvPr id="7" name="TextBox 6"/>
+          <p:cNvPr id="8" name="TextBox 7"/>
           <p:cNvSpPr txBox="1"/>
           <p:nvPr/>
         </p:nvSpPr>
@@ -9326,7 +9879,7 @@
       </p:sp>
       <p:sp>
         <p:nvSpPr>
-          <p:cNvPr id="8" name="TextBox 7"/>
+          <p:cNvPr id="9" name="TextBox 8"/>
           <p:cNvSpPr txBox="1"/>
           <p:nvPr/>
         </p:nvSpPr>
@@ -9361,7 +9914,7 @@
       </p:sp>
       <p:sp>
         <p:nvSpPr>
-          <p:cNvPr id="9" name="TextBox 8"/>
+          <p:cNvPr id="10" name="TextBox 9"/>
           <p:cNvSpPr txBox="1"/>
           <p:nvPr/>
         </p:nvSpPr>
@@ -9396,7 +9949,7 @@
       </p:sp>
       <p:sp>
         <p:nvSpPr>
-          <p:cNvPr id="10" name="Rounded Rectangle 9"/>
+          <p:cNvPr id="11" name="Rounded Rectangle 10"/>
           <p:cNvSpPr/>
           <p:nvPr/>
         </p:nvSpPr>
@@ -9441,7 +9994,7 @@
       </p:sp>
       <p:sp>
         <p:nvSpPr>
-          <p:cNvPr id="11" name="TextBox 10"/>
+          <p:cNvPr id="12" name="TextBox 11"/>
           <p:cNvSpPr txBox="1"/>
           <p:nvPr/>
         </p:nvSpPr>
@@ -9463,7 +10016,7 @@
           <a:p>
             <a:pPr algn="l"/>
             <a:r>
-              <a:rPr sz="1600" b="1">
+              <a:rPr sz="1500" b="1">
                 <a:solidFill>
                   <a:srgbClr val="2DD4BF"/>
                 </a:solidFill>
@@ -9476,7 +10029,7 @@
       </p:sp>
       <p:sp>
         <p:nvSpPr>
-          <p:cNvPr id="12" name="TextBox 11"/>
+          <p:cNvPr id="13" name="TextBox 12"/>
           <p:cNvSpPr txBox="1"/>
           <p:nvPr/>
         </p:nvSpPr>
@@ -9498,7 +10051,7 @@
           <a:p>
             <a:pPr algn="l"/>
             <a:r>
-              <a:rPr sz="1200" b="0">
+              <a:rPr sz="1100" b="0">
                 <a:solidFill>
                   <a:srgbClr val="E5EDF7"/>
                 </a:solidFill>
@@ -9509,14 +10062,15 @@
 Persistent file storage selected
 SMTP delivery verified
 Secrets stored in Render, not Git
-Worker health and logs monitored</a:t>
-            </a:r>
-          </a:p>
-        </p:txBody>
-      </p:sp>
-      <p:sp>
-        <p:nvSpPr>
-          <p:cNvPr id="13" name="TextBox 12"/>
+Worker health and logs monitored
+Smoke test: health → register → verify → login → upload → chat → logs.</a:t>
+            </a:r>
+          </a:p>
+        </p:txBody>
+      </p:sp>
+      <p:sp>
+        <p:nvSpPr>
+          <p:cNvPr id="14" name="TextBox 13"/>
           <p:cNvSpPr txBox="1"/>
           <p:nvPr/>
         </p:nvSpPr>
@@ -9647,7 +10201,42 @@
       </p:sp>
       <p:sp>
         <p:nvSpPr>
-          <p:cNvPr id="4" name="Rounded Rectangle 3"/>
+          <p:cNvPr id="4" name="TextBox 3"/>
+          <p:cNvSpPr txBox="1"/>
+          <p:nvPr/>
+        </p:nvSpPr>
+        <p:spPr>
+          <a:xfrm>
+            <a:off x="621792" y="6547104"/>
+            <a:ext cx="10972800" cy="182880"/>
+          </a:xfrm>
+          <a:prstGeom prst="rect">
+            <a:avLst/>
+          </a:prstGeom>
+          <a:noFill/>
+        </p:spPr>
+        <p:txBody>
+          <a:bodyPr wrap="square">
+            <a:spAutoFit/>
+          </a:bodyPr>
+          <a:lstStyle/>
+          <a:p>
+            <a:pPr algn="l"/>
+            <a:r>
+              <a:rPr sz="800" b="0">
+                <a:solidFill>
+                  <a:srgbClr val="94A3B8"/>
+                </a:solidFill>
+                <a:latin typeface="Aptos"/>
+              </a:rPr>
+              <a:t>tenantAI  |  jury presentation  |  21</a:t>
+            </a:r>
+          </a:p>
+        </p:txBody>
+      </p:sp>
+      <p:sp>
+        <p:nvSpPr>
+          <p:cNvPr id="5" name="Rounded Rectangle 4"/>
           <p:cNvSpPr/>
           <p:nvPr/>
         </p:nvSpPr>
@@ -9692,7 +10281,7 @@
       </p:sp>
       <p:sp>
         <p:nvSpPr>
-          <p:cNvPr id="5" name="TextBox 4"/>
+          <p:cNvPr id="6" name="TextBox 5"/>
           <p:cNvSpPr txBox="1"/>
           <p:nvPr/>
         </p:nvSpPr>
@@ -9714,7 +10303,7 @@
           <a:p>
             <a:pPr algn="l"/>
             <a:r>
-              <a:rPr sz="1600" b="1">
+              <a:rPr sz="1500" b="1">
                 <a:solidFill>
                   <a:srgbClr val="2DD4BF"/>
                 </a:solidFill>
@@ -9727,7 +10316,7 @@
       </p:sp>
       <p:sp>
         <p:nvSpPr>
-          <p:cNvPr id="6" name="TextBox 5"/>
+          <p:cNvPr id="7" name="TextBox 6"/>
           <p:cNvSpPr txBox="1"/>
           <p:nvPr/>
         </p:nvSpPr>
@@ -9749,7 +10338,7 @@
           <a:p>
             <a:pPr algn="l"/>
             <a:r>
-              <a:rPr sz="1200" b="0">
+              <a:rPr sz="1100" b="0">
                 <a:solidFill>
                   <a:srgbClr val="E5EDF7"/>
                 </a:solidFill>
@@ -9762,7 +10351,7 @@
       </p:sp>
       <p:sp>
         <p:nvSpPr>
-          <p:cNvPr id="7" name="Rounded Rectangle 6"/>
+          <p:cNvPr id="8" name="Rounded Rectangle 7"/>
           <p:cNvSpPr/>
           <p:nvPr/>
         </p:nvSpPr>
@@ -9807,7 +10396,7 @@
       </p:sp>
       <p:sp>
         <p:nvSpPr>
-          <p:cNvPr id="8" name="TextBox 7"/>
+          <p:cNvPr id="9" name="TextBox 8"/>
           <p:cNvSpPr txBox="1"/>
           <p:nvPr/>
         </p:nvSpPr>
@@ -9829,7 +10418,7 @@
           <a:p>
             <a:pPr algn="l"/>
             <a:r>
-              <a:rPr sz="1600" b="1">
+              <a:rPr sz="1500" b="1">
                 <a:solidFill>
                   <a:srgbClr val="2DD4BF"/>
                 </a:solidFill>
@@ -9842,7 +10431,7 @@
       </p:sp>
       <p:sp>
         <p:nvSpPr>
-          <p:cNvPr id="9" name="TextBox 8"/>
+          <p:cNvPr id="10" name="TextBox 9"/>
           <p:cNvSpPr txBox="1"/>
           <p:nvPr/>
         </p:nvSpPr>
@@ -9864,7 +10453,7 @@
           <a:p>
             <a:pPr algn="l"/>
             <a:r>
-              <a:rPr sz="1200" b="0">
+              <a:rPr sz="1100" b="0">
                 <a:solidFill>
                   <a:srgbClr val="E5EDF7"/>
                 </a:solidFill>
@@ -9877,7 +10466,7 @@
       </p:sp>
       <p:sp>
         <p:nvSpPr>
-          <p:cNvPr id="10" name="Rounded Rectangle 9"/>
+          <p:cNvPr id="11" name="Rounded Rectangle 10"/>
           <p:cNvSpPr/>
           <p:nvPr/>
         </p:nvSpPr>
@@ -9922,7 +10511,7 @@
       </p:sp>
       <p:sp>
         <p:nvSpPr>
-          <p:cNvPr id="11" name="TextBox 10"/>
+          <p:cNvPr id="12" name="TextBox 11"/>
           <p:cNvSpPr txBox="1"/>
           <p:nvPr/>
         </p:nvSpPr>
@@ -9944,7 +10533,7 @@
           <a:p>
             <a:pPr algn="l"/>
             <a:r>
-              <a:rPr sz="1600" b="1">
+              <a:rPr sz="1500" b="1">
                 <a:solidFill>
                   <a:srgbClr val="2DD4BF"/>
                 </a:solidFill>
@@ -9957,7 +10546,7 @@
       </p:sp>
       <p:sp>
         <p:nvSpPr>
-          <p:cNvPr id="12" name="TextBox 11"/>
+          <p:cNvPr id="13" name="TextBox 12"/>
           <p:cNvSpPr txBox="1"/>
           <p:nvPr/>
         </p:nvSpPr>
@@ -9979,7 +10568,7 @@
           <a:p>
             <a:pPr algn="l"/>
             <a:r>
-              <a:rPr sz="1200" b="0">
+              <a:rPr sz="1100" b="0">
                 <a:solidFill>
                   <a:srgbClr val="E5EDF7"/>
                 </a:solidFill>
@@ -9992,7 +10581,7 @@
       </p:sp>
       <p:sp>
         <p:nvSpPr>
-          <p:cNvPr id="13" name="TextBox 12"/>
+          <p:cNvPr id="14" name="TextBox 13"/>
           <p:cNvSpPr txBox="1"/>
           <p:nvPr/>
         </p:nvSpPr>
@@ -10123,7 +10712,42 @@
       </p:sp>
       <p:sp>
         <p:nvSpPr>
-          <p:cNvPr id="4" name="Rounded Rectangle 3"/>
+          <p:cNvPr id="4" name="TextBox 3"/>
+          <p:cNvSpPr txBox="1"/>
+          <p:nvPr/>
+        </p:nvSpPr>
+        <p:spPr>
+          <a:xfrm>
+            <a:off x="621792" y="6547104"/>
+            <a:ext cx="10972800" cy="182880"/>
+          </a:xfrm>
+          <a:prstGeom prst="rect">
+            <a:avLst/>
+          </a:prstGeom>
+          <a:noFill/>
+        </p:spPr>
+        <p:txBody>
+          <a:bodyPr wrap="square">
+            <a:spAutoFit/>
+          </a:bodyPr>
+          <a:lstStyle/>
+          <a:p>
+            <a:pPr algn="l"/>
+            <a:r>
+              <a:rPr sz="800" b="0">
+                <a:solidFill>
+                  <a:srgbClr val="94A3B8"/>
+                </a:solidFill>
+                <a:latin typeface="Aptos"/>
+              </a:rPr>
+              <a:t>tenantAI  |  jury presentation  |  22</a:t>
+            </a:r>
+          </a:p>
+        </p:txBody>
+      </p:sp>
+      <p:sp>
+        <p:nvSpPr>
+          <p:cNvPr id="5" name="Rounded Rectangle 4"/>
           <p:cNvSpPr/>
           <p:nvPr/>
         </p:nvSpPr>
@@ -10168,7 +10792,7 @@
       </p:sp>
       <p:sp>
         <p:nvSpPr>
-          <p:cNvPr id="5" name="TextBox 4"/>
+          <p:cNvPr id="6" name="TextBox 5"/>
           <p:cNvSpPr txBox="1"/>
           <p:nvPr/>
         </p:nvSpPr>
@@ -10190,7 +10814,7 @@
           <a:p>
             <a:pPr algn="l"/>
             <a:r>
-              <a:rPr sz="1600" b="1">
+              <a:rPr sz="1500" b="1">
                 <a:solidFill>
                   <a:srgbClr val="2DD4BF"/>
                 </a:solidFill>
@@ -10203,7 +10827,7 @@
       </p:sp>
       <p:sp>
         <p:nvSpPr>
-          <p:cNvPr id="6" name="TextBox 5"/>
+          <p:cNvPr id="7" name="TextBox 6"/>
           <p:cNvSpPr txBox="1"/>
           <p:nvPr/>
         </p:nvSpPr>
@@ -10225,7 +10849,7 @@
           <a:p>
             <a:pPr algn="l"/>
             <a:r>
-              <a:rPr sz="1200" b="0">
+              <a:rPr sz="1100" b="0">
                 <a:solidFill>
                   <a:srgbClr val="E5EDF7"/>
                 </a:solidFill>
@@ -10238,7 +10862,7 @@
       </p:sp>
       <p:sp>
         <p:nvSpPr>
-          <p:cNvPr id="7" name="Rounded Rectangle 6"/>
+          <p:cNvPr id="8" name="Rounded Rectangle 7"/>
           <p:cNvSpPr/>
           <p:nvPr/>
         </p:nvSpPr>
@@ -10283,7 +10907,7 @@
       </p:sp>
       <p:sp>
         <p:nvSpPr>
-          <p:cNvPr id="8" name="TextBox 7"/>
+          <p:cNvPr id="9" name="TextBox 8"/>
           <p:cNvSpPr txBox="1"/>
           <p:nvPr/>
         </p:nvSpPr>
@@ -10305,7 +10929,7 @@
           <a:p>
             <a:pPr algn="l"/>
             <a:r>
-              <a:rPr sz="1600" b="1">
+              <a:rPr sz="1500" b="1">
                 <a:solidFill>
                   <a:srgbClr val="2DD4BF"/>
                 </a:solidFill>
@@ -10318,7 +10942,7 @@
       </p:sp>
       <p:sp>
         <p:nvSpPr>
-          <p:cNvPr id="9" name="TextBox 8"/>
+          <p:cNvPr id="10" name="TextBox 9"/>
           <p:cNvSpPr txBox="1"/>
           <p:nvPr/>
         </p:nvSpPr>
@@ -10340,7 +10964,7 @@
           <a:p>
             <a:pPr algn="l"/>
             <a:r>
-              <a:rPr sz="1200" b="0">
+              <a:rPr sz="1100" b="0">
                 <a:solidFill>
                   <a:srgbClr val="E5EDF7"/>
                 </a:solidFill>
@@ -10353,7 +10977,7 @@
       </p:sp>
       <p:sp>
         <p:nvSpPr>
-          <p:cNvPr id="10" name="Rounded Rectangle 9"/>
+          <p:cNvPr id="11" name="Rounded Rectangle 10"/>
           <p:cNvSpPr/>
           <p:nvPr/>
         </p:nvSpPr>
@@ -10398,7 +11022,7 @@
       </p:sp>
       <p:sp>
         <p:nvSpPr>
-          <p:cNvPr id="11" name="TextBox 10"/>
+          <p:cNvPr id="12" name="TextBox 11"/>
           <p:cNvSpPr txBox="1"/>
           <p:nvPr/>
         </p:nvSpPr>
@@ -10420,7 +11044,7 @@
           <a:p>
             <a:pPr algn="l"/>
             <a:r>
-              <a:rPr sz="1600" b="1">
+              <a:rPr sz="1500" b="1">
                 <a:solidFill>
                   <a:srgbClr val="2DD4BF"/>
                 </a:solidFill>
@@ -10433,7 +11057,7 @@
       </p:sp>
       <p:sp>
         <p:nvSpPr>
-          <p:cNvPr id="12" name="TextBox 11"/>
+          <p:cNvPr id="13" name="TextBox 12"/>
           <p:cNvSpPr txBox="1"/>
           <p:nvPr/>
         </p:nvSpPr>
@@ -10455,7 +11079,7 @@
           <a:p>
             <a:pPr algn="l"/>
             <a:r>
-              <a:rPr sz="1200" b="0">
+              <a:rPr sz="1100" b="0">
                 <a:solidFill>
                   <a:srgbClr val="E5EDF7"/>
                 </a:solidFill>
@@ -10468,7 +11092,7 @@
       </p:sp>
       <p:sp>
         <p:nvSpPr>
-          <p:cNvPr id="13" name="Rounded Rectangle 12"/>
+          <p:cNvPr id="14" name="Rounded Rectangle 13"/>
           <p:cNvSpPr/>
           <p:nvPr/>
         </p:nvSpPr>
@@ -10513,7 +11137,7 @@
       </p:sp>
       <p:sp>
         <p:nvSpPr>
-          <p:cNvPr id="14" name="TextBox 13"/>
+          <p:cNvPr id="15" name="TextBox 14"/>
           <p:cNvSpPr txBox="1"/>
           <p:nvPr/>
         </p:nvSpPr>
@@ -10535,7 +11159,7 @@
           <a:p>
             <a:pPr algn="l"/>
             <a:r>
-              <a:rPr sz="1600" b="1">
+              <a:rPr sz="1500" b="1">
                 <a:solidFill>
                   <a:srgbClr val="2DD4BF"/>
                 </a:solidFill>
@@ -10548,7 +11172,7 @@
       </p:sp>
       <p:sp>
         <p:nvSpPr>
-          <p:cNvPr id="15" name="TextBox 14"/>
+          <p:cNvPr id="16" name="TextBox 15"/>
           <p:cNvSpPr txBox="1"/>
           <p:nvPr/>
         </p:nvSpPr>
@@ -10570,7 +11194,7 @@
           <a:p>
             <a:pPr algn="l"/>
             <a:r>
-              <a:rPr sz="1200" b="0">
+              <a:rPr sz="1100" b="0">
                 <a:solidFill>
                   <a:srgbClr val="E5EDF7"/>
                 </a:solidFill>
@@ -10679,7 +11303,42 @@
       </p:sp>
       <p:sp>
         <p:nvSpPr>
-          <p:cNvPr id="4" name="Rounded Rectangle 3"/>
+          <p:cNvPr id="4" name="TextBox 3"/>
+          <p:cNvSpPr txBox="1"/>
+          <p:nvPr/>
+        </p:nvSpPr>
+        <p:spPr>
+          <a:xfrm>
+            <a:off x="621792" y="6547104"/>
+            <a:ext cx="10972800" cy="182880"/>
+          </a:xfrm>
+          <a:prstGeom prst="rect">
+            <a:avLst/>
+          </a:prstGeom>
+          <a:noFill/>
+        </p:spPr>
+        <p:txBody>
+          <a:bodyPr wrap="square">
+            <a:spAutoFit/>
+          </a:bodyPr>
+          <a:lstStyle/>
+          <a:p>
+            <a:pPr algn="l"/>
+            <a:r>
+              <a:rPr sz="800" b="0">
+                <a:solidFill>
+                  <a:srgbClr val="94A3B8"/>
+                </a:solidFill>
+                <a:latin typeface="Aptos"/>
+              </a:rPr>
+              <a:t>tenantAI  |  jury presentation  |  23</a:t>
+            </a:r>
+          </a:p>
+        </p:txBody>
+      </p:sp>
+      <p:sp>
+        <p:nvSpPr>
+          <p:cNvPr id="5" name="Rounded Rectangle 4"/>
           <p:cNvSpPr/>
           <p:nvPr/>
         </p:nvSpPr>
@@ -10724,7 +11383,7 @@
       </p:sp>
       <p:sp>
         <p:nvSpPr>
-          <p:cNvPr id="5" name="TextBox 4"/>
+          <p:cNvPr id="6" name="TextBox 5"/>
           <p:cNvSpPr txBox="1"/>
           <p:nvPr/>
         </p:nvSpPr>
@@ -10746,7 +11405,7 @@
           <a:p>
             <a:pPr algn="l"/>
             <a:r>
-              <a:rPr sz="1600" b="1">
+              <a:rPr sz="1500" b="1">
                 <a:solidFill>
                   <a:srgbClr val="2DD4BF"/>
                 </a:solidFill>
@@ -10759,7 +11418,7 @@
       </p:sp>
       <p:sp>
         <p:nvSpPr>
-          <p:cNvPr id="6" name="TextBox 5"/>
+          <p:cNvPr id="7" name="TextBox 6"/>
           <p:cNvSpPr txBox="1"/>
           <p:nvPr/>
         </p:nvSpPr>
@@ -10781,7 +11440,7 @@
           <a:p>
             <a:pPr algn="l"/>
             <a:r>
-              <a:rPr sz="1200" b="0">
+              <a:rPr sz="1100" b="0">
                 <a:solidFill>
                   <a:srgbClr val="E5EDF7"/>
                 </a:solidFill>
@@ -10794,7 +11453,7 @@
       </p:sp>
       <p:sp>
         <p:nvSpPr>
-          <p:cNvPr id="7" name="Rounded Rectangle 6"/>
+          <p:cNvPr id="8" name="Rounded Rectangle 7"/>
           <p:cNvSpPr/>
           <p:nvPr/>
         </p:nvSpPr>
@@ -10839,7 +11498,7 @@
       </p:sp>
       <p:sp>
         <p:nvSpPr>
-          <p:cNvPr id="8" name="TextBox 7"/>
+          <p:cNvPr id="9" name="TextBox 8"/>
           <p:cNvSpPr txBox="1"/>
           <p:nvPr/>
         </p:nvSpPr>
@@ -10861,7 +11520,7 @@
           <a:p>
             <a:pPr algn="l"/>
             <a:r>
-              <a:rPr sz="1600" b="1">
+              <a:rPr sz="1500" b="1">
                 <a:solidFill>
                   <a:srgbClr val="2DD4BF"/>
                 </a:solidFill>
@@ -10874,7 +11533,7 @@
       </p:sp>
       <p:sp>
         <p:nvSpPr>
-          <p:cNvPr id="9" name="TextBox 8"/>
+          <p:cNvPr id="10" name="TextBox 9"/>
           <p:cNvSpPr txBox="1"/>
           <p:nvPr/>
         </p:nvSpPr>
@@ -10896,7 +11555,7 @@
           <a:p>
             <a:pPr algn="l"/>
             <a:r>
-              <a:rPr sz="1200" b="0">
+              <a:rPr sz="1100" b="0">
                 <a:solidFill>
                   <a:srgbClr val="E5EDF7"/>
                 </a:solidFill>
@@ -10909,7 +11568,7 @@
       </p:sp>
       <p:sp>
         <p:nvSpPr>
-          <p:cNvPr id="10" name="Rounded Rectangle 9"/>
+          <p:cNvPr id="11" name="Rounded Rectangle 10"/>
           <p:cNvSpPr/>
           <p:nvPr/>
         </p:nvSpPr>
@@ -10954,7 +11613,7 @@
       </p:sp>
       <p:sp>
         <p:nvSpPr>
-          <p:cNvPr id="11" name="TextBox 10"/>
+          <p:cNvPr id="12" name="TextBox 11"/>
           <p:cNvSpPr txBox="1"/>
           <p:nvPr/>
         </p:nvSpPr>
@@ -10976,7 +11635,7 @@
           <a:p>
             <a:pPr algn="l"/>
             <a:r>
-              <a:rPr sz="1600" b="1">
+              <a:rPr sz="1500" b="1">
                 <a:solidFill>
                   <a:srgbClr val="2DD4BF"/>
                 </a:solidFill>
@@ -10989,7 +11648,7 @@
       </p:sp>
       <p:sp>
         <p:nvSpPr>
-          <p:cNvPr id="12" name="TextBox 11"/>
+          <p:cNvPr id="13" name="TextBox 12"/>
           <p:cNvSpPr txBox="1"/>
           <p:nvPr/>
         </p:nvSpPr>
@@ -11011,7 +11670,7 @@
           <a:p>
             <a:pPr algn="l"/>
             <a:r>
-              <a:rPr sz="1200" b="0">
+              <a:rPr sz="1100" b="0">
                 <a:solidFill>
                   <a:srgbClr val="E5EDF7"/>
                 </a:solidFill>
@@ -11024,7 +11683,7 @@
       </p:sp>
       <p:sp>
         <p:nvSpPr>
-          <p:cNvPr id="13" name="TextBox 12"/>
+          <p:cNvPr id="14" name="TextBox 13"/>
           <p:cNvSpPr txBox="1"/>
           <p:nvPr/>
         </p:nvSpPr>
@@ -11155,7 +11814,42 @@
       </p:sp>
       <p:sp>
         <p:nvSpPr>
-          <p:cNvPr id="4" name="Rounded Rectangle 3"/>
+          <p:cNvPr id="4" name="TextBox 3"/>
+          <p:cNvSpPr txBox="1"/>
+          <p:nvPr/>
+        </p:nvSpPr>
+        <p:spPr>
+          <a:xfrm>
+            <a:off x="621792" y="6547104"/>
+            <a:ext cx="10972800" cy="182880"/>
+          </a:xfrm>
+          <a:prstGeom prst="rect">
+            <a:avLst/>
+          </a:prstGeom>
+          <a:noFill/>
+        </p:spPr>
+        <p:txBody>
+          <a:bodyPr wrap="square">
+            <a:spAutoFit/>
+          </a:bodyPr>
+          <a:lstStyle/>
+          <a:p>
+            <a:pPr algn="l"/>
+            <a:r>
+              <a:rPr sz="800" b="0">
+                <a:solidFill>
+                  <a:srgbClr val="94A3B8"/>
+                </a:solidFill>
+                <a:latin typeface="Aptos"/>
+              </a:rPr>
+              <a:t>tenantAI  |  jury presentation  |  03</a:t>
+            </a:r>
+          </a:p>
+        </p:txBody>
+      </p:sp>
+      <p:sp>
+        <p:nvSpPr>
+          <p:cNvPr id="5" name="Rounded Rectangle 4"/>
           <p:cNvSpPr/>
           <p:nvPr/>
         </p:nvSpPr>
@@ -11200,7 +11894,7 @@
       </p:sp>
       <p:sp>
         <p:nvSpPr>
-          <p:cNvPr id="5" name="TextBox 4"/>
+          <p:cNvPr id="6" name="TextBox 5"/>
           <p:cNvSpPr txBox="1"/>
           <p:nvPr/>
         </p:nvSpPr>
@@ -11222,7 +11916,7 @@
           <a:p>
             <a:pPr algn="l"/>
             <a:r>
-              <a:rPr sz="1600" b="1">
+              <a:rPr sz="1500" b="1">
                 <a:solidFill>
                   <a:srgbClr val="2DD4BF"/>
                 </a:solidFill>
@@ -11235,7 +11929,7 @@
       </p:sp>
       <p:sp>
         <p:nvSpPr>
-          <p:cNvPr id="6" name="TextBox 5"/>
+          <p:cNvPr id="7" name="TextBox 6"/>
           <p:cNvSpPr txBox="1"/>
           <p:nvPr/>
         </p:nvSpPr>
@@ -11257,20 +11951,21 @@
           <a:p>
             <a:pPr algn="l"/>
             <a:r>
-              <a:rPr sz="1200" b="0">
+              <a:rPr sz="1100" b="0">
                 <a:solidFill>
                   <a:srgbClr val="E5EDF7"/>
                 </a:solidFill>
                 <a:latin typeface="Aptos"/>
               </a:rPr>
-              <a:t>Create a company workspace and verify the administrator email with a six-digit OTP.</a:t>
-            </a:r>
-          </a:p>
-        </p:txBody>
-      </p:sp>
-      <p:sp>
-        <p:nvSpPr>
-          <p:cNvPr id="7" name="Rounded Rectangle 6"/>
+              <a:t>Create a company workspace and verify the administrator email with a six-digit OTP.
+Control: unverified accounts cannot log in.</a:t>
+            </a:r>
+          </a:p>
+        </p:txBody>
+      </p:sp>
+      <p:sp>
+        <p:nvSpPr>
+          <p:cNvPr id="8" name="Rounded Rectangle 7"/>
           <p:cNvSpPr/>
           <p:nvPr/>
         </p:nvSpPr>
@@ -11315,7 +12010,7 @@
       </p:sp>
       <p:sp>
         <p:nvSpPr>
-          <p:cNvPr id="8" name="TextBox 7"/>
+          <p:cNvPr id="9" name="TextBox 8"/>
           <p:cNvSpPr txBox="1"/>
           <p:nvPr/>
         </p:nvSpPr>
@@ -11337,7 +12032,7 @@
           <a:p>
             <a:pPr algn="l"/>
             <a:r>
-              <a:rPr sz="1600" b="1">
+              <a:rPr sz="1500" b="1">
                 <a:solidFill>
                   <a:srgbClr val="2DD4BF"/>
                 </a:solidFill>
@@ -11350,7 +12045,7 @@
       </p:sp>
       <p:sp>
         <p:nvSpPr>
-          <p:cNvPr id="9" name="TextBox 8"/>
+          <p:cNvPr id="10" name="TextBox 9"/>
           <p:cNvSpPr txBox="1"/>
           <p:nvPr/>
         </p:nvSpPr>
@@ -11372,20 +12067,21 @@
           <a:p>
             <a:pPr algn="l"/>
             <a:r>
-              <a:rPr sz="1200" b="0">
+              <a:rPr sz="1100" b="0">
                 <a:solidFill>
                   <a:srgbClr val="E5EDF7"/>
                 </a:solidFill>
                 <a:latin typeface="Aptos"/>
               </a:rPr>
-              <a:t>Search only READY documents belonging to the authenticated tenant.</a:t>
-            </a:r>
-          </a:p>
-        </p:txBody>
-      </p:sp>
-      <p:sp>
-        <p:nvSpPr>
-          <p:cNvPr id="10" name="Rounded Rectangle 9"/>
+              <a:t>Search only READY documents belonging to the authenticated tenant.
+Control: tenant scope is applied server-side, not taken from the browser.</a:t>
+            </a:r>
+          </a:p>
+        </p:txBody>
+      </p:sp>
+      <p:sp>
+        <p:nvSpPr>
+          <p:cNvPr id="11" name="Rounded Rectangle 10"/>
           <p:cNvSpPr/>
           <p:nvPr/>
         </p:nvSpPr>
@@ -11430,7 +12126,7 @@
       </p:sp>
       <p:sp>
         <p:nvSpPr>
-          <p:cNvPr id="11" name="TextBox 10"/>
+          <p:cNvPr id="12" name="TextBox 11"/>
           <p:cNvSpPr txBox="1"/>
           <p:nvPr/>
         </p:nvSpPr>
@@ -11452,7 +12148,7 @@
           <a:p>
             <a:pPr algn="l"/>
             <a:r>
-              <a:rPr sz="1600" b="1">
+              <a:rPr sz="1500" b="1">
                 <a:solidFill>
                   <a:srgbClr val="2DD4BF"/>
                 </a:solidFill>
@@ -11465,7 +12161,7 @@
       </p:sp>
       <p:sp>
         <p:nvSpPr>
-          <p:cNvPr id="12" name="TextBox 11"/>
+          <p:cNvPr id="13" name="TextBox 12"/>
           <p:cNvSpPr txBox="1"/>
           <p:nvPr/>
         </p:nvSpPr>
@@ -11487,13 +12183,14 @@
           <a:p>
             <a:pPr algn="l"/>
             <a:r>
-              <a:rPr sz="1200" b="0">
+              <a:rPr sz="1100" b="0">
                 <a:solidFill>
                   <a:srgbClr val="E5EDF7"/>
                 </a:solidFill>
                 <a:latin typeface="Aptos"/>
               </a:rPr>
-              <a:t>Return grounded responses with document and page citations plus audit telemetry.</a:t>
+              <a:t>Return grounded responses with document and page citations plus audit telemetry.
+Control: unsupported questions receive an explicit refusal.</a:t>
             </a:r>
           </a:p>
         </p:txBody>
@@ -11596,7 +12293,42 @@
       </p:sp>
       <p:sp>
         <p:nvSpPr>
-          <p:cNvPr id="4" name="Rounded Rectangle 3"/>
+          <p:cNvPr id="4" name="TextBox 3"/>
+          <p:cNvSpPr txBox="1"/>
+          <p:nvPr/>
+        </p:nvSpPr>
+        <p:spPr>
+          <a:xfrm>
+            <a:off x="621792" y="6547104"/>
+            <a:ext cx="10972800" cy="182880"/>
+          </a:xfrm>
+          <a:prstGeom prst="rect">
+            <a:avLst/>
+          </a:prstGeom>
+          <a:noFill/>
+        </p:spPr>
+        <p:txBody>
+          <a:bodyPr wrap="square">
+            <a:spAutoFit/>
+          </a:bodyPr>
+          <a:lstStyle/>
+          <a:p>
+            <a:pPr algn="l"/>
+            <a:r>
+              <a:rPr sz="800" b="0">
+                <a:solidFill>
+                  <a:srgbClr val="94A3B8"/>
+                </a:solidFill>
+                <a:latin typeface="Aptos"/>
+              </a:rPr>
+              <a:t>tenantAI  |  jury presentation  |  04</a:t>
+            </a:r>
+          </a:p>
+        </p:txBody>
+      </p:sp>
+      <p:sp>
+        <p:nvSpPr>
+          <p:cNvPr id="5" name="Rounded Rectangle 4"/>
           <p:cNvSpPr/>
           <p:nvPr/>
         </p:nvSpPr>
@@ -11641,7 +12373,7 @@
       </p:sp>
       <p:sp>
         <p:nvSpPr>
-          <p:cNvPr id="5" name="TextBox 4"/>
+          <p:cNvPr id="6" name="TextBox 5"/>
           <p:cNvSpPr txBox="1"/>
           <p:nvPr/>
         </p:nvSpPr>
@@ -11663,7 +12395,7 @@
           <a:p>
             <a:pPr algn="l"/>
             <a:r>
-              <a:rPr sz="1600" b="1">
+              <a:rPr sz="1500" b="1">
                 <a:solidFill>
                   <a:srgbClr val="2DD4BF"/>
                 </a:solidFill>
@@ -11676,7 +12408,7 @@
       </p:sp>
       <p:sp>
         <p:nvSpPr>
-          <p:cNvPr id="6" name="TextBox 5"/>
+          <p:cNvPr id="7" name="TextBox 6"/>
           <p:cNvSpPr txBox="1"/>
           <p:nvPr/>
         </p:nvSpPr>
@@ -11698,20 +12430,21 @@
           <a:p>
             <a:pPr algn="l"/>
             <a:r>
-              <a:rPr sz="1200" b="0">
+              <a:rPr sz="1100" b="0">
                 <a:solidFill>
                   <a:srgbClr val="E5EDF7"/>
                 </a:solidFill>
                 <a:latin typeface="Aptos"/>
               </a:rPr>
-              <a:t>Creates the workspace, manages members, reviews usage, and monitors security events.</a:t>
-            </a:r>
-          </a:p>
-        </p:txBody>
-      </p:sp>
-      <p:sp>
-        <p:nvSpPr>
-          <p:cNvPr id="7" name="Rounded Rectangle 6"/>
+              <a:t>Creates the workspace, manages members, reviews usage, and monitors security events.
+Success signal: clear ownership and faster policy decisions.</a:t>
+            </a:r>
+          </a:p>
+        </p:txBody>
+      </p:sp>
+      <p:sp>
+        <p:nvSpPr>
+          <p:cNvPr id="8" name="Rounded Rectangle 7"/>
           <p:cNvSpPr/>
           <p:nvPr/>
         </p:nvSpPr>
@@ -11756,7 +12489,7 @@
       </p:sp>
       <p:sp>
         <p:nvSpPr>
-          <p:cNvPr id="8" name="TextBox 7"/>
+          <p:cNvPr id="9" name="TextBox 8"/>
           <p:cNvSpPr txBox="1"/>
           <p:nvPr/>
         </p:nvSpPr>
@@ -11778,7 +12511,7 @@
           <a:p>
             <a:pPr algn="l"/>
             <a:r>
-              <a:rPr sz="1600" b="1">
+              <a:rPr sz="1500" b="1">
                 <a:solidFill>
                   <a:srgbClr val="2DD4BF"/>
                 </a:solidFill>
@@ -11791,7 +12524,7 @@
       </p:sp>
       <p:sp>
         <p:nvSpPr>
-          <p:cNvPr id="9" name="TextBox 8"/>
+          <p:cNvPr id="10" name="TextBox 9"/>
           <p:cNvSpPr txBox="1"/>
           <p:nvPr/>
         </p:nvSpPr>
@@ -11813,20 +12546,21 @@
           <a:p>
             <a:pPr algn="l"/>
             <a:r>
-              <a:rPr sz="1200" b="0">
+              <a:rPr sz="1100" b="0">
                 <a:solidFill>
                   <a:srgbClr val="E5EDF7"/>
                 </a:solidFill>
                 <a:latin typeface="Aptos"/>
               </a:rPr>
-              <a:t>Uploads approved material, asks natural-language questions, and reuses conversation history.</a:t>
-            </a:r>
-          </a:p>
-        </p:txBody>
-      </p:sp>
-      <p:sp>
-        <p:nvSpPr>
-          <p:cNvPr id="10" name="Rounded Rectangle 9"/>
+              <a:t>Uploads approved material, asks natural-language questions, and reuses conversation history.
+Success signal: answer plus citation in seconds.</a:t>
+            </a:r>
+          </a:p>
+        </p:txBody>
+      </p:sp>
+      <p:sp>
+        <p:nvSpPr>
+          <p:cNvPr id="11" name="Rounded Rectangle 10"/>
           <p:cNvSpPr/>
           <p:nvPr/>
         </p:nvSpPr>
@@ -11871,7 +12605,7 @@
       </p:sp>
       <p:sp>
         <p:nvSpPr>
-          <p:cNvPr id="11" name="TextBox 10"/>
+          <p:cNvPr id="12" name="TextBox 11"/>
           <p:cNvSpPr txBox="1"/>
           <p:nvPr/>
         </p:nvSpPr>
@@ -11893,7 +12627,7 @@
           <a:p>
             <a:pPr algn="l"/>
             <a:r>
-              <a:rPr sz="1600" b="1">
+              <a:rPr sz="1500" b="1">
                 <a:solidFill>
                   <a:srgbClr val="2DD4BF"/>
                 </a:solidFill>
@@ -11906,7 +12640,7 @@
       </p:sp>
       <p:sp>
         <p:nvSpPr>
-          <p:cNvPr id="12" name="TextBox 11"/>
+          <p:cNvPr id="13" name="TextBox 12"/>
           <p:cNvSpPr txBox="1"/>
           <p:nvPr/>
         </p:nvSpPr>
@@ -11928,20 +12662,21 @@
           <a:p>
             <a:pPr algn="l"/>
             <a:r>
-              <a:rPr sz="1200" b="0">
+              <a:rPr sz="1100" b="0">
                 <a:solidFill>
                   <a:srgbClr val="E5EDF7"/>
                 </a:solidFill>
                 <a:latin typeface="Aptos"/>
               </a:rPr>
-              <a:t>Uses SuperAdmin analytics, tenant summaries, quotas, and the live IDOR simulator.</a:t>
-            </a:r>
-          </a:p>
-        </p:txBody>
-      </p:sp>
-      <p:sp>
-        <p:nvSpPr>
-          <p:cNvPr id="13" name="TextBox 12"/>
+              <a:t>Uses SuperAdmin analytics, tenant summaries, quotas, and the live IDOR simulator.
+Success signal: usage and risk are visible, not hidden.</a:t>
+            </a:r>
+          </a:p>
+        </p:txBody>
+      </p:sp>
+      <p:sp>
+        <p:nvSpPr>
+          <p:cNvPr id="14" name="TextBox 13"/>
           <p:cNvSpPr txBox="1"/>
           <p:nvPr/>
         </p:nvSpPr>
@@ -12072,7 +12807,42 @@
       </p:sp>
       <p:sp>
         <p:nvSpPr>
-          <p:cNvPr id="4" name="Rounded Rectangle 3"/>
+          <p:cNvPr id="4" name="TextBox 3"/>
+          <p:cNvSpPr txBox="1"/>
+          <p:nvPr/>
+        </p:nvSpPr>
+        <p:spPr>
+          <a:xfrm>
+            <a:off x="621792" y="6547104"/>
+            <a:ext cx="10972800" cy="182880"/>
+          </a:xfrm>
+          <a:prstGeom prst="rect">
+            <a:avLst/>
+          </a:prstGeom>
+          <a:noFill/>
+        </p:spPr>
+        <p:txBody>
+          <a:bodyPr wrap="square">
+            <a:spAutoFit/>
+          </a:bodyPr>
+          <a:lstStyle/>
+          <a:p>
+            <a:pPr algn="l"/>
+            <a:r>
+              <a:rPr sz="800" b="0">
+                <a:solidFill>
+                  <a:srgbClr val="94A3B8"/>
+                </a:solidFill>
+                <a:latin typeface="Aptos"/>
+              </a:rPr>
+              <a:t>tenantAI  |  jury presentation  |  05</a:t>
+            </a:r>
+          </a:p>
+        </p:txBody>
+      </p:sp>
+      <p:sp>
+        <p:nvSpPr>
+          <p:cNvPr id="5" name="Rounded Rectangle 4"/>
           <p:cNvSpPr/>
           <p:nvPr/>
         </p:nvSpPr>
@@ -12117,7 +12887,7 @@
       </p:sp>
       <p:sp>
         <p:nvSpPr>
-          <p:cNvPr id="5" name="TextBox 4"/>
+          <p:cNvPr id="6" name="TextBox 5"/>
           <p:cNvSpPr txBox="1"/>
           <p:nvPr/>
         </p:nvSpPr>
@@ -12139,7 +12909,7 @@
           <a:p>
             <a:pPr algn="l"/>
             <a:r>
-              <a:rPr sz="1600" b="1">
+              <a:rPr sz="1500" b="1">
                 <a:solidFill>
                   <a:srgbClr val="2DD4BF"/>
                 </a:solidFill>
@@ -12152,7 +12922,7 @@
       </p:sp>
       <p:sp>
         <p:nvSpPr>
-          <p:cNvPr id="6" name="TextBox 5"/>
+          <p:cNvPr id="7" name="TextBox 6"/>
           <p:cNvSpPr txBox="1"/>
           <p:nvPr/>
         </p:nvSpPr>
@@ -12174,7 +12944,7 @@
           <a:p>
             <a:pPr algn="l"/>
             <a:r>
-              <a:rPr sz="1200" b="0">
+              <a:rPr sz="1100" b="0">
                 <a:solidFill>
                   <a:srgbClr val="E5EDF7"/>
                 </a:solidFill>
@@ -12184,14 +12954,15 @@
 Email OTP verification
 Verified login
 JWT session
-Role-based access</a:t>
-            </a:r>
-          </a:p>
-        </p:txBody>
-      </p:sp>
-      <p:sp>
-        <p:nvSpPr>
-          <p:cNvPr id="7" name="Rounded Rectangle 6"/>
+Role-based access
+Outcome: trusted identity before data access.</a:t>
+            </a:r>
+          </a:p>
+        </p:txBody>
+      </p:sp>
+      <p:sp>
+        <p:nvSpPr>
+          <p:cNvPr id="8" name="Rounded Rectangle 7"/>
           <p:cNvSpPr/>
           <p:nvPr/>
         </p:nvSpPr>
@@ -12236,7 +13007,7 @@
       </p:sp>
       <p:sp>
         <p:nvSpPr>
-          <p:cNvPr id="8" name="TextBox 7"/>
+          <p:cNvPr id="9" name="TextBox 8"/>
           <p:cNvSpPr txBox="1"/>
           <p:nvPr/>
         </p:nvSpPr>
@@ -12258,7 +13029,7 @@
           <a:p>
             <a:pPr algn="l"/>
             <a:r>
-              <a:rPr sz="1600" b="1">
+              <a:rPr sz="1500" b="1">
                 <a:solidFill>
                   <a:srgbClr val="2DD4BF"/>
                 </a:solidFill>
@@ -12271,7 +13042,7 @@
       </p:sp>
       <p:sp>
         <p:nvSpPr>
-          <p:cNvPr id="9" name="TextBox 8"/>
+          <p:cNvPr id="10" name="TextBox 9"/>
           <p:cNvSpPr txBox="1"/>
           <p:nvPr/>
         </p:nvSpPr>
@@ -12293,7 +13064,7 @@
           <a:p>
             <a:pPr algn="l"/>
             <a:r>
-              <a:rPr sz="1200" b="0">
+              <a:rPr sz="1100" b="0">
                 <a:solidFill>
                   <a:srgbClr val="E5EDF7"/>
                 </a:solidFill>
@@ -12303,14 +13074,15 @@
 File validation
 Text extraction
 Chunking
-Document lifecycle status</a:t>
-            </a:r>
-          </a:p>
-        </p:txBody>
-      </p:sp>
-      <p:sp>
-        <p:nvSpPr>
-          <p:cNvPr id="10" name="Rounded Rectangle 9"/>
+Document lifecycle status
+Outcome: searchable source material.</a:t>
+            </a:r>
+          </a:p>
+        </p:txBody>
+      </p:sp>
+      <p:sp>
+        <p:nvSpPr>
+          <p:cNvPr id="11" name="Rounded Rectangle 10"/>
           <p:cNvSpPr/>
           <p:nvPr/>
         </p:nvSpPr>
@@ -12355,7 +13127,7 @@
       </p:sp>
       <p:sp>
         <p:nvSpPr>
-          <p:cNvPr id="11" name="TextBox 10"/>
+          <p:cNvPr id="12" name="TextBox 11"/>
           <p:cNvSpPr txBox="1"/>
           <p:nvPr/>
         </p:nvSpPr>
@@ -12377,7 +13149,7 @@
           <a:p>
             <a:pPr algn="l"/>
             <a:r>
-              <a:rPr sz="1600" b="1">
+              <a:rPr sz="1500" b="1">
                 <a:solidFill>
                   <a:srgbClr val="2DD4BF"/>
                 </a:solidFill>
@@ -12390,7 +13162,7 @@
       </p:sp>
       <p:sp>
         <p:nvSpPr>
-          <p:cNvPr id="12" name="TextBox 11"/>
+          <p:cNvPr id="13" name="TextBox 12"/>
           <p:cNvSpPr txBox="1"/>
           <p:nvPr/>
         </p:nvSpPr>
@@ -12412,7 +13184,7 @@
           <a:p>
             <a:pPr algn="l"/>
             <a:r>
-              <a:rPr sz="1200" b="0">
+              <a:rPr sz="1100" b="0">
                 <a:solidFill>
                   <a:srgbClr val="E5EDF7"/>
                 </a:solidFill>
@@ -12422,14 +13194,15 @@
 Similarity retrieval
 Page citations
 Conversation history
-Out-of-domain refusal</a:t>
-            </a:r>
-          </a:p>
-        </p:txBody>
-      </p:sp>
-      <p:sp>
-        <p:nvSpPr>
-          <p:cNvPr id="13" name="Rounded Rectangle 12"/>
+Out-of-domain refusal
+Outcome: useful and explainable answers.</a:t>
+            </a:r>
+          </a:p>
+        </p:txBody>
+      </p:sp>
+      <p:sp>
+        <p:nvSpPr>
+          <p:cNvPr id="14" name="Rounded Rectangle 13"/>
           <p:cNvSpPr/>
           <p:nvPr/>
         </p:nvSpPr>
@@ -12474,7 +13247,7 @@
       </p:sp>
       <p:sp>
         <p:nvSpPr>
-          <p:cNvPr id="14" name="TextBox 13"/>
+          <p:cNvPr id="15" name="TextBox 14"/>
           <p:cNvSpPr txBox="1"/>
           <p:nvPr/>
         </p:nvSpPr>
@@ -12496,7 +13269,7 @@
           <a:p>
             <a:pPr algn="l"/>
             <a:r>
-              <a:rPr sz="1600" b="1">
+              <a:rPr sz="1500" b="1">
                 <a:solidFill>
                   <a:srgbClr val="2DD4BF"/>
                 </a:solidFill>
@@ -12509,7 +13282,7 @@
       </p:sp>
       <p:sp>
         <p:nvSpPr>
-          <p:cNvPr id="15" name="TextBox 14"/>
+          <p:cNvPr id="16" name="TextBox 15"/>
           <p:cNvSpPr txBox="1"/>
           <p:nvPr/>
         </p:nvSpPr>
@@ -12531,7 +13304,7 @@
           <a:p>
             <a:pPr algn="l"/>
             <a:r>
-              <a:rPr sz="1200" b="0">
+              <a:rPr sz="1100" b="0">
                 <a:solidFill>
                   <a:srgbClr val="E5EDF7"/>
                 </a:solidFill>
@@ -12541,7 +13314,8 @@
 Latency and token telemetry
 Tenant quotas
 Admin center
-IDOR simulator</a:t>
+IDOR simulator
+Outcome: operators can prove behavior.</a:t>
             </a:r>
           </a:p>
         </p:txBody>
@@ -12644,7 +13418,42 @@
       </p:sp>
       <p:sp>
         <p:nvSpPr>
-          <p:cNvPr id="4" name="Rounded Rectangle 3"/>
+          <p:cNvPr id="4" name="TextBox 3"/>
+          <p:cNvSpPr txBox="1"/>
+          <p:nvPr/>
+        </p:nvSpPr>
+        <p:spPr>
+          <a:xfrm>
+            <a:off x="621792" y="6547104"/>
+            <a:ext cx="10972800" cy="182880"/>
+          </a:xfrm>
+          <a:prstGeom prst="rect">
+            <a:avLst/>
+          </a:prstGeom>
+          <a:noFill/>
+        </p:spPr>
+        <p:txBody>
+          <a:bodyPr wrap="square">
+            <a:spAutoFit/>
+          </a:bodyPr>
+          <a:lstStyle/>
+          <a:p>
+            <a:pPr algn="l"/>
+            <a:r>
+              <a:rPr sz="800" b="0">
+                <a:solidFill>
+                  <a:srgbClr val="94A3B8"/>
+                </a:solidFill>
+                <a:latin typeface="Aptos"/>
+              </a:rPr>
+              <a:t>tenantAI  |  jury presentation  |  06</a:t>
+            </a:r>
+          </a:p>
+        </p:txBody>
+      </p:sp>
+      <p:sp>
+        <p:nvSpPr>
+          <p:cNvPr id="5" name="Rounded Rectangle 4"/>
           <p:cNvSpPr/>
           <p:nvPr/>
         </p:nvSpPr>
@@ -12689,7 +13498,7 @@
       </p:sp>
       <p:sp>
         <p:nvSpPr>
-          <p:cNvPr id="5" name="TextBox 4"/>
+          <p:cNvPr id="6" name="TextBox 5"/>
           <p:cNvSpPr txBox="1"/>
           <p:nvPr/>
         </p:nvSpPr>
@@ -12711,7 +13520,7 @@
           <a:p>
             <a:pPr algn="l"/>
             <a:r>
-              <a:rPr sz="1600" b="1">
+              <a:rPr sz="1500" b="1">
                 <a:solidFill>
                   <a:srgbClr val="2DD4BF"/>
                 </a:solidFill>
@@ -12724,7 +13533,7 @@
       </p:sp>
       <p:sp>
         <p:nvSpPr>
-          <p:cNvPr id="6" name="TextBox 5"/>
+          <p:cNvPr id="7" name="TextBox 6"/>
           <p:cNvSpPr txBox="1"/>
           <p:nvPr/>
         </p:nvSpPr>
@@ -12746,20 +13555,21 @@
           <a:p>
             <a:pPr algn="l"/>
             <a:r>
-              <a:rPr sz="1200" b="0">
+              <a:rPr sz="1100" b="0">
                 <a:solidFill>
                   <a:srgbClr val="E5EDF7"/>
                 </a:solidFill>
                 <a:latin typeface="Aptos"/>
               </a:rPr>
-              <a:t>Dark-first web dashboard</a:t>
-            </a:r>
-          </a:p>
-        </p:txBody>
-      </p:sp>
-      <p:sp>
-        <p:nvSpPr>
-          <p:cNvPr id="7" name="Rounded Rectangle 6"/>
+              <a:t>Dark-first web dashboard
+Accessible auth and tenant UI</a:t>
+            </a:r>
+          </a:p>
+        </p:txBody>
+      </p:sp>
+      <p:sp>
+        <p:nvSpPr>
+          <p:cNvPr id="8" name="Rounded Rectangle 7"/>
           <p:cNvSpPr/>
           <p:nvPr/>
         </p:nvSpPr>
@@ -12804,7 +13614,7 @@
       </p:sp>
       <p:sp>
         <p:nvSpPr>
-          <p:cNvPr id="8" name="TextBox 7"/>
+          <p:cNvPr id="9" name="TextBox 8"/>
           <p:cNvSpPr txBox="1"/>
           <p:nvPr/>
         </p:nvSpPr>
@@ -12826,7 +13636,7 @@
           <a:p>
             <a:pPr algn="l"/>
             <a:r>
-              <a:rPr sz="1600" b="1">
+              <a:rPr sz="1500" b="1">
                 <a:solidFill>
                   <a:srgbClr val="2DD4BF"/>
                 </a:solidFill>
@@ -12839,7 +13649,7 @@
       </p:sp>
       <p:sp>
         <p:nvSpPr>
-          <p:cNvPr id="9" name="TextBox 8"/>
+          <p:cNvPr id="10" name="TextBox 9"/>
           <p:cNvSpPr txBox="1"/>
           <p:nvPr/>
         </p:nvSpPr>
@@ -12861,20 +13671,21 @@
           <a:p>
             <a:pPr algn="l"/>
             <a:r>
-              <a:rPr sz="1200" b="0">
+              <a:rPr sz="1100" b="0">
                 <a:solidFill>
                   <a:srgbClr val="E5EDF7"/>
                 </a:solidFill>
                 <a:latin typeface="Aptos"/>
               </a:rPr>
-              <a:t>Auth, RBAC, tenant guards</a:t>
-            </a:r>
-          </a:p>
-        </p:txBody>
-      </p:sp>
-      <p:sp>
-        <p:nvSpPr>
-          <p:cNvPr id="10" name="Rounded Rectangle 9"/>
+              <a:t>Auth, RBAC, tenant guards
+Health and API boundaries</a:t>
+            </a:r>
+          </a:p>
+        </p:txBody>
+      </p:sp>
+      <p:sp>
+        <p:nvSpPr>
+          <p:cNvPr id="11" name="Rounded Rectangle 10"/>
           <p:cNvSpPr/>
           <p:nvPr/>
         </p:nvSpPr>
@@ -12919,7 +13730,7 @@
       </p:sp>
       <p:sp>
         <p:nvSpPr>
-          <p:cNvPr id="11" name="TextBox 10"/>
+          <p:cNvPr id="12" name="TextBox 11"/>
           <p:cNvSpPr txBox="1"/>
           <p:nvPr/>
         </p:nvSpPr>
@@ -12941,7 +13752,7 @@
           <a:p>
             <a:pPr algn="l"/>
             <a:r>
-              <a:rPr sz="1600" b="1">
+              <a:rPr sz="1500" b="1">
                 <a:solidFill>
                   <a:srgbClr val="2DD4BF"/>
                 </a:solidFill>
@@ -12954,7 +13765,7 @@
       </p:sp>
       <p:sp>
         <p:nvSpPr>
-          <p:cNvPr id="12" name="TextBox 11"/>
+          <p:cNvPr id="13" name="TextBox 12"/>
           <p:cNvSpPr txBox="1"/>
           <p:nvPr/>
         </p:nvSpPr>
@@ -12976,20 +13787,21 @@
           <a:p>
             <a:pPr algn="l"/>
             <a:r>
-              <a:rPr sz="1200" b="0">
+              <a:rPr sz="1100" b="0">
                 <a:solidFill>
                   <a:srgbClr val="E5EDF7"/>
                 </a:solidFill>
                 <a:latin typeface="Aptos"/>
               </a:rPr>
-              <a:t>Shared relational data</a:t>
-            </a:r>
-          </a:p>
-        </p:txBody>
-      </p:sp>
-      <p:sp>
-        <p:nvSpPr>
-          <p:cNvPr id="13" name="Rounded Rectangle 12"/>
+              <a:t>Shared relational data
+Ownership and status relationships</a:t>
+            </a:r>
+          </a:p>
+        </p:txBody>
+      </p:sp>
+      <p:sp>
+        <p:nvSpPr>
+          <p:cNvPr id="14" name="Rounded Rectangle 13"/>
           <p:cNvSpPr/>
           <p:nvPr/>
         </p:nvSpPr>
@@ -13034,7 +13846,7 @@
       </p:sp>
       <p:sp>
         <p:nvSpPr>
-          <p:cNvPr id="14" name="TextBox 13"/>
+          <p:cNvPr id="15" name="TextBox 14"/>
           <p:cNvSpPr txBox="1"/>
           <p:nvPr/>
         </p:nvSpPr>
@@ -13056,7 +13868,7 @@
           <a:p>
             <a:pPr algn="l"/>
             <a:r>
-              <a:rPr sz="1600" b="1">
+              <a:rPr sz="1500" b="1">
                 <a:solidFill>
                   <a:srgbClr val="2DD4BF"/>
                 </a:solidFill>
@@ -13069,7 +13881,7 @@
       </p:sp>
       <p:sp>
         <p:nvSpPr>
-          <p:cNvPr id="15" name="TextBox 14"/>
+          <p:cNvPr id="16" name="TextBox 15"/>
           <p:cNvSpPr txBox="1"/>
           <p:nvPr/>
         </p:nvSpPr>
@@ -13091,20 +13903,21 @@
           <a:p>
             <a:pPr algn="l"/>
             <a:r>
-              <a:rPr sz="1200" b="0">
+              <a:rPr sz="1100" b="0">
                 <a:solidFill>
                   <a:srgbClr val="E5EDF7"/>
                 </a:solidFill>
                 <a:latin typeface="Aptos"/>
               </a:rPr>
-              <a:t>Scoped retrieval + citations</a:t>
-            </a:r>
-          </a:p>
-        </p:txBody>
-      </p:sp>
-      <p:sp>
-        <p:nvSpPr>
-          <p:cNvPr id="16" name="TextBox 15"/>
+              <a:t>Scoped retrieval + citations
+Grounded response generation</a:t>
+            </a:r>
+          </a:p>
+        </p:txBody>
+      </p:sp>
+      <p:sp>
+        <p:nvSpPr>
+          <p:cNvPr id="17" name="TextBox 16"/>
           <p:cNvSpPr txBox="1"/>
           <p:nvPr/>
         </p:nvSpPr>
@@ -13139,14 +13952,14 @@
       </p:sp>
       <p:sp>
         <p:nvSpPr>
-          <p:cNvPr id="17" name="TextBox 16"/>
+          <p:cNvPr id="18" name="TextBox 17"/>
           <p:cNvSpPr txBox="1"/>
           <p:nvPr/>
         </p:nvSpPr>
         <p:spPr>
           <a:xfrm>
             <a:off x="914400" y="4754880"/>
-            <a:ext cx="10241280" cy="411480"/>
+            <a:ext cx="10241280" cy="594360"/>
           </a:xfrm>
           <a:prstGeom prst="rect">
             <a:avLst/>
@@ -13167,7 +13980,7 @@
                 </a:solidFill>
                 <a:latin typeface="Aptos"/>
               </a:rPr>
-              <a:t>All tenant-sensitive paths validate ownership server-side; frontend IDs are never trusted.</a:t>
+              <a:t>All tenant-sensitive paths validate ownership server-side; frontend IDs are never trusted. The shared database is safe because every sensitive query carries the authenticated tenant boundary.</a:t>
             </a:r>
           </a:p>
         </p:txBody>
@@ -13270,7 +14083,42 @@
       </p:sp>
       <p:sp>
         <p:nvSpPr>
-          <p:cNvPr id="4" name="Rounded Rectangle 3"/>
+          <p:cNvPr id="4" name="TextBox 3"/>
+          <p:cNvSpPr txBox="1"/>
+          <p:nvPr/>
+        </p:nvSpPr>
+        <p:spPr>
+          <a:xfrm>
+            <a:off x="621792" y="6547104"/>
+            <a:ext cx="10972800" cy="182880"/>
+          </a:xfrm>
+          <a:prstGeom prst="rect">
+            <a:avLst/>
+          </a:prstGeom>
+          <a:noFill/>
+        </p:spPr>
+        <p:txBody>
+          <a:bodyPr wrap="square">
+            <a:spAutoFit/>
+          </a:bodyPr>
+          <a:lstStyle/>
+          <a:p>
+            <a:pPr algn="l"/>
+            <a:r>
+              <a:rPr sz="800" b="0">
+                <a:solidFill>
+                  <a:srgbClr val="94A3B8"/>
+                </a:solidFill>
+                <a:latin typeface="Aptos"/>
+              </a:rPr>
+              <a:t>tenantAI  |  jury presentation  |  07</a:t>
+            </a:r>
+          </a:p>
+        </p:txBody>
+      </p:sp>
+      <p:sp>
+        <p:nvSpPr>
+          <p:cNvPr id="5" name="Rounded Rectangle 4"/>
           <p:cNvSpPr/>
           <p:nvPr/>
         </p:nvSpPr>
@@ -13315,7 +14163,7 @@
       </p:sp>
       <p:sp>
         <p:nvSpPr>
-          <p:cNvPr id="5" name="TextBox 4"/>
+          <p:cNvPr id="6" name="TextBox 5"/>
           <p:cNvSpPr txBox="1"/>
           <p:nvPr/>
         </p:nvSpPr>
@@ -13337,7 +14185,7 @@
           <a:p>
             <a:pPr algn="l"/>
             <a:r>
-              <a:rPr sz="1600" b="1">
+              <a:rPr sz="1500" b="1">
                 <a:solidFill>
                   <a:srgbClr val="2DD4BF"/>
                 </a:solidFill>
@@ -13350,7 +14198,7 @@
       </p:sp>
       <p:sp>
         <p:nvSpPr>
-          <p:cNvPr id="6" name="TextBox 5"/>
+          <p:cNvPr id="7" name="TextBox 6"/>
           <p:cNvSpPr txBox="1"/>
           <p:nvPr/>
         </p:nvSpPr>
@@ -13372,7 +14220,7 @@
           <a:p>
             <a:pPr algn="l"/>
             <a:r>
-              <a:rPr sz="1200" b="0">
+              <a:rPr sz="1100" b="0">
                 <a:solidFill>
                   <a:srgbClr val="E5EDF7"/>
                 </a:solidFill>
@@ -13385,7 +14233,7 @@
       </p:sp>
       <p:sp>
         <p:nvSpPr>
-          <p:cNvPr id="7" name="Rounded Rectangle 6"/>
+          <p:cNvPr id="8" name="Rounded Rectangle 7"/>
           <p:cNvSpPr/>
           <p:nvPr/>
         </p:nvSpPr>
@@ -13430,7 +14278,7 @@
       </p:sp>
       <p:sp>
         <p:nvSpPr>
-          <p:cNvPr id="8" name="TextBox 7"/>
+          <p:cNvPr id="9" name="TextBox 8"/>
           <p:cNvSpPr txBox="1"/>
           <p:nvPr/>
         </p:nvSpPr>
@@ -13452,7 +14300,7 @@
           <a:p>
             <a:pPr algn="l"/>
             <a:r>
-              <a:rPr sz="1600" b="1">
+              <a:rPr sz="1500" b="1">
                 <a:solidFill>
                   <a:srgbClr val="2DD4BF"/>
                 </a:solidFill>
@@ -13465,7 +14313,7 @@
       </p:sp>
       <p:sp>
         <p:nvSpPr>
-          <p:cNvPr id="9" name="TextBox 8"/>
+          <p:cNvPr id="10" name="TextBox 9"/>
           <p:cNvSpPr txBox="1"/>
           <p:nvPr/>
         </p:nvSpPr>
@@ -13487,7 +14335,7 @@
           <a:p>
             <a:pPr algn="l"/>
             <a:r>
-              <a:rPr sz="1200" b="0">
+              <a:rPr sz="1100" b="0">
                 <a:solidFill>
                   <a:srgbClr val="E5EDF7"/>
                 </a:solidFill>
@@ -13500,7 +14348,7 @@
       </p:sp>
       <p:sp>
         <p:nvSpPr>
-          <p:cNvPr id="10" name="Rounded Rectangle 9"/>
+          <p:cNvPr id="11" name="Rounded Rectangle 10"/>
           <p:cNvSpPr/>
           <p:nvPr/>
         </p:nvSpPr>
@@ -13545,7 +14393,7 @@
       </p:sp>
       <p:sp>
         <p:nvSpPr>
-          <p:cNvPr id="11" name="TextBox 10"/>
+          <p:cNvPr id="12" name="TextBox 11"/>
           <p:cNvSpPr txBox="1"/>
           <p:nvPr/>
         </p:nvSpPr>
@@ -13567,7 +14415,7 @@
           <a:p>
             <a:pPr algn="l"/>
             <a:r>
-              <a:rPr sz="1600" b="1">
+              <a:rPr sz="1500" b="1">
                 <a:solidFill>
                   <a:srgbClr val="2DD4BF"/>
                 </a:solidFill>
@@ -13580,7 +14428,7 @@
       </p:sp>
       <p:sp>
         <p:nvSpPr>
-          <p:cNvPr id="12" name="TextBox 11"/>
+          <p:cNvPr id="13" name="TextBox 12"/>
           <p:cNvSpPr txBox="1"/>
           <p:nvPr/>
         </p:nvSpPr>
@@ -13602,7 +14450,7 @@
           <a:p>
             <a:pPr algn="l"/>
             <a:r>
-              <a:rPr sz="1200" b="0">
+              <a:rPr sz="1100" b="0">
                 <a:solidFill>
                   <a:srgbClr val="E5EDF7"/>
                 </a:solidFill>
@@ -13615,7 +14463,7 @@
       </p:sp>
       <p:sp>
         <p:nvSpPr>
-          <p:cNvPr id="13" name="Rounded Rectangle 12"/>
+          <p:cNvPr id="14" name="Rounded Rectangle 13"/>
           <p:cNvSpPr/>
           <p:nvPr/>
         </p:nvSpPr>
@@ -13660,7 +14508,7 @@
       </p:sp>
       <p:sp>
         <p:nvSpPr>
-          <p:cNvPr id="14" name="TextBox 13"/>
+          <p:cNvPr id="15" name="TextBox 14"/>
           <p:cNvSpPr txBox="1"/>
           <p:nvPr/>
         </p:nvSpPr>
@@ -13682,7 +14530,7 @@
           <a:p>
             <a:pPr algn="l"/>
             <a:r>
-              <a:rPr sz="1600" b="1">
+              <a:rPr sz="1500" b="1">
                 <a:solidFill>
                   <a:srgbClr val="2DD4BF"/>
                 </a:solidFill>
@@ -13695,7 +14543,7 @@
       </p:sp>
       <p:sp>
         <p:nvSpPr>
-          <p:cNvPr id="15" name="TextBox 14"/>
+          <p:cNvPr id="16" name="TextBox 15"/>
           <p:cNvSpPr txBox="1"/>
           <p:nvPr/>
         </p:nvSpPr>
@@ -13717,7 +14565,7 @@
           <a:p>
             <a:pPr algn="l"/>
             <a:r>
-              <a:rPr sz="1200" b="0">
+              <a:rPr sz="1100" b="0">
                 <a:solidFill>
                   <a:srgbClr val="E5EDF7"/>
                 </a:solidFill>
@@ -13730,7 +14578,7 @@
       </p:sp>
       <p:sp>
         <p:nvSpPr>
-          <p:cNvPr id="16" name="Rounded Rectangle 15"/>
+          <p:cNvPr id="17" name="Rounded Rectangle 16"/>
           <p:cNvSpPr/>
           <p:nvPr/>
         </p:nvSpPr>
@@ -13775,7 +14623,7 @@
       </p:sp>
       <p:sp>
         <p:nvSpPr>
-          <p:cNvPr id="17" name="TextBox 16"/>
+          <p:cNvPr id="18" name="TextBox 17"/>
           <p:cNvSpPr txBox="1"/>
           <p:nvPr/>
         </p:nvSpPr>
@@ -13797,7 +14645,7 @@
           <a:p>
             <a:pPr algn="l"/>
             <a:r>
-              <a:rPr sz="1600" b="1">
+              <a:rPr sz="1500" b="1">
                 <a:solidFill>
                   <a:srgbClr val="2DD4BF"/>
                 </a:solidFill>
@@ -13810,7 +14658,7 @@
       </p:sp>
       <p:sp>
         <p:nvSpPr>
-          <p:cNvPr id="18" name="TextBox 17"/>
+          <p:cNvPr id="19" name="TextBox 18"/>
           <p:cNvSpPr txBox="1"/>
           <p:nvPr/>
         </p:nvSpPr>
@@ -13832,7 +14680,7 @@
           <a:p>
             <a:pPr algn="l"/>
             <a:r>
-              <a:rPr sz="1200" b="0">
+              <a:rPr sz="1100" b="0">
                 <a:solidFill>
                   <a:srgbClr val="E5EDF7"/>
                 </a:solidFill>
@@ -13845,7 +14693,7 @@
       </p:sp>
       <p:sp>
         <p:nvSpPr>
-          <p:cNvPr id="19" name="Rounded Rectangle 18"/>
+          <p:cNvPr id="20" name="Rounded Rectangle 19"/>
           <p:cNvSpPr/>
           <p:nvPr/>
         </p:nvSpPr>
@@ -13890,7 +14738,7 @@
       </p:sp>
       <p:sp>
         <p:nvSpPr>
-          <p:cNvPr id="20" name="TextBox 19"/>
+          <p:cNvPr id="21" name="TextBox 20"/>
           <p:cNvSpPr txBox="1"/>
           <p:nvPr/>
         </p:nvSpPr>
@@ -13912,7 +14760,7 @@
           <a:p>
             <a:pPr algn="l"/>
             <a:r>
-              <a:rPr sz="1600" b="1">
+              <a:rPr sz="1500" b="1">
                 <a:solidFill>
                   <a:srgbClr val="2DD4BF"/>
                 </a:solidFill>
@@ -13925,7 +14773,7 @@
       </p:sp>
       <p:sp>
         <p:nvSpPr>
-          <p:cNvPr id="21" name="TextBox 20"/>
+          <p:cNvPr id="22" name="TextBox 21"/>
           <p:cNvSpPr txBox="1"/>
           <p:nvPr/>
         </p:nvSpPr>
@@ -13947,7 +14795,7 @@
           <a:p>
             <a:pPr algn="l"/>
             <a:r>
-              <a:rPr sz="1200" b="0">
+              <a:rPr sz="1100" b="0">
                 <a:solidFill>
                   <a:srgbClr val="E5EDF7"/>
                 </a:solidFill>
@@ -13960,7 +14808,7 @@
       </p:sp>
       <p:sp>
         <p:nvSpPr>
-          <p:cNvPr id="22" name="Rounded Rectangle 21"/>
+          <p:cNvPr id="23" name="Rounded Rectangle 22"/>
           <p:cNvSpPr/>
           <p:nvPr/>
         </p:nvSpPr>
@@ -14005,7 +14853,7 @@
       </p:sp>
       <p:sp>
         <p:nvSpPr>
-          <p:cNvPr id="23" name="TextBox 22"/>
+          <p:cNvPr id="24" name="TextBox 23"/>
           <p:cNvSpPr txBox="1"/>
           <p:nvPr/>
         </p:nvSpPr>
@@ -14027,7 +14875,7 @@
           <a:p>
             <a:pPr algn="l"/>
             <a:r>
-              <a:rPr sz="1600" b="1">
+              <a:rPr sz="1500" b="1">
                 <a:solidFill>
                   <a:srgbClr val="2DD4BF"/>
                 </a:solidFill>
@@ -14040,7 +14888,7 @@
       </p:sp>
       <p:sp>
         <p:nvSpPr>
-          <p:cNvPr id="24" name="TextBox 23"/>
+          <p:cNvPr id="25" name="TextBox 24"/>
           <p:cNvSpPr txBox="1"/>
           <p:nvPr/>
         </p:nvSpPr>
@@ -14062,7 +14910,7 @@
           <a:p>
             <a:pPr algn="l"/>
             <a:r>
-              <a:rPr sz="1200" b="0">
+              <a:rPr sz="1100" b="0">
                 <a:solidFill>
                   <a:srgbClr val="E5EDF7"/>
                 </a:solidFill>
@@ -14075,7 +14923,7 @@
       </p:sp>
       <p:sp>
         <p:nvSpPr>
-          <p:cNvPr id="25" name="Rounded Rectangle 24"/>
+          <p:cNvPr id="26" name="Rounded Rectangle 25"/>
           <p:cNvSpPr/>
           <p:nvPr/>
         </p:nvSpPr>
@@ -14120,7 +14968,7 @@
       </p:sp>
       <p:sp>
         <p:nvSpPr>
-          <p:cNvPr id="26" name="TextBox 25"/>
+          <p:cNvPr id="27" name="TextBox 26"/>
           <p:cNvSpPr txBox="1"/>
           <p:nvPr/>
         </p:nvSpPr>
@@ -14142,7 +14990,7 @@
           <a:p>
             <a:pPr algn="l"/>
             <a:r>
-              <a:rPr sz="1600" b="1">
+              <a:rPr sz="1500" b="1">
                 <a:solidFill>
                   <a:srgbClr val="2DD4BF"/>
                 </a:solidFill>
@@ -14155,7 +15003,7 @@
       </p:sp>
       <p:sp>
         <p:nvSpPr>
-          <p:cNvPr id="27" name="TextBox 26"/>
+          <p:cNvPr id="28" name="TextBox 27"/>
           <p:cNvSpPr txBox="1"/>
           <p:nvPr/>
         </p:nvSpPr>
@@ -14177,7 +15025,7 @@
           <a:p>
             <a:pPr algn="l"/>
             <a:r>
-              <a:rPr sz="1200" b="0">
+              <a:rPr sz="1100" b="0">
                 <a:solidFill>
                   <a:srgbClr val="E5EDF7"/>
                 </a:solidFill>
@@ -14190,14 +15038,14 @@
       </p:sp>
       <p:sp>
         <p:nvSpPr>
-          <p:cNvPr id="28" name="TextBox 27"/>
+          <p:cNvPr id="29" name="TextBox 28"/>
           <p:cNvSpPr txBox="1"/>
           <p:nvPr/>
         </p:nvSpPr>
         <p:spPr>
           <a:xfrm>
             <a:off x="914400" y="4114800"/>
-            <a:ext cx="10241280" cy="457200"/>
+            <a:ext cx="10241280" cy="640080"/>
           </a:xfrm>
           <a:prstGeom prst="rect">
             <a:avLst/>
@@ -14212,13 +15060,13 @@
           <a:p>
             <a:pPr algn="ctr"/>
             <a:r>
-              <a:rPr sz="1600" b="0">
+              <a:rPr sz="1500" b="0">
                 <a:solidFill>
                   <a:srgbClr val="E5EDF7"/>
                 </a:solidFill>
                 <a:latin typeface="Aptos"/>
               </a:rPr>
-              <a:t>Processing status is persisted as PENDING / PROCESSING / READY / FAILED with safe retry visibility.</a:t>
+              <a:t>Processing status is persisted as PENDING / PROCESSING / READY / FAILED with safe retry visibility. Unsupported formats, quotas, and parser failures produce explicit user-facing outcomes.</a:t>
             </a:r>
           </a:p>
         </p:txBody>
@@ -14321,7 +15169,42 @@
       </p:sp>
       <p:sp>
         <p:nvSpPr>
-          <p:cNvPr id="4" name="Rounded Rectangle 3"/>
+          <p:cNvPr id="4" name="TextBox 3"/>
+          <p:cNvSpPr txBox="1"/>
+          <p:nvPr/>
+        </p:nvSpPr>
+        <p:spPr>
+          <a:xfrm>
+            <a:off x="621792" y="6547104"/>
+            <a:ext cx="10972800" cy="182880"/>
+          </a:xfrm>
+          <a:prstGeom prst="rect">
+            <a:avLst/>
+          </a:prstGeom>
+          <a:noFill/>
+        </p:spPr>
+        <p:txBody>
+          <a:bodyPr wrap="square">
+            <a:spAutoFit/>
+          </a:bodyPr>
+          <a:lstStyle/>
+          <a:p>
+            <a:pPr algn="l"/>
+            <a:r>
+              <a:rPr sz="800" b="0">
+                <a:solidFill>
+                  <a:srgbClr val="94A3B8"/>
+                </a:solidFill>
+                <a:latin typeface="Aptos"/>
+              </a:rPr>
+              <a:t>tenantAI  |  jury presentation  |  08</a:t>
+            </a:r>
+          </a:p>
+        </p:txBody>
+      </p:sp>
+      <p:sp>
+        <p:nvSpPr>
+          <p:cNvPr id="5" name="Rounded Rectangle 4"/>
           <p:cNvSpPr/>
           <p:nvPr/>
         </p:nvSpPr>
@@ -14366,7 +15249,7 @@
       </p:sp>
       <p:sp>
         <p:nvSpPr>
-          <p:cNvPr id="5" name="TextBox 4"/>
+          <p:cNvPr id="6" name="TextBox 5"/>
           <p:cNvSpPr txBox="1"/>
           <p:nvPr/>
         </p:nvSpPr>
@@ -14388,7 +15271,7 @@
           <a:p>
             <a:pPr algn="l"/>
             <a:r>
-              <a:rPr sz="1600" b="1">
+              <a:rPr sz="1500" b="1">
                 <a:solidFill>
                   <a:srgbClr val="2DD4BF"/>
                 </a:solidFill>
@@ -14401,7 +15284,7 @@
       </p:sp>
       <p:sp>
         <p:nvSpPr>
-          <p:cNvPr id="6" name="TextBox 5"/>
+          <p:cNvPr id="7" name="TextBox 6"/>
           <p:cNvSpPr txBox="1"/>
           <p:nvPr/>
         </p:nvSpPr>
@@ -14423,20 +15306,21 @@
           <a:p>
             <a:pPr algn="l"/>
             <a:r>
-              <a:rPr sz="1200" b="0">
+              <a:rPr sz="1100" b="0">
                 <a:solidFill>
                   <a:srgbClr val="E5EDF7"/>
                 </a:solidFill>
                 <a:latin typeface="Aptos"/>
               </a:rPr>
-              <a:t>OTP is cryptographically random, hashed at rest, expires after five minutes, and is rate limited.</a:t>
-            </a:r>
-          </a:p>
-        </p:txBody>
-      </p:sp>
-      <p:sp>
-        <p:nvSpPr>
-          <p:cNvPr id="7" name="Rounded Rectangle 6"/>
+              <a:t>OTP is cryptographically random, hashed at rest, expires after five minutes, and is rate limited.
+Evidence: only verified users receive login tokens.</a:t>
+            </a:r>
+          </a:p>
+        </p:txBody>
+      </p:sp>
+      <p:sp>
+        <p:nvSpPr>
+          <p:cNvPr id="8" name="Rounded Rectangle 7"/>
           <p:cNvSpPr/>
           <p:nvPr/>
         </p:nvSpPr>
@@ -14481,7 +15365,7 @@
       </p:sp>
       <p:sp>
         <p:nvSpPr>
-          <p:cNvPr id="8" name="TextBox 7"/>
+          <p:cNvPr id="9" name="TextBox 8"/>
           <p:cNvSpPr txBox="1"/>
           <p:nvPr/>
         </p:nvSpPr>
@@ -14503,7 +15387,7 @@
           <a:p>
             <a:pPr algn="l"/>
             <a:r>
-              <a:rPr sz="1600" b="1">
+              <a:rPr sz="1500" b="1">
                 <a:solidFill>
                   <a:srgbClr val="2DD4BF"/>
                 </a:solidFill>
@@ -14516,7 +15400,7 @@
       </p:sp>
       <p:sp>
         <p:nvSpPr>
-          <p:cNvPr id="9" name="TextBox 8"/>
+          <p:cNvPr id="10" name="TextBox 9"/>
           <p:cNvSpPr txBox="1"/>
           <p:nvPr/>
         </p:nvSpPr>
@@ -14538,20 +15422,21 @@
           <a:p>
             <a:pPr algn="l"/>
             <a:r>
-              <a:rPr sz="1200" b="0">
+              <a:rPr sz="1100" b="0">
                 <a:solidFill>
                   <a:srgbClr val="E5EDF7"/>
                 </a:solidFill>
                 <a:latin typeface="Aptos"/>
               </a:rPr>
-              <a:t>Documents, chunks, conversations, logs, and retrieval queries require the authenticated tenant scope.</a:t>
-            </a:r>
-          </a:p>
-        </p:txBody>
-      </p:sp>
-      <p:sp>
-        <p:nvSpPr>
-          <p:cNvPr id="10" name="Rounded Rectangle 9"/>
+              <a:t>Documents, chunks, conversations, logs, and retrieval queries require the authenticated tenant scope.
+Evidence: cross-tenant resources return hidden 404 responses.</a:t>
+            </a:r>
+          </a:p>
+        </p:txBody>
+      </p:sp>
+      <p:sp>
+        <p:nvSpPr>
+          <p:cNvPr id="11" name="Rounded Rectangle 10"/>
           <p:cNvSpPr/>
           <p:nvPr/>
         </p:nvSpPr>
@@ -14596,7 +15481,7 @@
       </p:sp>
       <p:sp>
         <p:nvSpPr>
-          <p:cNvPr id="11" name="TextBox 10"/>
+          <p:cNvPr id="12" name="TextBox 11"/>
           <p:cNvSpPr txBox="1"/>
           <p:nvPr/>
         </p:nvSpPr>
@@ -14618,7 +15503,7 @@
           <a:p>
             <a:pPr algn="l"/>
             <a:r>
-              <a:rPr sz="1600" b="1">
+              <a:rPr sz="1500" b="1">
                 <a:solidFill>
                   <a:srgbClr val="2DD4BF"/>
                 </a:solidFill>
@@ -14631,7 +15516,7 @@
       </p:sp>
       <p:sp>
         <p:nvSpPr>
-          <p:cNvPr id="12" name="TextBox 11"/>
+          <p:cNvPr id="13" name="TextBox 12"/>
           <p:cNvSpPr txBox="1"/>
           <p:nvPr/>
         </p:nvSpPr>
@@ -14653,13 +15538,14 @@
           <a:p>
             <a:pPr algn="l"/>
             <a:r>
-              <a:rPr sz="1200" b="0">
+              <a:rPr sz="1100" b="0">
                 <a:solidFill>
                   <a:srgbClr val="E5EDF7"/>
                 </a:solidFill>
                 <a:latin typeface="Aptos"/>
               </a:rPr>
-              <a:t>Login, upload, deletion, query, and cross-tenant probes are recorded for review.</a:t>
+              <a:t>Login, upload, deletion, query, and cross-tenant probes are recorded for review.
+Evidence: `/logs` shows action, outcome, actor, and tenant context.</a:t>
             </a:r>
           </a:p>
         </p:txBody>
@@ -14768,6 +15654,41 @@
         </p:nvSpPr>
         <p:spPr>
           <a:xfrm>
+            <a:off x="621792" y="6547104"/>
+            <a:ext cx="10972800" cy="182880"/>
+          </a:xfrm>
+          <a:prstGeom prst="rect">
+            <a:avLst/>
+          </a:prstGeom>
+          <a:noFill/>
+        </p:spPr>
+        <p:txBody>
+          <a:bodyPr wrap="square">
+            <a:spAutoFit/>
+          </a:bodyPr>
+          <a:lstStyle/>
+          <a:p>
+            <a:pPr algn="l"/>
+            <a:r>
+              <a:rPr sz="800" b="0">
+                <a:solidFill>
+                  <a:srgbClr val="94A3B8"/>
+                </a:solidFill>
+                <a:latin typeface="Aptos"/>
+              </a:rPr>
+              <a:t>tenantAI  |  jury presentation  |  09</a:t>
+            </a:r>
+          </a:p>
+        </p:txBody>
+      </p:sp>
+      <p:sp>
+        <p:nvSpPr>
+          <p:cNvPr id="5" name="TextBox 4"/>
+          <p:cNvSpPr txBox="1"/>
+          <p:nvPr/>
+        </p:nvSpPr>
+        <p:spPr>
+          <a:xfrm>
             <a:off x="822960" y="1554480"/>
             <a:ext cx="2743200" cy="365760"/>
           </a:xfrm>
@@ -14797,7 +15718,7 @@
       </p:sp>
       <p:sp>
         <p:nvSpPr>
-          <p:cNvPr id="5" name="TextBox 4"/>
+          <p:cNvPr id="6" name="TextBox 5"/>
           <p:cNvSpPr txBox="1"/>
           <p:nvPr/>
         </p:nvSpPr>
@@ -14832,7 +15753,7 @@
       </p:sp>
       <p:sp>
         <p:nvSpPr>
-          <p:cNvPr id="6" name="TextBox 5"/>
+          <p:cNvPr id="7" name="TextBox 6"/>
           <p:cNvSpPr txBox="1"/>
           <p:nvPr/>
         </p:nvSpPr>
@@ -14867,42 +15788,43 @@
       </p:sp>
       <p:sp>
         <p:nvSpPr>
-          <p:cNvPr id="7" name="TextBox 6"/>
+          <p:cNvPr id="8" name="TextBox 7"/>
           <p:cNvSpPr txBox="1"/>
           <p:nvPr/>
         </p:nvSpPr>
         <p:spPr>
           <a:xfrm>
             <a:off x="4572000" y="2011680"/>
-            <a:ext cx="3200400" cy="1234440"/>
-          </a:xfrm>
-          <a:prstGeom prst="rect">
-            <a:avLst/>
-          </a:prstGeom>
-          <a:noFill/>
-        </p:spPr>
-        <p:txBody>
-          <a:bodyPr wrap="square">
-            <a:spAutoFit/>
-          </a:bodyPr>
-          <a:lstStyle/>
-          <a:p>
-            <a:pPr algn="l"/>
-            <a:r>
-              <a:rPr sz="1700" b="1">
+            <a:ext cx="3200400" cy="1600200"/>
+          </a:xfrm>
+          <a:prstGeom prst="rect">
+            <a:avLst/>
+          </a:prstGeom>
+          <a:noFill/>
+        </p:spPr>
+        <p:txBody>
+          <a:bodyPr wrap="square">
+            <a:spAutoFit/>
+          </a:bodyPr>
+          <a:lstStyle/>
+          <a:p>
+            <a:pPr algn="l"/>
+            <a:r>
+              <a:rPr sz="1600" b="1">
                 <a:solidFill>
                   <a:srgbClr val="E5EDF7"/>
                 </a:solidFill>
                 <a:latin typeface="Aptos"/>
               </a:rPr>
-              <a:t>JWT tenant identity overrides client-supplied IDs and applies tenant filters to the query.</a:t>
-            </a:r>
-          </a:p>
-        </p:txBody>
-      </p:sp>
-      <p:sp>
-        <p:nvSpPr>
-          <p:cNvPr id="8" name="TextBox 7"/>
+              <a:t>JWT tenant identity overrides client-supplied IDs and applies tenant filters to the query.
+The attacker cannot select a different tenant by changing a URL or request body.</a:t>
+            </a:r>
+          </a:p>
+        </p:txBody>
+      </p:sp>
+      <p:sp>
+        <p:nvSpPr>
+          <p:cNvPr id="9" name="TextBox 8"/>
           <p:cNvSpPr txBox="1"/>
           <p:nvPr/>
         </p:nvSpPr>
@@ -14937,29 +15859,29 @@
       </p:sp>
       <p:sp>
         <p:nvSpPr>
-          <p:cNvPr id="9" name="TextBox 8"/>
+          <p:cNvPr id="10" name="TextBox 9"/>
           <p:cNvSpPr txBox="1"/>
           <p:nvPr/>
         </p:nvSpPr>
         <p:spPr>
           <a:xfrm>
             <a:off x="8229600" y="2011680"/>
-            <a:ext cx="3108960" cy="1371600"/>
-          </a:xfrm>
-          <a:prstGeom prst="rect">
-            <a:avLst/>
-          </a:prstGeom>
-          <a:noFill/>
-        </p:spPr>
-        <p:txBody>
-          <a:bodyPr wrap="square">
-            <a:spAutoFit/>
-          </a:bodyPr>
-          <a:lstStyle/>
-          <a:p>
-            <a:pPr algn="l"/>
-            <a:r>
-              <a:rPr sz="2100" b="1">
+            <a:ext cx="3108960" cy="1965960"/>
+          </a:xfrm>
+          <a:prstGeom prst="rect">
+            <a:avLst/>
+          </a:prstGeom>
+          <a:noFill/>
+        </p:spPr>
+        <p:txBody>
+          <a:bodyPr wrap="square">
+            <a:spAutoFit/>
+          </a:bodyPr>
+          <a:lstStyle/>
+          <a:p>
+            <a:pPr algn="l"/>
+            <a:r>
+              <a:rPr sz="1800" b="1">
                 <a:solidFill>
                   <a:srgbClr val="E5EDF7"/>
                 </a:solidFill>
@@ -14967,14 +15889,15 @@
               </a:rPr>
               <a:t>HTTP 404
 0 bytes leaked
-cross_tenant_denied audit event</a:t>
-            </a:r>
-          </a:p>
-        </p:txBody>
-      </p:sp>
-      <p:sp>
-        <p:nvSpPr>
-          <p:cNvPr id="10" name="TextBox 9"/>
+cross_tenant_denied audit event
+The response avoids confirming another tenant's resource.</a:t>
+            </a:r>
+          </a:p>
+        </p:txBody>
+      </p:sp>
+      <p:sp>
+        <p:nvSpPr>
+          <p:cNvPr id="11" name="TextBox 10"/>
           <p:cNvSpPr txBox="1"/>
           <p:nvPr/>
         </p:nvSpPr>
